--- a/operator_hypothesis_lab/presentations/return_geometry_daily_continuation_microscope.pptx
+++ b/operator_hypothesis_lab/presentations/return_geometry_daily_continuation_microscope.pptx
@@ -2,21 +2,27 @@
 <file path=ppt/presentation.xml><?xml version="1.0" encoding="utf-8"?>
 <p:presentation xmlns:p="http://schemas.openxmlformats.org/presentationml/2006/main">
   <p:sldMasterIdLst>
-    <p:sldMasterId xmlns:r="http://schemas.openxmlformats.org/officeDocument/2006/relationships" id="2147483648" r:id="Rcbba2aee34114d29"/>
+    <p:sldMasterId xmlns:r="http://schemas.openxmlformats.org/officeDocument/2006/relationships" id="2147483648" r:id="R0097c60ca9884520"/>
   </p:sldMasterIdLst>
   <p:notesMasterIdLst>
-    <p:notesMasterId xmlns:r="http://schemas.openxmlformats.org/officeDocument/2006/relationships" r:id="R35f75271a3e64ee4"/>
+    <p:notesMasterId xmlns:r="http://schemas.openxmlformats.org/officeDocument/2006/relationships" r:id="Ra6cfa17bd13c477a"/>
   </p:notesMasterIdLst>
   <p:sldIdLst>
-    <p:sldId xmlns:r="http://schemas.openxmlformats.org/officeDocument/2006/relationships" id="256" r:id="Raca35ff9f72d4275"/>
-    <p:sldId xmlns:r="http://schemas.openxmlformats.org/officeDocument/2006/relationships" id="257" r:id="R926c09c35045415e"/>
-    <p:sldId xmlns:r="http://schemas.openxmlformats.org/officeDocument/2006/relationships" id="258" r:id="R7d4f5ce121bf41f1"/>
-    <p:sldId xmlns:r="http://schemas.openxmlformats.org/officeDocument/2006/relationships" id="259" r:id="R3c625c8a9a44408f"/>
-    <p:sldId xmlns:r="http://schemas.openxmlformats.org/officeDocument/2006/relationships" id="260" r:id="R5c25987723914910"/>
-    <p:sldId xmlns:r="http://schemas.openxmlformats.org/officeDocument/2006/relationships" id="261" r:id="R942749c4226e471d"/>
-    <p:sldId xmlns:r="http://schemas.openxmlformats.org/officeDocument/2006/relationships" id="262" r:id="Rbbbd283063e846b5"/>
-    <p:sldId xmlns:r="http://schemas.openxmlformats.org/officeDocument/2006/relationships" id="263" r:id="Rc870a23bc6844430"/>
-    <p:sldId xmlns:r="http://schemas.openxmlformats.org/officeDocument/2006/relationships" id="264" r:id="R0b59ef5af3a646fc"/>
+    <p:sldId xmlns:r="http://schemas.openxmlformats.org/officeDocument/2006/relationships" id="256" r:id="R7f6041ace4974ec6"/>
+    <p:sldId xmlns:r="http://schemas.openxmlformats.org/officeDocument/2006/relationships" id="257" r:id="R5798945275e045d6"/>
+    <p:sldId xmlns:r="http://schemas.openxmlformats.org/officeDocument/2006/relationships" id="258" r:id="R151aed5e11834ded"/>
+    <p:sldId xmlns:r="http://schemas.openxmlformats.org/officeDocument/2006/relationships" id="259" r:id="R50e2dc2b82804a5c"/>
+    <p:sldId xmlns:r="http://schemas.openxmlformats.org/officeDocument/2006/relationships" id="260" r:id="Rad401365f5744ae2"/>
+    <p:sldId xmlns:r="http://schemas.openxmlformats.org/officeDocument/2006/relationships" id="261" r:id="R01f9002166344e69"/>
+    <p:sldId xmlns:r="http://schemas.openxmlformats.org/officeDocument/2006/relationships" id="262" r:id="Ra602d09fccf54ae7"/>
+    <p:sldId xmlns:r="http://schemas.openxmlformats.org/officeDocument/2006/relationships" id="263" r:id="Rd0a0f623f2f04281"/>
+    <p:sldId xmlns:r="http://schemas.openxmlformats.org/officeDocument/2006/relationships" id="264" r:id="Rbd935ccf41584057"/>
+    <p:sldId xmlns:r="http://schemas.openxmlformats.org/officeDocument/2006/relationships" id="265" r:id="R113353cfa457459d"/>
+    <p:sldId xmlns:r="http://schemas.openxmlformats.org/officeDocument/2006/relationships" id="266" r:id="R779b236355fc47da"/>
+    <p:sldId xmlns:r="http://schemas.openxmlformats.org/officeDocument/2006/relationships" id="267" r:id="Rc12dc436bc114d3b"/>
+    <p:sldId xmlns:r="http://schemas.openxmlformats.org/officeDocument/2006/relationships" id="268" r:id="R142e6b1e53074be2"/>
+    <p:sldId xmlns:r="http://schemas.openxmlformats.org/officeDocument/2006/relationships" id="269" r:id="R7a062c592c6a4048"/>
+    <p:sldId xmlns:r="http://schemas.openxmlformats.org/officeDocument/2006/relationships" id="270" r:id="Rf172dc5ea2114b28"/>
   </p:sldIdLst>
   <p:sldSz cx="12192000" cy="6858000"/>
   <p:notesSz cx="6858000" cy="9144000"/>
@@ -510,6 +516,581 @@
 </p:notes>
 </file>
 
+<file path=ppt/notesSlides/notesSlide10.xml><?xml version="1.0" encoding="utf-8"?>
+<p:notes xmlns:p="http://schemas.openxmlformats.org/presentationml/2006/main">
+  <p:cSld>
+    <p:spTree>
+      <p:nvGrpSpPr>
+        <p:cNvPr id="1" name=""/>
+        <p:cNvGrpSpPr/>
+        <p:nvPr/>
+      </p:nvGrpSpPr>
+      <p:grpSpPr>
+        <a:xfrm xmlns:a="http://schemas.openxmlformats.org/drawingml/2006/main"/>
+      </p:grpSpPr>
+      <p:sp>
+        <p:nvSpPr>
+          <p:cNvPr id="2" name="Slide Image Placeholder 1"/>
+          <p:cNvSpPr>
+            <a:spLocks xmlns:a="http://schemas.openxmlformats.org/drawingml/2006/main" noGrp="1"/>
+          </p:cNvSpPr>
+          <p:nvPr>
+            <p:ph type="sldImg" idx="0"/>
+          </p:nvPr>
+        </p:nvSpPr>
+        <p:spPr/>
+      </p:sp>
+      <p:sp>
+        <p:nvSpPr>
+          <p:cNvPr id="3" name="Notes Placeholder 2"/>
+          <p:cNvSpPr>
+            <a:spLocks xmlns:a="http://schemas.openxmlformats.org/drawingml/2006/main" noGrp="1"/>
+          </p:cNvSpPr>
+          <p:nvPr>
+            <p:ph type="body" idx="1"/>
+          </p:nvPr>
+        </p:nvSpPr>
+        <p:spPr/>
+        <p:txBody>
+          <a:bodyPr xmlns:a="http://schemas.openxmlformats.org/drawingml/2006/main"/>
+          <a:lstStyle xmlns:a="http://schemas.openxmlformats.org/drawingml/2006/main"/>
+          <a:p xmlns:a="http://schemas.openxmlformats.org/drawingml/2006/main">
+            <a:r>
+              <a:t>The operator selected the direct ER20-sideways versus ER20-trending comparison for fuller context. This section re-expresses the already-computed 2018-2023 atlas; it does not recompute returns, select a horizon, or test a trading rule.</a:t>
+            </a:r>
+          </a:p>
+          <a:p xmlns:a="http://schemas.openxmlformats.org/drawingml/2006/main">
+            <a:r>
+              <a:t/>
+            </a:r>
+          </a:p>
+          <a:p xmlns:a="http://schemas.openxmlformats.org/drawingml/2006/main">
+            <a:r>
+              <a:t>[Sources]</a:t>
+            </a:r>
+          </a:p>
+          <a:p xmlns:a="http://schemas.openxmlformats.org/drawingml/2006/main">
+            <a:r>
+              <a:t>- operator_hypothesis_lab/docs/RETURN_GEOMETRY_DAILY_CONTINUATION_MICROSCOPE_2018_2023.md</a:t>
+            </a:r>
+          </a:p>
+          <a:p xmlns:a="http://schemas.openxmlformats.org/drawingml/2006/main">
+            <a:r>
+              <a:t>- runs/research_workbench/operator_hypothesis_lab/return_geometry_continuation_state_contrast_20260828/run_spec.csv</a:t>
+            </a:r>
+          </a:p>
+          <a:p xmlns:a="http://schemas.openxmlformats.org/drawingml/2006/main">
+            <a:r>
+              <a:t>[/Sources]</a:t>
+            </a:r>
+          </a:p>
+        </p:txBody>
+      </p:sp>
+      <p:sp>
+        <p:nvSpPr>
+          <p:cNvPr id="4" name="Slide Number Placeholder 3"/>
+          <p:cNvSpPr>
+            <a:spLocks xmlns:a="http://schemas.openxmlformats.org/drawingml/2006/main" noGrp="1"/>
+          </p:cNvSpPr>
+          <p:nvPr>
+            <p:ph type="sldNum" idx="5"/>
+          </p:nvPr>
+        </p:nvSpPr>
+        <p:spPr/>
+        <p:txBody>
+          <a:bodyPr xmlns:a="http://schemas.openxmlformats.org/drawingml/2006/main"/>
+          <a:lstStyle xmlns:a="http://schemas.openxmlformats.org/drawingml/2006/main"/>
+          <a:p xmlns:a="http://schemas.openxmlformats.org/drawingml/2006/main"/>
+        </p:txBody>
+      </p:sp>
+    </p:spTree>
+  </p:cSld>
+  <p:clrMapOvr>
+    <a:masterClrMapping xmlns:a="http://schemas.openxmlformats.org/drawingml/2006/main"/>
+  </p:clrMapOvr>
+</p:notes>
+</file>
+
+<file path=ppt/notesSlides/notesSlide11.xml><?xml version="1.0" encoding="utf-8"?>
+<p:notes xmlns:p="http://schemas.openxmlformats.org/presentationml/2006/main">
+  <p:cSld>
+    <p:spTree>
+      <p:nvGrpSpPr>
+        <p:cNvPr id="1" name=""/>
+        <p:cNvGrpSpPr/>
+        <p:nvPr/>
+      </p:nvGrpSpPr>
+      <p:grpSpPr>
+        <a:xfrm xmlns:a="http://schemas.openxmlformats.org/drawingml/2006/main"/>
+      </p:grpSpPr>
+      <p:sp>
+        <p:nvSpPr>
+          <p:cNvPr id="2" name="Slide Image Placeholder 1"/>
+          <p:cNvSpPr>
+            <a:spLocks xmlns:a="http://schemas.openxmlformats.org/drawingml/2006/main" noGrp="1"/>
+          </p:cNvSpPr>
+          <p:nvPr>
+            <p:ph type="sldImg" idx="0"/>
+          </p:nvPr>
+        </p:nvSpPr>
+        <p:spPr/>
+      </p:sp>
+      <p:sp>
+        <p:nvSpPr>
+          <p:cNvPr id="3" name="Notes Placeholder 2"/>
+          <p:cNvSpPr>
+            <a:spLocks xmlns:a="http://schemas.openxmlformats.org/drawingml/2006/main" noGrp="1"/>
+          </p:cNvSpPr>
+          <p:nvPr>
+            <p:ph type="body" idx="1"/>
+          </p:nvPr>
+        </p:nvSpPr>
+        <p:spPr/>
+        <p:txBody>
+          <a:bodyPr xmlns:a="http://schemas.openxmlformats.org/drawingml/2006/main"/>
+          <a:lstStyle xmlns:a="http://schemas.openxmlformats.org/drawingml/2006/main"/>
+          <a:p xmlns:a="http://schemas.openxmlformats.org/drawingml/2006/main">
+            <a:r>
+              <a:t>Across all 225 cells, the median equal-sector positive-prior correlation is +0.027 in ER20-sideways and -0.028 in ER20-trending. Both use the identical asset core, horizon vocabulary, and causal state timing.</a:t>
+            </a:r>
+          </a:p>
+          <a:p xmlns:a="http://schemas.openxmlformats.org/drawingml/2006/main">
+            <a:r>
+              <a:t/>
+            </a:r>
+          </a:p>
+          <a:p xmlns:a="http://schemas.openxmlformats.org/drawingml/2006/main">
+            <a:r>
+              <a:t>[Sources]</a:t>
+            </a:r>
+          </a:p>
+          <a:p xmlns:a="http://schemas.openxmlformats.org/drawingml/2006/main">
+            <a:r>
+              <a:t>- runs/research_workbench/operator_hypothesis_lab/return_geometry_continuation_state_contrast_20260828/contrast_summary.csv</a:t>
+            </a:r>
+          </a:p>
+          <a:p xmlns:a="http://schemas.openxmlformats.org/drawingml/2006/main">
+            <a:r>
+              <a:t>- runs/research_workbench/operator_hypothesis_lab/return_geometry_continuation_state_contrast_20260828/visuals/sideways_vs_trending_positive_branch_heatmaps.png</a:t>
+            </a:r>
+          </a:p>
+          <a:p xmlns:a="http://schemas.openxmlformats.org/drawingml/2006/main">
+            <a:r>
+              <a:t>[/Sources]</a:t>
+            </a:r>
+          </a:p>
+        </p:txBody>
+      </p:sp>
+      <p:sp>
+        <p:nvSpPr>
+          <p:cNvPr id="4" name="Slide Number Placeholder 3"/>
+          <p:cNvSpPr>
+            <a:spLocks xmlns:a="http://schemas.openxmlformats.org/drawingml/2006/main" noGrp="1"/>
+          </p:cNvSpPr>
+          <p:nvPr>
+            <p:ph type="sldNum" idx="5"/>
+          </p:nvPr>
+        </p:nvSpPr>
+        <p:spPr/>
+        <p:txBody>
+          <a:bodyPr xmlns:a="http://schemas.openxmlformats.org/drawingml/2006/main"/>
+          <a:lstStyle xmlns:a="http://schemas.openxmlformats.org/drawingml/2006/main"/>
+          <a:p xmlns:a="http://schemas.openxmlformats.org/drawingml/2006/main"/>
+        </p:txBody>
+      </p:sp>
+    </p:spTree>
+  </p:cSld>
+  <p:clrMapOvr>
+    <a:masterClrMapping xmlns:a="http://schemas.openxmlformats.org/drawingml/2006/main"/>
+  </p:clrMapOvr>
+</p:notes>
+</file>
+
+<file path=ppt/notesSlides/notesSlide12.xml><?xml version="1.0" encoding="utf-8"?>
+<p:notes xmlns:p="http://schemas.openxmlformats.org/presentationml/2006/main">
+  <p:cSld>
+    <p:spTree>
+      <p:nvGrpSpPr>
+        <p:cNvPr id="1" name=""/>
+        <p:cNvGrpSpPr/>
+        <p:nvPr/>
+      </p:nvGrpSpPr>
+      <p:grpSpPr>
+        <a:xfrm xmlns:a="http://schemas.openxmlformats.org/drawingml/2006/main"/>
+      </p:grpSpPr>
+      <p:sp>
+        <p:nvSpPr>
+          <p:cNvPr id="2" name="Slide Image Placeholder 1"/>
+          <p:cNvSpPr>
+            <a:spLocks xmlns:a="http://schemas.openxmlformats.org/drawingml/2006/main" noGrp="1"/>
+          </p:cNvSpPr>
+          <p:nvPr>
+            <p:ph type="sldImg" idx="0"/>
+          </p:nvPr>
+        </p:nvSpPr>
+        <p:spPr/>
+      </p:sp>
+      <p:sp>
+        <p:nvSpPr>
+          <p:cNvPr id="3" name="Notes Placeholder 2"/>
+          <p:cNvSpPr>
+            <a:spLocks xmlns:a="http://schemas.openxmlformats.org/drawingml/2006/main" noGrp="1"/>
+          </p:cNvSpPr>
+          <p:nvPr>
+            <p:ph type="body" idx="1"/>
+          </p:nvPr>
+        </p:nvSpPr>
+        <p:spPr/>
+        <p:txBody>
+          <a:bodyPr xmlns:a="http://schemas.openxmlformats.org/drawingml/2006/main"/>
+          <a:lstStyle xmlns:a="http://schemas.openxmlformats.org/drawingml/2006/main"/>
+          <a:p xmlns:a="http://schemas.openxmlformats.org/drawingml/2006/main">
+            <a:r>
+              <a:t>Each asset is paired inside the same prior/following horizon cell before sector aggregation. The all-surface median paired contrast is +0.048, and 209 of 225 cells are positive. The contrast is a difference in correlations, not a return or spread trade.</a:t>
+            </a:r>
+          </a:p>
+          <a:p xmlns:a="http://schemas.openxmlformats.org/drawingml/2006/main">
+            <a:r>
+              <a:t/>
+            </a:r>
+          </a:p>
+          <a:p xmlns:a="http://schemas.openxmlformats.org/drawingml/2006/main">
+            <a:r>
+              <a:t>[Sources]</a:t>
+            </a:r>
+          </a:p>
+          <a:p xmlns:a="http://schemas.openxmlformats.org/drawingml/2006/main">
+            <a:r>
+              <a:t>- runs/research_workbench/operator_hypothesis_lab/return_geometry_continuation_state_contrast_20260828/equal_sector_paired_cell_summary.csv</a:t>
+            </a:r>
+          </a:p>
+          <a:p xmlns:a="http://schemas.openxmlformats.org/drawingml/2006/main">
+            <a:r>
+              <a:t>- runs/research_workbench/operator_hypothesis_lab/return_geometry_continuation_state_contrast_20260828/visuals/sideways_minus_trending_paired_heatmap.png</a:t>
+            </a:r>
+          </a:p>
+          <a:p xmlns:a="http://schemas.openxmlformats.org/drawingml/2006/main">
+            <a:r>
+              <a:t>[/Sources]</a:t>
+            </a:r>
+          </a:p>
+        </p:txBody>
+      </p:sp>
+      <p:sp>
+        <p:nvSpPr>
+          <p:cNvPr id="4" name="Slide Number Placeholder 3"/>
+          <p:cNvSpPr>
+            <a:spLocks xmlns:a="http://schemas.openxmlformats.org/drawingml/2006/main" noGrp="1"/>
+          </p:cNvSpPr>
+          <p:nvPr>
+            <p:ph type="sldNum" idx="5"/>
+          </p:nvPr>
+        </p:nvSpPr>
+        <p:spPr/>
+        <p:txBody>
+          <a:bodyPr xmlns:a="http://schemas.openxmlformats.org/drawingml/2006/main"/>
+          <a:lstStyle xmlns:a="http://schemas.openxmlformats.org/drawingml/2006/main"/>
+          <a:p xmlns:a="http://schemas.openxmlformats.org/drawingml/2006/main"/>
+        </p:txBody>
+      </p:sp>
+    </p:spTree>
+  </p:cSld>
+  <p:clrMapOvr>
+    <a:masterClrMapping xmlns:a="http://schemas.openxmlformats.org/drawingml/2006/main"/>
+  </p:clrMapOvr>
+</p:notes>
+</file>
+
+<file path=ppt/notesSlides/notesSlide13.xml><?xml version="1.0" encoding="utf-8"?>
+<p:notes xmlns:p="http://schemas.openxmlformats.org/presentationml/2006/main">
+  <p:cSld>
+    <p:spTree>
+      <p:nvGrpSpPr>
+        <p:cNvPr id="1" name=""/>
+        <p:cNvGrpSpPr/>
+        <p:nvPr/>
+      </p:nvGrpSpPr>
+      <p:grpSpPr>
+        <a:xfrm xmlns:a="http://schemas.openxmlformats.org/drawingml/2006/main"/>
+      </p:grpSpPr>
+      <p:sp>
+        <p:nvSpPr>
+          <p:cNvPr id="2" name="Slide Image Placeholder 1"/>
+          <p:cNvSpPr>
+            <a:spLocks xmlns:a="http://schemas.openxmlformats.org/drawingml/2006/main" noGrp="1"/>
+          </p:cNvSpPr>
+          <p:nvPr>
+            <p:ph type="sldImg" idx="0"/>
+          </p:nvPr>
+        </p:nvSpPr>
+        <p:spPr/>
+      </p:sp>
+      <p:sp>
+        <p:nvSpPr>
+          <p:cNvPr id="3" name="Notes Placeholder 2"/>
+          <p:cNvSpPr>
+            <a:spLocks xmlns:a="http://schemas.openxmlformats.org/drawingml/2006/main" noGrp="1"/>
+          </p:cNvSpPr>
+          <p:nvPr>
+            <p:ph type="body" idx="1"/>
+          </p:nvPr>
+        </p:nvSpPr>
+        <p:spPr/>
+        <p:txBody>
+          <a:bodyPr xmlns:a="http://schemas.openxmlformats.org/drawingml/2006/main"/>
+          <a:lstStyle xmlns:a="http://schemas.openxmlformats.org/drawingml/2006/main"/>
+          <a:p xmlns:a="http://schemas.openxmlformats.org/drawingml/2006/main">
+            <a:r>
+              <a:t>Every core sector has a positive median paired contrast across its 225-cell surface. The median contrast ranges from about +0.020 in Utilities to +0.077 in Health Care. Positive-cell breadth ranges from 62.2 to 85.8 percent, so the shape is broad but not uniform.</a:t>
+            </a:r>
+          </a:p>
+          <a:p xmlns:a="http://schemas.openxmlformats.org/drawingml/2006/main">
+            <a:r>
+              <a:t/>
+            </a:r>
+          </a:p>
+          <a:p xmlns:a="http://schemas.openxmlformats.org/drawingml/2006/main">
+            <a:r>
+              <a:t>[Sources]</a:t>
+            </a:r>
+          </a:p>
+          <a:p xmlns:a="http://schemas.openxmlformats.org/drawingml/2006/main">
+            <a:r>
+              <a:t>- runs/research_workbench/operator_hypothesis_lab/return_geometry_continuation_state_contrast_20260828/sector_surface_summary.csv</a:t>
+            </a:r>
+          </a:p>
+          <a:p xmlns:a="http://schemas.openxmlformats.org/drawingml/2006/main">
+            <a:r>
+              <a:t>- runs/research_workbench/operator_hypothesis_lab/return_geometry_continuation_state_contrast_20260828/visuals/sideways_advantage_by_sector.png</a:t>
+            </a:r>
+          </a:p>
+          <a:p xmlns:a="http://schemas.openxmlformats.org/drawingml/2006/main">
+            <a:r>
+              <a:t>[/Sources]</a:t>
+            </a:r>
+          </a:p>
+        </p:txBody>
+      </p:sp>
+      <p:sp>
+        <p:nvSpPr>
+          <p:cNvPr id="4" name="Slide Number Placeholder 3"/>
+          <p:cNvSpPr>
+            <a:spLocks xmlns:a="http://schemas.openxmlformats.org/drawingml/2006/main" noGrp="1"/>
+          </p:cNvSpPr>
+          <p:nvPr>
+            <p:ph type="sldNum" idx="5"/>
+          </p:nvPr>
+        </p:nvSpPr>
+        <p:spPr/>
+        <p:txBody>
+          <a:bodyPr xmlns:a="http://schemas.openxmlformats.org/drawingml/2006/main"/>
+          <a:lstStyle xmlns:a="http://schemas.openxmlformats.org/drawingml/2006/main"/>
+          <a:p xmlns:a="http://schemas.openxmlformats.org/drawingml/2006/main"/>
+        </p:txBody>
+      </p:sp>
+    </p:spTree>
+  </p:cSld>
+  <p:clrMapOvr>
+    <a:masterClrMapping xmlns:a="http://schemas.openxmlformats.org/drawingml/2006/main"/>
+  </p:clrMapOvr>
+</p:notes>
+</file>
+
+<file path=ppt/notesSlides/notesSlide14.xml><?xml version="1.0" encoding="utf-8"?>
+<p:notes xmlns:p="http://schemas.openxmlformats.org/presentationml/2006/main">
+  <p:cSld>
+    <p:spTree>
+      <p:nvGrpSpPr>
+        <p:cNvPr id="1" name=""/>
+        <p:cNvGrpSpPr/>
+        <p:nvPr/>
+      </p:nvGrpSpPr>
+      <p:grpSpPr>
+        <a:xfrm xmlns:a="http://schemas.openxmlformats.org/drawingml/2006/main"/>
+      </p:grpSpPr>
+      <p:sp>
+        <p:nvSpPr>
+          <p:cNvPr id="2" name="Slide Image Placeholder 1"/>
+          <p:cNvSpPr>
+            <a:spLocks xmlns:a="http://schemas.openxmlformats.org/drawingml/2006/main" noGrp="1"/>
+          </p:cNvSpPr>
+          <p:nvPr>
+            <p:ph type="sldImg" idx="0"/>
+          </p:nvPr>
+        </p:nvSpPr>
+        <p:spPr/>
+      </p:sp>
+      <p:sp>
+        <p:nvSpPr>
+          <p:cNvPr id="3" name="Notes Placeholder 2"/>
+          <p:cNvSpPr>
+            <a:spLocks xmlns:a="http://schemas.openxmlformats.org/drawingml/2006/main" noGrp="1"/>
+          </p:cNvSpPr>
+          <p:nvPr>
+            <p:ph type="body" idx="1"/>
+          </p:nvPr>
+        </p:nvSpPr>
+        <p:spPr/>
+        <p:txBody>
+          <a:bodyPr xmlns:a="http://schemas.openxmlformats.org/drawingml/2006/main"/>
+          <a:lstStyle xmlns:a="http://schemas.openxmlformats.org/drawingml/2006/main"/>
+          <a:p xmlns:a="http://schemas.openxmlformats.org/drawingml/2006/main">
+            <a:r>
+              <a:t>The diagonal is mostly positive but not monotone. The paired contrast is negative at 1-to-1 and 100-to-100, while its largest equal-horizon value occurs at 10-to-10. Across the full grid, 16 cells do not favor sideways; exceptions cluster at micro horizons and several 20-prior / long-forward combinations. These are context, not permission to choose 10-to-10.</a:t>
+            </a:r>
+          </a:p>
+          <a:p xmlns:a="http://schemas.openxmlformats.org/drawingml/2006/main">
+            <a:r>
+              <a:t/>
+            </a:r>
+          </a:p>
+          <a:p xmlns:a="http://schemas.openxmlformats.org/drawingml/2006/main">
+            <a:r>
+              <a:t>[Sources]</a:t>
+            </a:r>
+          </a:p>
+          <a:p xmlns:a="http://schemas.openxmlformats.org/drawingml/2006/main">
+            <a:r>
+              <a:t>- runs/research_workbench/operator_hypothesis_lab/return_geometry_continuation_state_contrast_20260828/equal_sector_paired_diagonal.csv</a:t>
+            </a:r>
+          </a:p>
+          <a:p xmlns:a="http://schemas.openxmlformats.org/drawingml/2006/main">
+            <a:r>
+              <a:t>- runs/research_workbench/operator_hypothesis_lab/return_geometry_continuation_state_contrast_20260828/visuals/sideways_vs_trending_diagonal.png</a:t>
+            </a:r>
+          </a:p>
+          <a:p xmlns:a="http://schemas.openxmlformats.org/drawingml/2006/main">
+            <a:r>
+              <a:t>[/Sources]</a:t>
+            </a:r>
+          </a:p>
+        </p:txBody>
+      </p:sp>
+      <p:sp>
+        <p:nvSpPr>
+          <p:cNvPr id="4" name="Slide Number Placeholder 3"/>
+          <p:cNvSpPr>
+            <a:spLocks xmlns:a="http://schemas.openxmlformats.org/drawingml/2006/main" noGrp="1"/>
+          </p:cNvSpPr>
+          <p:nvPr>
+            <p:ph type="sldNum" idx="5"/>
+          </p:nvPr>
+        </p:nvSpPr>
+        <p:spPr/>
+        <p:txBody>
+          <a:bodyPr xmlns:a="http://schemas.openxmlformats.org/drawingml/2006/main"/>
+          <a:lstStyle xmlns:a="http://schemas.openxmlformats.org/drawingml/2006/main"/>
+          <a:p xmlns:a="http://schemas.openxmlformats.org/drawingml/2006/main"/>
+        </p:txBody>
+      </p:sp>
+    </p:spTree>
+  </p:cSld>
+  <p:clrMapOvr>
+    <a:masterClrMapping xmlns:a="http://schemas.openxmlformats.org/drawingml/2006/main"/>
+  </p:clrMapOvr>
+</p:notes>
+</file>
+
+<file path=ppt/notesSlides/notesSlide15.xml><?xml version="1.0" encoding="utf-8"?>
+<p:notes xmlns:p="http://schemas.openxmlformats.org/presentationml/2006/main">
+  <p:cSld>
+    <p:spTree>
+      <p:nvGrpSpPr>
+        <p:cNvPr id="1" name=""/>
+        <p:cNvGrpSpPr/>
+        <p:nvPr/>
+      </p:nvGrpSpPr>
+      <p:grpSpPr>
+        <a:xfrm xmlns:a="http://schemas.openxmlformats.org/drawingml/2006/main"/>
+      </p:grpSpPr>
+      <p:sp>
+        <p:nvSpPr>
+          <p:cNvPr id="2" name="Slide Image Placeholder 1"/>
+          <p:cNvSpPr>
+            <a:spLocks xmlns:a="http://schemas.openxmlformats.org/drawingml/2006/main" noGrp="1"/>
+          </p:cNvSpPr>
+          <p:nvPr>
+            <p:ph type="sldImg" idx="0"/>
+          </p:nvPr>
+        </p:nvSpPr>
+        <p:spPr/>
+      </p:sp>
+      <p:sp>
+        <p:nvSpPr>
+          <p:cNvPr id="3" name="Notes Placeholder 2"/>
+          <p:cNvSpPr>
+            <a:spLocks xmlns:a="http://schemas.openxmlformats.org/drawingml/2006/main" noGrp="1"/>
+          </p:cNvSpPr>
+          <p:nvPr>
+            <p:ph type="body" idx="1"/>
+          </p:nvPr>
+        </p:nvSpPr>
+        <p:spPr/>
+        <p:txBody>
+          <a:bodyPr xmlns:a="http://schemas.openxmlformats.org/drawingml/2006/main"/>
+          <a:lstStyle xmlns:a="http://schemas.openxmlformats.org/drawingml/2006/main"/>
+          <a:p xmlns:a="http://schemas.openxmlformats.org/drawingml/2006/main">
+            <a:r>
+              <a:t>The approved comparison strengthened the behavioral description: sideways and trending are not merely different-looking heatmaps; their paired difference is positive across most cells and every sector's median surface. The magnitude remains small and the same research history discovered the contrast, so the lane stops before horizon choice or trading translation.</a:t>
+            </a:r>
+          </a:p>
+          <a:p xmlns:a="http://schemas.openxmlformats.org/drawingml/2006/main">
+            <a:r>
+              <a:t/>
+            </a:r>
+          </a:p>
+          <a:p xmlns:a="http://schemas.openxmlformats.org/drawingml/2006/main">
+            <a:r>
+              <a:t>[Sources]</a:t>
+            </a:r>
+          </a:p>
+          <a:p xmlns:a="http://schemas.openxmlformats.org/drawingml/2006/main">
+            <a:r>
+              <a:t>- runs/research_workbench/operator_hypothesis_lab/return_geometry_continuation_state_contrast_20260828/report.md</a:t>
+            </a:r>
+          </a:p>
+          <a:p xmlns:a="http://schemas.openxmlformats.org/drawingml/2006/main">
+            <a:r>
+              <a:t>- runs/research_workbench/operator_hypothesis_lab/return_geometry_continuation_state_contrast_20260828/contrast_summary.csv</a:t>
+            </a:r>
+          </a:p>
+          <a:p xmlns:a="http://schemas.openxmlformats.org/drawingml/2006/main">
+            <a:r>
+              <a:t>- operator_hypothesis_lab/docs/RETURN_GEOMETRY_DAILY_CONTINUATION_MICROSCOPE_2018_2023.md</a:t>
+            </a:r>
+          </a:p>
+          <a:p xmlns:a="http://schemas.openxmlformats.org/drawingml/2006/main">
+            <a:r>
+              <a:t>[/Sources]</a:t>
+            </a:r>
+          </a:p>
+        </p:txBody>
+      </p:sp>
+      <p:sp>
+        <p:nvSpPr>
+          <p:cNvPr id="4" name="Slide Number Placeholder 3"/>
+          <p:cNvSpPr>
+            <a:spLocks xmlns:a="http://schemas.openxmlformats.org/drawingml/2006/main" noGrp="1"/>
+          </p:cNvSpPr>
+          <p:nvPr>
+            <p:ph type="sldNum" idx="5"/>
+          </p:nvPr>
+        </p:nvSpPr>
+        <p:spPr/>
+        <p:txBody>
+          <a:bodyPr xmlns:a="http://schemas.openxmlformats.org/drawingml/2006/main"/>
+          <a:lstStyle xmlns:a="http://schemas.openxmlformats.org/drawingml/2006/main"/>
+          <a:p xmlns:a="http://schemas.openxmlformats.org/drawingml/2006/main"/>
+        </p:txBody>
+      </p:sp>
+    </p:spTree>
+  </p:cSld>
+  <p:clrMapOvr>
+    <a:masterClrMapping xmlns:a="http://schemas.openxmlformats.org/drawingml/2006/main"/>
+  </p:clrMapOvr>
+</p:notes>
+</file>
+
 <file path=ppt/notesSlides/notesSlide2.xml><?xml version="1.0" encoding="utf-8"?>
 <p:notes xmlns:p="http://schemas.openxmlformats.org/presentationml/2006/main">
   <p:cSld>
@@ -1313,7 +1894,7 @@
   </p:cSld>
   <p:clrMap bg1="lt1" tx1="dk1" bg2="lt2" tx2="dk2" accent1="accent1" accent2="accent2" accent3="accent3" accent4="accent4" accent5="accent5" accent6="accent6" hlink="hlink" folHlink="folHlink"/>
   <p:sldLayoutIdLst>
-    <p:sldLayoutId xmlns:r="http://schemas.openxmlformats.org/officeDocument/2006/relationships" id="2147483649" r:id="R6df414efe88c48e8"/>
+    <p:sldLayoutId xmlns:r="http://schemas.openxmlformats.org/officeDocument/2006/relationships" id="2147483649" r:id="R646df8c041414fa7"/>
   </p:sldLayoutIdLst>
   <p:txStyles>
     <p:titleStyle>
@@ -2157,6 +2738,2781 @@
 </p:sld>
 </file>
 
+<file path=ppt/slides/slide10.xml><?xml version="1.0" encoding="utf-8"?>
+<p:sld xmlns:p="http://schemas.openxmlformats.org/presentationml/2006/main">
+  <p:cSld>
+    <p:bg>
+      <p:bgPr>
+        <a:solidFill xmlns:a="http://schemas.openxmlformats.org/drawingml/2006/main">
+          <a:srgbClr val="FFFFFF"/>
+        </a:solidFill>
+      </p:bgPr>
+    </p:bg>
+    <p:spTree>
+      <p:nvGrpSpPr>
+        <p:cNvPr id="1" name=""/>
+        <p:cNvGrpSpPr/>
+        <p:nvPr/>
+      </p:nvGrpSpPr>
+      <p:grpSpPr>
+        <a:xfrm xmlns:a="http://schemas.openxmlformats.org/drawingml/2006/main"/>
+      </p:grpSpPr>
+      <p:sp>
+        <p:nvSpPr>
+          <p:cNvPr id="7" name="">
+            <a:extLst xmlns:a="http://schemas.openxmlformats.org/drawingml/2006/main">
+              <a:ext uri="{FF2B5EF4-FFF2-40B4-BE49-F238E27FC236}">
+                <a16:creationId xmlns:a16="http://schemas.microsoft.com/office/drawing/2014/main" id="{DB12B881-2D87-4470-A9E2-CA40D710634E}"/>
+              </a:ext>
+            </a:extLst>
+          </p:cNvPr>
+          <p:cNvSpPr>
+            <a:spLocks xmlns:a="http://schemas.openxmlformats.org/drawingml/2006/main" noGrp="1"/>
+          </p:cNvSpPr>
+          <p:nvPr/>
+        </p:nvSpPr>
+        <p:spPr>
+          <a:xfrm xmlns:a="http://schemas.openxmlformats.org/drawingml/2006/main">
+            <a:off x="457200" y="400050"/>
+            <a:ext cx="4000500" cy="266700"/>
+          </a:xfrm>
+          <a:prstGeom xmlns:a="http://schemas.openxmlformats.org/drawingml/2006/main" prst="rect">
+            <a:avLst/>
+          </a:prstGeom>
+          <a:noFill xmlns:a="http://schemas.openxmlformats.org/drawingml/2006/main"/>
+          <a:ln xmlns:a="http://schemas.openxmlformats.org/drawingml/2006/main" w="0">
+            <a:noFill/>
+            <a:prstDash val="solid"/>
+          </a:ln>
+        </p:spPr>
+        <p:txBody>
+          <a:bodyPr xmlns:a="http://schemas.openxmlformats.org/drawingml/2006/main"/>
+          <a:lstStyle xmlns:a="http://schemas.openxmlformats.org/drawingml/2006/main"/>
+          <a:p xmlns:a="http://schemas.openxmlformats.org/drawingml/2006/main">
+            <a:pPr>
+              <a:buNone/>
+              <a:defRPr sz="1350" b="1">
+                <a:solidFill>
+                  <a:srgbClr val="E45756"/>
+                </a:solidFill>
+              </a:defRPr>
+            </a:pPr>
+            <a:r>
+              <a:rPr sz="1350" b="1">
+                <a:solidFill>
+                  <a:srgbClr val="E45756"/>
+                </a:solidFill>
+              </a:rPr>
+              <a:t>STATE CONTRAST</a:t>
+            </a:r>
+          </a:p>
+        </p:txBody>
+      </p:sp>
+      <p:sp>
+        <p:nvSpPr>
+          <p:cNvPr id="2" name="">
+            <a:extLst xmlns:a="http://schemas.openxmlformats.org/drawingml/2006/main">
+              <a:ext uri="{FF2B5EF4-FFF2-40B4-BE49-F238E27FC236}">
+                <a16:creationId xmlns:a16="http://schemas.microsoft.com/office/drawing/2014/main" id="{0BB2094F-C042-49AB-BE8C-0ECFD22457DD}"/>
+              </a:ext>
+            </a:extLst>
+          </p:cNvPr>
+          <p:cNvSpPr>
+            <a:spLocks xmlns:a="http://schemas.openxmlformats.org/drawingml/2006/main" noGrp="1"/>
+          </p:cNvSpPr>
+          <p:nvPr/>
+        </p:nvSpPr>
+        <p:spPr>
+          <a:xfrm xmlns:a="http://schemas.openxmlformats.org/drawingml/2006/main">
+            <a:off x="457200" y="1562100"/>
+            <a:ext cx="10763250" cy="1809750"/>
+          </a:xfrm>
+          <a:prstGeom xmlns:a="http://schemas.openxmlformats.org/drawingml/2006/main" prst="rect">
+            <a:avLst/>
+          </a:prstGeom>
+          <a:noFill xmlns:a="http://schemas.openxmlformats.org/drawingml/2006/main"/>
+          <a:ln xmlns:a="http://schemas.openxmlformats.org/drawingml/2006/main" w="0">
+            <a:noFill/>
+            <a:prstDash val="solid"/>
+          </a:ln>
+        </p:spPr>
+        <p:txBody>
+          <a:bodyPr xmlns:a="http://schemas.openxmlformats.org/drawingml/2006/main"/>
+          <a:lstStyle xmlns:a="http://schemas.openxmlformats.org/drawingml/2006/main"/>
+          <a:p xmlns:a="http://schemas.openxmlformats.org/drawingml/2006/main">
+            <a:pPr>
+              <a:buNone/>
+              <a:defRPr sz="4350" b="1">
+                <a:solidFill>
+                  <a:srgbClr val="111827"/>
+                </a:solidFill>
+              </a:defRPr>
+            </a:pPr>
+            <a:r>
+              <a:rPr sz="4350" b="1">
+                <a:solidFill>
+                  <a:srgbClr val="111827"/>
+                </a:solidFill>
+              </a:rPr>
+              <a:t>Sideways versus trending: the approved comparison</a:t>
+            </a:r>
+          </a:p>
+        </p:txBody>
+      </p:sp>
+      <p:sp>
+        <p:nvSpPr>
+          <p:cNvPr id="3" name="">
+            <a:extLst xmlns:a="http://schemas.openxmlformats.org/drawingml/2006/main">
+              <a:ext uri="{FF2B5EF4-FFF2-40B4-BE49-F238E27FC236}">
+                <a16:creationId xmlns:a16="http://schemas.microsoft.com/office/drawing/2014/main" id="{D8394FB8-5765-4318-8A56-6DACECFE912E}"/>
+              </a:ext>
+            </a:extLst>
+          </p:cNvPr>
+          <p:cNvSpPr>
+            <a:spLocks xmlns:a="http://schemas.openxmlformats.org/drawingml/2006/main" noGrp="1"/>
+          </p:cNvSpPr>
+          <p:nvPr/>
+        </p:nvSpPr>
+        <p:spPr>
+          <a:xfrm xmlns:a="http://schemas.openxmlformats.org/drawingml/2006/main">
+            <a:off x="457200" y="3714750"/>
+            <a:ext cx="1257300" cy="76200"/>
+          </a:xfrm>
+          <a:prstGeom xmlns:a="http://schemas.openxmlformats.org/drawingml/2006/main" prst="rect">
+            <a:avLst/>
+          </a:prstGeom>
+          <a:solidFill xmlns:a="http://schemas.openxmlformats.org/drawingml/2006/main">
+            <a:srgbClr val="E45756"/>
+          </a:solidFill>
+          <a:ln xmlns:a="http://schemas.openxmlformats.org/drawingml/2006/main" w="9525">
+            <a:solidFill>
+              <a:srgbClr val="E45756"/>
+            </a:solidFill>
+            <a:prstDash val="solid"/>
+          </a:ln>
+        </p:spPr>
+      </p:sp>
+      <p:sp>
+        <p:nvSpPr>
+          <p:cNvPr id="4" name="">
+            <a:extLst xmlns:a="http://schemas.openxmlformats.org/drawingml/2006/main">
+              <a:ext uri="{FF2B5EF4-FFF2-40B4-BE49-F238E27FC236}">
+                <a16:creationId xmlns:a16="http://schemas.microsoft.com/office/drawing/2014/main" id="{67E3D676-3E4E-40CF-9FFA-FDD3E7F4C6B2}"/>
+              </a:ext>
+            </a:extLst>
+          </p:cNvPr>
+          <p:cNvSpPr>
+            <a:spLocks xmlns:a="http://schemas.openxmlformats.org/drawingml/2006/main" noGrp="1"/>
+          </p:cNvSpPr>
+          <p:nvPr/>
+        </p:nvSpPr>
+        <p:spPr>
+          <a:xfrm xmlns:a="http://schemas.openxmlformats.org/drawingml/2006/main">
+            <a:off x="457200" y="4171950"/>
+            <a:ext cx="9906000" cy="685800"/>
+          </a:xfrm>
+          <a:prstGeom xmlns:a="http://schemas.openxmlformats.org/drawingml/2006/main" prst="rect">
+            <a:avLst/>
+          </a:prstGeom>
+          <a:noFill xmlns:a="http://schemas.openxmlformats.org/drawingml/2006/main"/>
+          <a:ln xmlns:a="http://schemas.openxmlformats.org/drawingml/2006/main" w="0">
+            <a:noFill/>
+            <a:prstDash val="solid"/>
+          </a:ln>
+        </p:spPr>
+        <p:txBody>
+          <a:bodyPr xmlns:a="http://schemas.openxmlformats.org/drawingml/2006/main"/>
+          <a:lstStyle xmlns:a="http://schemas.openxmlformats.org/drawingml/2006/main"/>
+          <a:p xmlns:a="http://schemas.openxmlformats.org/drawingml/2006/main">
+            <a:pPr>
+              <a:buNone/>
+              <a:defRPr sz="2025" b="0">
+                <a:solidFill>
+                  <a:srgbClr val="667384"/>
+                </a:solidFill>
+              </a:defRPr>
+            </a:pPr>
+            <a:r>
+              <a:rPr sz="2025" b="0">
+                <a:solidFill>
+                  <a:srgbClr val="667384"/>
+                </a:solidFill>
+              </a:rPr>
+              <a:t>A paired descriptive contrast—not a strategy test</a:t>
+            </a:r>
+          </a:p>
+        </p:txBody>
+      </p:sp>
+      <p:sp>
+        <p:nvSpPr>
+          <p:cNvPr id="5" name="">
+            <a:extLst xmlns:a="http://schemas.openxmlformats.org/drawingml/2006/main">
+              <a:ext uri="{FF2B5EF4-FFF2-40B4-BE49-F238E27FC236}">
+                <a16:creationId xmlns:a16="http://schemas.microsoft.com/office/drawing/2014/main" id="{AF79BB13-9AEC-4C77-9A8C-3203F83002E1}"/>
+              </a:ext>
+            </a:extLst>
+          </p:cNvPr>
+          <p:cNvSpPr>
+            <a:spLocks xmlns:a="http://schemas.openxmlformats.org/drawingml/2006/main" noGrp="1"/>
+          </p:cNvSpPr>
+          <p:nvPr/>
+        </p:nvSpPr>
+        <p:spPr>
+          <a:xfrm xmlns:a="http://schemas.openxmlformats.org/drawingml/2006/main">
+            <a:off x="457200" y="5429250"/>
+            <a:ext cx="10477500" cy="609600"/>
+          </a:xfrm>
+          <a:prstGeom xmlns:a="http://schemas.openxmlformats.org/drawingml/2006/main" prst="rect">
+            <a:avLst/>
+          </a:prstGeom>
+          <a:noFill xmlns:a="http://schemas.openxmlformats.org/drawingml/2006/main"/>
+          <a:ln xmlns:a="http://schemas.openxmlformats.org/drawingml/2006/main" w="0">
+            <a:noFill/>
+            <a:prstDash val="solid"/>
+          </a:ln>
+        </p:spPr>
+        <p:txBody>
+          <a:bodyPr xmlns:a="http://schemas.openxmlformats.org/drawingml/2006/main"/>
+          <a:lstStyle xmlns:a="http://schemas.openxmlformats.org/drawingml/2006/main"/>
+          <a:p xmlns:a="http://schemas.openxmlformats.org/drawingml/2006/main">
+            <a:pPr>
+              <a:buNone/>
+              <a:defRPr sz="1575" b="0">
+                <a:solidFill>
+                  <a:srgbClr val="667384"/>
+                </a:solidFill>
+              </a:defRPr>
+            </a:pPr>
+            <a:r>
+              <a:rPr sz="1575" b="0">
+                <a:solidFill>
+                  <a:srgbClr val="667384"/>
+                </a:solidFill>
+              </a:rPr>
+              <a:t>Positive-prior branch • 15 × 15 horizons • 88-stock equal-sector core • post-2023 sealed</a:t>
+            </a:r>
+          </a:p>
+        </p:txBody>
+      </p:sp>
+      <p:sp>
+        <p:nvSpPr>
+          <p:cNvPr id="6" name="">
+            <a:extLst xmlns:a="http://schemas.openxmlformats.org/drawingml/2006/main">
+              <a:ext uri="{FF2B5EF4-FFF2-40B4-BE49-F238E27FC236}">
+                <a16:creationId xmlns:a16="http://schemas.microsoft.com/office/drawing/2014/main" id="{AD589277-BA8D-465E-8FE0-58FC0F7326BE}"/>
+              </a:ext>
+            </a:extLst>
+          </p:cNvPr>
+          <p:cNvSpPr>
+            <a:spLocks xmlns:a="http://schemas.openxmlformats.org/drawingml/2006/main" noGrp="1"/>
+          </p:cNvSpPr>
+          <p:nvPr/>
+        </p:nvSpPr>
+        <p:spPr>
+          <a:xfrm xmlns:a="http://schemas.openxmlformats.org/drawingml/2006/main">
+            <a:off x="11239500" y="6496050"/>
+            <a:ext cx="495300" cy="190500"/>
+          </a:xfrm>
+          <a:prstGeom xmlns:a="http://schemas.openxmlformats.org/drawingml/2006/main" prst="rect">
+            <a:avLst/>
+          </a:prstGeom>
+          <a:noFill xmlns:a="http://schemas.openxmlformats.org/drawingml/2006/main"/>
+          <a:ln xmlns:a="http://schemas.openxmlformats.org/drawingml/2006/main" w="0">
+            <a:noFill/>
+            <a:prstDash val="solid"/>
+          </a:ln>
+        </p:spPr>
+        <p:txBody>
+          <a:bodyPr xmlns:a="http://schemas.openxmlformats.org/drawingml/2006/main"/>
+          <a:lstStyle xmlns:a="http://schemas.openxmlformats.org/drawingml/2006/main"/>
+          <a:p xmlns:a="http://schemas.openxmlformats.org/drawingml/2006/main">
+            <a:pPr algn="r">
+              <a:buNone/>
+              <a:defRPr sz="900" b="0">
+                <a:solidFill>
+                  <a:srgbClr val="667384"/>
+                </a:solidFill>
+              </a:defRPr>
+            </a:pPr>
+            <a:r>
+              <a:rPr sz="900" b="0">
+                <a:solidFill>
+                  <a:srgbClr val="667384"/>
+                </a:solidFill>
+              </a:rPr>
+              <a:t>10</a:t>
+            </a:r>
+          </a:p>
+        </p:txBody>
+      </p:sp>
+    </p:spTree>
+    <p:extLst>
+      <p:ext uri="{BB962C8B-B14F-4D97-AF65-F5344CB8AC3E}">
+        <p14:creationId xmlns:p14="http://schemas.microsoft.com/office/powerpoint/2010/main" val="1697167073"/>
+      </p:ext>
+    </p:extLst>
+  </p:cSld>
+</p:sld>
+</file>
+
+<file path=ppt/slides/slide11.xml><?xml version="1.0" encoding="utf-8"?>
+<p:sld xmlns:p="http://schemas.openxmlformats.org/presentationml/2006/main">
+  <p:cSld>
+    <p:bg>
+      <p:bgPr>
+        <a:solidFill xmlns:a="http://schemas.openxmlformats.org/drawingml/2006/main">
+          <a:srgbClr val="FFFFFF"/>
+        </a:solidFill>
+      </p:bgPr>
+    </p:bg>
+    <p:spTree>
+      <p:nvGrpSpPr>
+        <p:cNvPr id="1" name=""/>
+        <p:cNvGrpSpPr/>
+        <p:nvPr/>
+      </p:nvGrpSpPr>
+      <p:grpSpPr>
+        <a:xfrm xmlns:a="http://schemas.openxmlformats.org/drawingml/2006/main"/>
+      </p:grpSpPr>
+      <p:sp>
+        <p:nvSpPr>
+          <p:cNvPr id="24" name="section-11">
+            <a:extLst xmlns:a="http://schemas.openxmlformats.org/drawingml/2006/main">
+              <a:ext uri="{FF2B5EF4-FFF2-40B4-BE49-F238E27FC236}">
+                <a16:creationId xmlns:a16="http://schemas.microsoft.com/office/drawing/2014/main" id="{272ED433-B59C-436C-9DFB-4D317B90A13F}"/>
+              </a:ext>
+            </a:extLst>
+          </p:cNvPr>
+          <p:cNvSpPr>
+            <a:spLocks xmlns:a="http://schemas.openxmlformats.org/drawingml/2006/main" noGrp="1"/>
+          </p:cNvSpPr>
+          <p:nvPr/>
+        </p:nvSpPr>
+        <p:spPr>
+          <a:xfrm xmlns:a="http://schemas.openxmlformats.org/drawingml/2006/main">
+            <a:off x="457200" y="228600"/>
+            <a:ext cx="4191000" cy="228600"/>
+          </a:xfrm>
+          <a:prstGeom xmlns:a="http://schemas.openxmlformats.org/drawingml/2006/main" prst="rect">
+            <a:avLst/>
+          </a:prstGeom>
+          <a:noFill xmlns:a="http://schemas.openxmlformats.org/drawingml/2006/main"/>
+          <a:ln xmlns:a="http://schemas.openxmlformats.org/drawingml/2006/main" w="0">
+            <a:noFill/>
+            <a:prstDash val="solid"/>
+          </a:ln>
+        </p:spPr>
+        <p:txBody>
+          <a:bodyPr xmlns:a="http://schemas.openxmlformats.org/drawingml/2006/main" wrap="square" lIns="0" tIns="0" rIns="0" bIns="0" anchor="t">
+            <a:normAutofit fontScale="100000"/>
+          </a:bodyPr>
+          <a:lstStyle xmlns:a="http://schemas.openxmlformats.org/drawingml/2006/main"/>
+          <a:p xmlns:a="http://schemas.openxmlformats.org/drawingml/2006/main">
+            <a:pPr algn="l">
+              <a:buNone/>
+              <a:defRPr sz="1200" b="1">
+                <a:solidFill>
+                  <a:srgbClr val="667384"/>
+                </a:solidFill>
+                <a:latin typeface="Arial"/>
+                <a:ea typeface="Arial"/>
+                <a:cs typeface="Arial"/>
+              </a:defRPr>
+            </a:pPr>
+            <a:r>
+              <a:rPr sz="1200" b="1">
+                <a:solidFill>
+                  <a:srgbClr val="667384"/>
+                </a:solidFill>
+                <a:latin typeface="Arial"/>
+                <a:ea typeface="Arial"/>
+                <a:cs typeface="Arial"/>
+              </a:rPr>
+              <a:t>STATE SURFACES</a:t>
+            </a:r>
+          </a:p>
+        </p:txBody>
+      </p:sp>
+      <p:sp>
+        <p:nvSpPr>
+          <p:cNvPr id="2" name="title-11">
+            <a:extLst xmlns:a="http://schemas.openxmlformats.org/drawingml/2006/main">
+              <a:ext uri="{FF2B5EF4-FFF2-40B4-BE49-F238E27FC236}">
+                <a16:creationId xmlns:a16="http://schemas.microsoft.com/office/drawing/2014/main" id="{3EC40708-7E00-432C-8ECE-907FA5705292}"/>
+              </a:ext>
+            </a:extLst>
+          </p:cNvPr>
+          <p:cNvSpPr>
+            <a:spLocks xmlns:a="http://schemas.openxmlformats.org/drawingml/2006/main" noGrp="1"/>
+          </p:cNvSpPr>
+          <p:nvPr/>
+        </p:nvSpPr>
+        <p:spPr>
+          <a:xfrm xmlns:a="http://schemas.openxmlformats.org/drawingml/2006/main">
+            <a:off x="457200" y="533400"/>
+            <a:ext cx="11277600" cy="628650"/>
+          </a:xfrm>
+          <a:prstGeom xmlns:a="http://schemas.openxmlformats.org/drawingml/2006/main" prst="rect">
+            <a:avLst/>
+          </a:prstGeom>
+          <a:noFill xmlns:a="http://schemas.openxmlformats.org/drawingml/2006/main"/>
+          <a:ln xmlns:a="http://schemas.openxmlformats.org/drawingml/2006/main" w="0">
+            <a:noFill/>
+            <a:prstDash val="solid"/>
+          </a:ln>
+        </p:spPr>
+        <p:txBody>
+          <a:bodyPr xmlns:a="http://schemas.openxmlformats.org/drawingml/2006/main" wrap="square" lIns="0" tIns="0" rIns="0" bIns="0" anchor="t">
+            <a:normAutofit fontScale="85754"/>
+          </a:bodyPr>
+          <a:lstStyle xmlns:a="http://schemas.openxmlformats.org/drawingml/2006/main"/>
+          <a:p xmlns:a="http://schemas.openxmlformats.org/drawingml/2006/main">
+            <a:pPr algn="l">
+              <a:buNone/>
+              <a:defRPr sz="3525" b="1">
+                <a:solidFill>
+                  <a:srgbClr val="000000"/>
+                </a:solidFill>
+                <a:latin typeface="Arial"/>
+                <a:ea typeface="Arial"/>
+                <a:cs typeface="Arial"/>
+              </a:defRPr>
+            </a:pPr>
+            <a:r>
+              <a:rPr sz="3525" b="1">
+                <a:solidFill>
+                  <a:srgbClr val="000000"/>
+                </a:solidFill>
+                <a:latin typeface="Arial"/>
+                <a:ea typeface="Arial"/>
+                <a:cs typeface="Arial"/>
+              </a:rPr>
+              <a:t>Sideways looks continuation-shaped; trending often does not</a:t>
+            </a:r>
+          </a:p>
+        </p:txBody>
+      </p:sp>
+      <p:sp>
+        <p:nvSpPr>
+          <p:cNvPr id="3" name="">
+            <a:extLst xmlns:a="http://schemas.openxmlformats.org/drawingml/2006/main">
+              <a:ext uri="{FF2B5EF4-FFF2-40B4-BE49-F238E27FC236}">
+                <a16:creationId xmlns:a16="http://schemas.microsoft.com/office/drawing/2014/main" id="{D5CA0FCE-75E8-41EF-A76A-23E9E2120C6A}"/>
+              </a:ext>
+            </a:extLst>
+          </p:cNvPr>
+          <p:cNvSpPr>
+            <a:spLocks xmlns:a="http://schemas.openxmlformats.org/drawingml/2006/main" noGrp="1"/>
+          </p:cNvSpPr>
+          <p:nvPr/>
+        </p:nvSpPr>
+        <p:spPr>
+          <a:xfrm xmlns:a="http://schemas.openxmlformats.org/drawingml/2006/main">
+            <a:off x="457200" y="1200150"/>
+            <a:ext cx="11277600" cy="19050"/>
+          </a:xfrm>
+          <a:prstGeom xmlns:a="http://schemas.openxmlformats.org/drawingml/2006/main" prst="rect">
+            <a:avLst/>
+          </a:prstGeom>
+          <a:solidFill xmlns:a="http://schemas.openxmlformats.org/drawingml/2006/main">
+            <a:srgbClr val="B8BCC4"/>
+          </a:solidFill>
+          <a:ln xmlns:a="http://schemas.openxmlformats.org/drawingml/2006/main" w="0">
+            <a:solidFill>
+              <a:srgbClr val="B8BCC4"/>
+            </a:solidFill>
+            <a:prstDash val="solid"/>
+          </a:ln>
+        </p:spPr>
+      </p:sp>
+      <p:sp>
+        <p:nvSpPr>
+          <p:cNvPr id="4" name="footer-left-11">
+            <a:extLst xmlns:a="http://schemas.openxmlformats.org/drawingml/2006/main">
+              <a:ext uri="{FF2B5EF4-FFF2-40B4-BE49-F238E27FC236}">
+                <a16:creationId xmlns:a16="http://schemas.microsoft.com/office/drawing/2014/main" id="{700DA765-80E0-4197-8700-00D867B86FA2}"/>
+              </a:ext>
+            </a:extLst>
+          </p:cNvPr>
+          <p:cNvSpPr>
+            <a:spLocks xmlns:a="http://schemas.openxmlformats.org/drawingml/2006/main" noGrp="1"/>
+          </p:cNvSpPr>
+          <p:nvPr/>
+        </p:nvSpPr>
+        <p:spPr>
+          <a:xfrm xmlns:a="http://schemas.openxmlformats.org/drawingml/2006/main">
+            <a:off x="457200" y="6515100"/>
+            <a:ext cx="3429000" cy="171450"/>
+          </a:xfrm>
+          <a:prstGeom xmlns:a="http://schemas.openxmlformats.org/drawingml/2006/main" prst="rect">
+            <a:avLst/>
+          </a:prstGeom>
+          <a:noFill xmlns:a="http://schemas.openxmlformats.org/drawingml/2006/main"/>
+          <a:ln xmlns:a="http://schemas.openxmlformats.org/drawingml/2006/main" w="0">
+            <a:noFill/>
+            <a:prstDash val="solid"/>
+          </a:ln>
+        </p:spPr>
+        <p:txBody>
+          <a:bodyPr xmlns:a="http://schemas.openxmlformats.org/drawingml/2006/main" wrap="square" lIns="0" tIns="0" rIns="0" bIns="0" anchor="t">
+            <a:normAutofit fontScale="100000"/>
+          </a:bodyPr>
+          <a:lstStyle xmlns:a="http://schemas.openxmlformats.org/drawingml/2006/main"/>
+          <a:p xmlns:a="http://schemas.openxmlformats.org/drawingml/2006/main">
+            <a:pPr algn="l">
+              <a:buNone/>
+              <a:defRPr sz="825" b="0">
+                <a:solidFill>
+                  <a:srgbClr val="64748B"/>
+                </a:solidFill>
+                <a:latin typeface="Arial"/>
+                <a:ea typeface="Arial"/>
+                <a:cs typeface="Arial"/>
+              </a:defRPr>
+            </a:pPr>
+            <a:r>
+              <a:rPr sz="825" b="0">
+                <a:solidFill>
+                  <a:srgbClr val="64748B"/>
+                </a:solidFill>
+                <a:latin typeface="Arial"/>
+                <a:ea typeface="Arial"/>
+                <a:cs typeface="Arial"/>
+              </a:rPr>
+              <a:t>88-stock core | paired positive-prior branch | equal-sector medians</a:t>
+            </a:r>
+          </a:p>
+        </p:txBody>
+      </p:sp>
+      <p:sp>
+        <p:nvSpPr>
+          <p:cNvPr id="5" name="footer-number-11">
+            <a:extLst xmlns:a="http://schemas.openxmlformats.org/drawingml/2006/main">
+              <a:ext uri="{FF2B5EF4-FFF2-40B4-BE49-F238E27FC236}">
+                <a16:creationId xmlns:a16="http://schemas.microsoft.com/office/drawing/2014/main" id="{83896276-4112-4532-AF7C-776C67C58B77}"/>
+              </a:ext>
+            </a:extLst>
+          </p:cNvPr>
+          <p:cNvSpPr>
+            <a:spLocks xmlns:a="http://schemas.openxmlformats.org/drawingml/2006/main" noGrp="1"/>
+          </p:cNvSpPr>
+          <p:nvPr/>
+        </p:nvSpPr>
+        <p:spPr>
+          <a:xfrm xmlns:a="http://schemas.openxmlformats.org/drawingml/2006/main">
+            <a:off x="10477500" y="6496050"/>
+            <a:ext cx="1257300" cy="190500"/>
+          </a:xfrm>
+          <a:prstGeom xmlns:a="http://schemas.openxmlformats.org/drawingml/2006/main" prst="rect">
+            <a:avLst/>
+          </a:prstGeom>
+          <a:noFill xmlns:a="http://schemas.openxmlformats.org/drawingml/2006/main"/>
+          <a:ln xmlns:a="http://schemas.openxmlformats.org/drawingml/2006/main" w="0">
+            <a:noFill/>
+            <a:prstDash val="solid"/>
+          </a:ln>
+        </p:spPr>
+        <p:txBody>
+          <a:bodyPr xmlns:a="http://schemas.openxmlformats.org/drawingml/2006/main" wrap="square" lIns="0" tIns="0" rIns="0" bIns="0" anchor="t">
+            <a:normAutofit fontScale="100000"/>
+          </a:bodyPr>
+          <a:lstStyle xmlns:a="http://schemas.openxmlformats.org/drawingml/2006/main"/>
+          <a:p xmlns:a="http://schemas.openxmlformats.org/drawingml/2006/main">
+            <a:pPr algn="r">
+              <a:buNone/>
+              <a:defRPr sz="1050" b="0">
+                <a:solidFill>
+                  <a:srgbClr val="667384"/>
+                </a:solidFill>
+                <a:latin typeface="Arial"/>
+                <a:ea typeface="Arial"/>
+                <a:cs typeface="Arial"/>
+              </a:defRPr>
+            </a:pPr>
+            <a:r>
+              <a:rPr sz="1050" b="0">
+                <a:solidFill>
+                  <a:srgbClr val="667384"/>
+                </a:solidFill>
+                <a:latin typeface="Arial"/>
+                <a:ea typeface="Arial"/>
+                <a:cs typeface="Arial"/>
+              </a:rPr>
+              <a:t>11</a:t>
+            </a:r>
+          </a:p>
+        </p:txBody>
+      </p:sp>
+      <p:pic>
+        <p:nvPicPr>
+          <p:cNvPr id="31" name=""/>
+          <p:cNvPicPr>
+            <a:picLocks xmlns:a="http://schemas.openxmlformats.org/drawingml/2006/main" noChangeAspect="1"/>
+          </p:cNvPicPr>
+          <p:nvPr/>
+        </p:nvPicPr>
+        <p:blipFill>
+          <a:blip xmlns:r="http://schemas.openxmlformats.org/officeDocument/2006/relationships" xmlns:a="http://schemas.openxmlformats.org/drawingml/2006/main" r:embed="R00d18af808c14119"/>
+          <a:stretch xmlns:a="http://schemas.openxmlformats.org/drawingml/2006/main"/>
+        </p:blipFill>
+        <p:spPr>
+          <a:xfrm xmlns:a="http://schemas.openxmlformats.org/drawingml/2006/main">
+            <a:off x="2885498" y="2240483"/>
+            <a:ext cx="6421005" cy="3234284"/>
+          </a:xfrm>
+          <a:prstGeom xmlns:a="http://schemas.openxmlformats.org/drawingml/2006/main" prst="rect">
+            <a:avLst/>
+          </a:prstGeom>
+        </p:spPr>
+      </p:pic>
+    </p:spTree>
+    <p:extLst>
+      <p:ext uri="{BB962C8B-B14F-4D97-AF65-F5344CB8AC3E}">
+        <p14:creationId xmlns:p14="http://schemas.microsoft.com/office/powerpoint/2010/main" val="666536286"/>
+      </p:ext>
+    </p:extLst>
+  </p:cSld>
+</p:sld>
+</file>
+
+<file path=ppt/slides/slide12.xml><?xml version="1.0" encoding="utf-8"?>
+<p:sld xmlns:p="http://schemas.openxmlformats.org/presentationml/2006/main">
+  <p:cSld>
+    <p:bg>
+      <p:bgPr>
+        <a:solidFill xmlns:a="http://schemas.openxmlformats.org/drawingml/2006/main">
+          <a:srgbClr val="FFFFFF"/>
+        </a:solidFill>
+      </p:bgPr>
+    </p:bg>
+    <p:spTree>
+      <p:nvGrpSpPr>
+        <p:cNvPr id="1" name=""/>
+        <p:cNvGrpSpPr/>
+        <p:nvPr/>
+      </p:nvGrpSpPr>
+      <p:grpSpPr>
+        <a:xfrm xmlns:a="http://schemas.openxmlformats.org/drawingml/2006/main"/>
+      </p:grpSpPr>
+      <p:sp>
+        <p:nvSpPr>
+          <p:cNvPr id="24" name="section-11">
+            <a:extLst xmlns:a="http://schemas.openxmlformats.org/drawingml/2006/main">
+              <a:ext uri="{FF2B5EF4-FFF2-40B4-BE49-F238E27FC236}">
+                <a16:creationId xmlns:a16="http://schemas.microsoft.com/office/drawing/2014/main" id="{272ED433-B59C-436C-9DFB-4D317B90A13F}"/>
+              </a:ext>
+            </a:extLst>
+          </p:cNvPr>
+          <p:cNvSpPr>
+            <a:spLocks xmlns:a="http://schemas.openxmlformats.org/drawingml/2006/main" noGrp="1"/>
+          </p:cNvSpPr>
+          <p:nvPr/>
+        </p:nvSpPr>
+        <p:spPr>
+          <a:xfrm xmlns:a="http://schemas.openxmlformats.org/drawingml/2006/main">
+            <a:off x="457200" y="228600"/>
+            <a:ext cx="4191000" cy="228600"/>
+          </a:xfrm>
+          <a:prstGeom xmlns:a="http://schemas.openxmlformats.org/drawingml/2006/main" prst="rect">
+            <a:avLst/>
+          </a:prstGeom>
+          <a:noFill xmlns:a="http://schemas.openxmlformats.org/drawingml/2006/main"/>
+          <a:ln xmlns:a="http://schemas.openxmlformats.org/drawingml/2006/main" w="0">
+            <a:noFill/>
+            <a:prstDash val="solid"/>
+          </a:ln>
+        </p:spPr>
+        <p:txBody>
+          <a:bodyPr xmlns:a="http://schemas.openxmlformats.org/drawingml/2006/main" wrap="square" lIns="0" tIns="0" rIns="0" bIns="0" anchor="t">
+            <a:normAutofit fontScale="100000"/>
+          </a:bodyPr>
+          <a:lstStyle xmlns:a="http://schemas.openxmlformats.org/drawingml/2006/main"/>
+          <a:p xmlns:a="http://schemas.openxmlformats.org/drawingml/2006/main">
+            <a:pPr algn="l">
+              <a:buNone/>
+              <a:defRPr sz="1200" b="1">
+                <a:solidFill>
+                  <a:srgbClr val="667384"/>
+                </a:solidFill>
+                <a:latin typeface="Arial"/>
+                <a:ea typeface="Arial"/>
+                <a:cs typeface="Arial"/>
+              </a:defRPr>
+            </a:pPr>
+            <a:r>
+              <a:rPr sz="1200" b="1">
+                <a:solidFill>
+                  <a:srgbClr val="667384"/>
+                </a:solidFill>
+                <a:latin typeface="Arial"/>
+                <a:ea typeface="Arial"/>
+                <a:cs typeface="Arial"/>
+              </a:rPr>
+              <a:t>PAIRED CONTRAST</a:t>
+            </a:r>
+          </a:p>
+        </p:txBody>
+      </p:sp>
+      <p:sp>
+        <p:nvSpPr>
+          <p:cNvPr id="2" name="title-11">
+            <a:extLst xmlns:a="http://schemas.openxmlformats.org/drawingml/2006/main">
+              <a:ext uri="{FF2B5EF4-FFF2-40B4-BE49-F238E27FC236}">
+                <a16:creationId xmlns:a16="http://schemas.microsoft.com/office/drawing/2014/main" id="{3EC40708-7E00-432C-8ECE-907FA5705292}"/>
+              </a:ext>
+            </a:extLst>
+          </p:cNvPr>
+          <p:cNvSpPr>
+            <a:spLocks xmlns:a="http://schemas.openxmlformats.org/drawingml/2006/main" noGrp="1"/>
+          </p:cNvSpPr>
+          <p:nvPr/>
+        </p:nvSpPr>
+        <p:spPr>
+          <a:xfrm xmlns:a="http://schemas.openxmlformats.org/drawingml/2006/main">
+            <a:off x="457200" y="533400"/>
+            <a:ext cx="11277600" cy="628650"/>
+          </a:xfrm>
+          <a:prstGeom xmlns:a="http://schemas.openxmlformats.org/drawingml/2006/main" prst="rect">
+            <a:avLst/>
+          </a:prstGeom>
+          <a:noFill xmlns:a="http://schemas.openxmlformats.org/drawingml/2006/main"/>
+          <a:ln xmlns:a="http://schemas.openxmlformats.org/drawingml/2006/main" w="0">
+            <a:noFill/>
+            <a:prstDash val="solid"/>
+          </a:ln>
+        </p:spPr>
+        <p:txBody>
+          <a:bodyPr xmlns:a="http://schemas.openxmlformats.org/drawingml/2006/main" wrap="square" lIns="0" tIns="0" rIns="0" bIns="0" anchor="t">
+            <a:normAutofit fontScale="100000"/>
+          </a:bodyPr>
+          <a:lstStyle xmlns:a="http://schemas.openxmlformats.org/drawingml/2006/main"/>
+          <a:p xmlns:a="http://schemas.openxmlformats.org/drawingml/2006/main">
+            <a:pPr algn="l">
+              <a:buNone/>
+              <a:defRPr sz="3525" b="1">
+                <a:solidFill>
+                  <a:srgbClr val="000000"/>
+                </a:solidFill>
+                <a:latin typeface="Arial"/>
+                <a:ea typeface="Arial"/>
+                <a:cs typeface="Arial"/>
+              </a:defRPr>
+            </a:pPr>
+            <a:r>
+              <a:rPr sz="3525" b="1">
+                <a:solidFill>
+                  <a:srgbClr val="000000"/>
+                </a:solidFill>
+                <a:latin typeface="Arial"/>
+                <a:ea typeface="Arial"/>
+                <a:cs typeface="Arial"/>
+              </a:rPr>
+              <a:t>Sideways wins 92.9% of paired horizon cells</a:t>
+            </a:r>
+          </a:p>
+        </p:txBody>
+      </p:sp>
+      <p:sp>
+        <p:nvSpPr>
+          <p:cNvPr id="3" name="">
+            <a:extLst xmlns:a="http://schemas.openxmlformats.org/drawingml/2006/main">
+              <a:ext uri="{FF2B5EF4-FFF2-40B4-BE49-F238E27FC236}">
+                <a16:creationId xmlns:a16="http://schemas.microsoft.com/office/drawing/2014/main" id="{D5CA0FCE-75E8-41EF-A76A-23E9E2120C6A}"/>
+              </a:ext>
+            </a:extLst>
+          </p:cNvPr>
+          <p:cNvSpPr>
+            <a:spLocks xmlns:a="http://schemas.openxmlformats.org/drawingml/2006/main" noGrp="1"/>
+          </p:cNvSpPr>
+          <p:nvPr/>
+        </p:nvSpPr>
+        <p:spPr>
+          <a:xfrm xmlns:a="http://schemas.openxmlformats.org/drawingml/2006/main">
+            <a:off x="457200" y="1200150"/>
+            <a:ext cx="11277600" cy="19050"/>
+          </a:xfrm>
+          <a:prstGeom xmlns:a="http://schemas.openxmlformats.org/drawingml/2006/main" prst="rect">
+            <a:avLst/>
+          </a:prstGeom>
+          <a:solidFill xmlns:a="http://schemas.openxmlformats.org/drawingml/2006/main">
+            <a:srgbClr val="B8BCC4"/>
+          </a:solidFill>
+          <a:ln xmlns:a="http://schemas.openxmlformats.org/drawingml/2006/main" w="0">
+            <a:solidFill>
+              <a:srgbClr val="B8BCC4"/>
+            </a:solidFill>
+            <a:prstDash val="solid"/>
+          </a:ln>
+        </p:spPr>
+      </p:sp>
+      <p:sp>
+        <p:nvSpPr>
+          <p:cNvPr id="4" name="footer-left-11">
+            <a:extLst xmlns:a="http://schemas.openxmlformats.org/drawingml/2006/main">
+              <a:ext uri="{FF2B5EF4-FFF2-40B4-BE49-F238E27FC236}">
+                <a16:creationId xmlns:a16="http://schemas.microsoft.com/office/drawing/2014/main" id="{700DA765-80E0-4197-8700-00D867B86FA2}"/>
+              </a:ext>
+            </a:extLst>
+          </p:cNvPr>
+          <p:cNvSpPr>
+            <a:spLocks xmlns:a="http://schemas.openxmlformats.org/drawingml/2006/main" noGrp="1"/>
+          </p:cNvSpPr>
+          <p:nvPr/>
+        </p:nvSpPr>
+        <p:spPr>
+          <a:xfrm xmlns:a="http://schemas.openxmlformats.org/drawingml/2006/main">
+            <a:off x="457200" y="6515100"/>
+            <a:ext cx="3429000" cy="171450"/>
+          </a:xfrm>
+          <a:prstGeom xmlns:a="http://schemas.openxmlformats.org/drawingml/2006/main" prst="rect">
+            <a:avLst/>
+          </a:prstGeom>
+          <a:noFill xmlns:a="http://schemas.openxmlformats.org/drawingml/2006/main"/>
+          <a:ln xmlns:a="http://schemas.openxmlformats.org/drawingml/2006/main" w="0">
+            <a:noFill/>
+            <a:prstDash val="solid"/>
+          </a:ln>
+        </p:spPr>
+        <p:txBody>
+          <a:bodyPr xmlns:a="http://schemas.openxmlformats.org/drawingml/2006/main" wrap="square" lIns="0" tIns="0" rIns="0" bIns="0" anchor="t">
+            <a:normAutofit fontScale="100000"/>
+          </a:bodyPr>
+          <a:lstStyle xmlns:a="http://schemas.openxmlformats.org/drawingml/2006/main"/>
+          <a:p xmlns:a="http://schemas.openxmlformats.org/drawingml/2006/main">
+            <a:pPr algn="l">
+              <a:buNone/>
+              <a:defRPr sz="825" b="0">
+                <a:solidFill>
+                  <a:srgbClr val="64748B"/>
+                </a:solidFill>
+                <a:latin typeface="Arial"/>
+                <a:ea typeface="Arial"/>
+                <a:cs typeface="Arial"/>
+              </a:defRPr>
+            </a:pPr>
+            <a:r>
+              <a:rPr sz="825" b="0">
+                <a:solidFill>
+                  <a:srgbClr val="64748B"/>
+                </a:solidFill>
+                <a:latin typeface="Arial"/>
+                <a:ea typeface="Arial"/>
+                <a:cs typeface="Arial"/>
+              </a:rPr>
+              <a:t>Sideways r minus trending r | paired within asset and horizon cell</a:t>
+            </a:r>
+          </a:p>
+        </p:txBody>
+      </p:sp>
+      <p:sp>
+        <p:nvSpPr>
+          <p:cNvPr id="5" name="footer-number-11">
+            <a:extLst xmlns:a="http://schemas.openxmlformats.org/drawingml/2006/main">
+              <a:ext uri="{FF2B5EF4-FFF2-40B4-BE49-F238E27FC236}">
+                <a16:creationId xmlns:a16="http://schemas.microsoft.com/office/drawing/2014/main" id="{83896276-4112-4532-AF7C-776C67C58B77}"/>
+              </a:ext>
+            </a:extLst>
+          </p:cNvPr>
+          <p:cNvSpPr>
+            <a:spLocks xmlns:a="http://schemas.openxmlformats.org/drawingml/2006/main" noGrp="1"/>
+          </p:cNvSpPr>
+          <p:nvPr/>
+        </p:nvSpPr>
+        <p:spPr>
+          <a:xfrm xmlns:a="http://schemas.openxmlformats.org/drawingml/2006/main">
+            <a:off x="10477500" y="6496050"/>
+            <a:ext cx="1257300" cy="190500"/>
+          </a:xfrm>
+          <a:prstGeom xmlns:a="http://schemas.openxmlformats.org/drawingml/2006/main" prst="rect">
+            <a:avLst/>
+          </a:prstGeom>
+          <a:noFill xmlns:a="http://schemas.openxmlformats.org/drawingml/2006/main"/>
+          <a:ln xmlns:a="http://schemas.openxmlformats.org/drawingml/2006/main" w="0">
+            <a:noFill/>
+            <a:prstDash val="solid"/>
+          </a:ln>
+        </p:spPr>
+        <p:txBody>
+          <a:bodyPr xmlns:a="http://schemas.openxmlformats.org/drawingml/2006/main" wrap="square" lIns="0" tIns="0" rIns="0" bIns="0" anchor="t">
+            <a:normAutofit fontScale="100000"/>
+          </a:bodyPr>
+          <a:lstStyle xmlns:a="http://schemas.openxmlformats.org/drawingml/2006/main"/>
+          <a:p xmlns:a="http://schemas.openxmlformats.org/drawingml/2006/main">
+            <a:pPr algn="r">
+              <a:buNone/>
+              <a:defRPr sz="1050" b="0">
+                <a:solidFill>
+                  <a:srgbClr val="667384"/>
+                </a:solidFill>
+                <a:latin typeface="Arial"/>
+                <a:ea typeface="Arial"/>
+                <a:cs typeface="Arial"/>
+              </a:defRPr>
+            </a:pPr>
+            <a:r>
+              <a:rPr sz="1050" b="0">
+                <a:solidFill>
+                  <a:srgbClr val="667384"/>
+                </a:solidFill>
+                <a:latin typeface="Arial"/>
+                <a:ea typeface="Arial"/>
+                <a:cs typeface="Arial"/>
+              </a:rPr>
+              <a:t>12</a:t>
+            </a:r>
+          </a:p>
+        </p:txBody>
+      </p:sp>
+      <p:pic>
+        <p:nvPicPr>
+          <p:cNvPr id="31" name=""/>
+          <p:cNvPicPr>
+            <a:picLocks xmlns:a="http://schemas.openxmlformats.org/drawingml/2006/main" noChangeAspect="1"/>
+          </p:cNvPicPr>
+          <p:nvPr/>
+        </p:nvPicPr>
+        <p:blipFill>
+          <a:blip xmlns:r="http://schemas.openxmlformats.org/officeDocument/2006/relationships" xmlns:a="http://schemas.openxmlformats.org/drawingml/2006/main" r:embed="R5b993ed231214726"/>
+          <a:stretch xmlns:a="http://schemas.openxmlformats.org/drawingml/2006/main"/>
+        </p:blipFill>
+        <p:spPr>
+          <a:xfrm xmlns:a="http://schemas.openxmlformats.org/drawingml/2006/main">
+            <a:off x="2885498" y="1421672"/>
+            <a:ext cx="6421005" cy="4871905"/>
+          </a:xfrm>
+          <a:prstGeom xmlns:a="http://schemas.openxmlformats.org/drawingml/2006/main" prst="rect">
+            <a:avLst/>
+          </a:prstGeom>
+        </p:spPr>
+      </p:pic>
+    </p:spTree>
+    <p:extLst>
+      <p:ext uri="{BB962C8B-B14F-4D97-AF65-F5344CB8AC3E}">
+        <p14:creationId xmlns:p14="http://schemas.microsoft.com/office/powerpoint/2010/main" val="666536286"/>
+      </p:ext>
+    </p:extLst>
+  </p:cSld>
+</p:sld>
+</file>
+
+<file path=ppt/slides/slide13.xml><?xml version="1.0" encoding="utf-8"?>
+<p:sld xmlns:p="http://schemas.openxmlformats.org/presentationml/2006/main">
+  <p:cSld>
+    <p:bg>
+      <p:bgPr>
+        <a:solidFill xmlns:a="http://schemas.openxmlformats.org/drawingml/2006/main">
+          <a:srgbClr val="FFFFFF"/>
+        </a:solidFill>
+      </p:bgPr>
+    </p:bg>
+    <p:spTree>
+      <p:nvGrpSpPr>
+        <p:cNvPr id="1" name=""/>
+        <p:cNvGrpSpPr/>
+        <p:nvPr/>
+      </p:nvGrpSpPr>
+      <p:grpSpPr>
+        <a:xfrm xmlns:a="http://schemas.openxmlformats.org/drawingml/2006/main"/>
+      </p:grpSpPr>
+      <p:sp>
+        <p:nvSpPr>
+          <p:cNvPr id="24" name="section-11">
+            <a:extLst xmlns:a="http://schemas.openxmlformats.org/drawingml/2006/main">
+              <a:ext uri="{FF2B5EF4-FFF2-40B4-BE49-F238E27FC236}">
+                <a16:creationId xmlns:a16="http://schemas.microsoft.com/office/drawing/2014/main" id="{272ED433-B59C-436C-9DFB-4D317B90A13F}"/>
+              </a:ext>
+            </a:extLst>
+          </p:cNvPr>
+          <p:cNvSpPr>
+            <a:spLocks xmlns:a="http://schemas.openxmlformats.org/drawingml/2006/main" noGrp="1"/>
+          </p:cNvSpPr>
+          <p:nvPr/>
+        </p:nvSpPr>
+        <p:spPr>
+          <a:xfrm xmlns:a="http://schemas.openxmlformats.org/drawingml/2006/main">
+            <a:off x="457200" y="228600"/>
+            <a:ext cx="4191000" cy="228600"/>
+          </a:xfrm>
+          <a:prstGeom xmlns:a="http://schemas.openxmlformats.org/drawingml/2006/main" prst="rect">
+            <a:avLst/>
+          </a:prstGeom>
+          <a:noFill xmlns:a="http://schemas.openxmlformats.org/drawingml/2006/main"/>
+          <a:ln xmlns:a="http://schemas.openxmlformats.org/drawingml/2006/main" w="0">
+            <a:noFill/>
+            <a:prstDash val="solid"/>
+          </a:ln>
+        </p:spPr>
+        <p:txBody>
+          <a:bodyPr xmlns:a="http://schemas.openxmlformats.org/drawingml/2006/main" wrap="square" lIns="0" tIns="0" rIns="0" bIns="0" anchor="t">
+            <a:normAutofit fontScale="100000"/>
+          </a:bodyPr>
+          <a:lstStyle xmlns:a="http://schemas.openxmlformats.org/drawingml/2006/main"/>
+          <a:p xmlns:a="http://schemas.openxmlformats.org/drawingml/2006/main">
+            <a:pPr algn="l">
+              <a:buNone/>
+              <a:defRPr sz="1200" b="1">
+                <a:solidFill>
+                  <a:srgbClr val="667384"/>
+                </a:solidFill>
+                <a:latin typeface="Arial"/>
+                <a:ea typeface="Arial"/>
+                <a:cs typeface="Arial"/>
+              </a:defRPr>
+            </a:pPr>
+            <a:r>
+              <a:rPr sz="1200" b="1">
+                <a:solidFill>
+                  <a:srgbClr val="667384"/>
+                </a:solidFill>
+                <a:latin typeface="Arial"/>
+                <a:ea typeface="Arial"/>
+                <a:cs typeface="Arial"/>
+              </a:rPr>
+              <a:t>SECTOR CONTEXT</a:t>
+            </a:r>
+          </a:p>
+        </p:txBody>
+      </p:sp>
+      <p:sp>
+        <p:nvSpPr>
+          <p:cNvPr id="2" name="title-11">
+            <a:extLst xmlns:a="http://schemas.openxmlformats.org/drawingml/2006/main">
+              <a:ext uri="{FF2B5EF4-FFF2-40B4-BE49-F238E27FC236}">
+                <a16:creationId xmlns:a16="http://schemas.microsoft.com/office/drawing/2014/main" id="{3EC40708-7E00-432C-8ECE-907FA5705292}"/>
+              </a:ext>
+            </a:extLst>
+          </p:cNvPr>
+          <p:cNvSpPr>
+            <a:spLocks xmlns:a="http://schemas.openxmlformats.org/drawingml/2006/main" noGrp="1"/>
+          </p:cNvSpPr>
+          <p:nvPr/>
+        </p:nvSpPr>
+        <p:spPr>
+          <a:xfrm xmlns:a="http://schemas.openxmlformats.org/drawingml/2006/main">
+            <a:off x="457200" y="533400"/>
+            <a:ext cx="11277600" cy="628650"/>
+          </a:xfrm>
+          <a:prstGeom xmlns:a="http://schemas.openxmlformats.org/drawingml/2006/main" prst="rect">
+            <a:avLst/>
+          </a:prstGeom>
+          <a:noFill xmlns:a="http://schemas.openxmlformats.org/drawingml/2006/main"/>
+          <a:ln xmlns:a="http://schemas.openxmlformats.org/drawingml/2006/main" w="0">
+            <a:noFill/>
+            <a:prstDash val="solid"/>
+          </a:ln>
+        </p:spPr>
+        <p:txBody>
+          <a:bodyPr xmlns:a="http://schemas.openxmlformats.org/drawingml/2006/main" wrap="square" lIns="0" tIns="0" rIns="0" bIns="0" anchor="t">
+            <a:normAutofit fontScale="100000"/>
+          </a:bodyPr>
+          <a:lstStyle xmlns:a="http://schemas.openxmlformats.org/drawingml/2006/main"/>
+          <a:p xmlns:a="http://schemas.openxmlformats.org/drawingml/2006/main">
+            <a:pPr algn="l">
+              <a:buNone/>
+              <a:defRPr sz="3525" b="1">
+                <a:solidFill>
+                  <a:srgbClr val="000000"/>
+                </a:solidFill>
+                <a:latin typeface="Arial"/>
+                <a:ea typeface="Arial"/>
+                <a:cs typeface="Arial"/>
+              </a:defRPr>
+            </a:pPr>
+            <a:r>
+              <a:rPr sz="3525" b="1">
+                <a:solidFill>
+                  <a:srgbClr val="000000"/>
+                </a:solidFill>
+                <a:latin typeface="Arial"/>
+                <a:ea typeface="Arial"/>
+                <a:cs typeface="Arial"/>
+              </a:rPr>
+              <a:t>All 11 sectors favor sideways on their median cell</a:t>
+            </a:r>
+          </a:p>
+        </p:txBody>
+      </p:sp>
+      <p:sp>
+        <p:nvSpPr>
+          <p:cNvPr id="3" name="">
+            <a:extLst xmlns:a="http://schemas.openxmlformats.org/drawingml/2006/main">
+              <a:ext uri="{FF2B5EF4-FFF2-40B4-BE49-F238E27FC236}">
+                <a16:creationId xmlns:a16="http://schemas.microsoft.com/office/drawing/2014/main" id="{D5CA0FCE-75E8-41EF-A76A-23E9E2120C6A}"/>
+              </a:ext>
+            </a:extLst>
+          </p:cNvPr>
+          <p:cNvSpPr>
+            <a:spLocks xmlns:a="http://schemas.openxmlformats.org/drawingml/2006/main" noGrp="1"/>
+          </p:cNvSpPr>
+          <p:nvPr/>
+        </p:nvSpPr>
+        <p:spPr>
+          <a:xfrm xmlns:a="http://schemas.openxmlformats.org/drawingml/2006/main">
+            <a:off x="457200" y="1200150"/>
+            <a:ext cx="11277600" cy="19050"/>
+          </a:xfrm>
+          <a:prstGeom xmlns:a="http://schemas.openxmlformats.org/drawingml/2006/main" prst="rect">
+            <a:avLst/>
+          </a:prstGeom>
+          <a:solidFill xmlns:a="http://schemas.openxmlformats.org/drawingml/2006/main">
+            <a:srgbClr val="B8BCC4"/>
+          </a:solidFill>
+          <a:ln xmlns:a="http://schemas.openxmlformats.org/drawingml/2006/main" w="0">
+            <a:solidFill>
+              <a:srgbClr val="B8BCC4"/>
+            </a:solidFill>
+            <a:prstDash val="solid"/>
+          </a:ln>
+        </p:spPr>
+      </p:sp>
+      <p:sp>
+        <p:nvSpPr>
+          <p:cNvPr id="4" name="footer-left-11">
+            <a:extLst xmlns:a="http://schemas.openxmlformats.org/drawingml/2006/main">
+              <a:ext uri="{FF2B5EF4-FFF2-40B4-BE49-F238E27FC236}">
+                <a16:creationId xmlns:a16="http://schemas.microsoft.com/office/drawing/2014/main" id="{700DA765-80E0-4197-8700-00D867B86FA2}"/>
+              </a:ext>
+            </a:extLst>
+          </p:cNvPr>
+          <p:cNvSpPr>
+            <a:spLocks xmlns:a="http://schemas.openxmlformats.org/drawingml/2006/main" noGrp="1"/>
+          </p:cNvSpPr>
+          <p:nvPr/>
+        </p:nvSpPr>
+        <p:spPr>
+          <a:xfrm xmlns:a="http://schemas.openxmlformats.org/drawingml/2006/main">
+            <a:off x="457200" y="6515100"/>
+            <a:ext cx="3429000" cy="171450"/>
+          </a:xfrm>
+          <a:prstGeom xmlns:a="http://schemas.openxmlformats.org/drawingml/2006/main" prst="rect">
+            <a:avLst/>
+          </a:prstGeom>
+          <a:noFill xmlns:a="http://schemas.openxmlformats.org/drawingml/2006/main"/>
+          <a:ln xmlns:a="http://schemas.openxmlformats.org/drawingml/2006/main" w="0">
+            <a:noFill/>
+            <a:prstDash val="solid"/>
+          </a:ln>
+        </p:spPr>
+        <p:txBody>
+          <a:bodyPr xmlns:a="http://schemas.openxmlformats.org/drawingml/2006/main" wrap="square" lIns="0" tIns="0" rIns="0" bIns="0" anchor="t">
+            <a:normAutofit fontScale="100000"/>
+          </a:bodyPr>
+          <a:lstStyle xmlns:a="http://schemas.openxmlformats.org/drawingml/2006/main"/>
+          <a:p xmlns:a="http://schemas.openxmlformats.org/drawingml/2006/main">
+            <a:pPr algn="l">
+              <a:buNone/>
+              <a:defRPr sz="825" b="0">
+                <a:solidFill>
+                  <a:srgbClr val="64748B"/>
+                </a:solidFill>
+                <a:latin typeface="Arial"/>
+                <a:ea typeface="Arial"/>
+                <a:cs typeface="Arial"/>
+              </a:defRPr>
+            </a:pPr>
+            <a:r>
+              <a:rPr sz="825" b="0">
+                <a:solidFill>
+                  <a:srgbClr val="64748B"/>
+                </a:solidFill>
+                <a:latin typeface="Arial"/>
+                <a:ea typeface="Arial"/>
+                <a:cs typeface="Arial"/>
+              </a:rPr>
+              <a:t>Frozen current GICS labels | eight stocks per sector | 225 cells</a:t>
+            </a:r>
+          </a:p>
+        </p:txBody>
+      </p:sp>
+      <p:sp>
+        <p:nvSpPr>
+          <p:cNvPr id="5" name="footer-number-11">
+            <a:extLst xmlns:a="http://schemas.openxmlformats.org/drawingml/2006/main">
+              <a:ext uri="{FF2B5EF4-FFF2-40B4-BE49-F238E27FC236}">
+                <a16:creationId xmlns:a16="http://schemas.microsoft.com/office/drawing/2014/main" id="{83896276-4112-4532-AF7C-776C67C58B77}"/>
+              </a:ext>
+            </a:extLst>
+          </p:cNvPr>
+          <p:cNvSpPr>
+            <a:spLocks xmlns:a="http://schemas.openxmlformats.org/drawingml/2006/main" noGrp="1"/>
+          </p:cNvSpPr>
+          <p:nvPr/>
+        </p:nvSpPr>
+        <p:spPr>
+          <a:xfrm xmlns:a="http://schemas.openxmlformats.org/drawingml/2006/main">
+            <a:off x="10477500" y="6496050"/>
+            <a:ext cx="1257300" cy="190500"/>
+          </a:xfrm>
+          <a:prstGeom xmlns:a="http://schemas.openxmlformats.org/drawingml/2006/main" prst="rect">
+            <a:avLst/>
+          </a:prstGeom>
+          <a:noFill xmlns:a="http://schemas.openxmlformats.org/drawingml/2006/main"/>
+          <a:ln xmlns:a="http://schemas.openxmlformats.org/drawingml/2006/main" w="0">
+            <a:noFill/>
+            <a:prstDash val="solid"/>
+          </a:ln>
+        </p:spPr>
+        <p:txBody>
+          <a:bodyPr xmlns:a="http://schemas.openxmlformats.org/drawingml/2006/main" wrap="square" lIns="0" tIns="0" rIns="0" bIns="0" anchor="t">
+            <a:normAutofit fontScale="100000"/>
+          </a:bodyPr>
+          <a:lstStyle xmlns:a="http://schemas.openxmlformats.org/drawingml/2006/main"/>
+          <a:p xmlns:a="http://schemas.openxmlformats.org/drawingml/2006/main">
+            <a:pPr algn="r">
+              <a:buNone/>
+              <a:defRPr sz="1050" b="0">
+                <a:solidFill>
+                  <a:srgbClr val="667384"/>
+                </a:solidFill>
+                <a:latin typeface="Arial"/>
+                <a:ea typeface="Arial"/>
+                <a:cs typeface="Arial"/>
+              </a:defRPr>
+            </a:pPr>
+            <a:r>
+              <a:rPr sz="1050" b="0">
+                <a:solidFill>
+                  <a:srgbClr val="667384"/>
+                </a:solidFill>
+                <a:latin typeface="Arial"/>
+                <a:ea typeface="Arial"/>
+                <a:cs typeface="Arial"/>
+              </a:rPr>
+              <a:t>13</a:t>
+            </a:r>
+          </a:p>
+        </p:txBody>
+      </p:sp>
+      <p:pic>
+        <p:nvPicPr>
+          <p:cNvPr id="31" name=""/>
+          <p:cNvPicPr>
+            <a:picLocks xmlns:a="http://schemas.openxmlformats.org/drawingml/2006/main" noChangeAspect="1"/>
+          </p:cNvPicPr>
+          <p:nvPr/>
+        </p:nvPicPr>
+        <p:blipFill>
+          <a:blip xmlns:r="http://schemas.openxmlformats.org/officeDocument/2006/relationships" xmlns:a="http://schemas.openxmlformats.org/drawingml/2006/main" r:embed="R49713716ac59446d"/>
+          <a:stretch xmlns:a="http://schemas.openxmlformats.org/drawingml/2006/main"/>
+        </p:blipFill>
+        <p:spPr>
+          <a:xfrm xmlns:a="http://schemas.openxmlformats.org/drawingml/2006/main">
+            <a:off x="2885498" y="1847571"/>
+            <a:ext cx="6421005" cy="4020107"/>
+          </a:xfrm>
+          <a:prstGeom xmlns:a="http://schemas.openxmlformats.org/drawingml/2006/main" prst="rect">
+            <a:avLst/>
+          </a:prstGeom>
+        </p:spPr>
+      </p:pic>
+    </p:spTree>
+    <p:extLst>
+      <p:ext uri="{BB962C8B-B14F-4D97-AF65-F5344CB8AC3E}">
+        <p14:creationId xmlns:p14="http://schemas.microsoft.com/office/powerpoint/2010/main" val="666536286"/>
+      </p:ext>
+    </p:extLst>
+  </p:cSld>
+</p:sld>
+</file>
+
+<file path=ppt/slides/slide14.xml><?xml version="1.0" encoding="utf-8"?>
+<p:sld xmlns:p="http://schemas.openxmlformats.org/presentationml/2006/main">
+  <p:cSld>
+    <p:bg>
+      <p:bgPr>
+        <a:solidFill xmlns:a="http://schemas.openxmlformats.org/drawingml/2006/main">
+          <a:srgbClr val="FFFFFF"/>
+        </a:solidFill>
+      </p:bgPr>
+    </p:bg>
+    <p:spTree>
+      <p:nvGrpSpPr>
+        <p:cNvPr id="1" name=""/>
+        <p:cNvGrpSpPr/>
+        <p:nvPr/>
+      </p:nvGrpSpPr>
+      <p:grpSpPr>
+        <a:xfrm xmlns:a="http://schemas.openxmlformats.org/drawingml/2006/main"/>
+      </p:grpSpPr>
+      <p:sp>
+        <p:nvSpPr>
+          <p:cNvPr id="24" name="section-11">
+            <a:extLst xmlns:a="http://schemas.openxmlformats.org/drawingml/2006/main">
+              <a:ext uri="{FF2B5EF4-FFF2-40B4-BE49-F238E27FC236}">
+                <a16:creationId xmlns:a16="http://schemas.microsoft.com/office/drawing/2014/main" id="{272ED433-B59C-436C-9DFB-4D317B90A13F}"/>
+              </a:ext>
+            </a:extLst>
+          </p:cNvPr>
+          <p:cNvSpPr>
+            <a:spLocks xmlns:a="http://schemas.openxmlformats.org/drawingml/2006/main" noGrp="1"/>
+          </p:cNvSpPr>
+          <p:nvPr/>
+        </p:nvSpPr>
+        <p:spPr>
+          <a:xfrm xmlns:a="http://schemas.openxmlformats.org/drawingml/2006/main">
+            <a:off x="457200" y="228600"/>
+            <a:ext cx="4191000" cy="228600"/>
+          </a:xfrm>
+          <a:prstGeom xmlns:a="http://schemas.openxmlformats.org/drawingml/2006/main" prst="rect">
+            <a:avLst/>
+          </a:prstGeom>
+          <a:noFill xmlns:a="http://schemas.openxmlformats.org/drawingml/2006/main"/>
+          <a:ln xmlns:a="http://schemas.openxmlformats.org/drawingml/2006/main" w="0">
+            <a:noFill/>
+            <a:prstDash val="solid"/>
+          </a:ln>
+        </p:spPr>
+        <p:txBody>
+          <a:bodyPr xmlns:a="http://schemas.openxmlformats.org/drawingml/2006/main" wrap="square" lIns="0" tIns="0" rIns="0" bIns="0" anchor="t">
+            <a:normAutofit fontScale="100000"/>
+          </a:bodyPr>
+          <a:lstStyle xmlns:a="http://schemas.openxmlformats.org/drawingml/2006/main"/>
+          <a:p xmlns:a="http://schemas.openxmlformats.org/drawingml/2006/main">
+            <a:pPr algn="l">
+              <a:buNone/>
+              <a:defRPr sz="1200" b="1">
+                <a:solidFill>
+                  <a:srgbClr val="667384"/>
+                </a:solidFill>
+                <a:latin typeface="Arial"/>
+                <a:ea typeface="Arial"/>
+                <a:cs typeface="Arial"/>
+              </a:defRPr>
+            </a:pPr>
+            <a:r>
+              <a:rPr sz="1200" b="1">
+                <a:solidFill>
+                  <a:srgbClr val="667384"/>
+                </a:solidFill>
+                <a:latin typeface="Arial"/>
+                <a:ea typeface="Arial"/>
+                <a:cs typeface="Arial"/>
+              </a:rPr>
+              <a:t>EXCEPTIONS</a:t>
+            </a:r>
+          </a:p>
+        </p:txBody>
+      </p:sp>
+      <p:sp>
+        <p:nvSpPr>
+          <p:cNvPr id="2" name="title-11">
+            <a:extLst xmlns:a="http://schemas.openxmlformats.org/drawingml/2006/main">
+              <a:ext uri="{FF2B5EF4-FFF2-40B4-BE49-F238E27FC236}">
+                <a16:creationId xmlns:a16="http://schemas.microsoft.com/office/drawing/2014/main" id="{3EC40708-7E00-432C-8ECE-907FA5705292}"/>
+              </a:ext>
+            </a:extLst>
+          </p:cNvPr>
+          <p:cNvSpPr>
+            <a:spLocks xmlns:a="http://schemas.openxmlformats.org/drawingml/2006/main" noGrp="1"/>
+          </p:cNvSpPr>
+          <p:nvPr/>
+        </p:nvSpPr>
+        <p:spPr>
+          <a:xfrm xmlns:a="http://schemas.openxmlformats.org/drawingml/2006/main">
+            <a:off x="457200" y="533400"/>
+            <a:ext cx="11277600" cy="628650"/>
+          </a:xfrm>
+          <a:prstGeom xmlns:a="http://schemas.openxmlformats.org/drawingml/2006/main" prst="rect">
+            <a:avLst/>
+          </a:prstGeom>
+          <a:noFill xmlns:a="http://schemas.openxmlformats.org/drawingml/2006/main"/>
+          <a:ln xmlns:a="http://schemas.openxmlformats.org/drawingml/2006/main" w="0">
+            <a:noFill/>
+            <a:prstDash val="solid"/>
+          </a:ln>
+        </p:spPr>
+        <p:txBody>
+          <a:bodyPr xmlns:a="http://schemas.openxmlformats.org/drawingml/2006/main" wrap="square" lIns="0" tIns="0" rIns="0" bIns="0" anchor="t">
+            <a:normAutofit fontScale="100000"/>
+          </a:bodyPr>
+          <a:lstStyle xmlns:a="http://schemas.openxmlformats.org/drawingml/2006/main"/>
+          <a:p xmlns:a="http://schemas.openxmlformats.org/drawingml/2006/main">
+            <a:pPr algn="l">
+              <a:buNone/>
+              <a:defRPr sz="3525" b="1">
+                <a:solidFill>
+                  <a:srgbClr val="000000"/>
+                </a:solidFill>
+                <a:latin typeface="Arial"/>
+                <a:ea typeface="Arial"/>
+                <a:cs typeface="Arial"/>
+              </a:defRPr>
+            </a:pPr>
+            <a:r>
+              <a:rPr sz="3525" b="1">
+                <a:solidFill>
+                  <a:srgbClr val="000000"/>
+                </a:solidFill>
+                <a:latin typeface="Arial"/>
+                <a:ea typeface="Arial"/>
+                <a:cs typeface="Arial"/>
+              </a:rPr>
+              <a:t>The state contrast has clear exceptions</a:t>
+            </a:r>
+          </a:p>
+        </p:txBody>
+      </p:sp>
+      <p:sp>
+        <p:nvSpPr>
+          <p:cNvPr id="3" name="">
+            <a:extLst xmlns:a="http://schemas.openxmlformats.org/drawingml/2006/main">
+              <a:ext uri="{FF2B5EF4-FFF2-40B4-BE49-F238E27FC236}">
+                <a16:creationId xmlns:a16="http://schemas.microsoft.com/office/drawing/2014/main" id="{D5CA0FCE-75E8-41EF-A76A-23E9E2120C6A}"/>
+              </a:ext>
+            </a:extLst>
+          </p:cNvPr>
+          <p:cNvSpPr>
+            <a:spLocks xmlns:a="http://schemas.openxmlformats.org/drawingml/2006/main" noGrp="1"/>
+          </p:cNvSpPr>
+          <p:nvPr/>
+        </p:nvSpPr>
+        <p:spPr>
+          <a:xfrm xmlns:a="http://schemas.openxmlformats.org/drawingml/2006/main">
+            <a:off x="457200" y="1200150"/>
+            <a:ext cx="11277600" cy="19050"/>
+          </a:xfrm>
+          <a:prstGeom xmlns:a="http://schemas.openxmlformats.org/drawingml/2006/main" prst="rect">
+            <a:avLst/>
+          </a:prstGeom>
+          <a:solidFill xmlns:a="http://schemas.openxmlformats.org/drawingml/2006/main">
+            <a:srgbClr val="B8BCC4"/>
+          </a:solidFill>
+          <a:ln xmlns:a="http://schemas.openxmlformats.org/drawingml/2006/main" w="0">
+            <a:solidFill>
+              <a:srgbClr val="B8BCC4"/>
+            </a:solidFill>
+            <a:prstDash val="solid"/>
+          </a:ln>
+        </p:spPr>
+      </p:sp>
+      <p:sp>
+        <p:nvSpPr>
+          <p:cNvPr id="4" name="footer-left-11">
+            <a:extLst xmlns:a="http://schemas.openxmlformats.org/drawingml/2006/main">
+              <a:ext uri="{FF2B5EF4-FFF2-40B4-BE49-F238E27FC236}">
+                <a16:creationId xmlns:a16="http://schemas.microsoft.com/office/drawing/2014/main" id="{700DA765-80E0-4197-8700-00D867B86FA2}"/>
+              </a:ext>
+            </a:extLst>
+          </p:cNvPr>
+          <p:cNvSpPr>
+            <a:spLocks xmlns:a="http://schemas.openxmlformats.org/drawingml/2006/main" noGrp="1"/>
+          </p:cNvSpPr>
+          <p:nvPr/>
+        </p:nvSpPr>
+        <p:spPr>
+          <a:xfrm xmlns:a="http://schemas.openxmlformats.org/drawingml/2006/main">
+            <a:off x="457200" y="6515100"/>
+            <a:ext cx="3429000" cy="171450"/>
+          </a:xfrm>
+          <a:prstGeom xmlns:a="http://schemas.openxmlformats.org/drawingml/2006/main" prst="rect">
+            <a:avLst/>
+          </a:prstGeom>
+          <a:noFill xmlns:a="http://schemas.openxmlformats.org/drawingml/2006/main"/>
+          <a:ln xmlns:a="http://schemas.openxmlformats.org/drawingml/2006/main" w="0">
+            <a:noFill/>
+            <a:prstDash val="solid"/>
+          </a:ln>
+        </p:spPr>
+        <p:txBody>
+          <a:bodyPr xmlns:a="http://schemas.openxmlformats.org/drawingml/2006/main" wrap="square" lIns="0" tIns="0" rIns="0" bIns="0" anchor="t">
+            <a:normAutofit fontScale="100000"/>
+          </a:bodyPr>
+          <a:lstStyle xmlns:a="http://schemas.openxmlformats.org/drawingml/2006/main"/>
+          <a:p xmlns:a="http://schemas.openxmlformats.org/drawingml/2006/main">
+            <a:pPr algn="l">
+              <a:buNone/>
+              <a:defRPr sz="825" b="0">
+                <a:solidFill>
+                  <a:srgbClr val="64748B"/>
+                </a:solidFill>
+                <a:latin typeface="Arial"/>
+                <a:ea typeface="Arial"/>
+                <a:cs typeface="Arial"/>
+              </a:defRPr>
+            </a:pPr>
+            <a:r>
+              <a:rPr sz="825" b="0">
+                <a:solidFill>
+                  <a:srgbClr val="64748B"/>
+                </a:solidFill>
+                <a:latin typeface="Arial"/>
+                <a:ea typeface="Arial"/>
+                <a:cs typeface="Arial"/>
+              </a:rPr>
+              <a:t>Equal-horizon diagonal | context for non-uniformity | no cell selection</a:t>
+            </a:r>
+          </a:p>
+        </p:txBody>
+      </p:sp>
+      <p:sp>
+        <p:nvSpPr>
+          <p:cNvPr id="5" name="footer-number-11">
+            <a:extLst xmlns:a="http://schemas.openxmlformats.org/drawingml/2006/main">
+              <a:ext uri="{FF2B5EF4-FFF2-40B4-BE49-F238E27FC236}">
+                <a16:creationId xmlns:a16="http://schemas.microsoft.com/office/drawing/2014/main" id="{83896276-4112-4532-AF7C-776C67C58B77}"/>
+              </a:ext>
+            </a:extLst>
+          </p:cNvPr>
+          <p:cNvSpPr>
+            <a:spLocks xmlns:a="http://schemas.openxmlformats.org/drawingml/2006/main" noGrp="1"/>
+          </p:cNvSpPr>
+          <p:nvPr/>
+        </p:nvSpPr>
+        <p:spPr>
+          <a:xfrm xmlns:a="http://schemas.openxmlformats.org/drawingml/2006/main">
+            <a:off x="10477500" y="6496050"/>
+            <a:ext cx="1257300" cy="190500"/>
+          </a:xfrm>
+          <a:prstGeom xmlns:a="http://schemas.openxmlformats.org/drawingml/2006/main" prst="rect">
+            <a:avLst/>
+          </a:prstGeom>
+          <a:noFill xmlns:a="http://schemas.openxmlformats.org/drawingml/2006/main"/>
+          <a:ln xmlns:a="http://schemas.openxmlformats.org/drawingml/2006/main" w="0">
+            <a:noFill/>
+            <a:prstDash val="solid"/>
+          </a:ln>
+        </p:spPr>
+        <p:txBody>
+          <a:bodyPr xmlns:a="http://schemas.openxmlformats.org/drawingml/2006/main" wrap="square" lIns="0" tIns="0" rIns="0" bIns="0" anchor="t">
+            <a:normAutofit fontScale="100000"/>
+          </a:bodyPr>
+          <a:lstStyle xmlns:a="http://schemas.openxmlformats.org/drawingml/2006/main"/>
+          <a:p xmlns:a="http://schemas.openxmlformats.org/drawingml/2006/main">
+            <a:pPr algn="r">
+              <a:buNone/>
+              <a:defRPr sz="1050" b="0">
+                <a:solidFill>
+                  <a:srgbClr val="667384"/>
+                </a:solidFill>
+                <a:latin typeface="Arial"/>
+                <a:ea typeface="Arial"/>
+                <a:cs typeface="Arial"/>
+              </a:defRPr>
+            </a:pPr>
+            <a:r>
+              <a:rPr sz="1050" b="0">
+                <a:solidFill>
+                  <a:srgbClr val="667384"/>
+                </a:solidFill>
+                <a:latin typeface="Arial"/>
+                <a:ea typeface="Arial"/>
+                <a:cs typeface="Arial"/>
+              </a:rPr>
+              <a:t>14</a:t>
+            </a:r>
+          </a:p>
+        </p:txBody>
+      </p:sp>
+      <p:pic>
+        <p:nvPicPr>
+          <p:cNvPr id="31" name=""/>
+          <p:cNvPicPr>
+            <a:picLocks xmlns:a="http://schemas.openxmlformats.org/drawingml/2006/main" noChangeAspect="1"/>
+          </p:cNvPicPr>
+          <p:nvPr/>
+        </p:nvPicPr>
+        <p:blipFill>
+          <a:blip xmlns:r="http://schemas.openxmlformats.org/officeDocument/2006/relationships" xmlns:a="http://schemas.openxmlformats.org/drawingml/2006/main" r:embed="Rcbdfc70cd8724c43"/>
+          <a:stretch xmlns:a="http://schemas.openxmlformats.org/drawingml/2006/main"/>
+        </p:blipFill>
+        <p:spPr>
+          <a:xfrm xmlns:a="http://schemas.openxmlformats.org/drawingml/2006/main">
+            <a:off x="2885498" y="2042993"/>
+            <a:ext cx="6421005" cy="3629264"/>
+          </a:xfrm>
+          <a:prstGeom xmlns:a="http://schemas.openxmlformats.org/drawingml/2006/main" prst="rect">
+            <a:avLst/>
+          </a:prstGeom>
+        </p:spPr>
+      </p:pic>
+    </p:spTree>
+    <p:extLst>
+      <p:ext uri="{BB962C8B-B14F-4D97-AF65-F5344CB8AC3E}">
+        <p14:creationId xmlns:p14="http://schemas.microsoft.com/office/powerpoint/2010/main" val="666536286"/>
+      </p:ext>
+    </p:extLst>
+  </p:cSld>
+</p:sld>
+</file>
+
+<file path=ppt/slides/slide15.xml><?xml version="1.0" encoding="utf-8"?>
+<p:sld xmlns:p="http://schemas.openxmlformats.org/presentationml/2006/main">
+  <p:cSld>
+    <p:bg>
+      <p:bgPr>
+        <a:solidFill xmlns:a="http://schemas.openxmlformats.org/drawingml/2006/main">
+          <a:srgbClr val="FFFFFF"/>
+        </a:solidFill>
+      </p:bgPr>
+    </p:bg>
+    <p:spTree>
+      <p:nvGrpSpPr>
+        <p:cNvPr id="1" name=""/>
+        <p:cNvGrpSpPr/>
+        <p:nvPr/>
+      </p:nvGrpSpPr>
+      <p:grpSpPr>
+        <a:xfrm xmlns:a="http://schemas.openxmlformats.org/drawingml/2006/main"/>
+      </p:grpSpPr>
+      <p:sp>
+        <p:nvSpPr>
+          <p:cNvPr id="24" name="section-11">
+            <a:extLst xmlns:a="http://schemas.openxmlformats.org/drawingml/2006/main">
+              <a:ext uri="{FF2B5EF4-FFF2-40B4-BE49-F238E27FC236}">
+                <a16:creationId xmlns:a16="http://schemas.microsoft.com/office/drawing/2014/main" id="{272ED433-B59C-436C-9DFB-4D317B90A13F}"/>
+              </a:ext>
+            </a:extLst>
+          </p:cNvPr>
+          <p:cNvSpPr>
+            <a:spLocks xmlns:a="http://schemas.openxmlformats.org/drawingml/2006/main" noGrp="1"/>
+          </p:cNvSpPr>
+          <p:nvPr/>
+        </p:nvSpPr>
+        <p:spPr>
+          <a:xfrm xmlns:a="http://schemas.openxmlformats.org/drawingml/2006/main">
+            <a:off x="457200" y="228600"/>
+            <a:ext cx="4191000" cy="228600"/>
+          </a:xfrm>
+          <a:prstGeom xmlns:a="http://schemas.openxmlformats.org/drawingml/2006/main" prst="rect">
+            <a:avLst/>
+          </a:prstGeom>
+          <a:noFill xmlns:a="http://schemas.openxmlformats.org/drawingml/2006/main"/>
+          <a:ln xmlns:a="http://schemas.openxmlformats.org/drawingml/2006/main" w="0">
+            <a:noFill/>
+            <a:prstDash val="solid"/>
+          </a:ln>
+        </p:spPr>
+        <p:txBody>
+          <a:bodyPr xmlns:a="http://schemas.openxmlformats.org/drawingml/2006/main" wrap="square" lIns="0" tIns="0" rIns="0" bIns="0" anchor="t">
+            <a:normAutofit fontScale="100000"/>
+          </a:bodyPr>
+          <a:lstStyle xmlns:a="http://schemas.openxmlformats.org/drawingml/2006/main"/>
+          <a:p xmlns:a="http://schemas.openxmlformats.org/drawingml/2006/main">
+            <a:pPr algn="l">
+              <a:buNone/>
+              <a:defRPr sz="1200" b="1">
+                <a:solidFill>
+                  <a:srgbClr val="667384"/>
+                </a:solidFill>
+                <a:latin typeface="Arial"/>
+                <a:ea typeface="Arial"/>
+                <a:cs typeface="Arial"/>
+              </a:defRPr>
+            </a:pPr>
+            <a:r>
+              <a:rPr sz="1200" b="1">
+                <a:solidFill>
+                  <a:srgbClr val="667384"/>
+                </a:solidFill>
+                <a:latin typeface="Arial"/>
+                <a:ea typeface="Arial"/>
+                <a:cs typeface="Arial"/>
+              </a:rPr>
+              <a:t>CONTRAST READOUT</a:t>
+            </a:r>
+          </a:p>
+        </p:txBody>
+      </p:sp>
+      <p:sp>
+        <p:nvSpPr>
+          <p:cNvPr id="2" name="title-11">
+            <a:extLst xmlns:a="http://schemas.openxmlformats.org/drawingml/2006/main">
+              <a:ext uri="{FF2B5EF4-FFF2-40B4-BE49-F238E27FC236}">
+                <a16:creationId xmlns:a16="http://schemas.microsoft.com/office/drawing/2014/main" id="{3EC40708-7E00-432C-8ECE-907FA5705292}"/>
+              </a:ext>
+            </a:extLst>
+          </p:cNvPr>
+          <p:cNvSpPr>
+            <a:spLocks xmlns:a="http://schemas.openxmlformats.org/drawingml/2006/main" noGrp="1"/>
+          </p:cNvSpPr>
+          <p:nvPr/>
+        </p:nvSpPr>
+        <p:spPr>
+          <a:xfrm xmlns:a="http://schemas.openxmlformats.org/drawingml/2006/main">
+            <a:off x="457200" y="533400"/>
+            <a:ext cx="11277600" cy="628650"/>
+          </a:xfrm>
+          <a:prstGeom xmlns:a="http://schemas.openxmlformats.org/drawingml/2006/main" prst="rect">
+            <a:avLst/>
+          </a:prstGeom>
+          <a:noFill xmlns:a="http://schemas.openxmlformats.org/drawingml/2006/main"/>
+          <a:ln xmlns:a="http://schemas.openxmlformats.org/drawingml/2006/main" w="0">
+            <a:noFill/>
+            <a:prstDash val="solid"/>
+          </a:ln>
+        </p:spPr>
+        <p:txBody>
+          <a:bodyPr xmlns:a="http://schemas.openxmlformats.org/drawingml/2006/main" wrap="square" lIns="0" tIns="0" rIns="0" bIns="0" anchor="t">
+            <a:normAutofit fontScale="100000"/>
+          </a:bodyPr>
+          <a:lstStyle xmlns:a="http://schemas.openxmlformats.org/drawingml/2006/main"/>
+          <a:p xmlns:a="http://schemas.openxmlformats.org/drawingml/2006/main">
+            <a:pPr algn="l">
+              <a:buNone/>
+              <a:defRPr sz="3525" b="1">
+                <a:solidFill>
+                  <a:srgbClr val="000000"/>
+                </a:solidFill>
+                <a:latin typeface="Arial"/>
+                <a:ea typeface="Arial"/>
+                <a:cs typeface="Arial"/>
+              </a:defRPr>
+            </a:pPr>
+            <a:r>
+              <a:rPr sz="3525" b="1">
+                <a:solidFill>
+                  <a:srgbClr val="000000"/>
+                </a:solidFill>
+                <a:latin typeface="Arial"/>
+                <a:ea typeface="Arial"/>
+                <a:cs typeface="Arial"/>
+              </a:rPr>
+              <a:t>The state discriminator is broad but still descriptive</a:t>
+            </a:r>
+          </a:p>
+        </p:txBody>
+      </p:sp>
+      <p:sp>
+        <p:nvSpPr>
+          <p:cNvPr id="3" name="">
+            <a:extLst xmlns:a="http://schemas.openxmlformats.org/drawingml/2006/main">
+              <a:ext uri="{FF2B5EF4-FFF2-40B4-BE49-F238E27FC236}">
+                <a16:creationId xmlns:a16="http://schemas.microsoft.com/office/drawing/2014/main" id="{D5CA0FCE-75E8-41EF-A76A-23E9E2120C6A}"/>
+              </a:ext>
+            </a:extLst>
+          </p:cNvPr>
+          <p:cNvSpPr>
+            <a:spLocks xmlns:a="http://schemas.openxmlformats.org/drawingml/2006/main" noGrp="1"/>
+          </p:cNvSpPr>
+          <p:nvPr/>
+        </p:nvSpPr>
+        <p:spPr>
+          <a:xfrm xmlns:a="http://schemas.openxmlformats.org/drawingml/2006/main">
+            <a:off x="457200" y="1200150"/>
+            <a:ext cx="11277600" cy="19050"/>
+          </a:xfrm>
+          <a:prstGeom xmlns:a="http://schemas.openxmlformats.org/drawingml/2006/main" prst="rect">
+            <a:avLst/>
+          </a:prstGeom>
+          <a:solidFill xmlns:a="http://schemas.openxmlformats.org/drawingml/2006/main">
+            <a:srgbClr val="B8BCC4"/>
+          </a:solidFill>
+          <a:ln xmlns:a="http://schemas.openxmlformats.org/drawingml/2006/main" w="0">
+            <a:solidFill>
+              <a:srgbClr val="B8BCC4"/>
+            </a:solidFill>
+            <a:prstDash val="solid"/>
+          </a:ln>
+        </p:spPr>
+      </p:sp>
+      <p:sp>
+        <p:nvSpPr>
+          <p:cNvPr id="4" name="footer-left-11">
+            <a:extLst xmlns:a="http://schemas.openxmlformats.org/drawingml/2006/main">
+              <a:ext uri="{FF2B5EF4-FFF2-40B4-BE49-F238E27FC236}">
+                <a16:creationId xmlns:a16="http://schemas.microsoft.com/office/drawing/2014/main" id="{700DA765-80E0-4197-8700-00D867B86FA2}"/>
+              </a:ext>
+            </a:extLst>
+          </p:cNvPr>
+          <p:cNvSpPr>
+            <a:spLocks xmlns:a="http://schemas.openxmlformats.org/drawingml/2006/main" noGrp="1"/>
+          </p:cNvSpPr>
+          <p:nvPr/>
+        </p:nvSpPr>
+        <p:spPr>
+          <a:xfrm xmlns:a="http://schemas.openxmlformats.org/drawingml/2006/main">
+            <a:off x="457200" y="6515100"/>
+            <a:ext cx="3429000" cy="171450"/>
+          </a:xfrm>
+          <a:prstGeom xmlns:a="http://schemas.openxmlformats.org/drawingml/2006/main" prst="rect">
+            <a:avLst/>
+          </a:prstGeom>
+          <a:noFill xmlns:a="http://schemas.openxmlformats.org/drawingml/2006/main"/>
+          <a:ln xmlns:a="http://schemas.openxmlformats.org/drawingml/2006/main" w="0">
+            <a:noFill/>
+            <a:prstDash val="solid"/>
+          </a:ln>
+        </p:spPr>
+        <p:txBody>
+          <a:bodyPr xmlns:a="http://schemas.openxmlformats.org/drawingml/2006/main" wrap="square" lIns="0" tIns="0" rIns="0" bIns="0" anchor="t">
+            <a:normAutofit fontScale="100000"/>
+          </a:bodyPr>
+          <a:lstStyle xmlns:a="http://schemas.openxmlformats.org/drawingml/2006/main"/>
+          <a:p xmlns:a="http://schemas.openxmlformats.org/drawingml/2006/main">
+            <a:pPr algn="l">
+              <a:buNone/>
+              <a:defRPr sz="825" b="0">
+                <a:solidFill>
+                  <a:srgbClr val="64748B"/>
+                </a:solidFill>
+                <a:latin typeface="Arial"/>
+                <a:ea typeface="Arial"/>
+                <a:cs typeface="Arial"/>
+              </a:defRPr>
+            </a:pPr>
+            <a:r>
+              <a:rPr sz="825" b="0">
+                <a:solidFill>
+                  <a:srgbClr val="64748B"/>
+                </a:solidFill>
+                <a:latin typeface="Arial"/>
+                <a:ea typeface="Arial"/>
+                <a:cs typeface="Arial"/>
+              </a:rPr>
+              <a:t>Return geometry | ER20 state contrast | 2018–2023</a:t>
+            </a:r>
+          </a:p>
+        </p:txBody>
+      </p:sp>
+      <p:sp>
+        <p:nvSpPr>
+          <p:cNvPr id="5" name="footer-number-11">
+            <a:extLst xmlns:a="http://schemas.openxmlformats.org/drawingml/2006/main">
+              <a:ext uri="{FF2B5EF4-FFF2-40B4-BE49-F238E27FC236}">
+                <a16:creationId xmlns:a16="http://schemas.microsoft.com/office/drawing/2014/main" id="{83896276-4112-4532-AF7C-776C67C58B77}"/>
+              </a:ext>
+            </a:extLst>
+          </p:cNvPr>
+          <p:cNvSpPr>
+            <a:spLocks xmlns:a="http://schemas.openxmlformats.org/drawingml/2006/main" noGrp="1"/>
+          </p:cNvSpPr>
+          <p:nvPr/>
+        </p:nvSpPr>
+        <p:spPr>
+          <a:xfrm xmlns:a="http://schemas.openxmlformats.org/drawingml/2006/main">
+            <a:off x="10477500" y="6496050"/>
+            <a:ext cx="1257300" cy="190500"/>
+          </a:xfrm>
+          <a:prstGeom xmlns:a="http://schemas.openxmlformats.org/drawingml/2006/main" prst="rect">
+            <a:avLst/>
+          </a:prstGeom>
+          <a:noFill xmlns:a="http://schemas.openxmlformats.org/drawingml/2006/main"/>
+          <a:ln xmlns:a="http://schemas.openxmlformats.org/drawingml/2006/main" w="0">
+            <a:noFill/>
+            <a:prstDash val="solid"/>
+          </a:ln>
+        </p:spPr>
+        <p:txBody>
+          <a:bodyPr xmlns:a="http://schemas.openxmlformats.org/drawingml/2006/main" wrap="square" lIns="0" tIns="0" rIns="0" bIns="0" anchor="t">
+            <a:normAutofit fontScale="100000"/>
+          </a:bodyPr>
+          <a:lstStyle xmlns:a="http://schemas.openxmlformats.org/drawingml/2006/main"/>
+          <a:p xmlns:a="http://schemas.openxmlformats.org/drawingml/2006/main">
+            <a:pPr algn="r">
+              <a:buNone/>
+              <a:defRPr sz="1050" b="0">
+                <a:solidFill>
+                  <a:srgbClr val="667384"/>
+                </a:solidFill>
+                <a:latin typeface="Arial"/>
+                <a:ea typeface="Arial"/>
+                <a:cs typeface="Arial"/>
+              </a:defRPr>
+            </a:pPr>
+            <a:r>
+              <a:rPr sz="1050" b="0">
+                <a:solidFill>
+                  <a:srgbClr val="667384"/>
+                </a:solidFill>
+                <a:latin typeface="Arial"/>
+                <a:ea typeface="Arial"/>
+                <a:cs typeface="Arial"/>
+              </a:rPr>
+              <a:t>15</a:t>
+            </a:r>
+          </a:p>
+        </p:txBody>
+      </p:sp>
+      <p:sp>
+        <p:nvSpPr>
+          <p:cNvPr id="6" name="">
+            <a:extLst xmlns:a="http://schemas.openxmlformats.org/drawingml/2006/main">
+              <a:ext uri="{FF2B5EF4-FFF2-40B4-BE49-F238E27FC236}">
+                <a16:creationId xmlns:a16="http://schemas.microsoft.com/office/drawing/2014/main" id="{10F4BA85-46C5-47BD-BA74-EC806E663D58}"/>
+              </a:ext>
+            </a:extLst>
+          </p:cNvPr>
+          <p:cNvSpPr>
+            <a:spLocks xmlns:a="http://schemas.openxmlformats.org/drawingml/2006/main" noGrp="1"/>
+          </p:cNvSpPr>
+          <p:nvPr/>
+        </p:nvSpPr>
+        <p:spPr>
+          <a:xfrm xmlns:a="http://schemas.openxmlformats.org/drawingml/2006/main">
+            <a:off x="552450" y="1600200"/>
+            <a:ext cx="95250" cy="895350"/>
+          </a:xfrm>
+          <a:prstGeom xmlns:a="http://schemas.openxmlformats.org/drawingml/2006/main" prst="rect">
+            <a:avLst/>
+          </a:prstGeom>
+          <a:solidFill xmlns:a="http://schemas.openxmlformats.org/drawingml/2006/main">
+            <a:srgbClr val="E45756"/>
+          </a:solidFill>
+          <a:ln xmlns:a="http://schemas.openxmlformats.org/drawingml/2006/main" w="0">
+            <a:solidFill>
+              <a:srgbClr val="E45756"/>
+            </a:solidFill>
+            <a:prstDash val="solid"/>
+          </a:ln>
+        </p:spPr>
+      </p:sp>
+      <p:sp>
+        <p:nvSpPr>
+          <p:cNvPr id="7" name="">
+            <a:extLst xmlns:a="http://schemas.openxmlformats.org/drawingml/2006/main">
+              <a:ext uri="{FF2B5EF4-FFF2-40B4-BE49-F238E27FC236}">
+                <a16:creationId xmlns:a16="http://schemas.microsoft.com/office/drawing/2014/main" id="{7EF5B945-9D04-48FA-BA66-96DE813A9715}"/>
+              </a:ext>
+            </a:extLst>
+          </p:cNvPr>
+          <p:cNvSpPr>
+            <a:spLocks xmlns:a="http://schemas.openxmlformats.org/drawingml/2006/main" noGrp="1"/>
+          </p:cNvSpPr>
+          <p:nvPr/>
+        </p:nvSpPr>
+        <p:spPr>
+          <a:xfrm xmlns:a="http://schemas.openxmlformats.org/drawingml/2006/main">
+            <a:off x="876300" y="1581150"/>
+            <a:ext cx="2095500" cy="285750"/>
+          </a:xfrm>
+          <a:prstGeom xmlns:a="http://schemas.openxmlformats.org/drawingml/2006/main" prst="rect">
+            <a:avLst/>
+          </a:prstGeom>
+          <a:noFill xmlns:a="http://schemas.openxmlformats.org/drawingml/2006/main"/>
+          <a:ln xmlns:a="http://schemas.openxmlformats.org/drawingml/2006/main" w="0">
+            <a:noFill/>
+            <a:prstDash val="solid"/>
+          </a:ln>
+        </p:spPr>
+        <p:txBody>
+          <a:bodyPr xmlns:a="http://schemas.openxmlformats.org/drawingml/2006/main" wrap="square" lIns="0" tIns="0" rIns="0" bIns="0" anchor="t">
+            <a:normAutofit fontScale="100000"/>
+          </a:bodyPr>
+          <a:lstStyle xmlns:a="http://schemas.openxmlformats.org/drawingml/2006/main"/>
+          <a:p xmlns:a="http://schemas.openxmlformats.org/drawingml/2006/main">
+            <a:pPr algn="l">
+              <a:buNone/>
+              <a:defRPr sz="1350" b="1">
+                <a:solidFill>
+                  <a:srgbClr val="E45756"/>
+                </a:solidFill>
+                <a:latin typeface="Arial"/>
+                <a:ea typeface="Arial"/>
+                <a:cs typeface="Arial"/>
+              </a:defRPr>
+            </a:pPr>
+            <a:r>
+              <a:rPr sz="1350" b="1">
+                <a:solidFill>
+                  <a:srgbClr val="E45756"/>
+                </a:solidFill>
+                <a:latin typeface="Arial"/>
+                <a:ea typeface="Arial"/>
+                <a:cs typeface="Arial"/>
+              </a:rPr>
+              <a:t>SURFACE</a:t>
+            </a:r>
+          </a:p>
+        </p:txBody>
+      </p:sp>
+      <p:sp>
+        <p:nvSpPr>
+          <p:cNvPr id="8" name="">
+            <a:extLst xmlns:a="http://schemas.openxmlformats.org/drawingml/2006/main">
+              <a:ext uri="{FF2B5EF4-FFF2-40B4-BE49-F238E27FC236}">
+                <a16:creationId xmlns:a16="http://schemas.microsoft.com/office/drawing/2014/main" id="{655CF75D-5F23-4C7F-BE9C-764036D0B9E8}"/>
+              </a:ext>
+            </a:extLst>
+          </p:cNvPr>
+          <p:cNvSpPr>
+            <a:spLocks xmlns:a="http://schemas.openxmlformats.org/drawingml/2006/main" noGrp="1"/>
+          </p:cNvSpPr>
+          <p:nvPr/>
+        </p:nvSpPr>
+        <p:spPr>
+          <a:xfrm xmlns:a="http://schemas.openxmlformats.org/drawingml/2006/main">
+            <a:off x="3105150" y="1562100"/>
+            <a:ext cx="4762500" cy="419100"/>
+          </a:xfrm>
+          <a:prstGeom xmlns:a="http://schemas.openxmlformats.org/drawingml/2006/main" prst="rect">
+            <a:avLst/>
+          </a:prstGeom>
+          <a:noFill xmlns:a="http://schemas.openxmlformats.org/drawingml/2006/main"/>
+          <a:ln xmlns:a="http://schemas.openxmlformats.org/drawingml/2006/main" w="0">
+            <a:noFill/>
+            <a:prstDash val="solid"/>
+          </a:ln>
+        </p:spPr>
+        <p:txBody>
+          <a:bodyPr xmlns:a="http://schemas.openxmlformats.org/drawingml/2006/main" wrap="square" lIns="0" tIns="0" rIns="0" bIns="0" anchor="t">
+            <a:normAutofit fontScale="100000"/>
+          </a:bodyPr>
+          <a:lstStyle xmlns:a="http://schemas.openxmlformats.org/drawingml/2006/main"/>
+          <a:p xmlns:a="http://schemas.openxmlformats.org/drawingml/2006/main">
+            <a:pPr algn="l">
+              <a:buNone/>
+              <a:defRPr sz="1950" b="1">
+                <a:solidFill>
+                  <a:srgbClr val="273548"/>
+                </a:solidFill>
+                <a:latin typeface="Arial"/>
+                <a:ea typeface="Arial"/>
+                <a:cs typeface="Arial"/>
+              </a:defRPr>
+            </a:pPr>
+            <a:r>
+              <a:rPr sz="1950" b="1">
+                <a:solidFill>
+                  <a:srgbClr val="273548"/>
+                </a:solidFill>
+                <a:latin typeface="Arial"/>
+                <a:ea typeface="Arial"/>
+                <a:cs typeface="Arial"/>
+              </a:rPr>
+              <a:t>Paired median contrast</a:t>
+            </a:r>
+          </a:p>
+        </p:txBody>
+      </p:sp>
+      <p:sp>
+        <p:nvSpPr>
+          <p:cNvPr id="9" name="">
+            <a:extLst xmlns:a="http://schemas.openxmlformats.org/drawingml/2006/main">
+              <a:ext uri="{FF2B5EF4-FFF2-40B4-BE49-F238E27FC236}">
+                <a16:creationId xmlns:a16="http://schemas.microsoft.com/office/drawing/2014/main" id="{3E0B76F2-4514-4DD8-934B-ABE42A34E950}"/>
+              </a:ext>
+            </a:extLst>
+          </p:cNvPr>
+          <p:cNvSpPr>
+            <a:spLocks xmlns:a="http://schemas.openxmlformats.org/drawingml/2006/main" noGrp="1"/>
+          </p:cNvSpPr>
+          <p:nvPr/>
+        </p:nvSpPr>
+        <p:spPr>
+          <a:xfrm xmlns:a="http://schemas.openxmlformats.org/drawingml/2006/main">
+            <a:off x="8096250" y="1581150"/>
+            <a:ext cx="3333750" cy="704850"/>
+          </a:xfrm>
+          <a:prstGeom xmlns:a="http://schemas.openxmlformats.org/drawingml/2006/main" prst="rect">
+            <a:avLst/>
+          </a:prstGeom>
+          <a:noFill xmlns:a="http://schemas.openxmlformats.org/drawingml/2006/main"/>
+          <a:ln xmlns:a="http://schemas.openxmlformats.org/drawingml/2006/main" w="0">
+            <a:noFill/>
+            <a:prstDash val="solid"/>
+          </a:ln>
+        </p:spPr>
+        <p:txBody>
+          <a:bodyPr xmlns:a="http://schemas.openxmlformats.org/drawingml/2006/main" wrap="square" lIns="0" tIns="0" rIns="0" bIns="0" anchor="t">
+            <a:normAutofit fontScale="100000"/>
+          </a:bodyPr>
+          <a:lstStyle xmlns:a="http://schemas.openxmlformats.org/drawingml/2006/main"/>
+          <a:p xmlns:a="http://schemas.openxmlformats.org/drawingml/2006/main">
+            <a:pPr algn="l">
+              <a:buNone/>
+              <a:defRPr sz="1425" b="0">
+                <a:solidFill>
+                  <a:srgbClr val="667384"/>
+                </a:solidFill>
+                <a:latin typeface="Arial"/>
+                <a:ea typeface="Arial"/>
+                <a:cs typeface="Arial"/>
+              </a:defRPr>
+            </a:pPr>
+            <a:r>
+              <a:rPr sz="1425" b="0">
+                <a:solidFill>
+                  <a:srgbClr val="667384"/>
+                </a:solidFill>
+                <a:latin typeface="Arial"/>
+                <a:ea typeface="Arial"/>
+                <a:cs typeface="Arial"/>
+              </a:rPr>
+              <a:t>+0.048; 92.9% of cells positive</a:t>
+            </a:r>
+          </a:p>
+        </p:txBody>
+      </p:sp>
+      <p:sp>
+        <p:nvSpPr>
+          <p:cNvPr id="10" name="">
+            <a:extLst xmlns:a="http://schemas.openxmlformats.org/drawingml/2006/main">
+              <a:ext uri="{FF2B5EF4-FFF2-40B4-BE49-F238E27FC236}">
+                <a16:creationId xmlns:a16="http://schemas.microsoft.com/office/drawing/2014/main" id="{294777C3-6D2F-4277-840E-7E984FB4554D}"/>
+              </a:ext>
+            </a:extLst>
+          </p:cNvPr>
+          <p:cNvSpPr>
+            <a:spLocks xmlns:a="http://schemas.openxmlformats.org/drawingml/2006/main" noGrp="1"/>
+          </p:cNvSpPr>
+          <p:nvPr/>
+        </p:nvSpPr>
+        <p:spPr>
+          <a:xfrm xmlns:a="http://schemas.openxmlformats.org/drawingml/2006/main">
+            <a:off x="876300" y="2590800"/>
+            <a:ext cx="10553700" cy="9525"/>
+          </a:xfrm>
+          <a:prstGeom xmlns:a="http://schemas.openxmlformats.org/drawingml/2006/main" prst="rect">
+            <a:avLst/>
+          </a:prstGeom>
+          <a:solidFill xmlns:a="http://schemas.openxmlformats.org/drawingml/2006/main">
+            <a:srgbClr val="B8BCC4"/>
+          </a:solidFill>
+          <a:ln xmlns:a="http://schemas.openxmlformats.org/drawingml/2006/main" w="0">
+            <a:solidFill>
+              <a:srgbClr val="B8BCC4"/>
+            </a:solidFill>
+            <a:prstDash val="solid"/>
+          </a:ln>
+        </p:spPr>
+      </p:sp>
+      <p:sp>
+        <p:nvSpPr>
+          <p:cNvPr id="11" name="">
+            <a:extLst xmlns:a="http://schemas.openxmlformats.org/drawingml/2006/main">
+              <a:ext uri="{FF2B5EF4-FFF2-40B4-BE49-F238E27FC236}">
+                <a16:creationId xmlns:a16="http://schemas.microsoft.com/office/drawing/2014/main" id="{F894CF3F-AD63-423C-8F01-64C507896579}"/>
+              </a:ext>
+            </a:extLst>
+          </p:cNvPr>
+          <p:cNvSpPr>
+            <a:spLocks xmlns:a="http://schemas.openxmlformats.org/drawingml/2006/main" noGrp="1"/>
+          </p:cNvSpPr>
+          <p:nvPr/>
+        </p:nvSpPr>
+        <p:spPr>
+          <a:xfrm xmlns:a="http://schemas.openxmlformats.org/drawingml/2006/main">
+            <a:off x="552450" y="2800350"/>
+            <a:ext cx="95250" cy="895350"/>
+          </a:xfrm>
+          <a:prstGeom xmlns:a="http://schemas.openxmlformats.org/drawingml/2006/main" prst="rect">
+            <a:avLst/>
+          </a:prstGeom>
+          <a:solidFill xmlns:a="http://schemas.openxmlformats.org/drawingml/2006/main">
+            <a:srgbClr val="2A9D6F"/>
+          </a:solidFill>
+          <a:ln xmlns:a="http://schemas.openxmlformats.org/drawingml/2006/main" w="0">
+            <a:solidFill>
+              <a:srgbClr val="2A9D6F"/>
+            </a:solidFill>
+            <a:prstDash val="solid"/>
+          </a:ln>
+        </p:spPr>
+      </p:sp>
+      <p:sp>
+        <p:nvSpPr>
+          <p:cNvPr id="12" name="">
+            <a:extLst xmlns:a="http://schemas.openxmlformats.org/drawingml/2006/main">
+              <a:ext uri="{FF2B5EF4-FFF2-40B4-BE49-F238E27FC236}">
+                <a16:creationId xmlns:a16="http://schemas.microsoft.com/office/drawing/2014/main" id="{D3953D03-6A7A-4FEE-B242-02BF0319C169}"/>
+              </a:ext>
+            </a:extLst>
+          </p:cNvPr>
+          <p:cNvSpPr>
+            <a:spLocks xmlns:a="http://schemas.openxmlformats.org/drawingml/2006/main" noGrp="1"/>
+          </p:cNvSpPr>
+          <p:nvPr/>
+        </p:nvSpPr>
+        <p:spPr>
+          <a:xfrm xmlns:a="http://schemas.openxmlformats.org/drawingml/2006/main">
+            <a:off x="876300" y="2781300"/>
+            <a:ext cx="2095500" cy="285750"/>
+          </a:xfrm>
+          <a:prstGeom xmlns:a="http://schemas.openxmlformats.org/drawingml/2006/main" prst="rect">
+            <a:avLst/>
+          </a:prstGeom>
+          <a:noFill xmlns:a="http://schemas.openxmlformats.org/drawingml/2006/main"/>
+          <a:ln xmlns:a="http://schemas.openxmlformats.org/drawingml/2006/main" w="0">
+            <a:noFill/>
+            <a:prstDash val="solid"/>
+          </a:ln>
+        </p:spPr>
+        <p:txBody>
+          <a:bodyPr xmlns:a="http://schemas.openxmlformats.org/drawingml/2006/main" wrap="square" lIns="0" tIns="0" rIns="0" bIns="0" anchor="t">
+            <a:normAutofit fontScale="100000"/>
+          </a:bodyPr>
+          <a:lstStyle xmlns:a="http://schemas.openxmlformats.org/drawingml/2006/main"/>
+          <a:p xmlns:a="http://schemas.openxmlformats.org/drawingml/2006/main">
+            <a:pPr algn="l">
+              <a:buNone/>
+              <a:defRPr sz="1350" b="1">
+                <a:solidFill>
+                  <a:srgbClr val="2A9D6F"/>
+                </a:solidFill>
+                <a:latin typeface="Arial"/>
+                <a:ea typeface="Arial"/>
+                <a:cs typeface="Arial"/>
+              </a:defRPr>
+            </a:pPr>
+            <a:r>
+              <a:rPr sz="1350" b="1">
+                <a:solidFill>
+                  <a:srgbClr val="2A9D6F"/>
+                </a:solidFill>
+                <a:latin typeface="Arial"/>
+                <a:ea typeface="Arial"/>
+                <a:cs typeface="Arial"/>
+              </a:rPr>
+              <a:t>BREADTH</a:t>
+            </a:r>
+          </a:p>
+        </p:txBody>
+      </p:sp>
+      <p:sp>
+        <p:nvSpPr>
+          <p:cNvPr id="13" name="">
+            <a:extLst xmlns:a="http://schemas.openxmlformats.org/drawingml/2006/main">
+              <a:ext uri="{FF2B5EF4-FFF2-40B4-BE49-F238E27FC236}">
+                <a16:creationId xmlns:a16="http://schemas.microsoft.com/office/drawing/2014/main" id="{52D1DBE8-EAF6-4492-89E7-5C97A3A6A395}"/>
+              </a:ext>
+            </a:extLst>
+          </p:cNvPr>
+          <p:cNvSpPr>
+            <a:spLocks xmlns:a="http://schemas.openxmlformats.org/drawingml/2006/main" noGrp="1"/>
+          </p:cNvSpPr>
+          <p:nvPr/>
+        </p:nvSpPr>
+        <p:spPr>
+          <a:xfrm xmlns:a="http://schemas.openxmlformats.org/drawingml/2006/main">
+            <a:off x="3105150" y="2762250"/>
+            <a:ext cx="4762500" cy="419100"/>
+          </a:xfrm>
+          <a:prstGeom xmlns:a="http://schemas.openxmlformats.org/drawingml/2006/main" prst="rect">
+            <a:avLst/>
+          </a:prstGeom>
+          <a:noFill xmlns:a="http://schemas.openxmlformats.org/drawingml/2006/main"/>
+          <a:ln xmlns:a="http://schemas.openxmlformats.org/drawingml/2006/main" w="0">
+            <a:noFill/>
+            <a:prstDash val="solid"/>
+          </a:ln>
+        </p:spPr>
+        <p:txBody>
+          <a:bodyPr xmlns:a="http://schemas.openxmlformats.org/drawingml/2006/main" wrap="square" lIns="0" tIns="0" rIns="0" bIns="0" anchor="t">
+            <a:normAutofit fontScale="100000"/>
+          </a:bodyPr>
+          <a:lstStyle xmlns:a="http://schemas.openxmlformats.org/drawingml/2006/main"/>
+          <a:p xmlns:a="http://schemas.openxmlformats.org/drawingml/2006/main">
+            <a:pPr algn="l">
+              <a:buNone/>
+              <a:defRPr sz="1950" b="1">
+                <a:solidFill>
+                  <a:srgbClr val="273548"/>
+                </a:solidFill>
+                <a:latin typeface="Arial"/>
+                <a:ea typeface="Arial"/>
+                <a:cs typeface="Arial"/>
+              </a:defRPr>
+            </a:pPr>
+            <a:r>
+              <a:rPr sz="1950" b="1">
+                <a:solidFill>
+                  <a:srgbClr val="273548"/>
+                </a:solidFill>
+                <a:latin typeface="Arial"/>
+                <a:ea typeface="Arial"/>
+                <a:cs typeface="Arial"/>
+              </a:rPr>
+              <a:t>All sector medians favor sideways</a:t>
+            </a:r>
+          </a:p>
+        </p:txBody>
+      </p:sp>
+      <p:sp>
+        <p:nvSpPr>
+          <p:cNvPr id="14" name="">
+            <a:extLst xmlns:a="http://schemas.openxmlformats.org/drawingml/2006/main">
+              <a:ext uri="{FF2B5EF4-FFF2-40B4-BE49-F238E27FC236}">
+                <a16:creationId xmlns:a16="http://schemas.microsoft.com/office/drawing/2014/main" id="{2CAF0156-C9E6-4210-8A8A-BFEDD044631B}"/>
+              </a:ext>
+            </a:extLst>
+          </p:cNvPr>
+          <p:cNvSpPr>
+            <a:spLocks xmlns:a="http://schemas.openxmlformats.org/drawingml/2006/main" noGrp="1"/>
+          </p:cNvSpPr>
+          <p:nvPr/>
+        </p:nvSpPr>
+        <p:spPr>
+          <a:xfrm xmlns:a="http://schemas.openxmlformats.org/drawingml/2006/main">
+            <a:off x="8096250" y="2781300"/>
+            <a:ext cx="3333750" cy="704850"/>
+          </a:xfrm>
+          <a:prstGeom xmlns:a="http://schemas.openxmlformats.org/drawingml/2006/main" prst="rect">
+            <a:avLst/>
+          </a:prstGeom>
+          <a:noFill xmlns:a="http://schemas.openxmlformats.org/drawingml/2006/main"/>
+          <a:ln xmlns:a="http://schemas.openxmlformats.org/drawingml/2006/main" w="0">
+            <a:noFill/>
+            <a:prstDash val="solid"/>
+          </a:ln>
+        </p:spPr>
+        <p:txBody>
+          <a:bodyPr xmlns:a="http://schemas.openxmlformats.org/drawingml/2006/main" wrap="square" lIns="0" tIns="0" rIns="0" bIns="0" anchor="t">
+            <a:normAutofit fontScale="100000"/>
+          </a:bodyPr>
+          <a:lstStyle xmlns:a="http://schemas.openxmlformats.org/drawingml/2006/main"/>
+          <a:p xmlns:a="http://schemas.openxmlformats.org/drawingml/2006/main">
+            <a:pPr algn="l">
+              <a:buNone/>
+              <a:defRPr sz="1425" b="0">
+                <a:solidFill>
+                  <a:srgbClr val="667384"/>
+                </a:solidFill>
+                <a:latin typeface="Arial"/>
+                <a:ea typeface="Arial"/>
+                <a:cs typeface="Arial"/>
+              </a:defRPr>
+            </a:pPr>
+            <a:r>
+              <a:rPr sz="1425" b="0">
+                <a:solidFill>
+                  <a:srgbClr val="667384"/>
+                </a:solidFill>
+                <a:latin typeface="Arial"/>
+                <a:ea typeface="Arial"/>
+                <a:cs typeface="Arial"/>
+              </a:rPr>
+              <a:t>62.2%–85.8% positive-cell breadth</a:t>
+            </a:r>
+          </a:p>
+        </p:txBody>
+      </p:sp>
+      <p:sp>
+        <p:nvSpPr>
+          <p:cNvPr id="15" name="">
+            <a:extLst xmlns:a="http://schemas.openxmlformats.org/drawingml/2006/main">
+              <a:ext uri="{FF2B5EF4-FFF2-40B4-BE49-F238E27FC236}">
+                <a16:creationId xmlns:a16="http://schemas.microsoft.com/office/drawing/2014/main" id="{B126165D-5B65-44DB-99BD-15ED33F9B90F}"/>
+              </a:ext>
+            </a:extLst>
+          </p:cNvPr>
+          <p:cNvSpPr>
+            <a:spLocks xmlns:a="http://schemas.openxmlformats.org/drawingml/2006/main" noGrp="1"/>
+          </p:cNvSpPr>
+          <p:nvPr/>
+        </p:nvSpPr>
+        <p:spPr>
+          <a:xfrm xmlns:a="http://schemas.openxmlformats.org/drawingml/2006/main">
+            <a:off x="876300" y="3790950"/>
+            <a:ext cx="10553700" cy="9525"/>
+          </a:xfrm>
+          <a:prstGeom xmlns:a="http://schemas.openxmlformats.org/drawingml/2006/main" prst="rect">
+            <a:avLst/>
+          </a:prstGeom>
+          <a:solidFill xmlns:a="http://schemas.openxmlformats.org/drawingml/2006/main">
+            <a:srgbClr val="B8BCC4"/>
+          </a:solidFill>
+          <a:ln xmlns:a="http://schemas.openxmlformats.org/drawingml/2006/main" w="0">
+            <a:solidFill>
+              <a:srgbClr val="B8BCC4"/>
+            </a:solidFill>
+            <a:prstDash val="solid"/>
+          </a:ln>
+        </p:spPr>
+      </p:sp>
+      <p:sp>
+        <p:nvSpPr>
+          <p:cNvPr id="16" name="">
+            <a:extLst xmlns:a="http://schemas.openxmlformats.org/drawingml/2006/main">
+              <a:ext uri="{FF2B5EF4-FFF2-40B4-BE49-F238E27FC236}">
+                <a16:creationId xmlns:a16="http://schemas.microsoft.com/office/drawing/2014/main" id="{7DC0911F-9587-4B19-84C6-11974DB2A91C}"/>
+              </a:ext>
+            </a:extLst>
+          </p:cNvPr>
+          <p:cNvSpPr>
+            <a:spLocks xmlns:a="http://schemas.openxmlformats.org/drawingml/2006/main" noGrp="1"/>
+          </p:cNvSpPr>
+          <p:nvPr/>
+        </p:nvSpPr>
+        <p:spPr>
+          <a:xfrm xmlns:a="http://schemas.openxmlformats.org/drawingml/2006/main">
+            <a:off x="552450" y="4000500"/>
+            <a:ext cx="95250" cy="895350"/>
+          </a:xfrm>
+          <a:prstGeom xmlns:a="http://schemas.openxmlformats.org/drawingml/2006/main" prst="rect">
+            <a:avLst/>
+          </a:prstGeom>
+          <a:solidFill xmlns:a="http://schemas.openxmlformats.org/drawingml/2006/main">
+            <a:srgbClr val="3D8DFF"/>
+          </a:solidFill>
+          <a:ln xmlns:a="http://schemas.openxmlformats.org/drawingml/2006/main" w="0">
+            <a:solidFill>
+              <a:srgbClr val="3D8DFF"/>
+            </a:solidFill>
+            <a:prstDash val="solid"/>
+          </a:ln>
+        </p:spPr>
+      </p:sp>
+      <p:sp>
+        <p:nvSpPr>
+          <p:cNvPr id="17" name="">
+            <a:extLst xmlns:a="http://schemas.openxmlformats.org/drawingml/2006/main">
+              <a:ext uri="{FF2B5EF4-FFF2-40B4-BE49-F238E27FC236}">
+                <a16:creationId xmlns:a16="http://schemas.microsoft.com/office/drawing/2014/main" id="{DAB53991-F50C-4B95-9F23-DAE86BCEDF3B}"/>
+              </a:ext>
+            </a:extLst>
+          </p:cNvPr>
+          <p:cNvSpPr>
+            <a:spLocks xmlns:a="http://schemas.openxmlformats.org/drawingml/2006/main" noGrp="1"/>
+          </p:cNvSpPr>
+          <p:nvPr/>
+        </p:nvSpPr>
+        <p:spPr>
+          <a:xfrm xmlns:a="http://schemas.openxmlformats.org/drawingml/2006/main">
+            <a:off x="876300" y="3981450"/>
+            <a:ext cx="2095500" cy="285750"/>
+          </a:xfrm>
+          <a:prstGeom xmlns:a="http://schemas.openxmlformats.org/drawingml/2006/main" prst="rect">
+            <a:avLst/>
+          </a:prstGeom>
+          <a:noFill xmlns:a="http://schemas.openxmlformats.org/drawingml/2006/main"/>
+          <a:ln xmlns:a="http://schemas.openxmlformats.org/drawingml/2006/main" w="0">
+            <a:noFill/>
+            <a:prstDash val="solid"/>
+          </a:ln>
+        </p:spPr>
+        <p:txBody>
+          <a:bodyPr xmlns:a="http://schemas.openxmlformats.org/drawingml/2006/main" wrap="square" lIns="0" tIns="0" rIns="0" bIns="0" anchor="t">
+            <a:normAutofit fontScale="100000"/>
+          </a:bodyPr>
+          <a:lstStyle xmlns:a="http://schemas.openxmlformats.org/drawingml/2006/main"/>
+          <a:p xmlns:a="http://schemas.openxmlformats.org/drawingml/2006/main">
+            <a:pPr algn="l">
+              <a:buNone/>
+              <a:defRPr sz="1350" b="1">
+                <a:solidFill>
+                  <a:srgbClr val="3D8DFF"/>
+                </a:solidFill>
+                <a:latin typeface="Arial"/>
+                <a:ea typeface="Arial"/>
+                <a:cs typeface="Arial"/>
+              </a:defRPr>
+            </a:pPr>
+            <a:r>
+              <a:rPr sz="1350" b="1">
+                <a:solidFill>
+                  <a:srgbClr val="3D8DFF"/>
+                </a:solidFill>
+                <a:latin typeface="Arial"/>
+                <a:ea typeface="Arial"/>
+                <a:cs typeface="Arial"/>
+              </a:rPr>
+              <a:t>LIMITS</a:t>
+            </a:r>
+          </a:p>
+        </p:txBody>
+      </p:sp>
+      <p:sp>
+        <p:nvSpPr>
+          <p:cNvPr id="18" name="">
+            <a:extLst xmlns:a="http://schemas.openxmlformats.org/drawingml/2006/main">
+              <a:ext uri="{FF2B5EF4-FFF2-40B4-BE49-F238E27FC236}">
+                <a16:creationId xmlns:a16="http://schemas.microsoft.com/office/drawing/2014/main" id="{5DFACF3B-08BC-4148-A40A-2004DFB81D71}"/>
+              </a:ext>
+            </a:extLst>
+          </p:cNvPr>
+          <p:cNvSpPr>
+            <a:spLocks xmlns:a="http://schemas.openxmlformats.org/drawingml/2006/main" noGrp="1"/>
+          </p:cNvSpPr>
+          <p:nvPr/>
+        </p:nvSpPr>
+        <p:spPr>
+          <a:xfrm xmlns:a="http://schemas.openxmlformats.org/drawingml/2006/main">
+            <a:off x="3105150" y="3962400"/>
+            <a:ext cx="4762500" cy="419100"/>
+          </a:xfrm>
+          <a:prstGeom xmlns:a="http://schemas.openxmlformats.org/drawingml/2006/main" prst="rect">
+            <a:avLst/>
+          </a:prstGeom>
+          <a:noFill xmlns:a="http://schemas.openxmlformats.org/drawingml/2006/main"/>
+          <a:ln xmlns:a="http://schemas.openxmlformats.org/drawingml/2006/main" w="0">
+            <a:noFill/>
+            <a:prstDash val="solid"/>
+          </a:ln>
+        </p:spPr>
+        <p:txBody>
+          <a:bodyPr xmlns:a="http://schemas.openxmlformats.org/drawingml/2006/main" wrap="square" lIns="0" tIns="0" rIns="0" bIns="0" anchor="t">
+            <a:normAutofit fontScale="100000"/>
+          </a:bodyPr>
+          <a:lstStyle xmlns:a="http://schemas.openxmlformats.org/drawingml/2006/main"/>
+          <a:p xmlns:a="http://schemas.openxmlformats.org/drawingml/2006/main">
+            <a:pPr algn="l">
+              <a:buNone/>
+              <a:defRPr sz="1950" b="1">
+                <a:solidFill>
+                  <a:srgbClr val="273548"/>
+                </a:solidFill>
+                <a:latin typeface="Arial"/>
+                <a:ea typeface="Arial"/>
+                <a:cs typeface="Arial"/>
+              </a:defRPr>
+            </a:pPr>
+            <a:r>
+              <a:rPr sz="1950" b="1">
+                <a:solidFill>
+                  <a:srgbClr val="273548"/>
+                </a:solidFill>
+                <a:latin typeface="Arial"/>
+                <a:ea typeface="Arial"/>
+                <a:cs typeface="Arial"/>
+              </a:rPr>
+              <a:t>Sixteen cells break the pattern</a:t>
+            </a:r>
+          </a:p>
+        </p:txBody>
+      </p:sp>
+      <p:sp>
+        <p:nvSpPr>
+          <p:cNvPr id="19" name="">
+            <a:extLst xmlns:a="http://schemas.openxmlformats.org/drawingml/2006/main">
+              <a:ext uri="{FF2B5EF4-FFF2-40B4-BE49-F238E27FC236}">
+                <a16:creationId xmlns:a16="http://schemas.microsoft.com/office/drawing/2014/main" id="{C907D23B-44A2-43C4-9658-4C6E38430BF5}"/>
+              </a:ext>
+            </a:extLst>
+          </p:cNvPr>
+          <p:cNvSpPr>
+            <a:spLocks xmlns:a="http://schemas.openxmlformats.org/drawingml/2006/main" noGrp="1"/>
+          </p:cNvSpPr>
+          <p:nvPr/>
+        </p:nvSpPr>
+        <p:spPr>
+          <a:xfrm xmlns:a="http://schemas.openxmlformats.org/drawingml/2006/main">
+            <a:off x="8096250" y="3981450"/>
+            <a:ext cx="3333750" cy="704850"/>
+          </a:xfrm>
+          <a:prstGeom xmlns:a="http://schemas.openxmlformats.org/drawingml/2006/main" prst="rect">
+            <a:avLst/>
+          </a:prstGeom>
+          <a:noFill xmlns:a="http://schemas.openxmlformats.org/drawingml/2006/main"/>
+          <a:ln xmlns:a="http://schemas.openxmlformats.org/drawingml/2006/main" w="0">
+            <a:noFill/>
+            <a:prstDash val="solid"/>
+          </a:ln>
+        </p:spPr>
+        <p:txBody>
+          <a:bodyPr xmlns:a="http://schemas.openxmlformats.org/drawingml/2006/main" wrap="square" lIns="0" tIns="0" rIns="0" bIns="0" anchor="t">
+            <a:normAutofit fontScale="100000"/>
+          </a:bodyPr>
+          <a:lstStyle xmlns:a="http://schemas.openxmlformats.org/drawingml/2006/main"/>
+          <a:p xmlns:a="http://schemas.openxmlformats.org/drawingml/2006/main">
+            <a:pPr algn="l">
+              <a:buNone/>
+              <a:defRPr sz="1425" b="0">
+                <a:solidFill>
+                  <a:srgbClr val="667384"/>
+                </a:solidFill>
+                <a:latin typeface="Arial"/>
+                <a:ea typeface="Arial"/>
+                <a:cs typeface="Arial"/>
+              </a:defRPr>
+            </a:pPr>
+            <a:r>
+              <a:rPr sz="1425" b="0">
+                <a:solidFill>
+                  <a:srgbClr val="667384"/>
+                </a:solidFill>
+                <a:latin typeface="Arial"/>
+                <a:ea typeface="Arial"/>
+                <a:cs typeface="Arial"/>
+              </a:rPr>
+              <a:t>Micro, prior-20/long-forward, 100→100</a:t>
+            </a:r>
+          </a:p>
+        </p:txBody>
+      </p:sp>
+      <p:sp>
+        <p:nvSpPr>
+          <p:cNvPr id="20" name="">
+            <a:extLst xmlns:a="http://schemas.openxmlformats.org/drawingml/2006/main">
+              <a:ext uri="{FF2B5EF4-FFF2-40B4-BE49-F238E27FC236}">
+                <a16:creationId xmlns:a16="http://schemas.microsoft.com/office/drawing/2014/main" id="{8042DFC4-7E22-47E6-8C53-1E63A8411C3A}"/>
+              </a:ext>
+            </a:extLst>
+          </p:cNvPr>
+          <p:cNvSpPr>
+            <a:spLocks xmlns:a="http://schemas.openxmlformats.org/drawingml/2006/main" noGrp="1"/>
+          </p:cNvSpPr>
+          <p:nvPr/>
+        </p:nvSpPr>
+        <p:spPr>
+          <a:xfrm xmlns:a="http://schemas.openxmlformats.org/drawingml/2006/main">
+            <a:off x="876300" y="4991100"/>
+            <a:ext cx="10553700" cy="9525"/>
+          </a:xfrm>
+          <a:prstGeom xmlns:a="http://schemas.openxmlformats.org/drawingml/2006/main" prst="rect">
+            <a:avLst/>
+          </a:prstGeom>
+          <a:solidFill xmlns:a="http://schemas.openxmlformats.org/drawingml/2006/main">
+            <a:srgbClr val="B8BCC4"/>
+          </a:solidFill>
+          <a:ln xmlns:a="http://schemas.openxmlformats.org/drawingml/2006/main" w="0">
+            <a:solidFill>
+              <a:srgbClr val="B8BCC4"/>
+            </a:solidFill>
+            <a:prstDash val="solid"/>
+          </a:ln>
+        </p:spPr>
+      </p:sp>
+      <p:sp>
+        <p:nvSpPr>
+          <p:cNvPr id="21" name="">
+            <a:extLst xmlns:a="http://schemas.openxmlformats.org/drawingml/2006/main">
+              <a:ext uri="{FF2B5EF4-FFF2-40B4-BE49-F238E27FC236}">
+                <a16:creationId xmlns:a16="http://schemas.microsoft.com/office/drawing/2014/main" id="{F4066D54-676B-4D0F-93B6-2152B57E41AF}"/>
+              </a:ext>
+            </a:extLst>
+          </p:cNvPr>
+          <p:cNvSpPr>
+            <a:spLocks xmlns:a="http://schemas.openxmlformats.org/drawingml/2006/main" noGrp="1"/>
+          </p:cNvSpPr>
+          <p:nvPr/>
+        </p:nvSpPr>
+        <p:spPr>
+          <a:xfrm xmlns:a="http://schemas.openxmlformats.org/drawingml/2006/main">
+            <a:off x="552450" y="5353050"/>
+            <a:ext cx="10877550" cy="781050"/>
+          </a:xfrm>
+          <a:prstGeom xmlns:a="http://schemas.openxmlformats.org/drawingml/2006/main" prst="rect">
+            <a:avLst/>
+          </a:prstGeom>
+          <a:solidFill xmlns:a="http://schemas.openxmlformats.org/drawingml/2006/main">
+            <a:srgbClr val="EAF5FB"/>
+          </a:solidFill>
+          <a:ln xmlns:a="http://schemas.openxmlformats.org/drawingml/2006/main" w="0">
+            <a:solidFill>
+              <a:srgbClr val="EAF5FB"/>
+            </a:solidFill>
+            <a:prstDash val="solid"/>
+          </a:ln>
+        </p:spPr>
+      </p:sp>
+      <p:sp>
+        <p:nvSpPr>
+          <p:cNvPr id="22" name="">
+            <a:extLst xmlns:a="http://schemas.openxmlformats.org/drawingml/2006/main">
+              <a:ext uri="{FF2B5EF4-FFF2-40B4-BE49-F238E27FC236}">
+                <a16:creationId xmlns:a16="http://schemas.microsoft.com/office/drawing/2014/main" id="{6E4C79AE-EB98-4B5B-B3D3-11ED0D4C729B}"/>
+              </a:ext>
+            </a:extLst>
+          </p:cNvPr>
+          <p:cNvSpPr>
+            <a:spLocks xmlns:a="http://schemas.openxmlformats.org/drawingml/2006/main" noGrp="1"/>
+          </p:cNvSpPr>
+          <p:nvPr/>
+        </p:nvSpPr>
+        <p:spPr>
+          <a:xfrm xmlns:a="http://schemas.openxmlformats.org/drawingml/2006/main">
+            <a:off x="781050" y="5524500"/>
+            <a:ext cx="2476500" cy="323850"/>
+          </a:xfrm>
+          <a:prstGeom xmlns:a="http://schemas.openxmlformats.org/drawingml/2006/main" prst="rect">
+            <a:avLst/>
+          </a:prstGeom>
+          <a:noFill xmlns:a="http://schemas.openxmlformats.org/drawingml/2006/main"/>
+          <a:ln xmlns:a="http://schemas.openxmlformats.org/drawingml/2006/main" w="0">
+            <a:noFill/>
+            <a:prstDash val="solid"/>
+          </a:ln>
+        </p:spPr>
+        <p:txBody>
+          <a:bodyPr xmlns:a="http://schemas.openxmlformats.org/drawingml/2006/main" wrap="square" lIns="0" tIns="0" rIns="0" bIns="0" anchor="t">
+            <a:normAutofit fontScale="100000"/>
+          </a:bodyPr>
+          <a:lstStyle xmlns:a="http://schemas.openxmlformats.org/drawingml/2006/main"/>
+          <a:p xmlns:a="http://schemas.openxmlformats.org/drawingml/2006/main">
+            <a:pPr algn="l">
+              <a:buNone/>
+              <a:defRPr sz="1725" b="1">
+                <a:solidFill>
+                  <a:srgbClr val="3D8DFF"/>
+                </a:solidFill>
+                <a:latin typeface="Arial"/>
+                <a:ea typeface="Arial"/>
+                <a:cs typeface="Arial"/>
+              </a:defRPr>
+            </a:pPr>
+            <a:r>
+              <a:rPr sz="1725" b="1">
+                <a:solidFill>
+                  <a:srgbClr val="3D8DFF"/>
+                </a:solidFill>
+                <a:latin typeface="Arial"/>
+                <a:ea typeface="Arial"/>
+                <a:cs typeface="Arial"/>
+              </a:rPr>
+              <a:t>STATUS</a:t>
+            </a:r>
+          </a:p>
+        </p:txBody>
+      </p:sp>
+      <p:sp>
+        <p:nvSpPr>
+          <p:cNvPr id="23" name="">
+            <a:extLst xmlns:a="http://schemas.openxmlformats.org/drawingml/2006/main">
+              <a:ext uri="{FF2B5EF4-FFF2-40B4-BE49-F238E27FC236}">
+                <a16:creationId xmlns:a16="http://schemas.microsoft.com/office/drawing/2014/main" id="{3320D60E-6067-4236-80ED-A898A863026E}"/>
+              </a:ext>
+            </a:extLst>
+          </p:cNvPr>
+          <p:cNvSpPr>
+            <a:spLocks xmlns:a="http://schemas.openxmlformats.org/drawingml/2006/main" noGrp="1"/>
+          </p:cNvSpPr>
+          <p:nvPr/>
+        </p:nvSpPr>
+        <p:spPr>
+          <a:xfrm xmlns:a="http://schemas.openxmlformats.org/drawingml/2006/main">
+            <a:off x="3333750" y="5486400"/>
+            <a:ext cx="7810500" cy="419100"/>
+          </a:xfrm>
+          <a:prstGeom xmlns:a="http://schemas.openxmlformats.org/drawingml/2006/main" prst="rect">
+            <a:avLst/>
+          </a:prstGeom>
+          <a:noFill xmlns:a="http://schemas.openxmlformats.org/drawingml/2006/main"/>
+          <a:ln xmlns:a="http://schemas.openxmlformats.org/drawingml/2006/main" w="0">
+            <a:noFill/>
+            <a:prstDash val="solid"/>
+          </a:ln>
+        </p:spPr>
+        <p:txBody>
+          <a:bodyPr xmlns:a="http://schemas.openxmlformats.org/drawingml/2006/main" wrap="square" lIns="0" tIns="0" rIns="0" bIns="0" anchor="t">
+            <a:normAutofit fontScale="76389"/>
+          </a:bodyPr>
+          <a:lstStyle xmlns:a="http://schemas.openxmlformats.org/drawingml/2006/main"/>
+          <a:p xmlns:a="http://schemas.openxmlformats.org/drawingml/2006/main">
+            <a:pPr algn="l">
+              <a:buNone/>
+              <a:defRPr sz="1800" b="1">
+                <a:solidFill>
+                  <a:srgbClr val="273548"/>
+                </a:solidFill>
+                <a:latin typeface="Arial"/>
+                <a:ea typeface="Arial"/>
+                <a:cs typeface="Arial"/>
+              </a:defRPr>
+            </a:pPr>
+            <a:r>
+              <a:rPr sz="1800" b="1">
+                <a:solidFill>
+                  <a:srgbClr val="273548"/>
+                </a:solidFill>
+                <a:latin typeface="Arial"/>
+                <a:ea typeface="Arial"/>
+                <a:cs typeface="Arial"/>
+              </a:rPr>
+              <a:t>BEHAV-MOM-01 remains a behavioral lead. Do not select a horizon or open a next-open rule, baseline, or post-2023 confirmation yet.</a:t>
+            </a:r>
+          </a:p>
+        </p:txBody>
+      </p:sp>
+    </p:spTree>
+    <p:extLst>
+      <p:ext uri="{BB962C8B-B14F-4D97-AF65-F5344CB8AC3E}">
+        <p14:creationId xmlns:p14="http://schemas.microsoft.com/office/powerpoint/2010/main" val="666536286"/>
+      </p:ext>
+    </p:extLst>
+  </p:cSld>
+</p:sld>
+</file>
+
 <file path=ppt/slides/slide2.xml><?xml version="1.0" encoding="utf-8"?>
 <p:sld xmlns:p="http://schemas.openxmlformats.org/presentationml/2006/main">
   <p:cSld>
@@ -3443,7 +6799,7 @@
         </p:spPr>
         <p:txBody>
           <a:bodyPr xmlns:a="http://schemas.openxmlformats.org/drawingml/2006/main" wrap="square" lIns="0" tIns="0" rIns="0" bIns="0" anchor="t">
-            <a:normAutofit fontScale="87656"/>
+            <a:normAutofit fontScale="100000"/>
           </a:bodyPr>
           <a:lstStyle xmlns:a="http://schemas.openxmlformats.org/drawingml/2006/main"/>
           <a:p xmlns:a="http://schemas.openxmlformats.org/drawingml/2006/main">
@@ -3467,7 +6823,7 @@
                 <a:ea typeface="Arial"/>
                 <a:cs typeface="Arial"/>
               </a:rPr>
-              <a:t>Aggregation reveals a weak 5–10-session continuation ridge</a:t>
+              <a:t>A weak 5–10-session continuation ridge appears</a:t>
             </a:r>
           </a:p>
         </p:txBody>
@@ -3632,7 +6988,7 @@
           <p:nvPr/>
         </p:nvPicPr>
         <p:blipFill>
-          <a:blip xmlns:r="http://schemas.openxmlformats.org/officeDocument/2006/relationships" xmlns:a="http://schemas.openxmlformats.org/drawingml/2006/main" r:embed="R38e442798bd64490"/>
+          <a:blip xmlns:r="http://schemas.openxmlformats.org/officeDocument/2006/relationships" xmlns:a="http://schemas.openxmlformats.org/drawingml/2006/main" r:embed="R59d79921c91f4537"/>
           <a:stretch xmlns:a="http://schemas.openxmlformats.org/drawingml/2006/main"/>
         </p:blipFill>
         <p:spPr>
@@ -3952,7 +7308,7 @@
           <p:nvPr/>
         </p:nvPicPr>
         <p:blipFill>
-          <a:blip xmlns:r="http://schemas.openxmlformats.org/officeDocument/2006/relationships" xmlns:a="http://schemas.openxmlformats.org/drawingml/2006/main" r:embed="Rc2a9f2b61768460a"/>
+          <a:blip xmlns:r="http://schemas.openxmlformats.org/officeDocument/2006/relationships" xmlns:a="http://schemas.openxmlformats.org/drawingml/2006/main" r:embed="R662083d1f331452a"/>
           <a:stretch xmlns:a="http://schemas.openxmlformats.org/drawingml/2006/main"/>
         </p:blipFill>
         <p:spPr>
@@ -4272,7 +7628,7 @@
           <p:nvPr/>
         </p:nvPicPr>
         <p:blipFill>
-          <a:blip xmlns:r="http://schemas.openxmlformats.org/officeDocument/2006/relationships" xmlns:a="http://schemas.openxmlformats.org/drawingml/2006/main" r:embed="Rf909af196ba2469d"/>
+          <a:blip xmlns:r="http://schemas.openxmlformats.org/officeDocument/2006/relationships" xmlns:a="http://schemas.openxmlformats.org/drawingml/2006/main" r:embed="R34f12cb8d38c4bb2"/>
           <a:stretch xmlns:a="http://schemas.openxmlformats.org/drawingml/2006/main"/>
         </p:blipFill>
         <p:spPr>
@@ -4403,7 +7759,7 @@
         </p:spPr>
         <p:txBody>
           <a:bodyPr xmlns:a="http://schemas.openxmlformats.org/drawingml/2006/main" wrap="square" lIns="0" tIns="0" rIns="0" bIns="0" anchor="t">
-            <a:normAutofit fontScale="87656"/>
+            <a:normAutofit fontScale="99137"/>
           </a:bodyPr>
           <a:lstStyle xmlns:a="http://schemas.openxmlformats.org/drawingml/2006/main"/>
           <a:p xmlns:a="http://schemas.openxmlformats.org/drawingml/2006/main">
@@ -4427,7 +7783,7 @@
                 <a:ea typeface="Arial"/>
                 <a:cs typeface="Arial"/>
               </a:rPr>
-              <a:t>Sideways paths carry the atlas's largest continuation cluster</a:t>
+              <a:t>Sideways paths carry the largest continuation cluster</a:t>
             </a:r>
           </a:p>
         </p:txBody>
@@ -4592,7 +7948,7 @@
           <p:nvPr/>
         </p:nvPicPr>
         <p:blipFill>
-          <a:blip xmlns:r="http://schemas.openxmlformats.org/officeDocument/2006/relationships" xmlns:a="http://schemas.openxmlformats.org/drawingml/2006/main" r:embed="Rc41909ef7da04c63"/>
+          <a:blip xmlns:r="http://schemas.openxmlformats.org/officeDocument/2006/relationships" xmlns:a="http://schemas.openxmlformats.org/drawingml/2006/main" r:embed="R3bfd2aef541446b8"/>
           <a:stretch xmlns:a="http://schemas.openxmlformats.org/drawingml/2006/main"/>
         </p:blipFill>
         <p:spPr>
@@ -4912,7 +8268,7 @@
           <p:nvPr/>
         </p:nvPicPr>
         <p:blipFill>
-          <a:blip xmlns:r="http://schemas.openxmlformats.org/officeDocument/2006/relationships" xmlns:a="http://schemas.openxmlformats.org/drawingml/2006/main" r:embed="R62bcabc3f2b040eb"/>
+          <a:blip xmlns:r="http://schemas.openxmlformats.org/officeDocument/2006/relationships" xmlns:a="http://schemas.openxmlformats.org/drawingml/2006/main" r:embed="Rdf95817faae04f76"/>
           <a:stretch xmlns:a="http://schemas.openxmlformats.org/drawingml/2006/main"/>
         </p:blipFill>
         <p:spPr>

--- a/operator_hypothesis_lab/presentations/return_geometry_daily_continuation_microscope.pptx
+++ b/operator_hypothesis_lab/presentations/return_geometry_daily_continuation_microscope.pptx
@@ -2,27 +2,35 @@
 <file path=ppt/presentation.xml><?xml version="1.0" encoding="utf-8"?>
 <p:presentation xmlns:p="http://schemas.openxmlformats.org/presentationml/2006/main">
   <p:sldMasterIdLst>
-    <p:sldMasterId xmlns:r="http://schemas.openxmlformats.org/officeDocument/2006/relationships" id="2147483648" r:id="R0097c60ca9884520"/>
+    <p:sldMasterId xmlns:r="http://schemas.openxmlformats.org/officeDocument/2006/relationships" id="2147483648" r:id="Rd29db7dd59354eed"/>
   </p:sldMasterIdLst>
   <p:notesMasterIdLst>
-    <p:notesMasterId xmlns:r="http://schemas.openxmlformats.org/officeDocument/2006/relationships" r:id="Ra6cfa17bd13c477a"/>
+    <p:notesMasterId xmlns:r="http://schemas.openxmlformats.org/officeDocument/2006/relationships" r:id="R80c2df66b38d4ade"/>
   </p:notesMasterIdLst>
   <p:sldIdLst>
-    <p:sldId xmlns:r="http://schemas.openxmlformats.org/officeDocument/2006/relationships" id="256" r:id="R7f6041ace4974ec6"/>
-    <p:sldId xmlns:r="http://schemas.openxmlformats.org/officeDocument/2006/relationships" id="257" r:id="R5798945275e045d6"/>
-    <p:sldId xmlns:r="http://schemas.openxmlformats.org/officeDocument/2006/relationships" id="258" r:id="R151aed5e11834ded"/>
-    <p:sldId xmlns:r="http://schemas.openxmlformats.org/officeDocument/2006/relationships" id="259" r:id="R50e2dc2b82804a5c"/>
-    <p:sldId xmlns:r="http://schemas.openxmlformats.org/officeDocument/2006/relationships" id="260" r:id="Rad401365f5744ae2"/>
-    <p:sldId xmlns:r="http://schemas.openxmlformats.org/officeDocument/2006/relationships" id="261" r:id="R01f9002166344e69"/>
-    <p:sldId xmlns:r="http://schemas.openxmlformats.org/officeDocument/2006/relationships" id="262" r:id="Ra602d09fccf54ae7"/>
-    <p:sldId xmlns:r="http://schemas.openxmlformats.org/officeDocument/2006/relationships" id="263" r:id="Rd0a0f623f2f04281"/>
-    <p:sldId xmlns:r="http://schemas.openxmlformats.org/officeDocument/2006/relationships" id="264" r:id="Rbd935ccf41584057"/>
-    <p:sldId xmlns:r="http://schemas.openxmlformats.org/officeDocument/2006/relationships" id="265" r:id="R113353cfa457459d"/>
-    <p:sldId xmlns:r="http://schemas.openxmlformats.org/officeDocument/2006/relationships" id="266" r:id="R779b236355fc47da"/>
-    <p:sldId xmlns:r="http://schemas.openxmlformats.org/officeDocument/2006/relationships" id="267" r:id="Rc12dc436bc114d3b"/>
-    <p:sldId xmlns:r="http://schemas.openxmlformats.org/officeDocument/2006/relationships" id="268" r:id="R142e6b1e53074be2"/>
-    <p:sldId xmlns:r="http://schemas.openxmlformats.org/officeDocument/2006/relationships" id="269" r:id="R7a062c592c6a4048"/>
-    <p:sldId xmlns:r="http://schemas.openxmlformats.org/officeDocument/2006/relationships" id="270" r:id="Rf172dc5ea2114b28"/>
+    <p:sldId xmlns:r="http://schemas.openxmlformats.org/officeDocument/2006/relationships" id="256" r:id="R5f329affa81b46ac"/>
+    <p:sldId xmlns:r="http://schemas.openxmlformats.org/officeDocument/2006/relationships" id="257" r:id="Rc5feca4d05be4d31"/>
+    <p:sldId xmlns:r="http://schemas.openxmlformats.org/officeDocument/2006/relationships" id="258" r:id="Rfe075a0198974755"/>
+    <p:sldId xmlns:r="http://schemas.openxmlformats.org/officeDocument/2006/relationships" id="259" r:id="R88b5a307b659476a"/>
+    <p:sldId xmlns:r="http://schemas.openxmlformats.org/officeDocument/2006/relationships" id="260" r:id="R45168b94e4134fc3"/>
+    <p:sldId xmlns:r="http://schemas.openxmlformats.org/officeDocument/2006/relationships" id="261" r:id="Rd9708d1a4cea4dd3"/>
+    <p:sldId xmlns:r="http://schemas.openxmlformats.org/officeDocument/2006/relationships" id="262" r:id="R32010ec1176b470d"/>
+    <p:sldId xmlns:r="http://schemas.openxmlformats.org/officeDocument/2006/relationships" id="263" r:id="Rcda05faff56240fe"/>
+    <p:sldId xmlns:r="http://schemas.openxmlformats.org/officeDocument/2006/relationships" id="264" r:id="R7e48ad869dce4bff"/>
+    <p:sldId xmlns:r="http://schemas.openxmlformats.org/officeDocument/2006/relationships" id="265" r:id="Raf1591d7362e4fec"/>
+    <p:sldId xmlns:r="http://schemas.openxmlformats.org/officeDocument/2006/relationships" id="266" r:id="R1b69565210f04e63"/>
+    <p:sldId xmlns:r="http://schemas.openxmlformats.org/officeDocument/2006/relationships" id="267" r:id="R7c5841ade7b247bf"/>
+    <p:sldId xmlns:r="http://schemas.openxmlformats.org/officeDocument/2006/relationships" id="268" r:id="R902d283e8dc04733"/>
+    <p:sldId xmlns:r="http://schemas.openxmlformats.org/officeDocument/2006/relationships" id="269" r:id="Rce17cb33b7bb4cc3"/>
+    <p:sldId xmlns:r="http://schemas.openxmlformats.org/officeDocument/2006/relationships" id="270" r:id="R28611201c9a24e28"/>
+    <p:sldId xmlns:r="http://schemas.openxmlformats.org/officeDocument/2006/relationships" id="271" r:id="Rdd04f550549648b1"/>
+    <p:sldId xmlns:r="http://schemas.openxmlformats.org/officeDocument/2006/relationships" id="272" r:id="Rb5831e14f7504f81"/>
+    <p:sldId xmlns:r="http://schemas.openxmlformats.org/officeDocument/2006/relationships" id="273" r:id="Rddba663147554d32"/>
+    <p:sldId xmlns:r="http://schemas.openxmlformats.org/officeDocument/2006/relationships" id="274" r:id="R4e8332751a83477d"/>
+    <p:sldId xmlns:r="http://schemas.openxmlformats.org/officeDocument/2006/relationships" id="275" r:id="R47a08ce89880435d"/>
+    <p:sldId xmlns:r="http://schemas.openxmlformats.org/officeDocument/2006/relationships" id="276" r:id="Rc7c580b78c0b426c"/>
+    <p:sldId xmlns:r="http://schemas.openxmlformats.org/officeDocument/2006/relationships" id="277" r:id="R32203bb98aca4287"/>
+    <p:sldId xmlns:r="http://schemas.openxmlformats.org/officeDocument/2006/relationships" id="278" r:id="R74299a0031a6455e"/>
   </p:sldIdLst>
   <p:sldSz cx="12192000" cy="6858000"/>
   <p:notesSz cx="6858000" cy="9144000"/>
@@ -1091,6 +1099,386 @@
 </p:notes>
 </file>
 
+<file path=ppt/notesSlides/notesSlide16.xml><?xml version="1.0" encoding="utf-8"?>
+<p:notes xmlns:p="http://schemas.openxmlformats.org/presentationml/2006/main">
+  <p:cSld>
+    <p:spTree>
+      <p:nvGrpSpPr>
+        <p:cNvPr id="1" name=""/>
+        <p:cNvGrpSpPr/>
+        <p:nvPr/>
+      </p:nvGrpSpPr>
+      <p:grpSpPr>
+        <a:xfrm xmlns:a="http://schemas.openxmlformats.org/drawingml/2006/main"/>
+      </p:grpSpPr>
+      <p:sp>
+        <p:nvSpPr>
+          <p:cNvPr id="2" name="Slide Image Placeholder 1"/>
+          <p:cNvSpPr>
+            <a:spLocks xmlns:a="http://schemas.openxmlformats.org/drawingml/2006/main" noGrp="1"/>
+          </p:cNvSpPr>
+          <p:nvPr>
+            <p:ph type="sldImg" idx="0"/>
+          </p:nvPr>
+        </p:nvSpPr>
+        <p:spPr/>
+      </p:sp>
+      <p:sp>
+        <p:nvSpPr>
+          <p:cNvPr id="3" name="Notes Placeholder 2"/>
+          <p:cNvSpPr>
+            <a:spLocks xmlns:a="http://schemas.openxmlformats.org/drawingml/2006/main" noGrp="1"/>
+          </p:cNvSpPr>
+          <p:nvPr>
+            <p:ph type="body" idx="1"/>
+          </p:nvPr>
+        </p:nvSpPr>
+        <p:spPr/>
+        <p:txBody>
+          <a:bodyPr xmlns:a="http://schemas.openxmlformats.org/drawingml/2006/main"/>
+          <a:lstStyle xmlns:a="http://schemas.openxmlformats.org/drawingml/2006/main"/>
+          <a:p xmlns:a="http://schemas.openxmlformats.org/drawingml/2006/main">
+            <a:r>
+              <a:t>This section translates the descriptive ER20-sideways continuation lead into the simplest executable daily rule. The 20-session prior window is aligned with ER20; 5, 10, and 20 held sessions are frozen diagnostics rather than an optimized horizon search.</a:t>
+            </a:r>
+          </a:p>
+          <a:p xmlns:a="http://schemas.openxmlformats.org/drawingml/2006/main">
+            <a:r>
+              <a:t/>
+            </a:r>
+          </a:p>
+          <a:p xmlns:a="http://schemas.openxmlformats.org/drawingml/2006/main">
+            <a:r>
+              <a:t>[Sources]</a:t>
+            </a:r>
+          </a:p>
+          <a:p xmlns:a="http://schemas.openxmlformats.org/drawingml/2006/main">
+            <a:r>
+              <a:t>- runs/research_workbench/operator_hypothesis_lab/return_geometry_continuation_next_open_rule_20260829/run_spec.csv</a:t>
+            </a:r>
+          </a:p>
+          <a:p xmlns:a="http://schemas.openxmlformats.org/drawingml/2006/main">
+            <a:r>
+              <a:t>- operator_hypothesis_lab/docs/RETURN_GEOMETRY_DAILY_CONTINUATION_MICROSCOPE_2018_2023.md</a:t>
+            </a:r>
+          </a:p>
+          <a:p xmlns:a="http://schemas.openxmlformats.org/drawingml/2006/main">
+            <a:r>
+              <a:t>[/Sources]</a:t>
+            </a:r>
+          </a:p>
+        </p:txBody>
+      </p:sp>
+      <p:sp>
+        <p:nvSpPr>
+          <p:cNvPr id="4" name="Slide Number Placeholder 3"/>
+          <p:cNvSpPr>
+            <a:spLocks xmlns:a="http://schemas.openxmlformats.org/drawingml/2006/main" noGrp="1"/>
+          </p:cNvSpPr>
+          <p:nvPr>
+            <p:ph type="sldNum" idx="5"/>
+          </p:nvPr>
+        </p:nvSpPr>
+        <p:spPr/>
+        <p:txBody>
+          <a:bodyPr xmlns:a="http://schemas.openxmlformats.org/drawingml/2006/main"/>
+          <a:lstStyle xmlns:a="http://schemas.openxmlformats.org/drawingml/2006/main"/>
+          <a:p xmlns:a="http://schemas.openxmlformats.org/drawingml/2006/main"/>
+        </p:txBody>
+      </p:sp>
+    </p:spTree>
+  </p:cSld>
+  <p:clrMapOvr>
+    <a:masterClrMapping xmlns:a="http://schemas.openxmlformats.org/drawingml/2006/main"/>
+  </p:clrMapOvr>
+</p:notes>
+</file>
+
+<file path=ppt/notesSlides/notesSlide17.xml><?xml version="1.0" encoding="utf-8"?>
+<p:notes xmlns:p="http://schemas.openxmlformats.org/presentationml/2006/main">
+  <p:cSld>
+    <p:spTree>
+      <p:nvGrpSpPr>
+        <p:cNvPr id="1" name=""/>
+        <p:cNvGrpSpPr/>
+        <p:nvPr/>
+      </p:nvGrpSpPr>
+      <p:grpSpPr>
+        <a:xfrm xmlns:a="http://schemas.openxmlformats.org/drawingml/2006/main"/>
+      </p:grpSpPr>
+      <p:sp>
+        <p:nvSpPr>
+          <p:cNvPr id="2" name="Slide Image Placeholder 1"/>
+          <p:cNvSpPr>
+            <a:spLocks xmlns:a="http://schemas.openxmlformats.org/drawingml/2006/main" noGrp="1"/>
+          </p:cNvSpPr>
+          <p:nvPr>
+            <p:ph type="sldImg" idx="0"/>
+          </p:nvPr>
+        </p:nvSpPr>
+        <p:spPr/>
+      </p:sp>
+      <p:sp>
+        <p:nvSpPr>
+          <p:cNvPr id="3" name="Notes Placeholder 2"/>
+          <p:cNvSpPr>
+            <a:spLocks xmlns:a="http://schemas.openxmlformats.org/drawingml/2006/main" noGrp="1"/>
+          </p:cNvSpPr>
+          <p:nvPr>
+            <p:ph type="body" idx="1"/>
+          </p:nvPr>
+        </p:nvSpPr>
+        <p:spPr/>
+        <p:txBody>
+          <a:bodyPr xmlns:a="http://schemas.openxmlformats.org/drawingml/2006/main"/>
+          <a:lstStyle xmlns:a="http://schemas.openxmlformats.org/drawingml/2006/main"/>
+          <a:p xmlns:a="http://schemas.openxmlformats.org/drawingml/2006/main">
+            <a:r>
+              <a:t>The primary rule is known at completed close t and enters at open t+1. One position is allowed per asset, rule, and horizon; intervening signals are ignored until the exit open. All controls use the same execution and non-overlap convention.</a:t>
+            </a:r>
+          </a:p>
+          <a:p xmlns:a="http://schemas.openxmlformats.org/drawingml/2006/main">
+            <a:r>
+              <a:t/>
+            </a:r>
+          </a:p>
+          <a:p xmlns:a="http://schemas.openxmlformats.org/drawingml/2006/main">
+            <a:r>
+              <a:t>[Sources]</a:t>
+            </a:r>
+          </a:p>
+          <a:p xmlns:a="http://schemas.openxmlformats.org/drawingml/2006/main">
+            <a:r>
+              <a:t>- runs/research_workbench/operator_hypothesis_lab/return_geometry_continuation_next_open_rule_20260829/run_spec.csv</a:t>
+            </a:r>
+          </a:p>
+          <a:p xmlns:a="http://schemas.openxmlformats.org/drawingml/2006/main">
+            <a:r>
+              <a:t>- runs/research_workbench/operator_hypothesis_lab/return_geometry_continuation_next_open_rule_20260829/construction_checks.csv</a:t>
+            </a:r>
+          </a:p>
+          <a:p xmlns:a="http://schemas.openxmlformats.org/drawingml/2006/main">
+            <a:r>
+              <a:t>[/Sources]</a:t>
+            </a:r>
+          </a:p>
+        </p:txBody>
+      </p:sp>
+      <p:sp>
+        <p:nvSpPr>
+          <p:cNvPr id="4" name="Slide Number Placeholder 3"/>
+          <p:cNvSpPr>
+            <a:spLocks xmlns:a="http://schemas.openxmlformats.org/drawingml/2006/main" noGrp="1"/>
+          </p:cNvSpPr>
+          <p:nvPr>
+            <p:ph type="sldNum" idx="5"/>
+          </p:nvPr>
+        </p:nvSpPr>
+        <p:spPr/>
+        <p:txBody>
+          <a:bodyPr xmlns:a="http://schemas.openxmlformats.org/drawingml/2006/main"/>
+          <a:lstStyle xmlns:a="http://schemas.openxmlformats.org/drawingml/2006/main"/>
+          <a:p xmlns:a="http://schemas.openxmlformats.org/drawingml/2006/main"/>
+        </p:txBody>
+      </p:sp>
+    </p:spTree>
+  </p:cSld>
+  <p:clrMapOvr>
+    <a:masterClrMapping xmlns:a="http://schemas.openxmlformats.org/drawingml/2006/main"/>
+  </p:clrMapOvr>
+</p:notes>
+</file>
+
+<file path=ppt/notesSlides/notesSlide18.xml><?xml version="1.0" encoding="utf-8"?>
+<p:notes xmlns:p="http://schemas.openxmlformats.org/presentationml/2006/main">
+  <p:cSld>
+    <p:spTree>
+      <p:nvGrpSpPr>
+        <p:cNvPr id="1" name=""/>
+        <p:cNvGrpSpPr/>
+        <p:nvPr/>
+      </p:nvGrpSpPr>
+      <p:grpSpPr>
+        <a:xfrm xmlns:a="http://schemas.openxmlformats.org/drawingml/2006/main"/>
+      </p:grpSpPr>
+      <p:sp>
+        <p:nvSpPr>
+          <p:cNvPr id="2" name="Slide Image Placeholder 1"/>
+          <p:cNvSpPr>
+            <a:spLocks xmlns:a="http://schemas.openxmlformats.org/drawingml/2006/main" noGrp="1"/>
+          </p:cNvSpPr>
+          <p:nvPr>
+            <p:ph type="sldImg" idx="0"/>
+          </p:nvPr>
+        </p:nvSpPr>
+        <p:spPr/>
+      </p:sp>
+      <p:sp>
+        <p:nvSpPr>
+          <p:cNvPr id="3" name="Notes Placeholder 2"/>
+          <p:cNvSpPr>
+            <a:spLocks xmlns:a="http://schemas.openxmlformats.org/drawingml/2006/main" noGrp="1"/>
+          </p:cNvSpPr>
+          <p:nvPr>
+            <p:ph type="body" idx="1"/>
+          </p:nvPr>
+        </p:nvSpPr>
+        <p:spPr/>
+        <p:txBody>
+          <a:bodyPr xmlns:a="http://schemas.openxmlformats.org/drawingml/2006/main"/>
+          <a:lstStyle xmlns:a="http://schemas.openxmlformats.org/drawingml/2006/main"/>
+          <a:p xmlns:a="http://schemas.openxmlformats.org/drawingml/2006/main">
+            <a:r>
+              <a:t>The primary rule has positive equal-sector median net returns of +0.05%, +0.23%, and +0.66% over 5, 10, and 20 sessions. It nevertheless trails unconditional same-horizon drift by 16, 10, and 14 basis points per trade. Positive R20 adds little versus the positive-only control and detracts versus sideways-state-only.</a:t>
+            </a:r>
+          </a:p>
+          <a:p xmlns:a="http://schemas.openxmlformats.org/drawingml/2006/main">
+            <a:r>
+              <a:t/>
+            </a:r>
+          </a:p>
+          <a:p xmlns:a="http://schemas.openxmlformats.org/drawingml/2006/main">
+            <a:r>
+              <a:t>[Sources]</a:t>
+            </a:r>
+          </a:p>
+          <a:p xmlns:a="http://schemas.openxmlformats.org/drawingml/2006/main">
+            <a:r>
+              <a:t>- runs/research_workbench/operator_hypothesis_lab/return_geometry_continuation_next_open_rule_20260829/equal_sector_horizon_summary.csv</a:t>
+            </a:r>
+          </a:p>
+          <a:p xmlns:a="http://schemas.openxmlformats.org/drawingml/2006/main">
+            <a:r>
+              <a:t>- runs/research_workbench/operator_hypothesis_lab/return_geometry_continuation_next_open_rule_20260829/visuals/equal_sector_horizon_comparison.png</a:t>
+            </a:r>
+          </a:p>
+          <a:p xmlns:a="http://schemas.openxmlformats.org/drawingml/2006/main">
+            <a:r>
+              <a:t>[/Sources]</a:t>
+            </a:r>
+          </a:p>
+        </p:txBody>
+      </p:sp>
+      <p:sp>
+        <p:nvSpPr>
+          <p:cNvPr id="4" name="Slide Number Placeholder 3"/>
+          <p:cNvSpPr>
+            <a:spLocks xmlns:a="http://schemas.openxmlformats.org/drawingml/2006/main" noGrp="1"/>
+          </p:cNvSpPr>
+          <p:nvPr>
+            <p:ph type="sldNum" idx="5"/>
+          </p:nvPr>
+        </p:nvSpPr>
+        <p:spPr/>
+        <p:txBody>
+          <a:bodyPr xmlns:a="http://schemas.openxmlformats.org/drawingml/2006/main"/>
+          <a:lstStyle xmlns:a="http://schemas.openxmlformats.org/drawingml/2006/main"/>
+          <a:p xmlns:a="http://schemas.openxmlformats.org/drawingml/2006/main"/>
+        </p:txBody>
+      </p:sp>
+    </p:spTree>
+  </p:cSld>
+  <p:clrMapOvr>
+    <a:masterClrMapping xmlns:a="http://schemas.openxmlformats.org/drawingml/2006/main"/>
+  </p:clrMapOvr>
+</p:notes>
+</file>
+
+<file path=ppt/notesSlides/notesSlide19.xml><?xml version="1.0" encoding="utf-8"?>
+<p:notes xmlns:p="http://schemas.openxmlformats.org/presentationml/2006/main">
+  <p:cSld>
+    <p:spTree>
+      <p:nvGrpSpPr>
+        <p:cNvPr id="1" name=""/>
+        <p:cNvGrpSpPr/>
+        <p:nvPr/>
+      </p:nvGrpSpPr>
+      <p:grpSpPr>
+        <a:xfrm xmlns:a="http://schemas.openxmlformats.org/drawingml/2006/main"/>
+      </p:grpSpPr>
+      <p:sp>
+        <p:nvSpPr>
+          <p:cNvPr id="2" name="Slide Image Placeholder 1"/>
+          <p:cNvSpPr>
+            <a:spLocks xmlns:a="http://schemas.openxmlformats.org/drawingml/2006/main" noGrp="1"/>
+          </p:cNvSpPr>
+          <p:nvPr>
+            <p:ph type="sldImg" idx="0"/>
+          </p:nvPr>
+        </p:nvSpPr>
+        <p:spPr/>
+      </p:sp>
+      <p:sp>
+        <p:nvSpPr>
+          <p:cNvPr id="3" name="Notes Placeholder 2"/>
+          <p:cNvSpPr>
+            <a:spLocks xmlns:a="http://schemas.openxmlformats.org/drawingml/2006/main" noGrp="1"/>
+          </p:cNvSpPr>
+          <p:nvPr>
+            <p:ph type="body" idx="1"/>
+          </p:nvPr>
+        </p:nvSpPr>
+        <p:spPr/>
+        <p:txBody>
+          <a:bodyPr xmlns:a="http://schemas.openxmlformats.org/drawingml/2006/main"/>
+          <a:lstStyle xmlns:a="http://schemas.openxmlformats.org/drawingml/2006/main"/>
+          <a:p xmlns:a="http://schemas.openxmlformats.org/drawingml/2006/main">
+            <a:r>
+              <a:t>The executable state contrast is sensitive to aggregation at 5 sessions and negative under both lenses at 10. At 20 sessions it is positive under both: about +38 basis points under equal-sector median aggregation and +5 basis points event-pooled. This is a descriptive robustness clue, not horizon-selection permission.</a:t>
+            </a:r>
+          </a:p>
+          <a:p xmlns:a="http://schemas.openxmlformats.org/drawingml/2006/main">
+            <a:r>
+              <a:t/>
+            </a:r>
+          </a:p>
+          <a:p xmlns:a="http://schemas.openxmlformats.org/drawingml/2006/main">
+            <a:r>
+              <a:t>[Sources]</a:t>
+            </a:r>
+          </a:p>
+          <a:p xmlns:a="http://schemas.openxmlformats.org/drawingml/2006/main">
+            <a:r>
+              <a:t>- runs/research_workbench/operator_hypothesis_lab/return_geometry_continuation_next_open_rule_20260829/aggregation_lens_summary.csv</a:t>
+            </a:r>
+          </a:p>
+          <a:p xmlns:a="http://schemas.openxmlformats.org/drawingml/2006/main">
+            <a:r>
+              <a:t>- runs/research_workbench/operator_hypothesis_lab/return_geometry_continuation_next_open_rule_20260829/visuals/sideways_vs_trending_executable_returns.png</a:t>
+            </a:r>
+          </a:p>
+          <a:p xmlns:a="http://schemas.openxmlformats.org/drawingml/2006/main">
+            <a:r>
+              <a:t>[/Sources]</a:t>
+            </a:r>
+          </a:p>
+        </p:txBody>
+      </p:sp>
+      <p:sp>
+        <p:nvSpPr>
+          <p:cNvPr id="4" name="Slide Number Placeholder 3"/>
+          <p:cNvSpPr>
+            <a:spLocks xmlns:a="http://schemas.openxmlformats.org/drawingml/2006/main" noGrp="1"/>
+          </p:cNvSpPr>
+          <p:nvPr>
+            <p:ph type="sldNum" idx="5"/>
+          </p:nvPr>
+        </p:nvSpPr>
+        <p:spPr/>
+        <p:txBody>
+          <a:bodyPr xmlns:a="http://schemas.openxmlformats.org/drawingml/2006/main"/>
+          <a:lstStyle xmlns:a="http://schemas.openxmlformats.org/drawingml/2006/main"/>
+          <a:p xmlns:a="http://schemas.openxmlformats.org/drawingml/2006/main"/>
+        </p:txBody>
+      </p:sp>
+    </p:spTree>
+  </p:cSld>
+  <p:clrMapOvr>
+    <a:masterClrMapping xmlns:a="http://schemas.openxmlformats.org/drawingml/2006/main"/>
+  </p:clrMapOvr>
+</p:notes>
+</file>
+
 <file path=ppt/notesSlides/notesSlide2.xml><?xml version="1.0" encoding="utf-8"?>
 <p:notes xmlns:p="http://schemas.openxmlformats.org/presentationml/2006/main">
   <p:cSld>
@@ -1152,6 +1540,396 @@
           <a:p xmlns:a="http://schemas.openxmlformats.org/drawingml/2006/main">
             <a:r>
               <a:t>- operator_hypothesis_lab/docs/RETURN_GEOMETRY_WIDE_ATLAS_2018_2023.md</a:t>
+            </a:r>
+          </a:p>
+          <a:p xmlns:a="http://schemas.openxmlformats.org/drawingml/2006/main">
+            <a:r>
+              <a:t>[/Sources]</a:t>
+            </a:r>
+          </a:p>
+        </p:txBody>
+      </p:sp>
+      <p:sp>
+        <p:nvSpPr>
+          <p:cNvPr id="4" name="Slide Number Placeholder 3"/>
+          <p:cNvSpPr>
+            <a:spLocks xmlns:a="http://schemas.openxmlformats.org/drawingml/2006/main" noGrp="1"/>
+          </p:cNvSpPr>
+          <p:nvPr>
+            <p:ph type="sldNum" idx="5"/>
+          </p:nvPr>
+        </p:nvSpPr>
+        <p:spPr/>
+        <p:txBody>
+          <a:bodyPr xmlns:a="http://schemas.openxmlformats.org/drawingml/2006/main"/>
+          <a:lstStyle xmlns:a="http://schemas.openxmlformats.org/drawingml/2006/main"/>
+          <a:p xmlns:a="http://schemas.openxmlformats.org/drawingml/2006/main"/>
+        </p:txBody>
+      </p:sp>
+    </p:spTree>
+  </p:cSld>
+  <p:clrMapOvr>
+    <a:masterClrMapping xmlns:a="http://schemas.openxmlformats.org/drawingml/2006/main"/>
+  </p:clrMapOvr>
+</p:notes>
+</file>
+
+<file path=ppt/notesSlides/notesSlide20.xml><?xml version="1.0" encoding="utf-8"?>
+<p:notes xmlns:p="http://schemas.openxmlformats.org/presentationml/2006/main">
+  <p:cSld>
+    <p:spTree>
+      <p:nvGrpSpPr>
+        <p:cNvPr id="1" name=""/>
+        <p:cNvGrpSpPr/>
+        <p:nvPr/>
+      </p:nvGrpSpPr>
+      <p:grpSpPr>
+        <a:xfrm xmlns:a="http://schemas.openxmlformats.org/drawingml/2006/main"/>
+      </p:grpSpPr>
+      <p:sp>
+        <p:nvSpPr>
+          <p:cNvPr id="2" name="Slide Image Placeholder 1"/>
+          <p:cNvSpPr>
+            <a:spLocks xmlns:a="http://schemas.openxmlformats.org/drawingml/2006/main" noGrp="1"/>
+          </p:cNvSpPr>
+          <p:nvPr>
+            <p:ph type="sldImg" idx="0"/>
+          </p:nvPr>
+        </p:nvSpPr>
+        <p:spPr/>
+      </p:sp>
+      <p:sp>
+        <p:nvSpPr>
+          <p:cNvPr id="3" name="Notes Placeholder 2"/>
+          <p:cNvSpPr>
+            <a:spLocks xmlns:a="http://schemas.openxmlformats.org/drawingml/2006/main" noGrp="1"/>
+          </p:cNvSpPr>
+          <p:nvPr>
+            <p:ph type="body" idx="1"/>
+          </p:nvPr>
+        </p:nvSpPr>
+        <p:spPr/>
+        <p:txBody>
+          <a:bodyPr xmlns:a="http://schemas.openxmlformats.org/drawingml/2006/main"/>
+          <a:lstStyle xmlns:a="http://schemas.openxmlformats.org/drawingml/2006/main"/>
+          <a:p xmlns:a="http://schemas.openxmlformats.org/drawingml/2006/main">
+            <a:r>
+              <a:t>Only 1 of 11 sectors has positive median excess at 5 sessions, 2 at 10, and 4 at 20. Energy is the clearest positive exception at longer holds; Utilities and Real Estate remain negative. The breadth does not support an asset-agnostic rule.</a:t>
+            </a:r>
+          </a:p>
+          <a:p xmlns:a="http://schemas.openxmlformats.org/drawingml/2006/main">
+            <a:r>
+              <a:t/>
+            </a:r>
+          </a:p>
+          <a:p xmlns:a="http://schemas.openxmlformats.org/drawingml/2006/main">
+            <a:r>
+              <a:t>[Sources]</a:t>
+            </a:r>
+          </a:p>
+          <a:p xmlns:a="http://schemas.openxmlformats.org/drawingml/2006/main">
+            <a:r>
+              <a:t>- runs/research_workbench/operator_hypothesis_lab/return_geometry_continuation_next_open_rule_20260829/core_sector_horizon_summary.csv</a:t>
+            </a:r>
+          </a:p>
+          <a:p xmlns:a="http://schemas.openxmlformats.org/drawingml/2006/main">
+            <a:r>
+              <a:t>- runs/research_workbench/operator_hypothesis_lab/return_geometry_continuation_next_open_rule_20260829/visuals/sector_excess_heatmap.png</a:t>
+            </a:r>
+          </a:p>
+          <a:p xmlns:a="http://schemas.openxmlformats.org/drawingml/2006/main">
+            <a:r>
+              <a:t>[/Sources]</a:t>
+            </a:r>
+          </a:p>
+        </p:txBody>
+      </p:sp>
+      <p:sp>
+        <p:nvSpPr>
+          <p:cNvPr id="4" name="Slide Number Placeholder 3"/>
+          <p:cNvSpPr>
+            <a:spLocks xmlns:a="http://schemas.openxmlformats.org/drawingml/2006/main" noGrp="1"/>
+          </p:cNvSpPr>
+          <p:nvPr>
+            <p:ph type="sldNum" idx="5"/>
+          </p:nvPr>
+        </p:nvSpPr>
+        <p:spPr/>
+        <p:txBody>
+          <a:bodyPr xmlns:a="http://schemas.openxmlformats.org/drawingml/2006/main"/>
+          <a:lstStyle xmlns:a="http://schemas.openxmlformats.org/drawingml/2006/main"/>
+          <a:p xmlns:a="http://schemas.openxmlformats.org/drawingml/2006/main"/>
+        </p:txBody>
+      </p:sp>
+    </p:spTree>
+  </p:cSld>
+  <p:clrMapOvr>
+    <a:masterClrMapping xmlns:a="http://schemas.openxmlformats.org/drawingml/2006/main"/>
+  </p:clrMapOvr>
+</p:notes>
+</file>
+
+<file path=ppt/notesSlides/notesSlide21.xml><?xml version="1.0" encoding="utf-8"?>
+<p:notes xmlns:p="http://schemas.openxmlformats.org/presentationml/2006/main">
+  <p:cSld>
+    <p:spTree>
+      <p:nvGrpSpPr>
+        <p:cNvPr id="1" name=""/>
+        <p:cNvGrpSpPr/>
+        <p:nvPr/>
+      </p:nvGrpSpPr>
+      <p:grpSpPr>
+        <a:xfrm xmlns:a="http://schemas.openxmlformats.org/drawingml/2006/main"/>
+      </p:grpSpPr>
+      <p:sp>
+        <p:nvSpPr>
+          <p:cNvPr id="2" name="Slide Image Placeholder 1"/>
+          <p:cNvSpPr>
+            <a:spLocks xmlns:a="http://schemas.openxmlformats.org/drawingml/2006/main" noGrp="1"/>
+          </p:cNvSpPr>
+          <p:nvPr>
+            <p:ph type="sldImg" idx="0"/>
+          </p:nvPr>
+        </p:nvSpPr>
+        <p:spPr/>
+      </p:sp>
+      <p:sp>
+        <p:nvSpPr>
+          <p:cNvPr id="3" name="Notes Placeholder 2"/>
+          <p:cNvSpPr>
+            <a:spLocks xmlns:a="http://schemas.openxmlformats.org/drawingml/2006/main" noGrp="1"/>
+          </p:cNvSpPr>
+          <p:nvPr>
+            <p:ph type="body" idx="1"/>
+          </p:nvPr>
+        </p:nvSpPr>
+        <p:spPr/>
+        <p:txBody>
+          <a:bodyPr xmlns:a="http://schemas.openxmlformats.org/drawingml/2006/main"/>
+          <a:lstStyle xmlns:a="http://schemas.openxmlformats.org/drawingml/2006/main"/>
+          <a:p xmlns:a="http://schemas.openxmlformats.org/drawingml/2006/main">
+            <a:r>
+              <a:t>Event-pooled trade paths show trending-positive entries ahead through the 5- and 10-session holds. The paths converge near the end of the 20-session hold, where sideways-positive finishes modestly ahead. This timing shape helps explain why the correlation surface did not translate cleanly at shorter horizons.</a:t>
+            </a:r>
+          </a:p>
+          <a:p xmlns:a="http://schemas.openxmlformats.org/drawingml/2006/main">
+            <a:r>
+              <a:t/>
+            </a:r>
+          </a:p>
+          <a:p xmlns:a="http://schemas.openxmlformats.org/drawingml/2006/main">
+            <a:r>
+              <a:t>[Sources]</a:t>
+            </a:r>
+          </a:p>
+          <a:p xmlns:a="http://schemas.openxmlformats.org/drawingml/2006/main">
+            <a:r>
+              <a:t>- runs/research_workbench/operator_hypothesis_lab/return_geometry_continuation_next_open_rule_20260829/trade_path_summary.csv</a:t>
+            </a:r>
+          </a:p>
+          <a:p xmlns:a="http://schemas.openxmlformats.org/drawingml/2006/main">
+            <a:r>
+              <a:t>- runs/research_workbench/operator_hypothesis_lab/return_geometry_continuation_next_open_rule_20260829/visuals/sideways_vs_trending_trade_paths.png</a:t>
+            </a:r>
+          </a:p>
+          <a:p xmlns:a="http://schemas.openxmlformats.org/drawingml/2006/main">
+            <a:r>
+              <a:t>[/Sources]</a:t>
+            </a:r>
+          </a:p>
+        </p:txBody>
+      </p:sp>
+      <p:sp>
+        <p:nvSpPr>
+          <p:cNvPr id="4" name="Slide Number Placeholder 3"/>
+          <p:cNvSpPr>
+            <a:spLocks xmlns:a="http://schemas.openxmlformats.org/drawingml/2006/main" noGrp="1"/>
+          </p:cNvSpPr>
+          <p:nvPr>
+            <p:ph type="sldNum" idx="5"/>
+          </p:nvPr>
+        </p:nvSpPr>
+        <p:spPr/>
+        <p:txBody>
+          <a:bodyPr xmlns:a="http://schemas.openxmlformats.org/drawingml/2006/main"/>
+          <a:lstStyle xmlns:a="http://schemas.openxmlformats.org/drawingml/2006/main"/>
+          <a:p xmlns:a="http://schemas.openxmlformats.org/drawingml/2006/main"/>
+        </p:txBody>
+      </p:sp>
+    </p:spTree>
+  </p:cSld>
+  <p:clrMapOvr>
+    <a:masterClrMapping xmlns:a="http://schemas.openxmlformats.org/drawingml/2006/main"/>
+  </p:clrMapOvr>
+</p:notes>
+</file>
+
+<file path=ppt/notesSlides/notesSlide22.xml><?xml version="1.0" encoding="utf-8"?>
+<p:notes xmlns:p="http://schemas.openxmlformats.org/presentationml/2006/main">
+  <p:cSld>
+    <p:spTree>
+      <p:nvGrpSpPr>
+        <p:cNvPr id="1" name=""/>
+        <p:cNvGrpSpPr/>
+        <p:nvPr/>
+      </p:nvGrpSpPr>
+      <p:grpSpPr>
+        <a:xfrm xmlns:a="http://schemas.openxmlformats.org/drawingml/2006/main"/>
+      </p:grpSpPr>
+      <p:sp>
+        <p:nvSpPr>
+          <p:cNvPr id="2" name="Slide Image Placeholder 1"/>
+          <p:cNvSpPr>
+            <a:spLocks xmlns:a="http://schemas.openxmlformats.org/drawingml/2006/main" noGrp="1"/>
+          </p:cNvSpPr>
+          <p:nvPr>
+            <p:ph type="sldImg" idx="0"/>
+          </p:nvPr>
+        </p:nvSpPr>
+        <p:spPr/>
+      </p:sp>
+      <p:sp>
+        <p:nvSpPr>
+          <p:cNvPr id="3" name="Notes Placeholder 2"/>
+          <p:cNvSpPr>
+            <a:spLocks xmlns:a="http://schemas.openxmlformats.org/drawingml/2006/main" noGrp="1"/>
+          </p:cNvSpPr>
+          <p:nvPr>
+            <p:ph type="body" idx="1"/>
+          </p:nvPr>
+        </p:nvSpPr>
+        <p:spPr/>
+        <p:txBody>
+          <a:bodyPr xmlns:a="http://schemas.openxmlformats.org/drawingml/2006/main"/>
+          <a:lstStyle xmlns:a="http://schemas.openxmlformats.org/drawingml/2006/main"/>
+          <a:p xmlns:a="http://schemas.openxmlformats.org/drawingml/2006/main">
+            <a:r>
+              <a:t>The first eligible 10-session event is shown for TSLA, AMD, NVDA, and SPY. TSLA, AMD, and NVDA happen to be profitable while SPY is slightly negative. These deterministic examples make the mechanics concrete but do not override the weak aggregate baseline comparison.</a:t>
+            </a:r>
+          </a:p>
+          <a:p xmlns:a="http://schemas.openxmlformats.org/drawingml/2006/main">
+            <a:r>
+              <a:t/>
+            </a:r>
+          </a:p>
+          <a:p xmlns:a="http://schemas.openxmlformats.org/drawingml/2006/main">
+            <a:r>
+              <a:t>[Sources]</a:t>
+            </a:r>
+          </a:p>
+          <a:p xmlns:a="http://schemas.openxmlformats.org/drawingml/2006/main">
+            <a:r>
+              <a:t>- runs/research_workbench/operator_hypothesis_lab/return_geometry_continuation_next_open_rule_20260829/trade_ledger.csv</a:t>
+            </a:r>
+          </a:p>
+          <a:p xmlns:a="http://schemas.openxmlformats.org/drawingml/2006/main">
+            <a:r>
+              <a:t>- runs/research_workbench/operator_hypothesis_lab/return_geometry_continuation_next_open_rule_20260829/visuals/representative_primary_trade_tapes.png</a:t>
+            </a:r>
+          </a:p>
+          <a:p xmlns:a="http://schemas.openxmlformats.org/drawingml/2006/main">
+            <a:r>
+              <a:t>[/Sources]</a:t>
+            </a:r>
+          </a:p>
+        </p:txBody>
+      </p:sp>
+      <p:sp>
+        <p:nvSpPr>
+          <p:cNvPr id="4" name="Slide Number Placeholder 3"/>
+          <p:cNvSpPr>
+            <a:spLocks xmlns:a="http://schemas.openxmlformats.org/drawingml/2006/main" noGrp="1"/>
+          </p:cNvSpPr>
+          <p:nvPr>
+            <p:ph type="sldNum" idx="5"/>
+          </p:nvPr>
+        </p:nvSpPr>
+        <p:spPr/>
+        <p:txBody>
+          <a:bodyPr xmlns:a="http://schemas.openxmlformats.org/drawingml/2006/main"/>
+          <a:lstStyle xmlns:a="http://schemas.openxmlformats.org/drawingml/2006/main"/>
+          <a:p xmlns:a="http://schemas.openxmlformats.org/drawingml/2006/main"/>
+        </p:txBody>
+      </p:sp>
+    </p:spTree>
+  </p:cSld>
+  <p:clrMapOvr>
+    <a:masterClrMapping xmlns:a="http://schemas.openxmlformats.org/drawingml/2006/main"/>
+  </p:clrMapOvr>
+</p:notes>
+</file>
+
+<file path=ppt/notesSlides/notesSlide23.xml><?xml version="1.0" encoding="utf-8"?>
+<p:notes xmlns:p="http://schemas.openxmlformats.org/presentationml/2006/main">
+  <p:cSld>
+    <p:spTree>
+      <p:nvGrpSpPr>
+        <p:cNvPr id="1" name=""/>
+        <p:cNvGrpSpPr/>
+        <p:nvPr/>
+      </p:nvGrpSpPr>
+      <p:grpSpPr>
+        <a:xfrm xmlns:a="http://schemas.openxmlformats.org/drawingml/2006/main"/>
+      </p:grpSpPr>
+      <p:sp>
+        <p:nvSpPr>
+          <p:cNvPr id="2" name="Slide Image Placeholder 1"/>
+          <p:cNvSpPr>
+            <a:spLocks xmlns:a="http://schemas.openxmlformats.org/drawingml/2006/main" noGrp="1"/>
+          </p:cNvSpPr>
+          <p:nvPr>
+            <p:ph type="sldImg" idx="0"/>
+          </p:nvPr>
+        </p:nvSpPr>
+        <p:spPr/>
+      </p:sp>
+      <p:sp>
+        <p:nvSpPr>
+          <p:cNvPr id="3" name="Notes Placeholder 2"/>
+          <p:cNvSpPr>
+            <a:spLocks xmlns:a="http://schemas.openxmlformats.org/drawingml/2006/main" noGrp="1"/>
+          </p:cNvSpPr>
+          <p:nvPr>
+            <p:ph type="body" idx="1"/>
+          </p:nvPr>
+        </p:nvSpPr>
+        <p:spPr/>
+        <p:txBody>
+          <a:bodyPr xmlns:a="http://schemas.openxmlformats.org/drawingml/2006/main"/>
+          <a:lstStyle xmlns:a="http://schemas.openxmlformats.org/drawingml/2006/main"/>
+          <a:p xmlns:a="http://schemas.openxmlformats.org/drawingml/2006/main">
+            <a:r>
+              <a:t>The minimal rule translated cleanly into next-open mechanics but did not beat unconditional drift at any frozen hold. The 20-session sideways-versus-trending contrast deserves context because it is positive under both aggregation lenses, yet the positive-return condition itself underperforms sideways-state-only. The correct status is a transparent TRAIN stop before horizon selection or OOS—not an edge claim and not a dead-end verdict on all continuation ideas.</a:t>
+            </a:r>
+          </a:p>
+          <a:p xmlns:a="http://schemas.openxmlformats.org/drawingml/2006/main">
+            <a:r>
+              <a:t/>
+            </a:r>
+          </a:p>
+          <a:p xmlns:a="http://schemas.openxmlformats.org/drawingml/2006/main">
+            <a:r>
+              <a:t>[Sources]</a:t>
+            </a:r>
+          </a:p>
+          <a:p xmlns:a="http://schemas.openxmlformats.org/drawingml/2006/main">
+            <a:r>
+              <a:t>- runs/research_workbench/operator_hypothesis_lab/return_geometry_continuation_next_open_rule_20260829/report.md</a:t>
+            </a:r>
+          </a:p>
+          <a:p xmlns:a="http://schemas.openxmlformats.org/drawingml/2006/main">
+            <a:r>
+              <a:t>- runs/research_workbench/operator_hypothesis_lab/return_geometry_continuation_next_open_rule_20260829/equal_sector_horizon_summary.csv</a:t>
+            </a:r>
+          </a:p>
+          <a:p xmlns:a="http://schemas.openxmlformats.org/drawingml/2006/main">
+            <a:r>
+              <a:t>- runs/research_workbench/operator_hypothesis_lab/return_geometry_continuation_next_open_rule_20260829/aggregation_lens_summary.csv</a:t>
+            </a:r>
+          </a:p>
+          <a:p xmlns:a="http://schemas.openxmlformats.org/drawingml/2006/main">
+            <a:r>
+              <a:t>- operator_hypothesis_lab/docs/RETURN_GEOMETRY_DAILY_CONTINUATION_MICROSCOPE_2018_2023.md</a:t>
             </a:r>
           </a:p>
           <a:p xmlns:a="http://schemas.openxmlformats.org/drawingml/2006/main">
@@ -1894,7 +2672,7 @@
   </p:cSld>
   <p:clrMap bg1="lt1" tx1="dk1" bg2="lt2" tx2="dk2" accent1="accent1" accent2="accent2" accent3="accent3" accent4="accent4" accent5="accent5" accent6="accent6" hlink="hlink" folHlink="folHlink"/>
   <p:sldLayoutIdLst>
-    <p:sldLayoutId xmlns:r="http://schemas.openxmlformats.org/officeDocument/2006/relationships" id="2147483649" r:id="R646df8c041414fa7"/>
+    <p:sldLayoutId xmlns:r="http://schemas.openxmlformats.org/officeDocument/2006/relationships" id="2147483649" r:id="R61c7f835a86d478b"/>
   </p:sldLayoutIdLst>
   <p:txStyles>
     <p:titleStyle>
@@ -3352,7 +4130,7 @@
           <p:nvPr/>
         </p:nvPicPr>
         <p:blipFill>
-          <a:blip xmlns:r="http://schemas.openxmlformats.org/officeDocument/2006/relationships" xmlns:a="http://schemas.openxmlformats.org/drawingml/2006/main" r:embed="R00d18af808c14119"/>
+          <a:blip xmlns:r="http://schemas.openxmlformats.org/officeDocument/2006/relationships" xmlns:a="http://schemas.openxmlformats.org/drawingml/2006/main" r:embed="R9ec3a5842a9d4d03"/>
           <a:stretch xmlns:a="http://schemas.openxmlformats.org/drawingml/2006/main"/>
         </p:blipFill>
         <p:spPr>
@@ -3672,7 +4450,7 @@
           <p:nvPr/>
         </p:nvPicPr>
         <p:blipFill>
-          <a:blip xmlns:r="http://schemas.openxmlformats.org/officeDocument/2006/relationships" xmlns:a="http://schemas.openxmlformats.org/drawingml/2006/main" r:embed="R5b993ed231214726"/>
+          <a:blip xmlns:r="http://schemas.openxmlformats.org/officeDocument/2006/relationships" xmlns:a="http://schemas.openxmlformats.org/drawingml/2006/main" r:embed="Rdf2d6d453acd4226"/>
           <a:stretch xmlns:a="http://schemas.openxmlformats.org/drawingml/2006/main"/>
         </p:blipFill>
         <p:spPr>
@@ -3992,7 +4770,7 @@
           <p:nvPr/>
         </p:nvPicPr>
         <p:blipFill>
-          <a:blip xmlns:r="http://schemas.openxmlformats.org/officeDocument/2006/relationships" xmlns:a="http://schemas.openxmlformats.org/drawingml/2006/main" r:embed="R49713716ac59446d"/>
+          <a:blip xmlns:r="http://schemas.openxmlformats.org/officeDocument/2006/relationships" xmlns:a="http://schemas.openxmlformats.org/drawingml/2006/main" r:embed="R090dedc108d9446a"/>
           <a:stretch xmlns:a="http://schemas.openxmlformats.org/drawingml/2006/main"/>
         </p:blipFill>
         <p:spPr>
@@ -4312,7 +5090,7 @@
           <p:nvPr/>
         </p:nvPicPr>
         <p:blipFill>
-          <a:blip xmlns:r="http://schemas.openxmlformats.org/officeDocument/2006/relationships" xmlns:a="http://schemas.openxmlformats.org/drawingml/2006/main" r:embed="Rcbdfc70cd8724c43"/>
+          <a:blip xmlns:r="http://schemas.openxmlformats.org/officeDocument/2006/relationships" xmlns:a="http://schemas.openxmlformats.org/drawingml/2006/main" r:embed="Rfff5e28198364a7c"/>
           <a:stretch xmlns:a="http://schemas.openxmlformats.org/drawingml/2006/main"/>
         </p:blipFill>
         <p:spPr>
@@ -5513,6 +6291,2141 @@
 </p:sld>
 </file>
 
+<file path=ppt/slides/slide16.xml><?xml version="1.0" encoding="utf-8"?>
+<p:sld xmlns:p="http://schemas.openxmlformats.org/presentationml/2006/main">
+  <p:cSld>
+    <p:bg>
+      <p:bgPr>
+        <a:solidFill xmlns:a="http://schemas.openxmlformats.org/drawingml/2006/main">
+          <a:srgbClr val="FFFFFF"/>
+        </a:solidFill>
+      </p:bgPr>
+    </p:bg>
+    <p:spTree>
+      <p:nvGrpSpPr>
+        <p:cNvPr id="1" name=""/>
+        <p:cNvGrpSpPr/>
+        <p:nvPr/>
+      </p:nvGrpSpPr>
+      <p:grpSpPr>
+        <a:xfrm xmlns:a="http://schemas.openxmlformats.org/drawingml/2006/main"/>
+      </p:grpSpPr>
+      <p:sp>
+        <p:nvSpPr>
+          <p:cNvPr id="7" name="">
+            <a:extLst xmlns:a="http://schemas.openxmlformats.org/drawingml/2006/main">
+              <a:ext uri="{FF2B5EF4-FFF2-40B4-BE49-F238E27FC236}">
+                <a16:creationId xmlns:a16="http://schemas.microsoft.com/office/drawing/2014/main" id="{DB12B881-2D87-4470-A9E2-CA40D710634E}"/>
+              </a:ext>
+            </a:extLst>
+          </p:cNvPr>
+          <p:cNvSpPr>
+            <a:spLocks xmlns:a="http://schemas.openxmlformats.org/drawingml/2006/main" noGrp="1"/>
+          </p:cNvSpPr>
+          <p:nvPr/>
+        </p:nvSpPr>
+        <p:spPr>
+          <a:xfrm xmlns:a="http://schemas.openxmlformats.org/drawingml/2006/main">
+            <a:off x="457200" y="400050"/>
+            <a:ext cx="4000500" cy="266700"/>
+          </a:xfrm>
+          <a:prstGeom xmlns:a="http://schemas.openxmlformats.org/drawingml/2006/main" prst="rect">
+            <a:avLst/>
+          </a:prstGeom>
+          <a:noFill xmlns:a="http://schemas.openxmlformats.org/drawingml/2006/main"/>
+          <a:ln xmlns:a="http://schemas.openxmlformats.org/drawingml/2006/main" w="0">
+            <a:noFill/>
+            <a:prstDash val="solid"/>
+          </a:ln>
+        </p:spPr>
+        <p:txBody>
+          <a:bodyPr xmlns:a="http://schemas.openxmlformats.org/drawingml/2006/main"/>
+          <a:lstStyle xmlns:a="http://schemas.openxmlformats.org/drawingml/2006/main"/>
+          <a:p xmlns:a="http://schemas.openxmlformats.org/drawingml/2006/main">
+            <a:pPr>
+              <a:buNone/>
+              <a:defRPr sz="1350" b="1">
+                <a:solidFill>
+                  <a:srgbClr val="E45756"/>
+                </a:solidFill>
+              </a:defRPr>
+            </a:pPr>
+            <a:r>
+              <a:rPr sz="1350" b="1">
+                <a:solidFill>
+                  <a:srgbClr val="E45756"/>
+                </a:solidFill>
+              </a:rPr>
+              <a:t>OPEN-TO-OPEN</a:t>
+            </a:r>
+          </a:p>
+        </p:txBody>
+      </p:sp>
+      <p:sp>
+        <p:nvSpPr>
+          <p:cNvPr id="2" name="">
+            <a:extLst xmlns:a="http://schemas.openxmlformats.org/drawingml/2006/main">
+              <a:ext uri="{FF2B5EF4-FFF2-40B4-BE49-F238E27FC236}">
+                <a16:creationId xmlns:a16="http://schemas.microsoft.com/office/drawing/2014/main" id="{0BB2094F-C042-49AB-BE8C-0ECFD22457DD}"/>
+              </a:ext>
+            </a:extLst>
+          </p:cNvPr>
+          <p:cNvSpPr>
+            <a:spLocks xmlns:a="http://schemas.openxmlformats.org/drawingml/2006/main" noGrp="1"/>
+          </p:cNvSpPr>
+          <p:nvPr/>
+        </p:nvSpPr>
+        <p:spPr>
+          <a:xfrm xmlns:a="http://schemas.openxmlformats.org/drawingml/2006/main">
+            <a:off x="457200" y="1562100"/>
+            <a:ext cx="10763250" cy="1809750"/>
+          </a:xfrm>
+          <a:prstGeom xmlns:a="http://schemas.openxmlformats.org/drawingml/2006/main" prst="rect">
+            <a:avLst/>
+          </a:prstGeom>
+          <a:noFill xmlns:a="http://schemas.openxmlformats.org/drawingml/2006/main"/>
+          <a:ln xmlns:a="http://schemas.openxmlformats.org/drawingml/2006/main" w="0">
+            <a:noFill/>
+            <a:prstDash val="solid"/>
+          </a:ln>
+        </p:spPr>
+        <p:txBody>
+          <a:bodyPr xmlns:a="http://schemas.openxmlformats.org/drawingml/2006/main"/>
+          <a:lstStyle xmlns:a="http://schemas.openxmlformats.org/drawingml/2006/main"/>
+          <a:p xmlns:a="http://schemas.openxmlformats.org/drawingml/2006/main">
+            <a:pPr>
+              <a:buNone/>
+              <a:defRPr sz="4350" b="1">
+                <a:solidFill>
+                  <a:srgbClr val="111827"/>
+                </a:solidFill>
+              </a:defRPr>
+            </a:pPr>
+            <a:r>
+              <a:rPr sz="4350" b="1">
+                <a:solidFill>
+                  <a:srgbClr val="111827"/>
+                </a:solidFill>
+              </a:rPr>
+              <a:t>A descriptive state contrast becomes an executable rule</a:t>
+            </a:r>
+          </a:p>
+        </p:txBody>
+      </p:sp>
+      <p:sp>
+        <p:nvSpPr>
+          <p:cNvPr id="3" name="">
+            <a:extLst xmlns:a="http://schemas.openxmlformats.org/drawingml/2006/main">
+              <a:ext uri="{FF2B5EF4-FFF2-40B4-BE49-F238E27FC236}">
+                <a16:creationId xmlns:a16="http://schemas.microsoft.com/office/drawing/2014/main" id="{D8394FB8-5765-4318-8A56-6DACECFE912E}"/>
+              </a:ext>
+            </a:extLst>
+          </p:cNvPr>
+          <p:cNvSpPr>
+            <a:spLocks xmlns:a="http://schemas.openxmlformats.org/drawingml/2006/main" noGrp="1"/>
+          </p:cNvSpPr>
+          <p:nvPr/>
+        </p:nvSpPr>
+        <p:spPr>
+          <a:xfrm xmlns:a="http://schemas.openxmlformats.org/drawingml/2006/main">
+            <a:off x="457200" y="3714750"/>
+            <a:ext cx="1257300" cy="76200"/>
+          </a:xfrm>
+          <a:prstGeom xmlns:a="http://schemas.openxmlformats.org/drawingml/2006/main" prst="rect">
+            <a:avLst/>
+          </a:prstGeom>
+          <a:solidFill xmlns:a="http://schemas.openxmlformats.org/drawingml/2006/main">
+            <a:srgbClr val="E45756"/>
+          </a:solidFill>
+          <a:ln xmlns:a="http://schemas.openxmlformats.org/drawingml/2006/main" w="9525">
+            <a:solidFill>
+              <a:srgbClr val="E45756"/>
+            </a:solidFill>
+            <a:prstDash val="solid"/>
+          </a:ln>
+        </p:spPr>
+      </p:sp>
+      <p:sp>
+        <p:nvSpPr>
+          <p:cNvPr id="4" name="">
+            <a:extLst xmlns:a="http://schemas.openxmlformats.org/drawingml/2006/main">
+              <a:ext uri="{FF2B5EF4-FFF2-40B4-BE49-F238E27FC236}">
+                <a16:creationId xmlns:a16="http://schemas.microsoft.com/office/drawing/2014/main" id="{67E3D676-3E4E-40CF-9FFA-FDD3E7F4C6B2}"/>
+              </a:ext>
+            </a:extLst>
+          </p:cNvPr>
+          <p:cNvSpPr>
+            <a:spLocks xmlns:a="http://schemas.openxmlformats.org/drawingml/2006/main" noGrp="1"/>
+          </p:cNvSpPr>
+          <p:nvPr/>
+        </p:nvSpPr>
+        <p:spPr>
+          <a:xfrm xmlns:a="http://schemas.openxmlformats.org/drawingml/2006/main">
+            <a:off x="457200" y="4171950"/>
+            <a:ext cx="9906000" cy="685800"/>
+          </a:xfrm>
+          <a:prstGeom xmlns:a="http://schemas.openxmlformats.org/drawingml/2006/main" prst="rect">
+            <a:avLst/>
+          </a:prstGeom>
+          <a:noFill xmlns:a="http://schemas.openxmlformats.org/drawingml/2006/main"/>
+          <a:ln xmlns:a="http://schemas.openxmlformats.org/drawingml/2006/main" w="0">
+            <a:noFill/>
+            <a:prstDash val="solid"/>
+          </a:ln>
+        </p:spPr>
+        <p:txBody>
+          <a:bodyPr xmlns:a="http://schemas.openxmlformats.org/drawingml/2006/main"/>
+          <a:lstStyle xmlns:a="http://schemas.openxmlformats.org/drawingml/2006/main"/>
+          <a:p xmlns:a="http://schemas.openxmlformats.org/drawingml/2006/main">
+            <a:pPr>
+              <a:buNone/>
+              <a:defRPr sz="2025" b="0">
+                <a:solidFill>
+                  <a:srgbClr val="667384"/>
+                </a:solidFill>
+              </a:defRPr>
+            </a:pPr>
+            <a:r>
+              <a:rPr sz="2025" b="0">
+                <a:solidFill>
+                  <a:srgbClr val="667384"/>
+                </a:solidFill>
+              </a:rPr>
+              <a:t>Signal at the close; trade at the next open; three frozen holds</a:t>
+            </a:r>
+          </a:p>
+        </p:txBody>
+      </p:sp>
+      <p:sp>
+        <p:nvSpPr>
+          <p:cNvPr id="5" name="">
+            <a:extLst xmlns:a="http://schemas.openxmlformats.org/drawingml/2006/main">
+              <a:ext uri="{FF2B5EF4-FFF2-40B4-BE49-F238E27FC236}">
+                <a16:creationId xmlns:a16="http://schemas.microsoft.com/office/drawing/2014/main" id="{AF79BB13-9AEC-4C77-9A8C-3203F83002E1}"/>
+              </a:ext>
+            </a:extLst>
+          </p:cNvPr>
+          <p:cNvSpPr>
+            <a:spLocks xmlns:a="http://schemas.openxmlformats.org/drawingml/2006/main" noGrp="1"/>
+          </p:cNvSpPr>
+          <p:nvPr/>
+        </p:nvSpPr>
+        <p:spPr>
+          <a:xfrm xmlns:a="http://schemas.openxmlformats.org/drawingml/2006/main">
+            <a:off x="457200" y="5429250"/>
+            <a:ext cx="10477500" cy="609600"/>
+          </a:xfrm>
+          <a:prstGeom xmlns:a="http://schemas.openxmlformats.org/drawingml/2006/main" prst="rect">
+            <a:avLst/>
+          </a:prstGeom>
+          <a:noFill xmlns:a="http://schemas.openxmlformats.org/drawingml/2006/main"/>
+          <a:ln xmlns:a="http://schemas.openxmlformats.org/drawingml/2006/main" w="0">
+            <a:noFill/>
+            <a:prstDash val="solid"/>
+          </a:ln>
+        </p:spPr>
+        <p:txBody>
+          <a:bodyPr xmlns:a="http://schemas.openxmlformats.org/drawingml/2006/main"/>
+          <a:lstStyle xmlns:a="http://schemas.openxmlformats.org/drawingml/2006/main"/>
+          <a:p xmlns:a="http://schemas.openxmlformats.org/drawingml/2006/main">
+            <a:pPr>
+              <a:buNone/>
+              <a:defRPr sz="1575" b="0">
+                <a:solidFill>
+                  <a:srgbClr val="667384"/>
+                </a:solidFill>
+              </a:defRPr>
+            </a:pPr>
+            <a:r>
+              <a:rPr sz="1575" b="0">
+                <a:solidFill>
+                  <a:srgbClr val="667384"/>
+                </a:solidFill>
+              </a:rPr>
+              <a:t>R20 &gt; 0 • ER20 &lt; 0.30 • 5 / 10 / 20 sessions • 10 bp • post-2023 sealed</a:t>
+            </a:r>
+          </a:p>
+        </p:txBody>
+      </p:sp>
+      <p:sp>
+        <p:nvSpPr>
+          <p:cNvPr id="6" name="">
+            <a:extLst xmlns:a="http://schemas.openxmlformats.org/drawingml/2006/main">
+              <a:ext uri="{FF2B5EF4-FFF2-40B4-BE49-F238E27FC236}">
+                <a16:creationId xmlns:a16="http://schemas.microsoft.com/office/drawing/2014/main" id="{AD589277-BA8D-465E-8FE0-58FC0F7326BE}"/>
+              </a:ext>
+            </a:extLst>
+          </p:cNvPr>
+          <p:cNvSpPr>
+            <a:spLocks xmlns:a="http://schemas.openxmlformats.org/drawingml/2006/main" noGrp="1"/>
+          </p:cNvSpPr>
+          <p:nvPr/>
+        </p:nvSpPr>
+        <p:spPr>
+          <a:xfrm xmlns:a="http://schemas.openxmlformats.org/drawingml/2006/main">
+            <a:off x="11239500" y="6496050"/>
+            <a:ext cx="495300" cy="190500"/>
+          </a:xfrm>
+          <a:prstGeom xmlns:a="http://schemas.openxmlformats.org/drawingml/2006/main" prst="rect">
+            <a:avLst/>
+          </a:prstGeom>
+          <a:noFill xmlns:a="http://schemas.openxmlformats.org/drawingml/2006/main"/>
+          <a:ln xmlns:a="http://schemas.openxmlformats.org/drawingml/2006/main" w="0">
+            <a:noFill/>
+            <a:prstDash val="solid"/>
+          </a:ln>
+        </p:spPr>
+        <p:txBody>
+          <a:bodyPr xmlns:a="http://schemas.openxmlformats.org/drawingml/2006/main"/>
+          <a:lstStyle xmlns:a="http://schemas.openxmlformats.org/drawingml/2006/main"/>
+          <a:p xmlns:a="http://schemas.openxmlformats.org/drawingml/2006/main">
+            <a:pPr algn="r">
+              <a:buNone/>
+              <a:defRPr sz="900" b="0">
+                <a:solidFill>
+                  <a:srgbClr val="667384"/>
+                </a:solidFill>
+              </a:defRPr>
+            </a:pPr>
+            <a:r>
+              <a:rPr sz="900" b="0">
+                <a:solidFill>
+                  <a:srgbClr val="667384"/>
+                </a:solidFill>
+              </a:rPr>
+              <a:t>16</a:t>
+            </a:r>
+          </a:p>
+        </p:txBody>
+      </p:sp>
+    </p:spTree>
+    <p:extLst>
+      <p:ext uri="{BB962C8B-B14F-4D97-AF65-F5344CB8AC3E}">
+        <p14:creationId xmlns:p14="http://schemas.microsoft.com/office/powerpoint/2010/main" val="1697167073"/>
+      </p:ext>
+    </p:extLst>
+  </p:cSld>
+</p:sld>
+</file>
+
+<file path=ppt/slides/slide17.xml><?xml version="1.0" encoding="utf-8"?>
+<p:sld xmlns:p="http://schemas.openxmlformats.org/presentationml/2006/main">
+  <p:cSld>
+    <p:bg>
+      <p:bgPr>
+        <a:solidFill xmlns:a="http://schemas.openxmlformats.org/drawingml/2006/main">
+          <a:srgbClr val="FFFFFF"/>
+        </a:solidFill>
+      </p:bgPr>
+    </p:bg>
+    <p:spTree>
+      <p:nvGrpSpPr>
+        <p:cNvPr id="1" name=""/>
+        <p:cNvGrpSpPr/>
+        <p:nvPr/>
+      </p:nvGrpSpPr>
+      <p:grpSpPr>
+        <a:xfrm xmlns:a="http://schemas.openxmlformats.org/drawingml/2006/main"/>
+      </p:grpSpPr>
+      <p:sp>
+        <p:nvSpPr>
+          <p:cNvPr id="24" name="section-11">
+            <a:extLst xmlns:a="http://schemas.openxmlformats.org/drawingml/2006/main">
+              <a:ext uri="{FF2B5EF4-FFF2-40B4-BE49-F238E27FC236}">
+                <a16:creationId xmlns:a16="http://schemas.microsoft.com/office/drawing/2014/main" id="{272ED433-B59C-436C-9DFB-4D317B90A13F}"/>
+              </a:ext>
+            </a:extLst>
+          </p:cNvPr>
+          <p:cNvSpPr>
+            <a:spLocks xmlns:a="http://schemas.openxmlformats.org/drawingml/2006/main" noGrp="1"/>
+          </p:cNvSpPr>
+          <p:nvPr/>
+        </p:nvSpPr>
+        <p:spPr>
+          <a:xfrm xmlns:a="http://schemas.openxmlformats.org/drawingml/2006/main">
+            <a:off x="457200" y="228600"/>
+            <a:ext cx="4191000" cy="228600"/>
+          </a:xfrm>
+          <a:prstGeom xmlns:a="http://schemas.openxmlformats.org/drawingml/2006/main" prst="rect">
+            <a:avLst/>
+          </a:prstGeom>
+          <a:noFill xmlns:a="http://schemas.openxmlformats.org/drawingml/2006/main"/>
+          <a:ln xmlns:a="http://schemas.openxmlformats.org/drawingml/2006/main" w="0">
+            <a:noFill/>
+            <a:prstDash val="solid"/>
+          </a:ln>
+        </p:spPr>
+        <p:txBody>
+          <a:bodyPr xmlns:a="http://schemas.openxmlformats.org/drawingml/2006/main" wrap="square" lIns="0" tIns="0" rIns="0" bIns="0" anchor="t">
+            <a:normAutofit fontScale="100000"/>
+          </a:bodyPr>
+          <a:lstStyle xmlns:a="http://schemas.openxmlformats.org/drawingml/2006/main"/>
+          <a:p xmlns:a="http://schemas.openxmlformats.org/drawingml/2006/main">
+            <a:pPr algn="l">
+              <a:buNone/>
+              <a:defRPr sz="1200" b="1">
+                <a:solidFill>
+                  <a:srgbClr val="667384"/>
+                </a:solidFill>
+                <a:latin typeface="Arial"/>
+                <a:ea typeface="Arial"/>
+                <a:cs typeface="Arial"/>
+              </a:defRPr>
+            </a:pPr>
+            <a:r>
+              <a:rPr sz="1200" b="1">
+                <a:solidFill>
+                  <a:srgbClr val="667384"/>
+                </a:solidFill>
+                <a:latin typeface="Arial"/>
+                <a:ea typeface="Arial"/>
+                <a:cs typeface="Arial"/>
+              </a:rPr>
+              <a:t>FROZEN RULE</a:t>
+            </a:r>
+          </a:p>
+        </p:txBody>
+      </p:sp>
+      <p:sp>
+        <p:nvSpPr>
+          <p:cNvPr id="2" name="title-11">
+            <a:extLst xmlns:a="http://schemas.openxmlformats.org/drawingml/2006/main">
+              <a:ext uri="{FF2B5EF4-FFF2-40B4-BE49-F238E27FC236}">
+                <a16:creationId xmlns:a16="http://schemas.microsoft.com/office/drawing/2014/main" id="{3EC40708-7E00-432C-8ECE-907FA5705292}"/>
+              </a:ext>
+            </a:extLst>
+          </p:cNvPr>
+          <p:cNvSpPr>
+            <a:spLocks xmlns:a="http://schemas.openxmlformats.org/drawingml/2006/main" noGrp="1"/>
+          </p:cNvSpPr>
+          <p:nvPr/>
+        </p:nvSpPr>
+        <p:spPr>
+          <a:xfrm xmlns:a="http://schemas.openxmlformats.org/drawingml/2006/main">
+            <a:off x="457200" y="533400"/>
+            <a:ext cx="11277600" cy="628650"/>
+          </a:xfrm>
+          <a:prstGeom xmlns:a="http://schemas.openxmlformats.org/drawingml/2006/main" prst="rect">
+            <a:avLst/>
+          </a:prstGeom>
+          <a:noFill xmlns:a="http://schemas.openxmlformats.org/drawingml/2006/main"/>
+          <a:ln xmlns:a="http://schemas.openxmlformats.org/drawingml/2006/main" w="0">
+            <a:noFill/>
+            <a:prstDash val="solid"/>
+          </a:ln>
+        </p:spPr>
+        <p:txBody>
+          <a:bodyPr xmlns:a="http://schemas.openxmlformats.org/drawingml/2006/main" wrap="square" lIns="0" tIns="0" rIns="0" bIns="0" anchor="t">
+            <a:normAutofit fontScale="100000"/>
+          </a:bodyPr>
+          <a:lstStyle xmlns:a="http://schemas.openxmlformats.org/drawingml/2006/main"/>
+          <a:p xmlns:a="http://schemas.openxmlformats.org/drawingml/2006/main">
+            <a:pPr algn="l">
+              <a:buNone/>
+              <a:defRPr sz="3525" b="1">
+                <a:solidFill>
+                  <a:srgbClr val="000000"/>
+                </a:solidFill>
+                <a:latin typeface="Arial"/>
+                <a:ea typeface="Arial"/>
+                <a:cs typeface="Arial"/>
+              </a:defRPr>
+            </a:pPr>
+            <a:r>
+              <a:rPr sz="3525" b="1">
+                <a:solidFill>
+                  <a:srgbClr val="000000"/>
+                </a:solidFill>
+                <a:latin typeface="Arial"/>
+                <a:ea typeface="Arial"/>
+                <a:cs typeface="Arial"/>
+              </a:rPr>
+              <a:t>The first executable rule is deliberately literal</a:t>
+            </a:r>
+          </a:p>
+        </p:txBody>
+      </p:sp>
+      <p:sp>
+        <p:nvSpPr>
+          <p:cNvPr id="3" name="">
+            <a:extLst xmlns:a="http://schemas.openxmlformats.org/drawingml/2006/main">
+              <a:ext uri="{FF2B5EF4-FFF2-40B4-BE49-F238E27FC236}">
+                <a16:creationId xmlns:a16="http://schemas.microsoft.com/office/drawing/2014/main" id="{D5CA0FCE-75E8-41EF-A76A-23E9E2120C6A}"/>
+              </a:ext>
+            </a:extLst>
+          </p:cNvPr>
+          <p:cNvSpPr>
+            <a:spLocks xmlns:a="http://schemas.openxmlformats.org/drawingml/2006/main" noGrp="1"/>
+          </p:cNvSpPr>
+          <p:nvPr/>
+        </p:nvSpPr>
+        <p:spPr>
+          <a:xfrm xmlns:a="http://schemas.openxmlformats.org/drawingml/2006/main">
+            <a:off x="457200" y="1200150"/>
+            <a:ext cx="11277600" cy="19050"/>
+          </a:xfrm>
+          <a:prstGeom xmlns:a="http://schemas.openxmlformats.org/drawingml/2006/main" prst="rect">
+            <a:avLst/>
+          </a:prstGeom>
+          <a:solidFill xmlns:a="http://schemas.openxmlformats.org/drawingml/2006/main">
+            <a:srgbClr val="B8BCC4"/>
+          </a:solidFill>
+          <a:ln xmlns:a="http://schemas.openxmlformats.org/drawingml/2006/main" w="0">
+            <a:solidFill>
+              <a:srgbClr val="B8BCC4"/>
+            </a:solidFill>
+            <a:prstDash val="solid"/>
+          </a:ln>
+        </p:spPr>
+      </p:sp>
+      <p:sp>
+        <p:nvSpPr>
+          <p:cNvPr id="4" name="footer-left-11">
+            <a:extLst xmlns:a="http://schemas.openxmlformats.org/drawingml/2006/main">
+              <a:ext uri="{FF2B5EF4-FFF2-40B4-BE49-F238E27FC236}">
+                <a16:creationId xmlns:a16="http://schemas.microsoft.com/office/drawing/2014/main" id="{700DA765-80E0-4197-8700-00D867B86FA2}"/>
+              </a:ext>
+            </a:extLst>
+          </p:cNvPr>
+          <p:cNvSpPr>
+            <a:spLocks xmlns:a="http://schemas.openxmlformats.org/drawingml/2006/main" noGrp="1"/>
+          </p:cNvSpPr>
+          <p:nvPr/>
+        </p:nvSpPr>
+        <p:spPr>
+          <a:xfrm xmlns:a="http://schemas.openxmlformats.org/drawingml/2006/main">
+            <a:off x="457200" y="6515100"/>
+            <a:ext cx="3429000" cy="171450"/>
+          </a:xfrm>
+          <a:prstGeom xmlns:a="http://schemas.openxmlformats.org/drawingml/2006/main" prst="rect">
+            <a:avLst/>
+          </a:prstGeom>
+          <a:noFill xmlns:a="http://schemas.openxmlformats.org/drawingml/2006/main"/>
+          <a:ln xmlns:a="http://schemas.openxmlformats.org/drawingml/2006/main" w="0">
+            <a:noFill/>
+            <a:prstDash val="solid"/>
+          </a:ln>
+        </p:spPr>
+        <p:txBody>
+          <a:bodyPr xmlns:a="http://schemas.openxmlformats.org/drawingml/2006/main" wrap="square" lIns="0" tIns="0" rIns="0" bIns="0" anchor="t">
+            <a:normAutofit fontScale="100000"/>
+          </a:bodyPr>
+          <a:lstStyle xmlns:a="http://schemas.openxmlformats.org/drawingml/2006/main"/>
+          <a:p xmlns:a="http://schemas.openxmlformats.org/drawingml/2006/main">
+            <a:pPr algn="l">
+              <a:buNone/>
+              <a:defRPr sz="825" b="0">
+                <a:solidFill>
+                  <a:srgbClr val="64748B"/>
+                </a:solidFill>
+                <a:latin typeface="Arial"/>
+                <a:ea typeface="Arial"/>
+                <a:cs typeface="Arial"/>
+              </a:defRPr>
+            </a:pPr>
+            <a:r>
+              <a:rPr sz="825" b="0">
+                <a:solidFill>
+                  <a:srgbClr val="64748B"/>
+                </a:solidFill>
+                <a:latin typeface="Arial"/>
+                <a:ea typeface="Arial"/>
+                <a:cs typeface="Arial"/>
+              </a:rPr>
+              <a:t>Daily adjusted bars | 129 instruments | 88-stock equal-sector core</a:t>
+            </a:r>
+          </a:p>
+        </p:txBody>
+      </p:sp>
+      <p:sp>
+        <p:nvSpPr>
+          <p:cNvPr id="5" name="footer-number-11">
+            <a:extLst xmlns:a="http://schemas.openxmlformats.org/drawingml/2006/main">
+              <a:ext uri="{FF2B5EF4-FFF2-40B4-BE49-F238E27FC236}">
+                <a16:creationId xmlns:a16="http://schemas.microsoft.com/office/drawing/2014/main" id="{83896276-4112-4532-AF7C-776C67C58B77}"/>
+              </a:ext>
+            </a:extLst>
+          </p:cNvPr>
+          <p:cNvSpPr>
+            <a:spLocks xmlns:a="http://schemas.openxmlformats.org/drawingml/2006/main" noGrp="1"/>
+          </p:cNvSpPr>
+          <p:nvPr/>
+        </p:nvSpPr>
+        <p:spPr>
+          <a:xfrm xmlns:a="http://schemas.openxmlformats.org/drawingml/2006/main">
+            <a:off x="10477500" y="6496050"/>
+            <a:ext cx="1257300" cy="190500"/>
+          </a:xfrm>
+          <a:prstGeom xmlns:a="http://schemas.openxmlformats.org/drawingml/2006/main" prst="rect">
+            <a:avLst/>
+          </a:prstGeom>
+          <a:noFill xmlns:a="http://schemas.openxmlformats.org/drawingml/2006/main"/>
+          <a:ln xmlns:a="http://schemas.openxmlformats.org/drawingml/2006/main" w="0">
+            <a:noFill/>
+            <a:prstDash val="solid"/>
+          </a:ln>
+        </p:spPr>
+        <p:txBody>
+          <a:bodyPr xmlns:a="http://schemas.openxmlformats.org/drawingml/2006/main" wrap="square" lIns="0" tIns="0" rIns="0" bIns="0" anchor="t">
+            <a:normAutofit fontScale="100000"/>
+          </a:bodyPr>
+          <a:lstStyle xmlns:a="http://schemas.openxmlformats.org/drawingml/2006/main"/>
+          <a:p xmlns:a="http://schemas.openxmlformats.org/drawingml/2006/main">
+            <a:pPr algn="r">
+              <a:buNone/>
+              <a:defRPr sz="1050" b="0">
+                <a:solidFill>
+                  <a:srgbClr val="667384"/>
+                </a:solidFill>
+                <a:latin typeface="Arial"/>
+                <a:ea typeface="Arial"/>
+                <a:cs typeface="Arial"/>
+              </a:defRPr>
+            </a:pPr>
+            <a:r>
+              <a:rPr sz="1050" b="0">
+                <a:solidFill>
+                  <a:srgbClr val="667384"/>
+                </a:solidFill>
+                <a:latin typeface="Arial"/>
+                <a:ea typeface="Arial"/>
+                <a:cs typeface="Arial"/>
+              </a:rPr>
+              <a:t>17</a:t>
+            </a:r>
+          </a:p>
+        </p:txBody>
+      </p:sp>
+      <p:sp>
+        <p:nvSpPr>
+          <p:cNvPr id="6" name="">
+            <a:extLst xmlns:a="http://schemas.openxmlformats.org/drawingml/2006/main">
+              <a:ext uri="{FF2B5EF4-FFF2-40B4-BE49-F238E27FC236}">
+                <a16:creationId xmlns:a16="http://schemas.microsoft.com/office/drawing/2014/main" id="{10F4BA85-46C5-47BD-BA74-EC806E663D58}"/>
+              </a:ext>
+            </a:extLst>
+          </p:cNvPr>
+          <p:cNvSpPr>
+            <a:spLocks xmlns:a="http://schemas.openxmlformats.org/drawingml/2006/main" noGrp="1"/>
+          </p:cNvSpPr>
+          <p:nvPr/>
+        </p:nvSpPr>
+        <p:spPr>
+          <a:xfrm xmlns:a="http://schemas.openxmlformats.org/drawingml/2006/main">
+            <a:off x="552450" y="1600200"/>
+            <a:ext cx="95250" cy="895350"/>
+          </a:xfrm>
+          <a:prstGeom xmlns:a="http://schemas.openxmlformats.org/drawingml/2006/main" prst="rect">
+            <a:avLst/>
+          </a:prstGeom>
+          <a:solidFill xmlns:a="http://schemas.openxmlformats.org/drawingml/2006/main">
+            <a:srgbClr val="E45756"/>
+          </a:solidFill>
+          <a:ln xmlns:a="http://schemas.openxmlformats.org/drawingml/2006/main" w="0">
+            <a:solidFill>
+              <a:srgbClr val="E45756"/>
+            </a:solidFill>
+            <a:prstDash val="solid"/>
+          </a:ln>
+        </p:spPr>
+      </p:sp>
+      <p:sp>
+        <p:nvSpPr>
+          <p:cNvPr id="7" name="">
+            <a:extLst xmlns:a="http://schemas.openxmlformats.org/drawingml/2006/main">
+              <a:ext uri="{FF2B5EF4-FFF2-40B4-BE49-F238E27FC236}">
+                <a16:creationId xmlns:a16="http://schemas.microsoft.com/office/drawing/2014/main" id="{7EF5B945-9D04-48FA-BA66-96DE813A9715}"/>
+              </a:ext>
+            </a:extLst>
+          </p:cNvPr>
+          <p:cNvSpPr>
+            <a:spLocks xmlns:a="http://schemas.openxmlformats.org/drawingml/2006/main" noGrp="1"/>
+          </p:cNvSpPr>
+          <p:nvPr/>
+        </p:nvSpPr>
+        <p:spPr>
+          <a:xfrm xmlns:a="http://schemas.openxmlformats.org/drawingml/2006/main">
+            <a:off x="876300" y="1581150"/>
+            <a:ext cx="2095500" cy="285750"/>
+          </a:xfrm>
+          <a:prstGeom xmlns:a="http://schemas.openxmlformats.org/drawingml/2006/main" prst="rect">
+            <a:avLst/>
+          </a:prstGeom>
+          <a:noFill xmlns:a="http://schemas.openxmlformats.org/drawingml/2006/main"/>
+          <a:ln xmlns:a="http://schemas.openxmlformats.org/drawingml/2006/main" w="0">
+            <a:noFill/>
+            <a:prstDash val="solid"/>
+          </a:ln>
+        </p:spPr>
+        <p:txBody>
+          <a:bodyPr xmlns:a="http://schemas.openxmlformats.org/drawingml/2006/main" wrap="square" lIns="0" tIns="0" rIns="0" bIns="0" anchor="t">
+            <a:normAutofit fontScale="100000"/>
+          </a:bodyPr>
+          <a:lstStyle xmlns:a="http://schemas.openxmlformats.org/drawingml/2006/main"/>
+          <a:p xmlns:a="http://schemas.openxmlformats.org/drawingml/2006/main">
+            <a:pPr algn="l">
+              <a:buNone/>
+              <a:defRPr sz="1350" b="1">
+                <a:solidFill>
+                  <a:srgbClr val="E45756"/>
+                </a:solidFill>
+                <a:latin typeface="Arial"/>
+                <a:ea typeface="Arial"/>
+                <a:cs typeface="Arial"/>
+              </a:defRPr>
+            </a:pPr>
+            <a:r>
+              <a:rPr sz="1350" b="1">
+                <a:solidFill>
+                  <a:srgbClr val="E45756"/>
+                </a:solidFill>
+                <a:latin typeface="Arial"/>
+                <a:ea typeface="Arial"/>
+                <a:cs typeface="Arial"/>
+              </a:rPr>
+              <a:t>SIGNAL</a:t>
+            </a:r>
+          </a:p>
+        </p:txBody>
+      </p:sp>
+      <p:sp>
+        <p:nvSpPr>
+          <p:cNvPr id="8" name="">
+            <a:extLst xmlns:a="http://schemas.openxmlformats.org/drawingml/2006/main">
+              <a:ext uri="{FF2B5EF4-FFF2-40B4-BE49-F238E27FC236}">
+                <a16:creationId xmlns:a16="http://schemas.microsoft.com/office/drawing/2014/main" id="{655CF75D-5F23-4C7F-BE9C-764036D0B9E8}"/>
+              </a:ext>
+            </a:extLst>
+          </p:cNvPr>
+          <p:cNvSpPr>
+            <a:spLocks xmlns:a="http://schemas.openxmlformats.org/drawingml/2006/main" noGrp="1"/>
+          </p:cNvSpPr>
+          <p:nvPr/>
+        </p:nvSpPr>
+        <p:spPr>
+          <a:xfrm xmlns:a="http://schemas.openxmlformats.org/drawingml/2006/main">
+            <a:off x="3105150" y="1562100"/>
+            <a:ext cx="4762500" cy="419100"/>
+          </a:xfrm>
+          <a:prstGeom xmlns:a="http://schemas.openxmlformats.org/drawingml/2006/main" prst="rect">
+            <a:avLst/>
+          </a:prstGeom>
+          <a:noFill xmlns:a="http://schemas.openxmlformats.org/drawingml/2006/main"/>
+          <a:ln xmlns:a="http://schemas.openxmlformats.org/drawingml/2006/main" w="0">
+            <a:noFill/>
+            <a:prstDash val="solid"/>
+          </a:ln>
+        </p:spPr>
+        <p:txBody>
+          <a:bodyPr xmlns:a="http://schemas.openxmlformats.org/drawingml/2006/main" wrap="square" lIns="0" tIns="0" rIns="0" bIns="0" anchor="t">
+            <a:normAutofit fontScale="100000"/>
+          </a:bodyPr>
+          <a:lstStyle xmlns:a="http://schemas.openxmlformats.org/drawingml/2006/main"/>
+          <a:p xmlns:a="http://schemas.openxmlformats.org/drawingml/2006/main">
+            <a:pPr algn="l">
+              <a:buNone/>
+              <a:defRPr sz="1950" b="1">
+                <a:solidFill>
+                  <a:srgbClr val="273548"/>
+                </a:solidFill>
+                <a:latin typeface="Arial"/>
+                <a:ea typeface="Arial"/>
+                <a:cs typeface="Arial"/>
+              </a:defRPr>
+            </a:pPr>
+            <a:r>
+              <a:rPr sz="1950" b="1">
+                <a:solidFill>
+                  <a:srgbClr val="273548"/>
+                </a:solidFill>
+                <a:latin typeface="Arial"/>
+                <a:ea typeface="Arial"/>
+                <a:cs typeface="Arial"/>
+              </a:rPr>
+              <a:t>Positive R20 in ER20 sideways</a:t>
+            </a:r>
+          </a:p>
+        </p:txBody>
+      </p:sp>
+      <p:sp>
+        <p:nvSpPr>
+          <p:cNvPr id="9" name="">
+            <a:extLst xmlns:a="http://schemas.openxmlformats.org/drawingml/2006/main">
+              <a:ext uri="{FF2B5EF4-FFF2-40B4-BE49-F238E27FC236}">
+                <a16:creationId xmlns:a16="http://schemas.microsoft.com/office/drawing/2014/main" id="{3E0B76F2-4514-4DD8-934B-ABE42A34E950}"/>
+              </a:ext>
+            </a:extLst>
+          </p:cNvPr>
+          <p:cNvSpPr>
+            <a:spLocks xmlns:a="http://schemas.openxmlformats.org/drawingml/2006/main" noGrp="1"/>
+          </p:cNvSpPr>
+          <p:nvPr/>
+        </p:nvSpPr>
+        <p:spPr>
+          <a:xfrm xmlns:a="http://schemas.openxmlformats.org/drawingml/2006/main">
+            <a:off x="8096250" y="1581150"/>
+            <a:ext cx="3333750" cy="704850"/>
+          </a:xfrm>
+          <a:prstGeom xmlns:a="http://schemas.openxmlformats.org/drawingml/2006/main" prst="rect">
+            <a:avLst/>
+          </a:prstGeom>
+          <a:noFill xmlns:a="http://schemas.openxmlformats.org/drawingml/2006/main"/>
+          <a:ln xmlns:a="http://schemas.openxmlformats.org/drawingml/2006/main" w="0">
+            <a:noFill/>
+            <a:prstDash val="solid"/>
+          </a:ln>
+        </p:spPr>
+        <p:txBody>
+          <a:bodyPr xmlns:a="http://schemas.openxmlformats.org/drawingml/2006/main" wrap="square" lIns="0" tIns="0" rIns="0" bIns="0" anchor="t">
+            <a:normAutofit fontScale="100000"/>
+          </a:bodyPr>
+          <a:lstStyle xmlns:a="http://schemas.openxmlformats.org/drawingml/2006/main"/>
+          <a:p xmlns:a="http://schemas.openxmlformats.org/drawingml/2006/main">
+            <a:pPr algn="l">
+              <a:buNone/>
+              <a:defRPr sz="1425" b="0">
+                <a:solidFill>
+                  <a:srgbClr val="667384"/>
+                </a:solidFill>
+                <a:latin typeface="Arial"/>
+                <a:ea typeface="Arial"/>
+                <a:cs typeface="Arial"/>
+              </a:defRPr>
+            </a:pPr>
+            <a:r>
+              <a:rPr sz="1425" b="0">
+                <a:solidFill>
+                  <a:srgbClr val="667384"/>
+                </a:solidFill>
+                <a:latin typeface="Arial"/>
+                <a:ea typeface="Arial"/>
+                <a:cs typeface="Arial"/>
+              </a:rPr>
+              <a:t>R20 &gt; 0; ER20 &lt; 0.30 at close t</a:t>
+            </a:r>
+          </a:p>
+        </p:txBody>
+      </p:sp>
+      <p:sp>
+        <p:nvSpPr>
+          <p:cNvPr id="10" name="">
+            <a:extLst xmlns:a="http://schemas.openxmlformats.org/drawingml/2006/main">
+              <a:ext uri="{FF2B5EF4-FFF2-40B4-BE49-F238E27FC236}">
+                <a16:creationId xmlns:a16="http://schemas.microsoft.com/office/drawing/2014/main" id="{294777C3-6D2F-4277-840E-7E984FB4554D}"/>
+              </a:ext>
+            </a:extLst>
+          </p:cNvPr>
+          <p:cNvSpPr>
+            <a:spLocks xmlns:a="http://schemas.openxmlformats.org/drawingml/2006/main" noGrp="1"/>
+          </p:cNvSpPr>
+          <p:nvPr/>
+        </p:nvSpPr>
+        <p:spPr>
+          <a:xfrm xmlns:a="http://schemas.openxmlformats.org/drawingml/2006/main">
+            <a:off x="876300" y="2590800"/>
+            <a:ext cx="10553700" cy="9525"/>
+          </a:xfrm>
+          <a:prstGeom xmlns:a="http://schemas.openxmlformats.org/drawingml/2006/main" prst="rect">
+            <a:avLst/>
+          </a:prstGeom>
+          <a:solidFill xmlns:a="http://schemas.openxmlformats.org/drawingml/2006/main">
+            <a:srgbClr val="B8BCC4"/>
+          </a:solidFill>
+          <a:ln xmlns:a="http://schemas.openxmlformats.org/drawingml/2006/main" w="0">
+            <a:solidFill>
+              <a:srgbClr val="B8BCC4"/>
+            </a:solidFill>
+            <a:prstDash val="solid"/>
+          </a:ln>
+        </p:spPr>
+      </p:sp>
+      <p:sp>
+        <p:nvSpPr>
+          <p:cNvPr id="11" name="">
+            <a:extLst xmlns:a="http://schemas.openxmlformats.org/drawingml/2006/main">
+              <a:ext uri="{FF2B5EF4-FFF2-40B4-BE49-F238E27FC236}">
+                <a16:creationId xmlns:a16="http://schemas.microsoft.com/office/drawing/2014/main" id="{F894CF3F-AD63-423C-8F01-64C507896579}"/>
+              </a:ext>
+            </a:extLst>
+          </p:cNvPr>
+          <p:cNvSpPr>
+            <a:spLocks xmlns:a="http://schemas.openxmlformats.org/drawingml/2006/main" noGrp="1"/>
+          </p:cNvSpPr>
+          <p:nvPr/>
+        </p:nvSpPr>
+        <p:spPr>
+          <a:xfrm xmlns:a="http://schemas.openxmlformats.org/drawingml/2006/main">
+            <a:off x="552450" y="2800350"/>
+            <a:ext cx="95250" cy="895350"/>
+          </a:xfrm>
+          <a:prstGeom xmlns:a="http://schemas.openxmlformats.org/drawingml/2006/main" prst="rect">
+            <a:avLst/>
+          </a:prstGeom>
+          <a:solidFill xmlns:a="http://schemas.openxmlformats.org/drawingml/2006/main">
+            <a:srgbClr val="2A9D6F"/>
+          </a:solidFill>
+          <a:ln xmlns:a="http://schemas.openxmlformats.org/drawingml/2006/main" w="0">
+            <a:solidFill>
+              <a:srgbClr val="2A9D6F"/>
+            </a:solidFill>
+            <a:prstDash val="solid"/>
+          </a:ln>
+        </p:spPr>
+      </p:sp>
+      <p:sp>
+        <p:nvSpPr>
+          <p:cNvPr id="12" name="">
+            <a:extLst xmlns:a="http://schemas.openxmlformats.org/drawingml/2006/main">
+              <a:ext uri="{FF2B5EF4-FFF2-40B4-BE49-F238E27FC236}">
+                <a16:creationId xmlns:a16="http://schemas.microsoft.com/office/drawing/2014/main" id="{D3953D03-6A7A-4FEE-B242-02BF0319C169}"/>
+              </a:ext>
+            </a:extLst>
+          </p:cNvPr>
+          <p:cNvSpPr>
+            <a:spLocks xmlns:a="http://schemas.openxmlformats.org/drawingml/2006/main" noGrp="1"/>
+          </p:cNvSpPr>
+          <p:nvPr/>
+        </p:nvSpPr>
+        <p:spPr>
+          <a:xfrm xmlns:a="http://schemas.openxmlformats.org/drawingml/2006/main">
+            <a:off x="876300" y="2781300"/>
+            <a:ext cx="2095500" cy="285750"/>
+          </a:xfrm>
+          <a:prstGeom xmlns:a="http://schemas.openxmlformats.org/drawingml/2006/main" prst="rect">
+            <a:avLst/>
+          </a:prstGeom>
+          <a:noFill xmlns:a="http://schemas.openxmlformats.org/drawingml/2006/main"/>
+          <a:ln xmlns:a="http://schemas.openxmlformats.org/drawingml/2006/main" w="0">
+            <a:noFill/>
+            <a:prstDash val="solid"/>
+          </a:ln>
+        </p:spPr>
+        <p:txBody>
+          <a:bodyPr xmlns:a="http://schemas.openxmlformats.org/drawingml/2006/main" wrap="square" lIns="0" tIns="0" rIns="0" bIns="0" anchor="t">
+            <a:normAutofit fontScale="100000"/>
+          </a:bodyPr>
+          <a:lstStyle xmlns:a="http://schemas.openxmlformats.org/drawingml/2006/main"/>
+          <a:p xmlns:a="http://schemas.openxmlformats.org/drawingml/2006/main">
+            <a:pPr algn="l">
+              <a:buNone/>
+              <a:defRPr sz="1350" b="1">
+                <a:solidFill>
+                  <a:srgbClr val="2A9D6F"/>
+                </a:solidFill>
+                <a:latin typeface="Arial"/>
+                <a:ea typeface="Arial"/>
+                <a:cs typeface="Arial"/>
+              </a:defRPr>
+            </a:pPr>
+            <a:r>
+              <a:rPr sz="1350" b="1">
+                <a:solidFill>
+                  <a:srgbClr val="2A9D6F"/>
+                </a:solidFill>
+                <a:latin typeface="Arial"/>
+                <a:ea typeface="Arial"/>
+                <a:cs typeface="Arial"/>
+              </a:rPr>
+              <a:t>EXECUTION</a:t>
+            </a:r>
+          </a:p>
+        </p:txBody>
+      </p:sp>
+      <p:sp>
+        <p:nvSpPr>
+          <p:cNvPr id="13" name="">
+            <a:extLst xmlns:a="http://schemas.openxmlformats.org/drawingml/2006/main">
+              <a:ext uri="{FF2B5EF4-FFF2-40B4-BE49-F238E27FC236}">
+                <a16:creationId xmlns:a16="http://schemas.microsoft.com/office/drawing/2014/main" id="{52D1DBE8-EAF6-4492-89E7-5C97A3A6A395}"/>
+              </a:ext>
+            </a:extLst>
+          </p:cNvPr>
+          <p:cNvSpPr>
+            <a:spLocks xmlns:a="http://schemas.openxmlformats.org/drawingml/2006/main" noGrp="1"/>
+          </p:cNvSpPr>
+          <p:nvPr/>
+        </p:nvSpPr>
+        <p:spPr>
+          <a:xfrm xmlns:a="http://schemas.openxmlformats.org/drawingml/2006/main">
+            <a:off x="3105150" y="2762250"/>
+            <a:ext cx="4762500" cy="419100"/>
+          </a:xfrm>
+          <a:prstGeom xmlns:a="http://schemas.openxmlformats.org/drawingml/2006/main" prst="rect">
+            <a:avLst/>
+          </a:prstGeom>
+          <a:noFill xmlns:a="http://schemas.openxmlformats.org/drawingml/2006/main"/>
+          <a:ln xmlns:a="http://schemas.openxmlformats.org/drawingml/2006/main" w="0">
+            <a:noFill/>
+            <a:prstDash val="solid"/>
+          </a:ln>
+        </p:spPr>
+        <p:txBody>
+          <a:bodyPr xmlns:a="http://schemas.openxmlformats.org/drawingml/2006/main" wrap="square" lIns="0" tIns="0" rIns="0" bIns="0" anchor="t">
+            <a:normAutofit fontScale="100000"/>
+          </a:bodyPr>
+          <a:lstStyle xmlns:a="http://schemas.openxmlformats.org/drawingml/2006/main"/>
+          <a:p xmlns:a="http://schemas.openxmlformats.org/drawingml/2006/main">
+            <a:pPr algn="l">
+              <a:buNone/>
+              <a:defRPr sz="1950" b="1">
+                <a:solidFill>
+                  <a:srgbClr val="273548"/>
+                </a:solidFill>
+                <a:latin typeface="Arial"/>
+                <a:ea typeface="Arial"/>
+                <a:cs typeface="Arial"/>
+              </a:defRPr>
+            </a:pPr>
+            <a:r>
+              <a:rPr sz="1950" b="1">
+                <a:solidFill>
+                  <a:srgbClr val="273548"/>
+                </a:solidFill>
+                <a:latin typeface="Arial"/>
+                <a:ea typeface="Arial"/>
+                <a:cs typeface="Arial"/>
+              </a:rPr>
+              <a:t>Next-open entry; fixed exit</a:t>
+            </a:r>
+          </a:p>
+        </p:txBody>
+      </p:sp>
+      <p:sp>
+        <p:nvSpPr>
+          <p:cNvPr id="14" name="">
+            <a:extLst xmlns:a="http://schemas.openxmlformats.org/drawingml/2006/main">
+              <a:ext uri="{FF2B5EF4-FFF2-40B4-BE49-F238E27FC236}">
+                <a16:creationId xmlns:a16="http://schemas.microsoft.com/office/drawing/2014/main" id="{2CAF0156-C9E6-4210-8A8A-BFEDD044631B}"/>
+              </a:ext>
+            </a:extLst>
+          </p:cNvPr>
+          <p:cNvSpPr>
+            <a:spLocks xmlns:a="http://schemas.openxmlformats.org/drawingml/2006/main" noGrp="1"/>
+          </p:cNvSpPr>
+          <p:nvPr/>
+        </p:nvSpPr>
+        <p:spPr>
+          <a:xfrm xmlns:a="http://schemas.openxmlformats.org/drawingml/2006/main">
+            <a:off x="8096250" y="2781300"/>
+            <a:ext cx="3333750" cy="704850"/>
+          </a:xfrm>
+          <a:prstGeom xmlns:a="http://schemas.openxmlformats.org/drawingml/2006/main" prst="rect">
+            <a:avLst/>
+          </a:prstGeom>
+          <a:noFill xmlns:a="http://schemas.openxmlformats.org/drawingml/2006/main"/>
+          <a:ln xmlns:a="http://schemas.openxmlformats.org/drawingml/2006/main" w="0">
+            <a:noFill/>
+            <a:prstDash val="solid"/>
+          </a:ln>
+        </p:spPr>
+        <p:txBody>
+          <a:bodyPr xmlns:a="http://schemas.openxmlformats.org/drawingml/2006/main" wrap="square" lIns="0" tIns="0" rIns="0" bIns="0" anchor="t">
+            <a:normAutofit fontScale="100000"/>
+          </a:bodyPr>
+          <a:lstStyle xmlns:a="http://schemas.openxmlformats.org/drawingml/2006/main"/>
+          <a:p xmlns:a="http://schemas.openxmlformats.org/drawingml/2006/main">
+            <a:pPr algn="l">
+              <a:buNone/>
+              <a:defRPr sz="1425" b="0">
+                <a:solidFill>
+                  <a:srgbClr val="667384"/>
+                </a:solidFill>
+                <a:latin typeface="Arial"/>
+                <a:ea typeface="Arial"/>
+                <a:cs typeface="Arial"/>
+              </a:defRPr>
+            </a:pPr>
+            <a:r>
+              <a:rPr sz="1425" b="0">
+                <a:solidFill>
+                  <a:srgbClr val="667384"/>
+                </a:solidFill>
+                <a:latin typeface="Arial"/>
+                <a:ea typeface="Arial"/>
+                <a:cs typeface="Arial"/>
+              </a:rPr>
+              <a:t>5 / 10 / 20 held sessions; 10 bp</a:t>
+            </a:r>
+          </a:p>
+        </p:txBody>
+      </p:sp>
+      <p:sp>
+        <p:nvSpPr>
+          <p:cNvPr id="15" name="">
+            <a:extLst xmlns:a="http://schemas.openxmlformats.org/drawingml/2006/main">
+              <a:ext uri="{FF2B5EF4-FFF2-40B4-BE49-F238E27FC236}">
+                <a16:creationId xmlns:a16="http://schemas.microsoft.com/office/drawing/2014/main" id="{B126165D-5B65-44DB-99BD-15ED33F9B90F}"/>
+              </a:ext>
+            </a:extLst>
+          </p:cNvPr>
+          <p:cNvSpPr>
+            <a:spLocks xmlns:a="http://schemas.openxmlformats.org/drawingml/2006/main" noGrp="1"/>
+          </p:cNvSpPr>
+          <p:nvPr/>
+        </p:nvSpPr>
+        <p:spPr>
+          <a:xfrm xmlns:a="http://schemas.openxmlformats.org/drawingml/2006/main">
+            <a:off x="876300" y="3790950"/>
+            <a:ext cx="10553700" cy="9525"/>
+          </a:xfrm>
+          <a:prstGeom xmlns:a="http://schemas.openxmlformats.org/drawingml/2006/main" prst="rect">
+            <a:avLst/>
+          </a:prstGeom>
+          <a:solidFill xmlns:a="http://schemas.openxmlformats.org/drawingml/2006/main">
+            <a:srgbClr val="B8BCC4"/>
+          </a:solidFill>
+          <a:ln xmlns:a="http://schemas.openxmlformats.org/drawingml/2006/main" w="0">
+            <a:solidFill>
+              <a:srgbClr val="B8BCC4"/>
+            </a:solidFill>
+            <a:prstDash val="solid"/>
+          </a:ln>
+        </p:spPr>
+      </p:sp>
+      <p:sp>
+        <p:nvSpPr>
+          <p:cNvPr id="16" name="">
+            <a:extLst xmlns:a="http://schemas.openxmlformats.org/drawingml/2006/main">
+              <a:ext uri="{FF2B5EF4-FFF2-40B4-BE49-F238E27FC236}">
+                <a16:creationId xmlns:a16="http://schemas.microsoft.com/office/drawing/2014/main" id="{7DC0911F-9587-4B19-84C6-11974DB2A91C}"/>
+              </a:ext>
+            </a:extLst>
+          </p:cNvPr>
+          <p:cNvSpPr>
+            <a:spLocks xmlns:a="http://schemas.openxmlformats.org/drawingml/2006/main" noGrp="1"/>
+          </p:cNvSpPr>
+          <p:nvPr/>
+        </p:nvSpPr>
+        <p:spPr>
+          <a:xfrm xmlns:a="http://schemas.openxmlformats.org/drawingml/2006/main">
+            <a:off x="552450" y="4000500"/>
+            <a:ext cx="95250" cy="895350"/>
+          </a:xfrm>
+          <a:prstGeom xmlns:a="http://schemas.openxmlformats.org/drawingml/2006/main" prst="rect">
+            <a:avLst/>
+          </a:prstGeom>
+          <a:solidFill xmlns:a="http://schemas.openxmlformats.org/drawingml/2006/main">
+            <a:srgbClr val="3D8DFF"/>
+          </a:solidFill>
+          <a:ln xmlns:a="http://schemas.openxmlformats.org/drawingml/2006/main" w="0">
+            <a:solidFill>
+              <a:srgbClr val="3D8DFF"/>
+            </a:solidFill>
+            <a:prstDash val="solid"/>
+          </a:ln>
+        </p:spPr>
+      </p:sp>
+      <p:sp>
+        <p:nvSpPr>
+          <p:cNvPr id="17" name="">
+            <a:extLst xmlns:a="http://schemas.openxmlformats.org/drawingml/2006/main">
+              <a:ext uri="{FF2B5EF4-FFF2-40B4-BE49-F238E27FC236}">
+                <a16:creationId xmlns:a16="http://schemas.microsoft.com/office/drawing/2014/main" id="{DAB53991-F50C-4B95-9F23-DAE86BCEDF3B}"/>
+              </a:ext>
+            </a:extLst>
+          </p:cNvPr>
+          <p:cNvSpPr>
+            <a:spLocks xmlns:a="http://schemas.openxmlformats.org/drawingml/2006/main" noGrp="1"/>
+          </p:cNvSpPr>
+          <p:nvPr/>
+        </p:nvSpPr>
+        <p:spPr>
+          <a:xfrm xmlns:a="http://schemas.openxmlformats.org/drawingml/2006/main">
+            <a:off x="876300" y="3981450"/>
+            <a:ext cx="2095500" cy="285750"/>
+          </a:xfrm>
+          <a:prstGeom xmlns:a="http://schemas.openxmlformats.org/drawingml/2006/main" prst="rect">
+            <a:avLst/>
+          </a:prstGeom>
+          <a:noFill xmlns:a="http://schemas.openxmlformats.org/drawingml/2006/main"/>
+          <a:ln xmlns:a="http://schemas.openxmlformats.org/drawingml/2006/main" w="0">
+            <a:noFill/>
+            <a:prstDash val="solid"/>
+          </a:ln>
+        </p:spPr>
+        <p:txBody>
+          <a:bodyPr xmlns:a="http://schemas.openxmlformats.org/drawingml/2006/main" wrap="square" lIns="0" tIns="0" rIns="0" bIns="0" anchor="t">
+            <a:normAutofit fontScale="100000"/>
+          </a:bodyPr>
+          <a:lstStyle xmlns:a="http://schemas.openxmlformats.org/drawingml/2006/main"/>
+          <a:p xmlns:a="http://schemas.openxmlformats.org/drawingml/2006/main">
+            <a:pPr algn="l">
+              <a:buNone/>
+              <a:defRPr sz="1350" b="1">
+                <a:solidFill>
+                  <a:srgbClr val="3D8DFF"/>
+                </a:solidFill>
+                <a:latin typeface="Arial"/>
+                <a:ea typeface="Arial"/>
+                <a:cs typeface="Arial"/>
+              </a:defRPr>
+            </a:pPr>
+            <a:r>
+              <a:rPr sz="1350" b="1">
+                <a:solidFill>
+                  <a:srgbClr val="3D8DFF"/>
+                </a:solidFill>
+                <a:latin typeface="Arial"/>
+                <a:ea typeface="Arial"/>
+                <a:cs typeface="Arial"/>
+              </a:rPr>
+              <a:t>CONTROLS</a:t>
+            </a:r>
+          </a:p>
+        </p:txBody>
+      </p:sp>
+      <p:sp>
+        <p:nvSpPr>
+          <p:cNvPr id="18" name="">
+            <a:extLst xmlns:a="http://schemas.openxmlformats.org/drawingml/2006/main">
+              <a:ext uri="{FF2B5EF4-FFF2-40B4-BE49-F238E27FC236}">
+                <a16:creationId xmlns:a16="http://schemas.microsoft.com/office/drawing/2014/main" id="{5DFACF3B-08BC-4148-A40A-2004DFB81D71}"/>
+              </a:ext>
+            </a:extLst>
+          </p:cNvPr>
+          <p:cNvSpPr>
+            <a:spLocks xmlns:a="http://schemas.openxmlformats.org/drawingml/2006/main" noGrp="1"/>
+          </p:cNvSpPr>
+          <p:nvPr/>
+        </p:nvSpPr>
+        <p:spPr>
+          <a:xfrm xmlns:a="http://schemas.openxmlformats.org/drawingml/2006/main">
+            <a:off x="3105150" y="3962400"/>
+            <a:ext cx="4762500" cy="419100"/>
+          </a:xfrm>
+          <a:prstGeom xmlns:a="http://schemas.openxmlformats.org/drawingml/2006/main" prst="rect">
+            <a:avLst/>
+          </a:prstGeom>
+          <a:noFill xmlns:a="http://schemas.openxmlformats.org/drawingml/2006/main"/>
+          <a:ln xmlns:a="http://schemas.openxmlformats.org/drawingml/2006/main" w="0">
+            <a:noFill/>
+            <a:prstDash val="solid"/>
+          </a:ln>
+        </p:spPr>
+        <p:txBody>
+          <a:bodyPr xmlns:a="http://schemas.openxmlformats.org/drawingml/2006/main" wrap="square" lIns="0" tIns="0" rIns="0" bIns="0" anchor="t">
+            <a:normAutofit fontScale="100000"/>
+          </a:bodyPr>
+          <a:lstStyle xmlns:a="http://schemas.openxmlformats.org/drawingml/2006/main"/>
+          <a:p xmlns:a="http://schemas.openxmlformats.org/drawingml/2006/main">
+            <a:pPr algn="l">
+              <a:buNone/>
+              <a:defRPr sz="1950" b="1">
+                <a:solidFill>
+                  <a:srgbClr val="273548"/>
+                </a:solidFill>
+                <a:latin typeface="Arial"/>
+                <a:ea typeface="Arial"/>
+                <a:cs typeface="Arial"/>
+              </a:defRPr>
+            </a:pPr>
+            <a:r>
+              <a:rPr sz="1950" b="1">
+                <a:solidFill>
+                  <a:srgbClr val="273548"/>
+                </a:solidFill>
+                <a:latin typeface="Arial"/>
+                <a:ea typeface="Arial"/>
+                <a:cs typeface="Arial"/>
+              </a:rPr>
+              <a:t>Four matched reference rules</a:t>
+            </a:r>
+          </a:p>
+        </p:txBody>
+      </p:sp>
+      <p:sp>
+        <p:nvSpPr>
+          <p:cNvPr id="19" name="">
+            <a:extLst xmlns:a="http://schemas.openxmlformats.org/drawingml/2006/main">
+              <a:ext uri="{FF2B5EF4-FFF2-40B4-BE49-F238E27FC236}">
+                <a16:creationId xmlns:a16="http://schemas.microsoft.com/office/drawing/2014/main" id="{C907D23B-44A2-43C4-9658-4C6E38430BF5}"/>
+              </a:ext>
+            </a:extLst>
+          </p:cNvPr>
+          <p:cNvSpPr>
+            <a:spLocks xmlns:a="http://schemas.openxmlformats.org/drawingml/2006/main" noGrp="1"/>
+          </p:cNvSpPr>
+          <p:nvPr/>
+        </p:nvSpPr>
+        <p:spPr>
+          <a:xfrm xmlns:a="http://schemas.openxmlformats.org/drawingml/2006/main">
+            <a:off x="8096250" y="3981450"/>
+            <a:ext cx="3333750" cy="704850"/>
+          </a:xfrm>
+          <a:prstGeom xmlns:a="http://schemas.openxmlformats.org/drawingml/2006/main" prst="rect">
+            <a:avLst/>
+          </a:prstGeom>
+          <a:noFill xmlns:a="http://schemas.openxmlformats.org/drawingml/2006/main"/>
+          <a:ln xmlns:a="http://schemas.openxmlformats.org/drawingml/2006/main" w="0">
+            <a:noFill/>
+            <a:prstDash val="solid"/>
+          </a:ln>
+        </p:spPr>
+        <p:txBody>
+          <a:bodyPr xmlns:a="http://schemas.openxmlformats.org/drawingml/2006/main" wrap="square" lIns="0" tIns="0" rIns="0" bIns="0" anchor="t">
+            <a:normAutofit fontScale="100000"/>
+          </a:bodyPr>
+          <a:lstStyle xmlns:a="http://schemas.openxmlformats.org/drawingml/2006/main"/>
+          <a:p xmlns:a="http://schemas.openxmlformats.org/drawingml/2006/main">
+            <a:pPr algn="l">
+              <a:buNone/>
+              <a:defRPr sz="1425" b="0">
+                <a:solidFill>
+                  <a:srgbClr val="667384"/>
+                </a:solidFill>
+                <a:latin typeface="Arial"/>
+                <a:ea typeface="Arial"/>
+                <a:cs typeface="Arial"/>
+              </a:defRPr>
+            </a:pPr>
+            <a:r>
+              <a:rPr sz="1425" b="0">
+                <a:solidFill>
+                  <a:srgbClr val="667384"/>
+                </a:solidFill>
+                <a:latin typeface="Arial"/>
+                <a:ea typeface="Arial"/>
+                <a:cs typeface="Arial"/>
+              </a:rPr>
+              <a:t>Trending +R20; +R20; sideways; drift</a:t>
+            </a:r>
+          </a:p>
+        </p:txBody>
+      </p:sp>
+      <p:sp>
+        <p:nvSpPr>
+          <p:cNvPr id="20" name="">
+            <a:extLst xmlns:a="http://schemas.openxmlformats.org/drawingml/2006/main">
+              <a:ext uri="{FF2B5EF4-FFF2-40B4-BE49-F238E27FC236}">
+                <a16:creationId xmlns:a16="http://schemas.microsoft.com/office/drawing/2014/main" id="{8042DFC4-7E22-47E6-8C53-1E63A8411C3A}"/>
+              </a:ext>
+            </a:extLst>
+          </p:cNvPr>
+          <p:cNvSpPr>
+            <a:spLocks xmlns:a="http://schemas.openxmlformats.org/drawingml/2006/main" noGrp="1"/>
+          </p:cNvSpPr>
+          <p:nvPr/>
+        </p:nvSpPr>
+        <p:spPr>
+          <a:xfrm xmlns:a="http://schemas.openxmlformats.org/drawingml/2006/main">
+            <a:off x="876300" y="4991100"/>
+            <a:ext cx="10553700" cy="9525"/>
+          </a:xfrm>
+          <a:prstGeom xmlns:a="http://schemas.openxmlformats.org/drawingml/2006/main" prst="rect">
+            <a:avLst/>
+          </a:prstGeom>
+          <a:solidFill xmlns:a="http://schemas.openxmlformats.org/drawingml/2006/main">
+            <a:srgbClr val="B8BCC4"/>
+          </a:solidFill>
+          <a:ln xmlns:a="http://schemas.openxmlformats.org/drawingml/2006/main" w="0">
+            <a:solidFill>
+              <a:srgbClr val="B8BCC4"/>
+            </a:solidFill>
+            <a:prstDash val="solid"/>
+          </a:ln>
+        </p:spPr>
+      </p:sp>
+      <p:sp>
+        <p:nvSpPr>
+          <p:cNvPr id="21" name="">
+            <a:extLst xmlns:a="http://schemas.openxmlformats.org/drawingml/2006/main">
+              <a:ext uri="{FF2B5EF4-FFF2-40B4-BE49-F238E27FC236}">
+                <a16:creationId xmlns:a16="http://schemas.microsoft.com/office/drawing/2014/main" id="{F4066D54-676B-4D0F-93B6-2152B57E41AF}"/>
+              </a:ext>
+            </a:extLst>
+          </p:cNvPr>
+          <p:cNvSpPr>
+            <a:spLocks xmlns:a="http://schemas.openxmlformats.org/drawingml/2006/main" noGrp="1"/>
+          </p:cNvSpPr>
+          <p:nvPr/>
+        </p:nvSpPr>
+        <p:spPr>
+          <a:xfrm xmlns:a="http://schemas.openxmlformats.org/drawingml/2006/main">
+            <a:off x="552450" y="5353050"/>
+            <a:ext cx="10877550" cy="781050"/>
+          </a:xfrm>
+          <a:prstGeom xmlns:a="http://schemas.openxmlformats.org/drawingml/2006/main" prst="rect">
+            <a:avLst/>
+          </a:prstGeom>
+          <a:solidFill xmlns:a="http://schemas.openxmlformats.org/drawingml/2006/main">
+            <a:srgbClr val="EAF5FB"/>
+          </a:solidFill>
+          <a:ln xmlns:a="http://schemas.openxmlformats.org/drawingml/2006/main" w="0">
+            <a:solidFill>
+              <a:srgbClr val="EAF5FB"/>
+            </a:solidFill>
+            <a:prstDash val="solid"/>
+          </a:ln>
+        </p:spPr>
+      </p:sp>
+      <p:sp>
+        <p:nvSpPr>
+          <p:cNvPr id="22" name="">
+            <a:extLst xmlns:a="http://schemas.openxmlformats.org/drawingml/2006/main">
+              <a:ext uri="{FF2B5EF4-FFF2-40B4-BE49-F238E27FC236}">
+                <a16:creationId xmlns:a16="http://schemas.microsoft.com/office/drawing/2014/main" id="{6E4C79AE-EB98-4B5B-B3D3-11ED0D4C729B}"/>
+              </a:ext>
+            </a:extLst>
+          </p:cNvPr>
+          <p:cNvSpPr>
+            <a:spLocks xmlns:a="http://schemas.openxmlformats.org/drawingml/2006/main" noGrp="1"/>
+          </p:cNvSpPr>
+          <p:nvPr/>
+        </p:nvSpPr>
+        <p:spPr>
+          <a:xfrm xmlns:a="http://schemas.openxmlformats.org/drawingml/2006/main">
+            <a:off x="781050" y="5524500"/>
+            <a:ext cx="2476500" cy="323850"/>
+          </a:xfrm>
+          <a:prstGeom xmlns:a="http://schemas.openxmlformats.org/drawingml/2006/main" prst="rect">
+            <a:avLst/>
+          </a:prstGeom>
+          <a:noFill xmlns:a="http://schemas.openxmlformats.org/drawingml/2006/main"/>
+          <a:ln xmlns:a="http://schemas.openxmlformats.org/drawingml/2006/main" w="0">
+            <a:noFill/>
+            <a:prstDash val="solid"/>
+          </a:ln>
+        </p:spPr>
+        <p:txBody>
+          <a:bodyPr xmlns:a="http://schemas.openxmlformats.org/drawingml/2006/main" wrap="square" lIns="0" tIns="0" rIns="0" bIns="0" anchor="t">
+            <a:normAutofit fontScale="100000"/>
+          </a:bodyPr>
+          <a:lstStyle xmlns:a="http://schemas.openxmlformats.org/drawingml/2006/main"/>
+          <a:p xmlns:a="http://schemas.openxmlformats.org/drawingml/2006/main">
+            <a:pPr algn="l">
+              <a:buNone/>
+              <a:defRPr sz="1725" b="1">
+                <a:solidFill>
+                  <a:srgbClr val="3D8DFF"/>
+                </a:solidFill>
+                <a:latin typeface="Arial"/>
+                <a:ea typeface="Arial"/>
+                <a:cs typeface="Arial"/>
+              </a:defRPr>
+            </a:pPr>
+            <a:r>
+              <a:rPr sz="1725" b="1">
+                <a:solidFill>
+                  <a:srgbClr val="3D8DFF"/>
+                </a:solidFill>
+                <a:latin typeface="Arial"/>
+                <a:ea typeface="Arial"/>
+                <a:cs typeface="Arial"/>
+              </a:rPr>
+              <a:t>STATUS</a:t>
+            </a:r>
+          </a:p>
+        </p:txBody>
+      </p:sp>
+      <p:sp>
+        <p:nvSpPr>
+          <p:cNvPr id="23" name="">
+            <a:extLst xmlns:a="http://schemas.openxmlformats.org/drawingml/2006/main">
+              <a:ext uri="{FF2B5EF4-FFF2-40B4-BE49-F238E27FC236}">
+                <a16:creationId xmlns:a16="http://schemas.microsoft.com/office/drawing/2014/main" id="{3320D60E-6067-4236-80ED-A898A863026E}"/>
+              </a:ext>
+            </a:extLst>
+          </p:cNvPr>
+          <p:cNvSpPr>
+            <a:spLocks xmlns:a="http://schemas.openxmlformats.org/drawingml/2006/main" noGrp="1"/>
+          </p:cNvSpPr>
+          <p:nvPr/>
+        </p:nvSpPr>
+        <p:spPr>
+          <a:xfrm xmlns:a="http://schemas.openxmlformats.org/drawingml/2006/main">
+            <a:off x="3333750" y="5486400"/>
+            <a:ext cx="7810500" cy="419100"/>
+          </a:xfrm>
+          <a:prstGeom xmlns:a="http://schemas.openxmlformats.org/drawingml/2006/main" prst="rect">
+            <a:avLst/>
+          </a:prstGeom>
+          <a:noFill xmlns:a="http://schemas.openxmlformats.org/drawingml/2006/main"/>
+          <a:ln xmlns:a="http://schemas.openxmlformats.org/drawingml/2006/main" w="0">
+            <a:noFill/>
+            <a:prstDash val="solid"/>
+          </a:ln>
+        </p:spPr>
+        <p:txBody>
+          <a:bodyPr xmlns:a="http://schemas.openxmlformats.org/drawingml/2006/main" wrap="square" lIns="0" tIns="0" rIns="0" bIns="0" anchor="t">
+            <a:normAutofit fontScale="76389"/>
+          </a:bodyPr>
+          <a:lstStyle xmlns:a="http://schemas.openxmlformats.org/drawingml/2006/main"/>
+          <a:p xmlns:a="http://schemas.openxmlformats.org/drawingml/2006/main">
+            <a:pPr algn="l">
+              <a:buNone/>
+              <a:defRPr sz="1800" b="1">
+                <a:solidFill>
+                  <a:srgbClr val="273548"/>
+                </a:solidFill>
+                <a:latin typeface="Arial"/>
+                <a:ea typeface="Arial"/>
+                <a:cs typeface="Arial"/>
+              </a:defRPr>
+            </a:pPr>
+            <a:r>
+              <a:rPr sz="1800" b="1">
+                <a:solidFill>
+                  <a:srgbClr val="273548"/>
+                </a:solidFill>
+                <a:latin typeface="Arial"/>
+                <a:ea typeface="Arial"/>
+                <a:cs typeface="Arial"/>
+              </a:rPr>
+              <a:t>Frozen before calculation. No horizon selection, post-2023 confirmation, portfolio replay, or 30-minute data is opened.</a:t>
+            </a:r>
+          </a:p>
+        </p:txBody>
+      </p:sp>
+    </p:spTree>
+    <p:extLst>
+      <p:ext uri="{BB962C8B-B14F-4D97-AF65-F5344CB8AC3E}">
+        <p14:creationId xmlns:p14="http://schemas.microsoft.com/office/powerpoint/2010/main" val="666536286"/>
+      </p:ext>
+    </p:extLst>
+  </p:cSld>
+</p:sld>
+</file>
+
+<file path=ppt/slides/slide18.xml><?xml version="1.0" encoding="utf-8"?>
+<p:sld xmlns:p="http://schemas.openxmlformats.org/presentationml/2006/main">
+  <p:cSld>
+    <p:bg>
+      <p:bgPr>
+        <a:solidFill xmlns:a="http://schemas.openxmlformats.org/drawingml/2006/main">
+          <a:srgbClr val="FFFFFF"/>
+        </a:solidFill>
+      </p:bgPr>
+    </p:bg>
+    <p:spTree>
+      <p:nvGrpSpPr>
+        <p:cNvPr id="1" name=""/>
+        <p:cNvGrpSpPr/>
+        <p:nvPr/>
+      </p:nvGrpSpPr>
+      <p:grpSpPr>
+        <a:xfrm xmlns:a="http://schemas.openxmlformats.org/drawingml/2006/main"/>
+      </p:grpSpPr>
+      <p:sp>
+        <p:nvSpPr>
+          <p:cNvPr id="24" name="section-11">
+            <a:extLst xmlns:a="http://schemas.openxmlformats.org/drawingml/2006/main">
+              <a:ext uri="{FF2B5EF4-FFF2-40B4-BE49-F238E27FC236}">
+                <a16:creationId xmlns:a16="http://schemas.microsoft.com/office/drawing/2014/main" id="{272ED433-B59C-436C-9DFB-4D317B90A13F}"/>
+              </a:ext>
+            </a:extLst>
+          </p:cNvPr>
+          <p:cNvSpPr>
+            <a:spLocks xmlns:a="http://schemas.openxmlformats.org/drawingml/2006/main" noGrp="1"/>
+          </p:cNvSpPr>
+          <p:nvPr/>
+        </p:nvSpPr>
+        <p:spPr>
+          <a:xfrm xmlns:a="http://schemas.openxmlformats.org/drawingml/2006/main">
+            <a:off x="457200" y="228600"/>
+            <a:ext cx="4191000" cy="228600"/>
+          </a:xfrm>
+          <a:prstGeom xmlns:a="http://schemas.openxmlformats.org/drawingml/2006/main" prst="rect">
+            <a:avLst/>
+          </a:prstGeom>
+          <a:noFill xmlns:a="http://schemas.openxmlformats.org/drawingml/2006/main"/>
+          <a:ln xmlns:a="http://schemas.openxmlformats.org/drawingml/2006/main" w="0">
+            <a:noFill/>
+            <a:prstDash val="solid"/>
+          </a:ln>
+        </p:spPr>
+        <p:txBody>
+          <a:bodyPr xmlns:a="http://schemas.openxmlformats.org/drawingml/2006/main" wrap="square" lIns="0" tIns="0" rIns="0" bIns="0" anchor="t">
+            <a:normAutofit fontScale="100000"/>
+          </a:bodyPr>
+          <a:lstStyle xmlns:a="http://schemas.openxmlformats.org/drawingml/2006/main"/>
+          <a:p xmlns:a="http://schemas.openxmlformats.org/drawingml/2006/main">
+            <a:pPr algn="l">
+              <a:buNone/>
+              <a:defRPr sz="1200" b="1">
+                <a:solidFill>
+                  <a:srgbClr val="667384"/>
+                </a:solidFill>
+                <a:latin typeface="Arial"/>
+                <a:ea typeface="Arial"/>
+                <a:cs typeface="Arial"/>
+              </a:defRPr>
+            </a:pPr>
+            <a:r>
+              <a:rPr sz="1200" b="1">
+                <a:solidFill>
+                  <a:srgbClr val="667384"/>
+                </a:solidFill>
+                <a:latin typeface="Arial"/>
+                <a:ea typeface="Arial"/>
+                <a:cs typeface="Arial"/>
+              </a:rPr>
+              <a:t>HORIZON READOUT</a:t>
+            </a:r>
+          </a:p>
+        </p:txBody>
+      </p:sp>
+      <p:sp>
+        <p:nvSpPr>
+          <p:cNvPr id="2" name="title-11">
+            <a:extLst xmlns:a="http://schemas.openxmlformats.org/drawingml/2006/main">
+              <a:ext uri="{FF2B5EF4-FFF2-40B4-BE49-F238E27FC236}">
+                <a16:creationId xmlns:a16="http://schemas.microsoft.com/office/drawing/2014/main" id="{3EC40708-7E00-432C-8ECE-907FA5705292}"/>
+              </a:ext>
+            </a:extLst>
+          </p:cNvPr>
+          <p:cNvSpPr>
+            <a:spLocks xmlns:a="http://schemas.openxmlformats.org/drawingml/2006/main" noGrp="1"/>
+          </p:cNvSpPr>
+          <p:nvPr/>
+        </p:nvSpPr>
+        <p:spPr>
+          <a:xfrm xmlns:a="http://schemas.openxmlformats.org/drawingml/2006/main">
+            <a:off x="457200" y="533400"/>
+            <a:ext cx="11277600" cy="628650"/>
+          </a:xfrm>
+          <a:prstGeom xmlns:a="http://schemas.openxmlformats.org/drawingml/2006/main" prst="rect">
+            <a:avLst/>
+          </a:prstGeom>
+          <a:noFill xmlns:a="http://schemas.openxmlformats.org/drawingml/2006/main"/>
+          <a:ln xmlns:a="http://schemas.openxmlformats.org/drawingml/2006/main" w="0">
+            <a:noFill/>
+            <a:prstDash val="solid"/>
+          </a:ln>
+        </p:spPr>
+        <p:txBody>
+          <a:bodyPr xmlns:a="http://schemas.openxmlformats.org/drawingml/2006/main" wrap="square" lIns="0" tIns="0" rIns="0" bIns="0" anchor="t">
+            <a:normAutofit fontScale="100000"/>
+          </a:bodyPr>
+          <a:lstStyle xmlns:a="http://schemas.openxmlformats.org/drawingml/2006/main"/>
+          <a:p xmlns:a="http://schemas.openxmlformats.org/drawingml/2006/main">
+            <a:pPr algn="l">
+              <a:buNone/>
+              <a:defRPr sz="3525" b="1">
+                <a:solidFill>
+                  <a:srgbClr val="000000"/>
+                </a:solidFill>
+                <a:latin typeface="Arial"/>
+                <a:ea typeface="Arial"/>
+                <a:cs typeface="Arial"/>
+              </a:defRPr>
+            </a:pPr>
+            <a:r>
+              <a:rPr sz="3525" b="1">
+                <a:solidFill>
+                  <a:srgbClr val="000000"/>
+                </a:solidFill>
+                <a:latin typeface="Arial"/>
+                <a:ea typeface="Arial"/>
+                <a:cs typeface="Arial"/>
+              </a:rPr>
+              <a:t>Positive returns do not beat ordinary drift</a:t>
+            </a:r>
+          </a:p>
+        </p:txBody>
+      </p:sp>
+      <p:sp>
+        <p:nvSpPr>
+          <p:cNvPr id="3" name="">
+            <a:extLst xmlns:a="http://schemas.openxmlformats.org/drawingml/2006/main">
+              <a:ext uri="{FF2B5EF4-FFF2-40B4-BE49-F238E27FC236}">
+                <a16:creationId xmlns:a16="http://schemas.microsoft.com/office/drawing/2014/main" id="{D5CA0FCE-75E8-41EF-A76A-23E9E2120C6A}"/>
+              </a:ext>
+            </a:extLst>
+          </p:cNvPr>
+          <p:cNvSpPr>
+            <a:spLocks xmlns:a="http://schemas.openxmlformats.org/drawingml/2006/main" noGrp="1"/>
+          </p:cNvSpPr>
+          <p:nvPr/>
+        </p:nvSpPr>
+        <p:spPr>
+          <a:xfrm xmlns:a="http://schemas.openxmlformats.org/drawingml/2006/main">
+            <a:off x="457200" y="1200150"/>
+            <a:ext cx="11277600" cy="19050"/>
+          </a:xfrm>
+          <a:prstGeom xmlns:a="http://schemas.openxmlformats.org/drawingml/2006/main" prst="rect">
+            <a:avLst/>
+          </a:prstGeom>
+          <a:solidFill xmlns:a="http://schemas.openxmlformats.org/drawingml/2006/main">
+            <a:srgbClr val="B8BCC4"/>
+          </a:solidFill>
+          <a:ln xmlns:a="http://schemas.openxmlformats.org/drawingml/2006/main" w="0">
+            <a:solidFill>
+              <a:srgbClr val="B8BCC4"/>
+            </a:solidFill>
+            <a:prstDash val="solid"/>
+          </a:ln>
+        </p:spPr>
+      </p:sp>
+      <p:sp>
+        <p:nvSpPr>
+          <p:cNvPr id="4" name="footer-left-11">
+            <a:extLst xmlns:a="http://schemas.openxmlformats.org/drawingml/2006/main">
+              <a:ext uri="{FF2B5EF4-FFF2-40B4-BE49-F238E27FC236}">
+                <a16:creationId xmlns:a16="http://schemas.microsoft.com/office/drawing/2014/main" id="{700DA765-80E0-4197-8700-00D867B86FA2}"/>
+              </a:ext>
+            </a:extLst>
+          </p:cNvPr>
+          <p:cNvSpPr>
+            <a:spLocks xmlns:a="http://schemas.openxmlformats.org/drawingml/2006/main" noGrp="1"/>
+          </p:cNvSpPr>
+          <p:nvPr/>
+        </p:nvSpPr>
+        <p:spPr>
+          <a:xfrm xmlns:a="http://schemas.openxmlformats.org/drawingml/2006/main">
+            <a:off x="457200" y="6515100"/>
+            <a:ext cx="3429000" cy="171450"/>
+          </a:xfrm>
+          <a:prstGeom xmlns:a="http://schemas.openxmlformats.org/drawingml/2006/main" prst="rect">
+            <a:avLst/>
+          </a:prstGeom>
+          <a:noFill xmlns:a="http://schemas.openxmlformats.org/drawingml/2006/main"/>
+          <a:ln xmlns:a="http://schemas.openxmlformats.org/drawingml/2006/main" w="0">
+            <a:noFill/>
+            <a:prstDash val="solid"/>
+          </a:ln>
+        </p:spPr>
+        <p:txBody>
+          <a:bodyPr xmlns:a="http://schemas.openxmlformats.org/drawingml/2006/main" wrap="square" lIns="0" tIns="0" rIns="0" bIns="0" anchor="t">
+            <a:normAutofit fontScale="100000"/>
+          </a:bodyPr>
+          <a:lstStyle xmlns:a="http://schemas.openxmlformats.org/drawingml/2006/main"/>
+          <a:p xmlns:a="http://schemas.openxmlformats.org/drawingml/2006/main">
+            <a:pPr algn="l">
+              <a:buNone/>
+              <a:defRPr sz="825" b="0">
+                <a:solidFill>
+                  <a:srgbClr val="64748B"/>
+                </a:solidFill>
+                <a:latin typeface="Arial"/>
+                <a:ea typeface="Arial"/>
+                <a:cs typeface="Arial"/>
+              </a:defRPr>
+            </a:pPr>
+            <a:r>
+              <a:rPr sz="825" b="0">
+                <a:solidFill>
+                  <a:srgbClr val="64748B"/>
+                </a:solidFill>
+                <a:latin typeface="Arial"/>
+                <a:ea typeface="Arial"/>
+                <a:cs typeface="Arial"/>
+              </a:rPr>
+              <a:t>Equal-sector median asset | net of 10 bp | 11 sectors</a:t>
+            </a:r>
+          </a:p>
+        </p:txBody>
+      </p:sp>
+      <p:sp>
+        <p:nvSpPr>
+          <p:cNvPr id="5" name="footer-number-11">
+            <a:extLst xmlns:a="http://schemas.openxmlformats.org/drawingml/2006/main">
+              <a:ext uri="{FF2B5EF4-FFF2-40B4-BE49-F238E27FC236}">
+                <a16:creationId xmlns:a16="http://schemas.microsoft.com/office/drawing/2014/main" id="{83896276-4112-4532-AF7C-776C67C58B77}"/>
+              </a:ext>
+            </a:extLst>
+          </p:cNvPr>
+          <p:cNvSpPr>
+            <a:spLocks xmlns:a="http://schemas.openxmlformats.org/drawingml/2006/main" noGrp="1"/>
+          </p:cNvSpPr>
+          <p:nvPr/>
+        </p:nvSpPr>
+        <p:spPr>
+          <a:xfrm xmlns:a="http://schemas.openxmlformats.org/drawingml/2006/main">
+            <a:off x="10477500" y="6496050"/>
+            <a:ext cx="1257300" cy="190500"/>
+          </a:xfrm>
+          <a:prstGeom xmlns:a="http://schemas.openxmlformats.org/drawingml/2006/main" prst="rect">
+            <a:avLst/>
+          </a:prstGeom>
+          <a:noFill xmlns:a="http://schemas.openxmlformats.org/drawingml/2006/main"/>
+          <a:ln xmlns:a="http://schemas.openxmlformats.org/drawingml/2006/main" w="0">
+            <a:noFill/>
+            <a:prstDash val="solid"/>
+          </a:ln>
+        </p:spPr>
+        <p:txBody>
+          <a:bodyPr xmlns:a="http://schemas.openxmlformats.org/drawingml/2006/main" wrap="square" lIns="0" tIns="0" rIns="0" bIns="0" anchor="t">
+            <a:normAutofit fontScale="100000"/>
+          </a:bodyPr>
+          <a:lstStyle xmlns:a="http://schemas.openxmlformats.org/drawingml/2006/main"/>
+          <a:p xmlns:a="http://schemas.openxmlformats.org/drawingml/2006/main">
+            <a:pPr algn="r">
+              <a:buNone/>
+              <a:defRPr sz="1050" b="0">
+                <a:solidFill>
+                  <a:srgbClr val="667384"/>
+                </a:solidFill>
+                <a:latin typeface="Arial"/>
+                <a:ea typeface="Arial"/>
+                <a:cs typeface="Arial"/>
+              </a:defRPr>
+            </a:pPr>
+            <a:r>
+              <a:rPr sz="1050" b="0">
+                <a:solidFill>
+                  <a:srgbClr val="667384"/>
+                </a:solidFill>
+                <a:latin typeface="Arial"/>
+                <a:ea typeface="Arial"/>
+                <a:cs typeface="Arial"/>
+              </a:rPr>
+              <a:t>18</a:t>
+            </a:r>
+          </a:p>
+        </p:txBody>
+      </p:sp>
+      <p:pic>
+        <p:nvPicPr>
+          <p:cNvPr id="31" name=""/>
+          <p:cNvPicPr>
+            <a:picLocks xmlns:a="http://schemas.openxmlformats.org/drawingml/2006/main" noChangeAspect="1"/>
+          </p:cNvPicPr>
+          <p:nvPr/>
+        </p:nvPicPr>
+        <p:blipFill>
+          <a:blip xmlns:r="http://schemas.openxmlformats.org/officeDocument/2006/relationships" xmlns:a="http://schemas.openxmlformats.org/drawingml/2006/main" r:embed="Rf85cdb41c2c8422e"/>
+          <a:stretch xmlns:a="http://schemas.openxmlformats.org/drawingml/2006/main"/>
+        </p:blipFill>
+        <p:spPr>
+          <a:xfrm xmlns:a="http://schemas.openxmlformats.org/drawingml/2006/main">
+            <a:off x="2885498" y="1951389"/>
+            <a:ext cx="6421005" cy="3812472"/>
+          </a:xfrm>
+          <a:prstGeom xmlns:a="http://schemas.openxmlformats.org/drawingml/2006/main" prst="rect">
+            <a:avLst/>
+          </a:prstGeom>
+        </p:spPr>
+      </p:pic>
+    </p:spTree>
+    <p:extLst>
+      <p:ext uri="{BB962C8B-B14F-4D97-AF65-F5344CB8AC3E}">
+        <p14:creationId xmlns:p14="http://schemas.microsoft.com/office/powerpoint/2010/main" val="666536286"/>
+      </p:ext>
+    </p:extLst>
+  </p:cSld>
+</p:sld>
+</file>
+
+<file path=ppt/slides/slide19.xml><?xml version="1.0" encoding="utf-8"?>
+<p:sld xmlns:p="http://schemas.openxmlformats.org/presentationml/2006/main">
+  <p:cSld>
+    <p:bg>
+      <p:bgPr>
+        <a:solidFill xmlns:a="http://schemas.openxmlformats.org/drawingml/2006/main">
+          <a:srgbClr val="FFFFFF"/>
+        </a:solidFill>
+      </p:bgPr>
+    </p:bg>
+    <p:spTree>
+      <p:nvGrpSpPr>
+        <p:cNvPr id="1" name=""/>
+        <p:cNvGrpSpPr/>
+        <p:nvPr/>
+      </p:nvGrpSpPr>
+      <p:grpSpPr>
+        <a:xfrm xmlns:a="http://schemas.openxmlformats.org/drawingml/2006/main"/>
+      </p:grpSpPr>
+      <p:sp>
+        <p:nvSpPr>
+          <p:cNvPr id="24" name="section-11">
+            <a:extLst xmlns:a="http://schemas.openxmlformats.org/drawingml/2006/main">
+              <a:ext uri="{FF2B5EF4-FFF2-40B4-BE49-F238E27FC236}">
+                <a16:creationId xmlns:a16="http://schemas.microsoft.com/office/drawing/2014/main" id="{272ED433-B59C-436C-9DFB-4D317B90A13F}"/>
+              </a:ext>
+            </a:extLst>
+          </p:cNvPr>
+          <p:cNvSpPr>
+            <a:spLocks xmlns:a="http://schemas.openxmlformats.org/drawingml/2006/main" noGrp="1"/>
+          </p:cNvSpPr>
+          <p:nvPr/>
+        </p:nvSpPr>
+        <p:spPr>
+          <a:xfrm xmlns:a="http://schemas.openxmlformats.org/drawingml/2006/main">
+            <a:off x="457200" y="228600"/>
+            <a:ext cx="4191000" cy="228600"/>
+          </a:xfrm>
+          <a:prstGeom xmlns:a="http://schemas.openxmlformats.org/drawingml/2006/main" prst="rect">
+            <a:avLst/>
+          </a:prstGeom>
+          <a:noFill xmlns:a="http://schemas.openxmlformats.org/drawingml/2006/main"/>
+          <a:ln xmlns:a="http://schemas.openxmlformats.org/drawingml/2006/main" w="0">
+            <a:noFill/>
+            <a:prstDash val="solid"/>
+          </a:ln>
+        </p:spPr>
+        <p:txBody>
+          <a:bodyPr xmlns:a="http://schemas.openxmlformats.org/drawingml/2006/main" wrap="square" lIns="0" tIns="0" rIns="0" bIns="0" anchor="t">
+            <a:normAutofit fontScale="100000"/>
+          </a:bodyPr>
+          <a:lstStyle xmlns:a="http://schemas.openxmlformats.org/drawingml/2006/main"/>
+          <a:p xmlns:a="http://schemas.openxmlformats.org/drawingml/2006/main">
+            <a:pPr algn="l">
+              <a:buNone/>
+              <a:defRPr sz="1200" b="1">
+                <a:solidFill>
+                  <a:srgbClr val="667384"/>
+                </a:solidFill>
+                <a:latin typeface="Arial"/>
+                <a:ea typeface="Arial"/>
+                <a:cs typeface="Arial"/>
+              </a:defRPr>
+            </a:pPr>
+            <a:r>
+              <a:rPr sz="1200" b="1">
+                <a:solidFill>
+                  <a:srgbClr val="667384"/>
+                </a:solidFill>
+                <a:latin typeface="Arial"/>
+                <a:ea typeface="Arial"/>
+                <a:cs typeface="Arial"/>
+              </a:rPr>
+              <a:t>WEIGHTING SENSITIVITY</a:t>
+            </a:r>
+          </a:p>
+        </p:txBody>
+      </p:sp>
+      <p:sp>
+        <p:nvSpPr>
+          <p:cNvPr id="2" name="title-11">
+            <a:extLst xmlns:a="http://schemas.openxmlformats.org/drawingml/2006/main">
+              <a:ext uri="{FF2B5EF4-FFF2-40B4-BE49-F238E27FC236}">
+                <a16:creationId xmlns:a16="http://schemas.microsoft.com/office/drawing/2014/main" id="{3EC40708-7E00-432C-8ECE-907FA5705292}"/>
+              </a:ext>
+            </a:extLst>
+          </p:cNvPr>
+          <p:cNvSpPr>
+            <a:spLocks xmlns:a="http://schemas.openxmlformats.org/drawingml/2006/main" noGrp="1"/>
+          </p:cNvSpPr>
+          <p:nvPr/>
+        </p:nvSpPr>
+        <p:spPr>
+          <a:xfrm xmlns:a="http://schemas.openxmlformats.org/drawingml/2006/main">
+            <a:off x="457200" y="533400"/>
+            <a:ext cx="11277600" cy="628650"/>
+          </a:xfrm>
+          <a:prstGeom xmlns:a="http://schemas.openxmlformats.org/drawingml/2006/main" prst="rect">
+            <a:avLst/>
+          </a:prstGeom>
+          <a:noFill xmlns:a="http://schemas.openxmlformats.org/drawingml/2006/main"/>
+          <a:ln xmlns:a="http://schemas.openxmlformats.org/drawingml/2006/main" w="0">
+            <a:noFill/>
+            <a:prstDash val="solid"/>
+          </a:ln>
+        </p:spPr>
+        <p:txBody>
+          <a:bodyPr xmlns:a="http://schemas.openxmlformats.org/drawingml/2006/main" wrap="square" lIns="0" tIns="0" rIns="0" bIns="0" anchor="t">
+            <a:normAutofit fontScale="100000"/>
+          </a:bodyPr>
+          <a:lstStyle xmlns:a="http://schemas.openxmlformats.org/drawingml/2006/main"/>
+          <a:p xmlns:a="http://schemas.openxmlformats.org/drawingml/2006/main">
+            <a:pPr algn="l">
+              <a:buNone/>
+              <a:defRPr sz="3525" b="1">
+                <a:solidFill>
+                  <a:srgbClr val="000000"/>
+                </a:solidFill>
+                <a:latin typeface="Arial"/>
+                <a:ea typeface="Arial"/>
+                <a:cs typeface="Arial"/>
+              </a:defRPr>
+            </a:pPr>
+            <a:r>
+              <a:rPr sz="3525" b="1">
+                <a:solidFill>
+                  <a:srgbClr val="000000"/>
+                </a:solidFill>
+                <a:latin typeface="Arial"/>
+                <a:ea typeface="Arial"/>
+                <a:cs typeface="Arial"/>
+              </a:rPr>
+              <a:t>Only 20 sessions beats trending under both lenses</a:t>
+            </a:r>
+          </a:p>
+        </p:txBody>
+      </p:sp>
+      <p:sp>
+        <p:nvSpPr>
+          <p:cNvPr id="3" name="">
+            <a:extLst xmlns:a="http://schemas.openxmlformats.org/drawingml/2006/main">
+              <a:ext uri="{FF2B5EF4-FFF2-40B4-BE49-F238E27FC236}">
+                <a16:creationId xmlns:a16="http://schemas.microsoft.com/office/drawing/2014/main" id="{D5CA0FCE-75E8-41EF-A76A-23E9E2120C6A}"/>
+              </a:ext>
+            </a:extLst>
+          </p:cNvPr>
+          <p:cNvSpPr>
+            <a:spLocks xmlns:a="http://schemas.openxmlformats.org/drawingml/2006/main" noGrp="1"/>
+          </p:cNvSpPr>
+          <p:nvPr/>
+        </p:nvSpPr>
+        <p:spPr>
+          <a:xfrm xmlns:a="http://schemas.openxmlformats.org/drawingml/2006/main">
+            <a:off x="457200" y="1200150"/>
+            <a:ext cx="11277600" cy="19050"/>
+          </a:xfrm>
+          <a:prstGeom xmlns:a="http://schemas.openxmlformats.org/drawingml/2006/main" prst="rect">
+            <a:avLst/>
+          </a:prstGeom>
+          <a:solidFill xmlns:a="http://schemas.openxmlformats.org/drawingml/2006/main">
+            <a:srgbClr val="B8BCC4"/>
+          </a:solidFill>
+          <a:ln xmlns:a="http://schemas.openxmlformats.org/drawingml/2006/main" w="0">
+            <a:solidFill>
+              <a:srgbClr val="B8BCC4"/>
+            </a:solidFill>
+            <a:prstDash val="solid"/>
+          </a:ln>
+        </p:spPr>
+      </p:sp>
+      <p:sp>
+        <p:nvSpPr>
+          <p:cNvPr id="4" name="footer-left-11">
+            <a:extLst xmlns:a="http://schemas.openxmlformats.org/drawingml/2006/main">
+              <a:ext uri="{FF2B5EF4-FFF2-40B4-BE49-F238E27FC236}">
+                <a16:creationId xmlns:a16="http://schemas.microsoft.com/office/drawing/2014/main" id="{700DA765-80E0-4197-8700-00D867B86FA2}"/>
+              </a:ext>
+            </a:extLst>
+          </p:cNvPr>
+          <p:cNvSpPr>
+            <a:spLocks xmlns:a="http://schemas.openxmlformats.org/drawingml/2006/main" noGrp="1"/>
+          </p:cNvSpPr>
+          <p:nvPr/>
+        </p:nvSpPr>
+        <p:spPr>
+          <a:xfrm xmlns:a="http://schemas.openxmlformats.org/drawingml/2006/main">
+            <a:off x="457200" y="6515100"/>
+            <a:ext cx="3429000" cy="171450"/>
+          </a:xfrm>
+          <a:prstGeom xmlns:a="http://schemas.openxmlformats.org/drawingml/2006/main" prst="rect">
+            <a:avLst/>
+          </a:prstGeom>
+          <a:noFill xmlns:a="http://schemas.openxmlformats.org/drawingml/2006/main"/>
+          <a:ln xmlns:a="http://schemas.openxmlformats.org/drawingml/2006/main" w="0">
+            <a:noFill/>
+            <a:prstDash val="solid"/>
+          </a:ln>
+        </p:spPr>
+        <p:txBody>
+          <a:bodyPr xmlns:a="http://schemas.openxmlformats.org/drawingml/2006/main" wrap="square" lIns="0" tIns="0" rIns="0" bIns="0" anchor="t">
+            <a:normAutofit fontScale="100000"/>
+          </a:bodyPr>
+          <a:lstStyle xmlns:a="http://schemas.openxmlformats.org/drawingml/2006/main"/>
+          <a:p xmlns:a="http://schemas.openxmlformats.org/drawingml/2006/main">
+            <a:pPr algn="l">
+              <a:buNone/>
+              <a:defRPr sz="825" b="0">
+                <a:solidFill>
+                  <a:srgbClr val="64748B"/>
+                </a:solidFill>
+                <a:latin typeface="Arial"/>
+                <a:ea typeface="Arial"/>
+                <a:cs typeface="Arial"/>
+              </a:defRPr>
+            </a:pPr>
+            <a:r>
+              <a:rPr sz="825" b="0">
+                <a:solidFill>
+                  <a:srgbClr val="64748B"/>
+                </a:solidFill>
+                <a:latin typeface="Arial"/>
+                <a:ea typeface="Arial"/>
+                <a:cs typeface="Arial"/>
+              </a:rPr>
+              <a:t>Sideways-positive minus trending-positive | bp per trade</a:t>
+            </a:r>
+          </a:p>
+        </p:txBody>
+      </p:sp>
+      <p:sp>
+        <p:nvSpPr>
+          <p:cNvPr id="5" name="footer-number-11">
+            <a:extLst xmlns:a="http://schemas.openxmlformats.org/drawingml/2006/main">
+              <a:ext uri="{FF2B5EF4-FFF2-40B4-BE49-F238E27FC236}">
+                <a16:creationId xmlns:a16="http://schemas.microsoft.com/office/drawing/2014/main" id="{83896276-4112-4532-AF7C-776C67C58B77}"/>
+              </a:ext>
+            </a:extLst>
+          </p:cNvPr>
+          <p:cNvSpPr>
+            <a:spLocks xmlns:a="http://schemas.openxmlformats.org/drawingml/2006/main" noGrp="1"/>
+          </p:cNvSpPr>
+          <p:nvPr/>
+        </p:nvSpPr>
+        <p:spPr>
+          <a:xfrm xmlns:a="http://schemas.openxmlformats.org/drawingml/2006/main">
+            <a:off x="10477500" y="6496050"/>
+            <a:ext cx="1257300" cy="190500"/>
+          </a:xfrm>
+          <a:prstGeom xmlns:a="http://schemas.openxmlformats.org/drawingml/2006/main" prst="rect">
+            <a:avLst/>
+          </a:prstGeom>
+          <a:noFill xmlns:a="http://schemas.openxmlformats.org/drawingml/2006/main"/>
+          <a:ln xmlns:a="http://schemas.openxmlformats.org/drawingml/2006/main" w="0">
+            <a:noFill/>
+            <a:prstDash val="solid"/>
+          </a:ln>
+        </p:spPr>
+        <p:txBody>
+          <a:bodyPr xmlns:a="http://schemas.openxmlformats.org/drawingml/2006/main" wrap="square" lIns="0" tIns="0" rIns="0" bIns="0" anchor="t">
+            <a:normAutofit fontScale="100000"/>
+          </a:bodyPr>
+          <a:lstStyle xmlns:a="http://schemas.openxmlformats.org/drawingml/2006/main"/>
+          <a:p xmlns:a="http://schemas.openxmlformats.org/drawingml/2006/main">
+            <a:pPr algn="r">
+              <a:buNone/>
+              <a:defRPr sz="1050" b="0">
+                <a:solidFill>
+                  <a:srgbClr val="667384"/>
+                </a:solidFill>
+                <a:latin typeface="Arial"/>
+                <a:ea typeface="Arial"/>
+                <a:cs typeface="Arial"/>
+              </a:defRPr>
+            </a:pPr>
+            <a:r>
+              <a:rPr sz="1050" b="0">
+                <a:solidFill>
+                  <a:srgbClr val="667384"/>
+                </a:solidFill>
+                <a:latin typeface="Arial"/>
+                <a:ea typeface="Arial"/>
+                <a:cs typeface="Arial"/>
+              </a:rPr>
+              <a:t>19</a:t>
+            </a:r>
+          </a:p>
+        </p:txBody>
+      </p:sp>
+      <p:pic>
+        <p:nvPicPr>
+          <p:cNvPr id="31" name=""/>
+          <p:cNvPicPr>
+            <a:picLocks xmlns:a="http://schemas.openxmlformats.org/drawingml/2006/main" noChangeAspect="1"/>
+          </p:cNvPicPr>
+          <p:nvPr/>
+        </p:nvPicPr>
+        <p:blipFill>
+          <a:blip xmlns:r="http://schemas.openxmlformats.org/officeDocument/2006/relationships" xmlns:a="http://schemas.openxmlformats.org/drawingml/2006/main" r:embed="R58247bbb8bb24d13"/>
+          <a:stretch xmlns:a="http://schemas.openxmlformats.org/drawingml/2006/main"/>
+        </p:blipFill>
+        <p:spPr>
+          <a:xfrm xmlns:a="http://schemas.openxmlformats.org/drawingml/2006/main">
+            <a:off x="2885498" y="1931323"/>
+            <a:ext cx="6421005" cy="3852603"/>
+          </a:xfrm>
+          <a:prstGeom xmlns:a="http://schemas.openxmlformats.org/drawingml/2006/main" prst="rect">
+            <a:avLst/>
+          </a:prstGeom>
+        </p:spPr>
+      </p:pic>
+    </p:spTree>
+    <p:extLst>
+      <p:ext uri="{BB962C8B-B14F-4D97-AF65-F5344CB8AC3E}">
+        <p14:creationId xmlns:p14="http://schemas.microsoft.com/office/powerpoint/2010/main" val="666536286"/>
+      </p:ext>
+    </p:extLst>
+  </p:cSld>
+</p:sld>
+</file>
+
 <file path=ppt/slides/slide2.xml><?xml version="1.0" encoding="utf-8"?>
 <p:sld xmlns:p="http://schemas.openxmlformats.org/presentationml/2006/main">
   <p:cSld>
@@ -6677,6 +9590,2144 @@
                 <a:cs typeface="Arial"/>
               </a:rPr>
               <a:t>BEHAV-MOM-01 is worth preserving and discussing. Its current status is DESCRIPTIVE_BEHAVIORAL_LEAD.</a:t>
+            </a:r>
+          </a:p>
+        </p:txBody>
+      </p:sp>
+    </p:spTree>
+    <p:extLst>
+      <p:ext uri="{BB962C8B-B14F-4D97-AF65-F5344CB8AC3E}">
+        <p14:creationId xmlns:p14="http://schemas.microsoft.com/office/powerpoint/2010/main" val="666536286"/>
+      </p:ext>
+    </p:extLst>
+  </p:cSld>
+</p:sld>
+</file>
+
+<file path=ppt/slides/slide20.xml><?xml version="1.0" encoding="utf-8"?>
+<p:sld xmlns:p="http://schemas.openxmlformats.org/presentationml/2006/main">
+  <p:cSld>
+    <p:bg>
+      <p:bgPr>
+        <a:solidFill xmlns:a="http://schemas.openxmlformats.org/drawingml/2006/main">
+          <a:srgbClr val="FFFFFF"/>
+        </a:solidFill>
+      </p:bgPr>
+    </p:bg>
+    <p:spTree>
+      <p:nvGrpSpPr>
+        <p:cNvPr id="1" name=""/>
+        <p:cNvGrpSpPr/>
+        <p:nvPr/>
+      </p:nvGrpSpPr>
+      <p:grpSpPr>
+        <a:xfrm xmlns:a="http://schemas.openxmlformats.org/drawingml/2006/main"/>
+      </p:grpSpPr>
+      <p:sp>
+        <p:nvSpPr>
+          <p:cNvPr id="24" name="section-11">
+            <a:extLst xmlns:a="http://schemas.openxmlformats.org/drawingml/2006/main">
+              <a:ext uri="{FF2B5EF4-FFF2-40B4-BE49-F238E27FC236}">
+                <a16:creationId xmlns:a16="http://schemas.microsoft.com/office/drawing/2014/main" id="{272ED433-B59C-436C-9DFB-4D317B90A13F}"/>
+              </a:ext>
+            </a:extLst>
+          </p:cNvPr>
+          <p:cNvSpPr>
+            <a:spLocks xmlns:a="http://schemas.openxmlformats.org/drawingml/2006/main" noGrp="1"/>
+          </p:cNvSpPr>
+          <p:nvPr/>
+        </p:nvSpPr>
+        <p:spPr>
+          <a:xfrm xmlns:a="http://schemas.openxmlformats.org/drawingml/2006/main">
+            <a:off x="457200" y="228600"/>
+            <a:ext cx="4191000" cy="228600"/>
+          </a:xfrm>
+          <a:prstGeom xmlns:a="http://schemas.openxmlformats.org/drawingml/2006/main" prst="rect">
+            <a:avLst/>
+          </a:prstGeom>
+          <a:noFill xmlns:a="http://schemas.openxmlformats.org/drawingml/2006/main"/>
+          <a:ln xmlns:a="http://schemas.openxmlformats.org/drawingml/2006/main" w="0">
+            <a:noFill/>
+            <a:prstDash val="solid"/>
+          </a:ln>
+        </p:spPr>
+        <p:txBody>
+          <a:bodyPr xmlns:a="http://schemas.openxmlformats.org/drawingml/2006/main" wrap="square" lIns="0" tIns="0" rIns="0" bIns="0" anchor="t">
+            <a:normAutofit fontScale="100000"/>
+          </a:bodyPr>
+          <a:lstStyle xmlns:a="http://schemas.openxmlformats.org/drawingml/2006/main"/>
+          <a:p xmlns:a="http://schemas.openxmlformats.org/drawingml/2006/main">
+            <a:pPr algn="l">
+              <a:buNone/>
+              <a:defRPr sz="1200" b="1">
+                <a:solidFill>
+                  <a:srgbClr val="667384"/>
+                </a:solidFill>
+                <a:latin typeface="Arial"/>
+                <a:ea typeface="Arial"/>
+                <a:cs typeface="Arial"/>
+              </a:defRPr>
+            </a:pPr>
+            <a:r>
+              <a:rPr sz="1200" b="1">
+                <a:solidFill>
+                  <a:srgbClr val="667384"/>
+                </a:solidFill>
+                <a:latin typeface="Arial"/>
+                <a:ea typeface="Arial"/>
+                <a:cs typeface="Arial"/>
+              </a:rPr>
+              <a:t>SECTOR BREADTH</a:t>
+            </a:r>
+          </a:p>
+        </p:txBody>
+      </p:sp>
+      <p:sp>
+        <p:nvSpPr>
+          <p:cNvPr id="2" name="title-11">
+            <a:extLst xmlns:a="http://schemas.openxmlformats.org/drawingml/2006/main">
+              <a:ext uri="{FF2B5EF4-FFF2-40B4-BE49-F238E27FC236}">
+                <a16:creationId xmlns:a16="http://schemas.microsoft.com/office/drawing/2014/main" id="{3EC40708-7E00-432C-8ECE-907FA5705292}"/>
+              </a:ext>
+            </a:extLst>
+          </p:cNvPr>
+          <p:cNvSpPr>
+            <a:spLocks xmlns:a="http://schemas.openxmlformats.org/drawingml/2006/main" noGrp="1"/>
+          </p:cNvSpPr>
+          <p:nvPr/>
+        </p:nvSpPr>
+        <p:spPr>
+          <a:xfrm xmlns:a="http://schemas.openxmlformats.org/drawingml/2006/main">
+            <a:off x="457200" y="533400"/>
+            <a:ext cx="11277600" cy="628650"/>
+          </a:xfrm>
+          <a:prstGeom xmlns:a="http://schemas.openxmlformats.org/drawingml/2006/main" prst="rect">
+            <a:avLst/>
+          </a:prstGeom>
+          <a:noFill xmlns:a="http://schemas.openxmlformats.org/drawingml/2006/main"/>
+          <a:ln xmlns:a="http://schemas.openxmlformats.org/drawingml/2006/main" w="0">
+            <a:noFill/>
+            <a:prstDash val="solid"/>
+          </a:ln>
+        </p:spPr>
+        <p:txBody>
+          <a:bodyPr xmlns:a="http://schemas.openxmlformats.org/drawingml/2006/main" wrap="square" lIns="0" tIns="0" rIns="0" bIns="0" anchor="t">
+            <a:normAutofit fontScale="100000"/>
+          </a:bodyPr>
+          <a:lstStyle xmlns:a="http://schemas.openxmlformats.org/drawingml/2006/main"/>
+          <a:p xmlns:a="http://schemas.openxmlformats.org/drawingml/2006/main">
+            <a:pPr algn="l">
+              <a:buNone/>
+              <a:defRPr sz="3525" b="1">
+                <a:solidFill>
+                  <a:srgbClr val="000000"/>
+                </a:solidFill>
+                <a:latin typeface="Arial"/>
+                <a:ea typeface="Arial"/>
+                <a:cs typeface="Arial"/>
+              </a:defRPr>
+            </a:pPr>
+            <a:r>
+              <a:rPr sz="3525" b="1">
+                <a:solidFill>
+                  <a:srgbClr val="000000"/>
+                </a:solidFill>
+                <a:latin typeface="Arial"/>
+                <a:ea typeface="Arial"/>
+                <a:cs typeface="Arial"/>
+              </a:rPr>
+              <a:t>Excess versus drift is negative in most sectors</a:t>
+            </a:r>
+          </a:p>
+        </p:txBody>
+      </p:sp>
+      <p:sp>
+        <p:nvSpPr>
+          <p:cNvPr id="3" name="">
+            <a:extLst xmlns:a="http://schemas.openxmlformats.org/drawingml/2006/main">
+              <a:ext uri="{FF2B5EF4-FFF2-40B4-BE49-F238E27FC236}">
+                <a16:creationId xmlns:a16="http://schemas.microsoft.com/office/drawing/2014/main" id="{D5CA0FCE-75E8-41EF-A76A-23E9E2120C6A}"/>
+              </a:ext>
+            </a:extLst>
+          </p:cNvPr>
+          <p:cNvSpPr>
+            <a:spLocks xmlns:a="http://schemas.openxmlformats.org/drawingml/2006/main" noGrp="1"/>
+          </p:cNvSpPr>
+          <p:nvPr/>
+        </p:nvSpPr>
+        <p:spPr>
+          <a:xfrm xmlns:a="http://schemas.openxmlformats.org/drawingml/2006/main">
+            <a:off x="457200" y="1200150"/>
+            <a:ext cx="11277600" cy="19050"/>
+          </a:xfrm>
+          <a:prstGeom xmlns:a="http://schemas.openxmlformats.org/drawingml/2006/main" prst="rect">
+            <a:avLst/>
+          </a:prstGeom>
+          <a:solidFill xmlns:a="http://schemas.openxmlformats.org/drawingml/2006/main">
+            <a:srgbClr val="B8BCC4"/>
+          </a:solidFill>
+          <a:ln xmlns:a="http://schemas.openxmlformats.org/drawingml/2006/main" w="0">
+            <a:solidFill>
+              <a:srgbClr val="B8BCC4"/>
+            </a:solidFill>
+            <a:prstDash val="solid"/>
+          </a:ln>
+        </p:spPr>
+      </p:sp>
+      <p:sp>
+        <p:nvSpPr>
+          <p:cNvPr id="4" name="footer-left-11">
+            <a:extLst xmlns:a="http://schemas.openxmlformats.org/drawingml/2006/main">
+              <a:ext uri="{FF2B5EF4-FFF2-40B4-BE49-F238E27FC236}">
+                <a16:creationId xmlns:a16="http://schemas.microsoft.com/office/drawing/2014/main" id="{700DA765-80E0-4197-8700-00D867B86FA2}"/>
+              </a:ext>
+            </a:extLst>
+          </p:cNvPr>
+          <p:cNvSpPr>
+            <a:spLocks xmlns:a="http://schemas.openxmlformats.org/drawingml/2006/main" noGrp="1"/>
+          </p:cNvSpPr>
+          <p:nvPr/>
+        </p:nvSpPr>
+        <p:spPr>
+          <a:xfrm xmlns:a="http://schemas.openxmlformats.org/drawingml/2006/main">
+            <a:off x="457200" y="6515100"/>
+            <a:ext cx="3429000" cy="171450"/>
+          </a:xfrm>
+          <a:prstGeom xmlns:a="http://schemas.openxmlformats.org/drawingml/2006/main" prst="rect">
+            <a:avLst/>
+          </a:prstGeom>
+          <a:noFill xmlns:a="http://schemas.openxmlformats.org/drawingml/2006/main"/>
+          <a:ln xmlns:a="http://schemas.openxmlformats.org/drawingml/2006/main" w="0">
+            <a:noFill/>
+            <a:prstDash val="solid"/>
+          </a:ln>
+        </p:spPr>
+        <p:txBody>
+          <a:bodyPr xmlns:a="http://schemas.openxmlformats.org/drawingml/2006/main" wrap="square" lIns="0" tIns="0" rIns="0" bIns="0" anchor="t">
+            <a:normAutofit fontScale="100000"/>
+          </a:bodyPr>
+          <a:lstStyle xmlns:a="http://schemas.openxmlformats.org/drawingml/2006/main"/>
+          <a:p xmlns:a="http://schemas.openxmlformats.org/drawingml/2006/main">
+            <a:pPr algn="l">
+              <a:buNone/>
+              <a:defRPr sz="825" b="0">
+                <a:solidFill>
+                  <a:srgbClr val="64748B"/>
+                </a:solidFill>
+                <a:latin typeface="Arial"/>
+                <a:ea typeface="Arial"/>
+                <a:cs typeface="Arial"/>
+              </a:defRPr>
+            </a:pPr>
+            <a:r>
+              <a:rPr sz="825" b="0">
+                <a:solidFill>
+                  <a:srgbClr val="64748B"/>
+                </a:solidFill>
+                <a:latin typeface="Arial"/>
+                <a:ea typeface="Arial"/>
+                <a:cs typeface="Arial"/>
+              </a:rPr>
+              <a:t>Primary net return minus unconditional same-horizon drift | bp/trade</a:t>
+            </a:r>
+          </a:p>
+        </p:txBody>
+      </p:sp>
+      <p:sp>
+        <p:nvSpPr>
+          <p:cNvPr id="5" name="footer-number-11">
+            <a:extLst xmlns:a="http://schemas.openxmlformats.org/drawingml/2006/main">
+              <a:ext uri="{FF2B5EF4-FFF2-40B4-BE49-F238E27FC236}">
+                <a16:creationId xmlns:a16="http://schemas.microsoft.com/office/drawing/2014/main" id="{83896276-4112-4532-AF7C-776C67C58B77}"/>
+              </a:ext>
+            </a:extLst>
+          </p:cNvPr>
+          <p:cNvSpPr>
+            <a:spLocks xmlns:a="http://schemas.openxmlformats.org/drawingml/2006/main" noGrp="1"/>
+          </p:cNvSpPr>
+          <p:nvPr/>
+        </p:nvSpPr>
+        <p:spPr>
+          <a:xfrm xmlns:a="http://schemas.openxmlformats.org/drawingml/2006/main">
+            <a:off x="10477500" y="6496050"/>
+            <a:ext cx="1257300" cy="190500"/>
+          </a:xfrm>
+          <a:prstGeom xmlns:a="http://schemas.openxmlformats.org/drawingml/2006/main" prst="rect">
+            <a:avLst/>
+          </a:prstGeom>
+          <a:noFill xmlns:a="http://schemas.openxmlformats.org/drawingml/2006/main"/>
+          <a:ln xmlns:a="http://schemas.openxmlformats.org/drawingml/2006/main" w="0">
+            <a:noFill/>
+            <a:prstDash val="solid"/>
+          </a:ln>
+        </p:spPr>
+        <p:txBody>
+          <a:bodyPr xmlns:a="http://schemas.openxmlformats.org/drawingml/2006/main" wrap="square" lIns="0" tIns="0" rIns="0" bIns="0" anchor="t">
+            <a:normAutofit fontScale="100000"/>
+          </a:bodyPr>
+          <a:lstStyle xmlns:a="http://schemas.openxmlformats.org/drawingml/2006/main"/>
+          <a:p xmlns:a="http://schemas.openxmlformats.org/drawingml/2006/main">
+            <a:pPr algn="r">
+              <a:buNone/>
+              <a:defRPr sz="1050" b="0">
+                <a:solidFill>
+                  <a:srgbClr val="667384"/>
+                </a:solidFill>
+                <a:latin typeface="Arial"/>
+                <a:ea typeface="Arial"/>
+                <a:cs typeface="Arial"/>
+              </a:defRPr>
+            </a:pPr>
+            <a:r>
+              <a:rPr sz="1050" b="0">
+                <a:solidFill>
+                  <a:srgbClr val="667384"/>
+                </a:solidFill>
+                <a:latin typeface="Arial"/>
+                <a:ea typeface="Arial"/>
+                <a:cs typeface="Arial"/>
+              </a:rPr>
+              <a:t>20</a:t>
+            </a:r>
+          </a:p>
+        </p:txBody>
+      </p:sp>
+      <p:pic>
+        <p:nvPicPr>
+          <p:cNvPr id="31" name=""/>
+          <p:cNvPicPr>
+            <a:picLocks xmlns:a="http://schemas.openxmlformats.org/drawingml/2006/main" noChangeAspect="1"/>
+          </p:cNvPicPr>
+          <p:nvPr/>
+        </p:nvPicPr>
+        <p:blipFill>
+          <a:blip xmlns:r="http://schemas.openxmlformats.org/officeDocument/2006/relationships" xmlns:a="http://schemas.openxmlformats.org/drawingml/2006/main" r:embed="Rd179ea5a9cc94e43"/>
+          <a:stretch xmlns:a="http://schemas.openxmlformats.org/drawingml/2006/main"/>
+        </p:blipFill>
+        <p:spPr>
+          <a:xfrm xmlns:a="http://schemas.openxmlformats.org/drawingml/2006/main">
+            <a:off x="3281926" y="1847571"/>
+            <a:ext cx="5628150" cy="4020107"/>
+          </a:xfrm>
+          <a:prstGeom xmlns:a="http://schemas.openxmlformats.org/drawingml/2006/main" prst="rect">
+            <a:avLst/>
+          </a:prstGeom>
+        </p:spPr>
+      </p:pic>
+    </p:spTree>
+    <p:extLst>
+      <p:ext uri="{BB962C8B-B14F-4D97-AF65-F5344CB8AC3E}">
+        <p14:creationId xmlns:p14="http://schemas.microsoft.com/office/powerpoint/2010/main" val="666536286"/>
+      </p:ext>
+    </p:extLst>
+  </p:cSld>
+</p:sld>
+</file>
+
+<file path=ppt/slides/slide21.xml><?xml version="1.0" encoding="utf-8"?>
+<p:sld xmlns:p="http://schemas.openxmlformats.org/presentationml/2006/main">
+  <p:cSld>
+    <p:bg>
+      <p:bgPr>
+        <a:solidFill xmlns:a="http://schemas.openxmlformats.org/drawingml/2006/main">
+          <a:srgbClr val="FFFFFF"/>
+        </a:solidFill>
+      </p:bgPr>
+    </p:bg>
+    <p:spTree>
+      <p:nvGrpSpPr>
+        <p:cNvPr id="1" name=""/>
+        <p:cNvGrpSpPr/>
+        <p:nvPr/>
+      </p:nvGrpSpPr>
+      <p:grpSpPr>
+        <a:xfrm xmlns:a="http://schemas.openxmlformats.org/drawingml/2006/main"/>
+      </p:grpSpPr>
+      <p:sp>
+        <p:nvSpPr>
+          <p:cNvPr id="24" name="section-11">
+            <a:extLst xmlns:a="http://schemas.openxmlformats.org/drawingml/2006/main">
+              <a:ext uri="{FF2B5EF4-FFF2-40B4-BE49-F238E27FC236}">
+                <a16:creationId xmlns:a16="http://schemas.microsoft.com/office/drawing/2014/main" id="{272ED433-B59C-436C-9DFB-4D317B90A13F}"/>
+              </a:ext>
+            </a:extLst>
+          </p:cNvPr>
+          <p:cNvSpPr>
+            <a:spLocks xmlns:a="http://schemas.openxmlformats.org/drawingml/2006/main" noGrp="1"/>
+          </p:cNvSpPr>
+          <p:nvPr/>
+        </p:nvSpPr>
+        <p:spPr>
+          <a:xfrm xmlns:a="http://schemas.openxmlformats.org/drawingml/2006/main">
+            <a:off x="457200" y="228600"/>
+            <a:ext cx="4191000" cy="228600"/>
+          </a:xfrm>
+          <a:prstGeom xmlns:a="http://schemas.openxmlformats.org/drawingml/2006/main" prst="rect">
+            <a:avLst/>
+          </a:prstGeom>
+          <a:noFill xmlns:a="http://schemas.openxmlformats.org/drawingml/2006/main"/>
+          <a:ln xmlns:a="http://schemas.openxmlformats.org/drawingml/2006/main" w="0">
+            <a:noFill/>
+            <a:prstDash val="solid"/>
+          </a:ln>
+        </p:spPr>
+        <p:txBody>
+          <a:bodyPr xmlns:a="http://schemas.openxmlformats.org/drawingml/2006/main" wrap="square" lIns="0" tIns="0" rIns="0" bIns="0" anchor="t">
+            <a:normAutofit fontScale="100000"/>
+          </a:bodyPr>
+          <a:lstStyle xmlns:a="http://schemas.openxmlformats.org/drawingml/2006/main"/>
+          <a:p xmlns:a="http://schemas.openxmlformats.org/drawingml/2006/main">
+            <a:pPr algn="l">
+              <a:buNone/>
+              <a:defRPr sz="1200" b="1">
+                <a:solidFill>
+                  <a:srgbClr val="667384"/>
+                </a:solidFill>
+                <a:latin typeface="Arial"/>
+                <a:ea typeface="Arial"/>
+                <a:cs typeface="Arial"/>
+              </a:defRPr>
+            </a:pPr>
+            <a:r>
+              <a:rPr sz="1200" b="1">
+                <a:solidFill>
+                  <a:srgbClr val="667384"/>
+                </a:solidFill>
+                <a:latin typeface="Arial"/>
+                <a:ea typeface="Arial"/>
+                <a:cs typeface="Arial"/>
+              </a:rPr>
+              <a:t>PATH SHAPE</a:t>
+            </a:r>
+          </a:p>
+        </p:txBody>
+      </p:sp>
+      <p:sp>
+        <p:nvSpPr>
+          <p:cNvPr id="2" name="title-11">
+            <a:extLst xmlns:a="http://schemas.openxmlformats.org/drawingml/2006/main">
+              <a:ext uri="{FF2B5EF4-FFF2-40B4-BE49-F238E27FC236}">
+                <a16:creationId xmlns:a16="http://schemas.microsoft.com/office/drawing/2014/main" id="{3EC40708-7E00-432C-8ECE-907FA5705292}"/>
+              </a:ext>
+            </a:extLst>
+          </p:cNvPr>
+          <p:cNvSpPr>
+            <a:spLocks xmlns:a="http://schemas.openxmlformats.org/drawingml/2006/main" noGrp="1"/>
+          </p:cNvSpPr>
+          <p:nvPr/>
+        </p:nvSpPr>
+        <p:spPr>
+          <a:xfrm xmlns:a="http://schemas.openxmlformats.org/drawingml/2006/main">
+            <a:off x="457200" y="533400"/>
+            <a:ext cx="11277600" cy="628650"/>
+          </a:xfrm>
+          <a:prstGeom xmlns:a="http://schemas.openxmlformats.org/drawingml/2006/main" prst="rect">
+            <a:avLst/>
+          </a:prstGeom>
+          <a:noFill xmlns:a="http://schemas.openxmlformats.org/drawingml/2006/main"/>
+          <a:ln xmlns:a="http://schemas.openxmlformats.org/drawingml/2006/main" w="0">
+            <a:noFill/>
+            <a:prstDash val="solid"/>
+          </a:ln>
+        </p:spPr>
+        <p:txBody>
+          <a:bodyPr xmlns:a="http://schemas.openxmlformats.org/drawingml/2006/main" wrap="square" lIns="0" tIns="0" rIns="0" bIns="0" anchor="t">
+            <a:normAutofit fontScale="100000"/>
+          </a:bodyPr>
+          <a:lstStyle xmlns:a="http://schemas.openxmlformats.org/drawingml/2006/main"/>
+          <a:p xmlns:a="http://schemas.openxmlformats.org/drawingml/2006/main">
+            <a:pPr algn="l">
+              <a:buNone/>
+              <a:defRPr sz="3525" b="1">
+                <a:solidFill>
+                  <a:srgbClr val="000000"/>
+                </a:solidFill>
+                <a:latin typeface="Arial"/>
+                <a:ea typeface="Arial"/>
+                <a:cs typeface="Arial"/>
+              </a:defRPr>
+            </a:pPr>
+            <a:r>
+              <a:rPr sz="3525" b="1">
+                <a:solidFill>
+                  <a:srgbClr val="000000"/>
+                </a:solidFill>
+                <a:latin typeface="Arial"/>
+                <a:ea typeface="Arial"/>
+                <a:cs typeface="Arial"/>
+              </a:rPr>
+              <a:t>Trending leads early; sideways catches up by 20</a:t>
+            </a:r>
+          </a:p>
+        </p:txBody>
+      </p:sp>
+      <p:sp>
+        <p:nvSpPr>
+          <p:cNvPr id="3" name="">
+            <a:extLst xmlns:a="http://schemas.openxmlformats.org/drawingml/2006/main">
+              <a:ext uri="{FF2B5EF4-FFF2-40B4-BE49-F238E27FC236}">
+                <a16:creationId xmlns:a16="http://schemas.microsoft.com/office/drawing/2014/main" id="{D5CA0FCE-75E8-41EF-A76A-23E9E2120C6A}"/>
+              </a:ext>
+            </a:extLst>
+          </p:cNvPr>
+          <p:cNvSpPr>
+            <a:spLocks xmlns:a="http://schemas.openxmlformats.org/drawingml/2006/main" noGrp="1"/>
+          </p:cNvSpPr>
+          <p:nvPr/>
+        </p:nvSpPr>
+        <p:spPr>
+          <a:xfrm xmlns:a="http://schemas.openxmlformats.org/drawingml/2006/main">
+            <a:off x="457200" y="1200150"/>
+            <a:ext cx="11277600" cy="19050"/>
+          </a:xfrm>
+          <a:prstGeom xmlns:a="http://schemas.openxmlformats.org/drawingml/2006/main" prst="rect">
+            <a:avLst/>
+          </a:prstGeom>
+          <a:solidFill xmlns:a="http://schemas.openxmlformats.org/drawingml/2006/main">
+            <a:srgbClr val="B8BCC4"/>
+          </a:solidFill>
+          <a:ln xmlns:a="http://schemas.openxmlformats.org/drawingml/2006/main" w="0">
+            <a:solidFill>
+              <a:srgbClr val="B8BCC4"/>
+            </a:solidFill>
+            <a:prstDash val="solid"/>
+          </a:ln>
+        </p:spPr>
+      </p:sp>
+      <p:sp>
+        <p:nvSpPr>
+          <p:cNvPr id="4" name="footer-left-11">
+            <a:extLst xmlns:a="http://schemas.openxmlformats.org/drawingml/2006/main">
+              <a:ext uri="{FF2B5EF4-FFF2-40B4-BE49-F238E27FC236}">
+                <a16:creationId xmlns:a16="http://schemas.microsoft.com/office/drawing/2014/main" id="{700DA765-80E0-4197-8700-00D867B86FA2}"/>
+              </a:ext>
+            </a:extLst>
+          </p:cNvPr>
+          <p:cNvSpPr>
+            <a:spLocks xmlns:a="http://schemas.openxmlformats.org/drawingml/2006/main" noGrp="1"/>
+          </p:cNvSpPr>
+          <p:nvPr/>
+        </p:nvSpPr>
+        <p:spPr>
+          <a:xfrm xmlns:a="http://schemas.openxmlformats.org/drawingml/2006/main">
+            <a:off x="457200" y="6515100"/>
+            <a:ext cx="3429000" cy="171450"/>
+          </a:xfrm>
+          <a:prstGeom xmlns:a="http://schemas.openxmlformats.org/drawingml/2006/main" prst="rect">
+            <a:avLst/>
+          </a:prstGeom>
+          <a:noFill xmlns:a="http://schemas.openxmlformats.org/drawingml/2006/main"/>
+          <a:ln xmlns:a="http://schemas.openxmlformats.org/drawingml/2006/main" w="0">
+            <a:noFill/>
+            <a:prstDash val="solid"/>
+          </a:ln>
+        </p:spPr>
+        <p:txBody>
+          <a:bodyPr xmlns:a="http://schemas.openxmlformats.org/drawingml/2006/main" wrap="square" lIns="0" tIns="0" rIns="0" bIns="0" anchor="t">
+            <a:normAutofit fontScale="100000"/>
+          </a:bodyPr>
+          <a:lstStyle xmlns:a="http://schemas.openxmlformats.org/drawingml/2006/main"/>
+          <a:p xmlns:a="http://schemas.openxmlformats.org/drawingml/2006/main">
+            <a:pPr algn="l">
+              <a:buNone/>
+              <a:defRPr sz="825" b="0">
+                <a:solidFill>
+                  <a:srgbClr val="64748B"/>
+                </a:solidFill>
+                <a:latin typeface="Arial"/>
+                <a:ea typeface="Arial"/>
+                <a:cs typeface="Arial"/>
+              </a:defRPr>
+            </a:pPr>
+            <a:r>
+              <a:rPr sz="825" b="0">
+                <a:solidFill>
+                  <a:srgbClr val="64748B"/>
+                </a:solidFill>
+                <a:latin typeface="Arial"/>
+                <a:ea typeface="Arial"/>
+                <a:cs typeface="Arial"/>
+              </a:rPr>
+              <a:t>Event-pooled mean path | state-qualified positive-R20 trades</a:t>
+            </a:r>
+          </a:p>
+        </p:txBody>
+      </p:sp>
+      <p:sp>
+        <p:nvSpPr>
+          <p:cNvPr id="5" name="footer-number-11">
+            <a:extLst xmlns:a="http://schemas.openxmlformats.org/drawingml/2006/main">
+              <a:ext uri="{FF2B5EF4-FFF2-40B4-BE49-F238E27FC236}">
+                <a16:creationId xmlns:a16="http://schemas.microsoft.com/office/drawing/2014/main" id="{83896276-4112-4532-AF7C-776C67C58B77}"/>
+              </a:ext>
+            </a:extLst>
+          </p:cNvPr>
+          <p:cNvSpPr>
+            <a:spLocks xmlns:a="http://schemas.openxmlformats.org/drawingml/2006/main" noGrp="1"/>
+          </p:cNvSpPr>
+          <p:nvPr/>
+        </p:nvSpPr>
+        <p:spPr>
+          <a:xfrm xmlns:a="http://schemas.openxmlformats.org/drawingml/2006/main">
+            <a:off x="10477500" y="6496050"/>
+            <a:ext cx="1257300" cy="190500"/>
+          </a:xfrm>
+          <a:prstGeom xmlns:a="http://schemas.openxmlformats.org/drawingml/2006/main" prst="rect">
+            <a:avLst/>
+          </a:prstGeom>
+          <a:noFill xmlns:a="http://schemas.openxmlformats.org/drawingml/2006/main"/>
+          <a:ln xmlns:a="http://schemas.openxmlformats.org/drawingml/2006/main" w="0">
+            <a:noFill/>
+            <a:prstDash val="solid"/>
+          </a:ln>
+        </p:spPr>
+        <p:txBody>
+          <a:bodyPr xmlns:a="http://schemas.openxmlformats.org/drawingml/2006/main" wrap="square" lIns="0" tIns="0" rIns="0" bIns="0" anchor="t">
+            <a:normAutofit fontScale="100000"/>
+          </a:bodyPr>
+          <a:lstStyle xmlns:a="http://schemas.openxmlformats.org/drawingml/2006/main"/>
+          <a:p xmlns:a="http://schemas.openxmlformats.org/drawingml/2006/main">
+            <a:pPr algn="r">
+              <a:buNone/>
+              <a:defRPr sz="1050" b="0">
+                <a:solidFill>
+                  <a:srgbClr val="667384"/>
+                </a:solidFill>
+                <a:latin typeface="Arial"/>
+                <a:ea typeface="Arial"/>
+                <a:cs typeface="Arial"/>
+              </a:defRPr>
+            </a:pPr>
+            <a:r>
+              <a:rPr sz="1050" b="0">
+                <a:solidFill>
+                  <a:srgbClr val="667384"/>
+                </a:solidFill>
+                <a:latin typeface="Arial"/>
+                <a:ea typeface="Arial"/>
+                <a:cs typeface="Arial"/>
+              </a:rPr>
+              <a:t>21</a:t>
+            </a:r>
+          </a:p>
+        </p:txBody>
+      </p:sp>
+      <p:pic>
+        <p:nvPicPr>
+          <p:cNvPr id="31" name=""/>
+          <p:cNvPicPr>
+            <a:picLocks xmlns:a="http://schemas.openxmlformats.org/drawingml/2006/main" noChangeAspect="1"/>
+          </p:cNvPicPr>
+          <p:nvPr/>
+        </p:nvPicPr>
+        <p:blipFill>
+          <a:blip xmlns:r="http://schemas.openxmlformats.org/officeDocument/2006/relationships" xmlns:a="http://schemas.openxmlformats.org/drawingml/2006/main" r:embed="Re87c9881ea6a4b5d"/>
+          <a:stretch xmlns:a="http://schemas.openxmlformats.org/drawingml/2006/main"/>
+        </p:blipFill>
+        <p:spPr>
+          <a:xfrm xmlns:a="http://schemas.openxmlformats.org/drawingml/2006/main">
+            <a:off x="2885498" y="2453030"/>
+            <a:ext cx="6421005" cy="2809190"/>
+          </a:xfrm>
+          <a:prstGeom xmlns:a="http://schemas.openxmlformats.org/drawingml/2006/main" prst="rect">
+            <a:avLst/>
+          </a:prstGeom>
+        </p:spPr>
+      </p:pic>
+    </p:spTree>
+    <p:extLst>
+      <p:ext uri="{BB962C8B-B14F-4D97-AF65-F5344CB8AC3E}">
+        <p14:creationId xmlns:p14="http://schemas.microsoft.com/office/powerpoint/2010/main" val="666536286"/>
+      </p:ext>
+    </p:extLst>
+  </p:cSld>
+</p:sld>
+</file>
+
+<file path=ppt/slides/slide22.xml><?xml version="1.0" encoding="utf-8"?>
+<p:sld xmlns:p="http://schemas.openxmlformats.org/presentationml/2006/main">
+  <p:cSld>
+    <p:bg>
+      <p:bgPr>
+        <a:solidFill xmlns:a="http://schemas.openxmlformats.org/drawingml/2006/main">
+          <a:srgbClr val="FFFFFF"/>
+        </a:solidFill>
+      </p:bgPr>
+    </p:bg>
+    <p:spTree>
+      <p:nvGrpSpPr>
+        <p:cNvPr id="1" name=""/>
+        <p:cNvGrpSpPr/>
+        <p:nvPr/>
+      </p:nvGrpSpPr>
+      <p:grpSpPr>
+        <a:xfrm xmlns:a="http://schemas.openxmlformats.org/drawingml/2006/main"/>
+      </p:grpSpPr>
+      <p:sp>
+        <p:nvSpPr>
+          <p:cNvPr id="24" name="section-11">
+            <a:extLst xmlns:a="http://schemas.openxmlformats.org/drawingml/2006/main">
+              <a:ext uri="{FF2B5EF4-FFF2-40B4-BE49-F238E27FC236}">
+                <a16:creationId xmlns:a16="http://schemas.microsoft.com/office/drawing/2014/main" id="{272ED433-B59C-436C-9DFB-4D317B90A13F}"/>
+              </a:ext>
+            </a:extLst>
+          </p:cNvPr>
+          <p:cNvSpPr>
+            <a:spLocks xmlns:a="http://schemas.openxmlformats.org/drawingml/2006/main" noGrp="1"/>
+          </p:cNvSpPr>
+          <p:nvPr/>
+        </p:nvSpPr>
+        <p:spPr>
+          <a:xfrm xmlns:a="http://schemas.openxmlformats.org/drawingml/2006/main">
+            <a:off x="457200" y="228600"/>
+            <a:ext cx="4191000" cy="228600"/>
+          </a:xfrm>
+          <a:prstGeom xmlns:a="http://schemas.openxmlformats.org/drawingml/2006/main" prst="rect">
+            <a:avLst/>
+          </a:prstGeom>
+          <a:noFill xmlns:a="http://schemas.openxmlformats.org/drawingml/2006/main"/>
+          <a:ln xmlns:a="http://schemas.openxmlformats.org/drawingml/2006/main" w="0">
+            <a:noFill/>
+            <a:prstDash val="solid"/>
+          </a:ln>
+        </p:spPr>
+        <p:txBody>
+          <a:bodyPr xmlns:a="http://schemas.openxmlformats.org/drawingml/2006/main" wrap="square" lIns="0" tIns="0" rIns="0" bIns="0" anchor="t">
+            <a:normAutofit fontScale="100000"/>
+          </a:bodyPr>
+          <a:lstStyle xmlns:a="http://schemas.openxmlformats.org/drawingml/2006/main"/>
+          <a:p xmlns:a="http://schemas.openxmlformats.org/drawingml/2006/main">
+            <a:pPr algn="l">
+              <a:buNone/>
+              <a:defRPr sz="1200" b="1">
+                <a:solidFill>
+                  <a:srgbClr val="667384"/>
+                </a:solidFill>
+                <a:latin typeface="Arial"/>
+                <a:ea typeface="Arial"/>
+                <a:cs typeface="Arial"/>
+              </a:defRPr>
+            </a:pPr>
+            <a:r>
+              <a:rPr sz="1200" b="1">
+                <a:solidFill>
+                  <a:srgbClr val="667384"/>
+                </a:solidFill>
+                <a:latin typeface="Arial"/>
+                <a:ea typeface="Arial"/>
+                <a:cs typeface="Arial"/>
+              </a:rPr>
+              <a:t>TRADE TAPES</a:t>
+            </a:r>
+          </a:p>
+        </p:txBody>
+      </p:sp>
+      <p:sp>
+        <p:nvSpPr>
+          <p:cNvPr id="2" name="title-11">
+            <a:extLst xmlns:a="http://schemas.openxmlformats.org/drawingml/2006/main">
+              <a:ext uri="{FF2B5EF4-FFF2-40B4-BE49-F238E27FC236}">
+                <a16:creationId xmlns:a16="http://schemas.microsoft.com/office/drawing/2014/main" id="{3EC40708-7E00-432C-8ECE-907FA5705292}"/>
+              </a:ext>
+            </a:extLst>
+          </p:cNvPr>
+          <p:cNvSpPr>
+            <a:spLocks xmlns:a="http://schemas.openxmlformats.org/drawingml/2006/main" noGrp="1"/>
+          </p:cNvSpPr>
+          <p:nvPr/>
+        </p:nvSpPr>
+        <p:spPr>
+          <a:xfrm xmlns:a="http://schemas.openxmlformats.org/drawingml/2006/main">
+            <a:off x="457200" y="533400"/>
+            <a:ext cx="11277600" cy="628650"/>
+          </a:xfrm>
+          <a:prstGeom xmlns:a="http://schemas.openxmlformats.org/drawingml/2006/main" prst="rect">
+            <a:avLst/>
+          </a:prstGeom>
+          <a:noFill xmlns:a="http://schemas.openxmlformats.org/drawingml/2006/main"/>
+          <a:ln xmlns:a="http://schemas.openxmlformats.org/drawingml/2006/main" w="0">
+            <a:noFill/>
+            <a:prstDash val="solid"/>
+          </a:ln>
+        </p:spPr>
+        <p:txBody>
+          <a:bodyPr xmlns:a="http://schemas.openxmlformats.org/drawingml/2006/main" wrap="square" lIns="0" tIns="0" rIns="0" bIns="0" anchor="t">
+            <a:normAutofit fontScale="100000"/>
+          </a:bodyPr>
+          <a:lstStyle xmlns:a="http://schemas.openxmlformats.org/drawingml/2006/main"/>
+          <a:p xmlns:a="http://schemas.openxmlformats.org/drawingml/2006/main">
+            <a:pPr algn="l">
+              <a:buNone/>
+              <a:defRPr sz="3525" b="1">
+                <a:solidFill>
+                  <a:srgbClr val="000000"/>
+                </a:solidFill>
+                <a:latin typeface="Arial"/>
+                <a:ea typeface="Arial"/>
+                <a:cs typeface="Arial"/>
+              </a:defRPr>
+            </a:pPr>
+            <a:r>
+              <a:rPr sz="3525" b="1">
+                <a:solidFill>
+                  <a:srgbClr val="000000"/>
+                </a:solidFill>
+                <a:latin typeface="Arial"/>
+                <a:ea typeface="Arial"/>
+                <a:cs typeface="Arial"/>
+              </a:rPr>
+              <a:t>Winners coexist with weak aggregate results</a:t>
+            </a:r>
+          </a:p>
+        </p:txBody>
+      </p:sp>
+      <p:sp>
+        <p:nvSpPr>
+          <p:cNvPr id="3" name="">
+            <a:extLst xmlns:a="http://schemas.openxmlformats.org/drawingml/2006/main">
+              <a:ext uri="{FF2B5EF4-FFF2-40B4-BE49-F238E27FC236}">
+                <a16:creationId xmlns:a16="http://schemas.microsoft.com/office/drawing/2014/main" id="{D5CA0FCE-75E8-41EF-A76A-23E9E2120C6A}"/>
+              </a:ext>
+            </a:extLst>
+          </p:cNvPr>
+          <p:cNvSpPr>
+            <a:spLocks xmlns:a="http://schemas.openxmlformats.org/drawingml/2006/main" noGrp="1"/>
+          </p:cNvSpPr>
+          <p:nvPr/>
+        </p:nvSpPr>
+        <p:spPr>
+          <a:xfrm xmlns:a="http://schemas.openxmlformats.org/drawingml/2006/main">
+            <a:off x="457200" y="1200150"/>
+            <a:ext cx="11277600" cy="19050"/>
+          </a:xfrm>
+          <a:prstGeom xmlns:a="http://schemas.openxmlformats.org/drawingml/2006/main" prst="rect">
+            <a:avLst/>
+          </a:prstGeom>
+          <a:solidFill xmlns:a="http://schemas.openxmlformats.org/drawingml/2006/main">
+            <a:srgbClr val="B8BCC4"/>
+          </a:solidFill>
+          <a:ln xmlns:a="http://schemas.openxmlformats.org/drawingml/2006/main" w="0">
+            <a:solidFill>
+              <a:srgbClr val="B8BCC4"/>
+            </a:solidFill>
+            <a:prstDash val="solid"/>
+          </a:ln>
+        </p:spPr>
+      </p:sp>
+      <p:sp>
+        <p:nvSpPr>
+          <p:cNvPr id="4" name="footer-left-11">
+            <a:extLst xmlns:a="http://schemas.openxmlformats.org/drawingml/2006/main">
+              <a:ext uri="{FF2B5EF4-FFF2-40B4-BE49-F238E27FC236}">
+                <a16:creationId xmlns:a16="http://schemas.microsoft.com/office/drawing/2014/main" id="{700DA765-80E0-4197-8700-00D867B86FA2}"/>
+              </a:ext>
+            </a:extLst>
+          </p:cNvPr>
+          <p:cNvSpPr>
+            <a:spLocks xmlns:a="http://schemas.openxmlformats.org/drawingml/2006/main" noGrp="1"/>
+          </p:cNvSpPr>
+          <p:nvPr/>
+        </p:nvSpPr>
+        <p:spPr>
+          <a:xfrm xmlns:a="http://schemas.openxmlformats.org/drawingml/2006/main">
+            <a:off x="457200" y="6515100"/>
+            <a:ext cx="3429000" cy="171450"/>
+          </a:xfrm>
+          <a:prstGeom xmlns:a="http://schemas.openxmlformats.org/drawingml/2006/main" prst="rect">
+            <a:avLst/>
+          </a:prstGeom>
+          <a:noFill xmlns:a="http://schemas.openxmlformats.org/drawingml/2006/main"/>
+          <a:ln xmlns:a="http://schemas.openxmlformats.org/drawingml/2006/main" w="0">
+            <a:noFill/>
+            <a:prstDash val="solid"/>
+          </a:ln>
+        </p:spPr>
+        <p:txBody>
+          <a:bodyPr xmlns:a="http://schemas.openxmlformats.org/drawingml/2006/main" wrap="square" lIns="0" tIns="0" rIns="0" bIns="0" anchor="t">
+            <a:normAutofit fontScale="100000"/>
+          </a:bodyPr>
+          <a:lstStyle xmlns:a="http://schemas.openxmlformats.org/drawingml/2006/main"/>
+          <a:p xmlns:a="http://schemas.openxmlformats.org/drawingml/2006/main">
+            <a:pPr algn="l">
+              <a:buNone/>
+              <a:defRPr sz="825" b="0">
+                <a:solidFill>
+                  <a:srgbClr val="64748B"/>
+                </a:solidFill>
+                <a:latin typeface="Arial"/>
+                <a:ea typeface="Arial"/>
+                <a:cs typeface="Arial"/>
+              </a:defRPr>
+            </a:pPr>
+            <a:r>
+              <a:rPr sz="825" b="0">
+                <a:solidFill>
+                  <a:srgbClr val="64748B"/>
+                </a:solidFill>
+                <a:latin typeface="Arial"/>
+                <a:ea typeface="Arial"/>
+                <a:cs typeface="Arial"/>
+              </a:rPr>
+              <a:t>First eligible 10-session event | deterministic, not outcome-selected</a:t>
+            </a:r>
+          </a:p>
+        </p:txBody>
+      </p:sp>
+      <p:sp>
+        <p:nvSpPr>
+          <p:cNvPr id="5" name="footer-number-11">
+            <a:extLst xmlns:a="http://schemas.openxmlformats.org/drawingml/2006/main">
+              <a:ext uri="{FF2B5EF4-FFF2-40B4-BE49-F238E27FC236}">
+                <a16:creationId xmlns:a16="http://schemas.microsoft.com/office/drawing/2014/main" id="{83896276-4112-4532-AF7C-776C67C58B77}"/>
+              </a:ext>
+            </a:extLst>
+          </p:cNvPr>
+          <p:cNvSpPr>
+            <a:spLocks xmlns:a="http://schemas.openxmlformats.org/drawingml/2006/main" noGrp="1"/>
+          </p:cNvSpPr>
+          <p:nvPr/>
+        </p:nvSpPr>
+        <p:spPr>
+          <a:xfrm xmlns:a="http://schemas.openxmlformats.org/drawingml/2006/main">
+            <a:off x="10477500" y="6496050"/>
+            <a:ext cx="1257300" cy="190500"/>
+          </a:xfrm>
+          <a:prstGeom xmlns:a="http://schemas.openxmlformats.org/drawingml/2006/main" prst="rect">
+            <a:avLst/>
+          </a:prstGeom>
+          <a:noFill xmlns:a="http://schemas.openxmlformats.org/drawingml/2006/main"/>
+          <a:ln xmlns:a="http://schemas.openxmlformats.org/drawingml/2006/main" w="0">
+            <a:noFill/>
+            <a:prstDash val="solid"/>
+          </a:ln>
+        </p:spPr>
+        <p:txBody>
+          <a:bodyPr xmlns:a="http://schemas.openxmlformats.org/drawingml/2006/main" wrap="square" lIns="0" tIns="0" rIns="0" bIns="0" anchor="t">
+            <a:normAutofit fontScale="100000"/>
+          </a:bodyPr>
+          <a:lstStyle xmlns:a="http://schemas.openxmlformats.org/drawingml/2006/main"/>
+          <a:p xmlns:a="http://schemas.openxmlformats.org/drawingml/2006/main">
+            <a:pPr algn="r">
+              <a:buNone/>
+              <a:defRPr sz="1050" b="0">
+                <a:solidFill>
+                  <a:srgbClr val="667384"/>
+                </a:solidFill>
+                <a:latin typeface="Arial"/>
+                <a:ea typeface="Arial"/>
+                <a:cs typeface="Arial"/>
+              </a:defRPr>
+            </a:pPr>
+            <a:r>
+              <a:rPr sz="1050" b="0">
+                <a:solidFill>
+                  <a:srgbClr val="667384"/>
+                </a:solidFill>
+                <a:latin typeface="Arial"/>
+                <a:ea typeface="Arial"/>
+                <a:cs typeface="Arial"/>
+              </a:rPr>
+              <a:t>22</a:t>
+            </a:r>
+          </a:p>
+        </p:txBody>
+      </p:sp>
+      <p:pic>
+        <p:nvPicPr>
+          <p:cNvPr id="31" name=""/>
+          <p:cNvPicPr>
+            <a:picLocks xmlns:a="http://schemas.openxmlformats.org/drawingml/2006/main" noChangeAspect="1"/>
+          </p:cNvPicPr>
+          <p:nvPr/>
+        </p:nvPicPr>
+        <p:blipFill>
+          <a:blip xmlns:r="http://schemas.openxmlformats.org/officeDocument/2006/relationships" xmlns:a="http://schemas.openxmlformats.org/drawingml/2006/main" r:embed="R4aaf75a5de5d4f03"/>
+          <a:stretch xmlns:a="http://schemas.openxmlformats.org/drawingml/2006/main"/>
+        </p:blipFill>
+        <p:spPr>
+          <a:xfrm xmlns:a="http://schemas.openxmlformats.org/drawingml/2006/main">
+            <a:off x="2885498" y="1650404"/>
+            <a:ext cx="6421005" cy="4414441"/>
+          </a:xfrm>
+          <a:prstGeom xmlns:a="http://schemas.openxmlformats.org/drawingml/2006/main" prst="rect">
+            <a:avLst/>
+          </a:prstGeom>
+        </p:spPr>
+      </p:pic>
+    </p:spTree>
+    <p:extLst>
+      <p:ext uri="{BB962C8B-B14F-4D97-AF65-F5344CB8AC3E}">
+        <p14:creationId xmlns:p14="http://schemas.microsoft.com/office/powerpoint/2010/main" val="666536286"/>
+      </p:ext>
+    </p:extLst>
+  </p:cSld>
+</p:sld>
+</file>
+
+<file path=ppt/slides/slide23.xml><?xml version="1.0" encoding="utf-8"?>
+<p:sld xmlns:p="http://schemas.openxmlformats.org/presentationml/2006/main">
+  <p:cSld>
+    <p:bg>
+      <p:bgPr>
+        <a:solidFill xmlns:a="http://schemas.openxmlformats.org/drawingml/2006/main">
+          <a:srgbClr val="FFFFFF"/>
+        </a:solidFill>
+      </p:bgPr>
+    </p:bg>
+    <p:spTree>
+      <p:nvGrpSpPr>
+        <p:cNvPr id="1" name=""/>
+        <p:cNvGrpSpPr/>
+        <p:nvPr/>
+      </p:nvGrpSpPr>
+      <p:grpSpPr>
+        <a:xfrm xmlns:a="http://schemas.openxmlformats.org/drawingml/2006/main"/>
+      </p:grpSpPr>
+      <p:sp>
+        <p:nvSpPr>
+          <p:cNvPr id="24" name="section-11">
+            <a:extLst xmlns:a="http://schemas.openxmlformats.org/drawingml/2006/main">
+              <a:ext uri="{FF2B5EF4-FFF2-40B4-BE49-F238E27FC236}">
+                <a16:creationId xmlns:a16="http://schemas.microsoft.com/office/drawing/2014/main" id="{272ED433-B59C-436C-9DFB-4D317B90A13F}"/>
+              </a:ext>
+            </a:extLst>
+          </p:cNvPr>
+          <p:cNvSpPr>
+            <a:spLocks xmlns:a="http://schemas.openxmlformats.org/drawingml/2006/main" noGrp="1"/>
+          </p:cNvSpPr>
+          <p:nvPr/>
+        </p:nvSpPr>
+        <p:spPr>
+          <a:xfrm xmlns:a="http://schemas.openxmlformats.org/drawingml/2006/main">
+            <a:off x="457200" y="228600"/>
+            <a:ext cx="4191000" cy="228600"/>
+          </a:xfrm>
+          <a:prstGeom xmlns:a="http://schemas.openxmlformats.org/drawingml/2006/main" prst="rect">
+            <a:avLst/>
+          </a:prstGeom>
+          <a:noFill xmlns:a="http://schemas.openxmlformats.org/drawingml/2006/main"/>
+          <a:ln xmlns:a="http://schemas.openxmlformats.org/drawingml/2006/main" w="0">
+            <a:noFill/>
+            <a:prstDash val="solid"/>
+          </a:ln>
+        </p:spPr>
+        <p:txBody>
+          <a:bodyPr xmlns:a="http://schemas.openxmlformats.org/drawingml/2006/main" wrap="square" lIns="0" tIns="0" rIns="0" bIns="0" anchor="t">
+            <a:normAutofit fontScale="100000"/>
+          </a:bodyPr>
+          <a:lstStyle xmlns:a="http://schemas.openxmlformats.org/drawingml/2006/main"/>
+          <a:p xmlns:a="http://schemas.openxmlformats.org/drawingml/2006/main">
+            <a:pPr algn="l">
+              <a:buNone/>
+              <a:defRPr sz="1200" b="1">
+                <a:solidFill>
+                  <a:srgbClr val="667384"/>
+                </a:solidFill>
+                <a:latin typeface="Arial"/>
+                <a:ea typeface="Arial"/>
+                <a:cs typeface="Arial"/>
+              </a:defRPr>
+            </a:pPr>
+            <a:r>
+              <a:rPr sz="1200" b="1">
+                <a:solidFill>
+                  <a:srgbClr val="667384"/>
+                </a:solidFill>
+                <a:latin typeface="Arial"/>
+                <a:ea typeface="Arial"/>
+                <a:cs typeface="Arial"/>
+              </a:rPr>
+              <a:t>EXECUTABLE READOUT</a:t>
+            </a:r>
+          </a:p>
+        </p:txBody>
+      </p:sp>
+      <p:sp>
+        <p:nvSpPr>
+          <p:cNvPr id="2" name="title-11">
+            <a:extLst xmlns:a="http://schemas.openxmlformats.org/drawingml/2006/main">
+              <a:ext uri="{FF2B5EF4-FFF2-40B4-BE49-F238E27FC236}">
+                <a16:creationId xmlns:a16="http://schemas.microsoft.com/office/drawing/2014/main" id="{3EC40708-7E00-432C-8ECE-907FA5705292}"/>
+              </a:ext>
+            </a:extLst>
+          </p:cNvPr>
+          <p:cNvSpPr>
+            <a:spLocks xmlns:a="http://schemas.openxmlformats.org/drawingml/2006/main" noGrp="1"/>
+          </p:cNvSpPr>
+          <p:nvPr/>
+        </p:nvSpPr>
+        <p:spPr>
+          <a:xfrm xmlns:a="http://schemas.openxmlformats.org/drawingml/2006/main">
+            <a:off x="457200" y="533400"/>
+            <a:ext cx="11277600" cy="628650"/>
+          </a:xfrm>
+          <a:prstGeom xmlns:a="http://schemas.openxmlformats.org/drawingml/2006/main" prst="rect">
+            <a:avLst/>
+          </a:prstGeom>
+          <a:noFill xmlns:a="http://schemas.openxmlformats.org/drawingml/2006/main"/>
+          <a:ln xmlns:a="http://schemas.openxmlformats.org/drawingml/2006/main" w="0">
+            <a:noFill/>
+            <a:prstDash val="solid"/>
+          </a:ln>
+        </p:spPr>
+        <p:txBody>
+          <a:bodyPr xmlns:a="http://schemas.openxmlformats.org/drawingml/2006/main" wrap="square" lIns="0" tIns="0" rIns="0" bIns="0" anchor="t">
+            <a:normAutofit fontScale="100000"/>
+          </a:bodyPr>
+          <a:lstStyle xmlns:a="http://schemas.openxmlformats.org/drawingml/2006/main"/>
+          <a:p xmlns:a="http://schemas.openxmlformats.org/drawingml/2006/main">
+            <a:pPr algn="l">
+              <a:buNone/>
+              <a:defRPr sz="3525" b="1">
+                <a:solidFill>
+                  <a:srgbClr val="000000"/>
+                </a:solidFill>
+                <a:latin typeface="Arial"/>
+                <a:ea typeface="Arial"/>
+                <a:cs typeface="Arial"/>
+              </a:defRPr>
+            </a:pPr>
+            <a:r>
+              <a:rPr sz="3525" b="1">
+                <a:solidFill>
+                  <a:srgbClr val="000000"/>
+                </a:solidFill>
+                <a:latin typeface="Arial"/>
+                <a:ea typeface="Arial"/>
+                <a:cs typeface="Arial"/>
+              </a:rPr>
+              <a:t>The rule earns context—not horizon selection</a:t>
+            </a:r>
+          </a:p>
+        </p:txBody>
+      </p:sp>
+      <p:sp>
+        <p:nvSpPr>
+          <p:cNvPr id="3" name="">
+            <a:extLst xmlns:a="http://schemas.openxmlformats.org/drawingml/2006/main">
+              <a:ext uri="{FF2B5EF4-FFF2-40B4-BE49-F238E27FC236}">
+                <a16:creationId xmlns:a16="http://schemas.microsoft.com/office/drawing/2014/main" id="{D5CA0FCE-75E8-41EF-A76A-23E9E2120C6A}"/>
+              </a:ext>
+            </a:extLst>
+          </p:cNvPr>
+          <p:cNvSpPr>
+            <a:spLocks xmlns:a="http://schemas.openxmlformats.org/drawingml/2006/main" noGrp="1"/>
+          </p:cNvSpPr>
+          <p:nvPr/>
+        </p:nvSpPr>
+        <p:spPr>
+          <a:xfrm xmlns:a="http://schemas.openxmlformats.org/drawingml/2006/main">
+            <a:off x="457200" y="1200150"/>
+            <a:ext cx="11277600" cy="19050"/>
+          </a:xfrm>
+          <a:prstGeom xmlns:a="http://schemas.openxmlformats.org/drawingml/2006/main" prst="rect">
+            <a:avLst/>
+          </a:prstGeom>
+          <a:solidFill xmlns:a="http://schemas.openxmlformats.org/drawingml/2006/main">
+            <a:srgbClr val="B8BCC4"/>
+          </a:solidFill>
+          <a:ln xmlns:a="http://schemas.openxmlformats.org/drawingml/2006/main" w="0">
+            <a:solidFill>
+              <a:srgbClr val="B8BCC4"/>
+            </a:solidFill>
+            <a:prstDash val="solid"/>
+          </a:ln>
+        </p:spPr>
+      </p:sp>
+      <p:sp>
+        <p:nvSpPr>
+          <p:cNvPr id="4" name="footer-left-11">
+            <a:extLst xmlns:a="http://schemas.openxmlformats.org/drawingml/2006/main">
+              <a:ext uri="{FF2B5EF4-FFF2-40B4-BE49-F238E27FC236}">
+                <a16:creationId xmlns:a16="http://schemas.microsoft.com/office/drawing/2014/main" id="{700DA765-80E0-4197-8700-00D867B86FA2}"/>
+              </a:ext>
+            </a:extLst>
+          </p:cNvPr>
+          <p:cNvSpPr>
+            <a:spLocks xmlns:a="http://schemas.openxmlformats.org/drawingml/2006/main" noGrp="1"/>
+          </p:cNvSpPr>
+          <p:nvPr/>
+        </p:nvSpPr>
+        <p:spPr>
+          <a:xfrm xmlns:a="http://schemas.openxmlformats.org/drawingml/2006/main">
+            <a:off x="457200" y="6515100"/>
+            <a:ext cx="3429000" cy="171450"/>
+          </a:xfrm>
+          <a:prstGeom xmlns:a="http://schemas.openxmlformats.org/drawingml/2006/main" prst="rect">
+            <a:avLst/>
+          </a:prstGeom>
+          <a:noFill xmlns:a="http://schemas.openxmlformats.org/drawingml/2006/main"/>
+          <a:ln xmlns:a="http://schemas.openxmlformats.org/drawingml/2006/main" w="0">
+            <a:noFill/>
+            <a:prstDash val="solid"/>
+          </a:ln>
+        </p:spPr>
+        <p:txBody>
+          <a:bodyPr xmlns:a="http://schemas.openxmlformats.org/drawingml/2006/main" wrap="square" lIns="0" tIns="0" rIns="0" bIns="0" anchor="t">
+            <a:normAutofit fontScale="100000"/>
+          </a:bodyPr>
+          <a:lstStyle xmlns:a="http://schemas.openxmlformats.org/drawingml/2006/main"/>
+          <a:p xmlns:a="http://schemas.openxmlformats.org/drawingml/2006/main">
+            <a:pPr algn="l">
+              <a:buNone/>
+              <a:defRPr sz="825" b="0">
+                <a:solidFill>
+                  <a:srgbClr val="64748B"/>
+                </a:solidFill>
+                <a:latin typeface="Arial"/>
+                <a:ea typeface="Arial"/>
+                <a:cs typeface="Arial"/>
+              </a:defRPr>
+            </a:pPr>
+            <a:r>
+              <a:rPr sz="825" b="0">
+                <a:solidFill>
+                  <a:srgbClr val="64748B"/>
+                </a:solidFill>
+                <a:latin typeface="Arial"/>
+                <a:ea typeface="Arial"/>
+                <a:cs typeface="Arial"/>
+              </a:rPr>
+              <a:t>2018–2023 TRAIN | descriptive mechanics | no OOS opened</a:t>
+            </a:r>
+          </a:p>
+        </p:txBody>
+      </p:sp>
+      <p:sp>
+        <p:nvSpPr>
+          <p:cNvPr id="5" name="footer-number-11">
+            <a:extLst xmlns:a="http://schemas.openxmlformats.org/drawingml/2006/main">
+              <a:ext uri="{FF2B5EF4-FFF2-40B4-BE49-F238E27FC236}">
+                <a16:creationId xmlns:a16="http://schemas.microsoft.com/office/drawing/2014/main" id="{83896276-4112-4532-AF7C-776C67C58B77}"/>
+              </a:ext>
+            </a:extLst>
+          </p:cNvPr>
+          <p:cNvSpPr>
+            <a:spLocks xmlns:a="http://schemas.openxmlformats.org/drawingml/2006/main" noGrp="1"/>
+          </p:cNvSpPr>
+          <p:nvPr/>
+        </p:nvSpPr>
+        <p:spPr>
+          <a:xfrm xmlns:a="http://schemas.openxmlformats.org/drawingml/2006/main">
+            <a:off x="10477500" y="6496050"/>
+            <a:ext cx="1257300" cy="190500"/>
+          </a:xfrm>
+          <a:prstGeom xmlns:a="http://schemas.openxmlformats.org/drawingml/2006/main" prst="rect">
+            <a:avLst/>
+          </a:prstGeom>
+          <a:noFill xmlns:a="http://schemas.openxmlformats.org/drawingml/2006/main"/>
+          <a:ln xmlns:a="http://schemas.openxmlformats.org/drawingml/2006/main" w="0">
+            <a:noFill/>
+            <a:prstDash val="solid"/>
+          </a:ln>
+        </p:spPr>
+        <p:txBody>
+          <a:bodyPr xmlns:a="http://schemas.openxmlformats.org/drawingml/2006/main" wrap="square" lIns="0" tIns="0" rIns="0" bIns="0" anchor="t">
+            <a:normAutofit fontScale="100000"/>
+          </a:bodyPr>
+          <a:lstStyle xmlns:a="http://schemas.openxmlformats.org/drawingml/2006/main"/>
+          <a:p xmlns:a="http://schemas.openxmlformats.org/drawingml/2006/main">
+            <a:pPr algn="r">
+              <a:buNone/>
+              <a:defRPr sz="1050" b="0">
+                <a:solidFill>
+                  <a:srgbClr val="667384"/>
+                </a:solidFill>
+                <a:latin typeface="Arial"/>
+                <a:ea typeface="Arial"/>
+                <a:cs typeface="Arial"/>
+              </a:defRPr>
+            </a:pPr>
+            <a:r>
+              <a:rPr sz="1050" b="0">
+                <a:solidFill>
+                  <a:srgbClr val="667384"/>
+                </a:solidFill>
+                <a:latin typeface="Arial"/>
+                <a:ea typeface="Arial"/>
+                <a:cs typeface="Arial"/>
+              </a:rPr>
+              <a:t>23</a:t>
+            </a:r>
+          </a:p>
+        </p:txBody>
+      </p:sp>
+      <p:sp>
+        <p:nvSpPr>
+          <p:cNvPr id="6" name="">
+            <a:extLst xmlns:a="http://schemas.openxmlformats.org/drawingml/2006/main">
+              <a:ext uri="{FF2B5EF4-FFF2-40B4-BE49-F238E27FC236}">
+                <a16:creationId xmlns:a16="http://schemas.microsoft.com/office/drawing/2014/main" id="{10F4BA85-46C5-47BD-BA74-EC806E663D58}"/>
+              </a:ext>
+            </a:extLst>
+          </p:cNvPr>
+          <p:cNvSpPr>
+            <a:spLocks xmlns:a="http://schemas.openxmlformats.org/drawingml/2006/main" noGrp="1"/>
+          </p:cNvSpPr>
+          <p:nvPr/>
+        </p:nvSpPr>
+        <p:spPr>
+          <a:xfrm xmlns:a="http://schemas.openxmlformats.org/drawingml/2006/main">
+            <a:off x="552450" y="1600200"/>
+            <a:ext cx="95250" cy="895350"/>
+          </a:xfrm>
+          <a:prstGeom xmlns:a="http://schemas.openxmlformats.org/drawingml/2006/main" prst="rect">
+            <a:avLst/>
+          </a:prstGeom>
+          <a:solidFill xmlns:a="http://schemas.openxmlformats.org/drawingml/2006/main">
+            <a:srgbClr val="E45756"/>
+          </a:solidFill>
+          <a:ln xmlns:a="http://schemas.openxmlformats.org/drawingml/2006/main" w="0">
+            <a:solidFill>
+              <a:srgbClr val="E45756"/>
+            </a:solidFill>
+            <a:prstDash val="solid"/>
+          </a:ln>
+        </p:spPr>
+      </p:sp>
+      <p:sp>
+        <p:nvSpPr>
+          <p:cNvPr id="7" name="">
+            <a:extLst xmlns:a="http://schemas.openxmlformats.org/drawingml/2006/main">
+              <a:ext uri="{FF2B5EF4-FFF2-40B4-BE49-F238E27FC236}">
+                <a16:creationId xmlns:a16="http://schemas.microsoft.com/office/drawing/2014/main" id="{7EF5B945-9D04-48FA-BA66-96DE813A9715}"/>
+              </a:ext>
+            </a:extLst>
+          </p:cNvPr>
+          <p:cNvSpPr>
+            <a:spLocks xmlns:a="http://schemas.openxmlformats.org/drawingml/2006/main" noGrp="1"/>
+          </p:cNvSpPr>
+          <p:nvPr/>
+        </p:nvSpPr>
+        <p:spPr>
+          <a:xfrm xmlns:a="http://schemas.openxmlformats.org/drawingml/2006/main">
+            <a:off x="876300" y="1581150"/>
+            <a:ext cx="2095500" cy="285750"/>
+          </a:xfrm>
+          <a:prstGeom xmlns:a="http://schemas.openxmlformats.org/drawingml/2006/main" prst="rect">
+            <a:avLst/>
+          </a:prstGeom>
+          <a:noFill xmlns:a="http://schemas.openxmlformats.org/drawingml/2006/main"/>
+          <a:ln xmlns:a="http://schemas.openxmlformats.org/drawingml/2006/main" w="0">
+            <a:noFill/>
+            <a:prstDash val="solid"/>
+          </a:ln>
+        </p:spPr>
+        <p:txBody>
+          <a:bodyPr xmlns:a="http://schemas.openxmlformats.org/drawingml/2006/main" wrap="square" lIns="0" tIns="0" rIns="0" bIns="0" anchor="t">
+            <a:normAutofit fontScale="100000"/>
+          </a:bodyPr>
+          <a:lstStyle xmlns:a="http://schemas.openxmlformats.org/drawingml/2006/main"/>
+          <a:p xmlns:a="http://schemas.openxmlformats.org/drawingml/2006/main">
+            <a:pPr algn="l">
+              <a:buNone/>
+              <a:defRPr sz="1350" b="1">
+                <a:solidFill>
+                  <a:srgbClr val="E45756"/>
+                </a:solidFill>
+                <a:latin typeface="Arial"/>
+                <a:ea typeface="Arial"/>
+                <a:cs typeface="Arial"/>
+              </a:defRPr>
+            </a:pPr>
+            <a:r>
+              <a:rPr sz="1350" b="1">
+                <a:solidFill>
+                  <a:srgbClr val="E45756"/>
+                </a:solidFill>
+                <a:latin typeface="Arial"/>
+                <a:ea typeface="Arial"/>
+                <a:cs typeface="Arial"/>
+              </a:rPr>
+              <a:t>BASELINE</a:t>
+            </a:r>
+          </a:p>
+        </p:txBody>
+      </p:sp>
+      <p:sp>
+        <p:nvSpPr>
+          <p:cNvPr id="8" name="">
+            <a:extLst xmlns:a="http://schemas.openxmlformats.org/drawingml/2006/main">
+              <a:ext uri="{FF2B5EF4-FFF2-40B4-BE49-F238E27FC236}">
+                <a16:creationId xmlns:a16="http://schemas.microsoft.com/office/drawing/2014/main" id="{655CF75D-5F23-4C7F-BE9C-764036D0B9E8}"/>
+              </a:ext>
+            </a:extLst>
+          </p:cNvPr>
+          <p:cNvSpPr>
+            <a:spLocks xmlns:a="http://schemas.openxmlformats.org/drawingml/2006/main" noGrp="1"/>
+          </p:cNvSpPr>
+          <p:nvPr/>
+        </p:nvSpPr>
+        <p:spPr>
+          <a:xfrm xmlns:a="http://schemas.openxmlformats.org/drawingml/2006/main">
+            <a:off x="3105150" y="1562100"/>
+            <a:ext cx="4762500" cy="419100"/>
+          </a:xfrm>
+          <a:prstGeom xmlns:a="http://schemas.openxmlformats.org/drawingml/2006/main" prst="rect">
+            <a:avLst/>
+          </a:prstGeom>
+          <a:noFill xmlns:a="http://schemas.openxmlformats.org/drawingml/2006/main"/>
+          <a:ln xmlns:a="http://schemas.openxmlformats.org/drawingml/2006/main" w="0">
+            <a:noFill/>
+            <a:prstDash val="solid"/>
+          </a:ln>
+        </p:spPr>
+        <p:txBody>
+          <a:bodyPr xmlns:a="http://schemas.openxmlformats.org/drawingml/2006/main" wrap="square" lIns="0" tIns="0" rIns="0" bIns="0" anchor="t">
+            <a:normAutofit fontScale="100000"/>
+          </a:bodyPr>
+          <a:lstStyle xmlns:a="http://schemas.openxmlformats.org/drawingml/2006/main"/>
+          <a:p xmlns:a="http://schemas.openxmlformats.org/drawingml/2006/main">
+            <a:pPr algn="l">
+              <a:buNone/>
+              <a:defRPr sz="1950" b="1">
+                <a:solidFill>
+                  <a:srgbClr val="273548"/>
+                </a:solidFill>
+                <a:latin typeface="Arial"/>
+                <a:ea typeface="Arial"/>
+                <a:cs typeface="Arial"/>
+              </a:defRPr>
+            </a:pPr>
+            <a:r>
+              <a:rPr sz="1950" b="1">
+                <a:solidFill>
+                  <a:srgbClr val="273548"/>
+                </a:solidFill>
+                <a:latin typeface="Arial"/>
+                <a:ea typeface="Arial"/>
+                <a:cs typeface="Arial"/>
+              </a:rPr>
+              <a:t>Rule trails unconditional drift</a:t>
+            </a:r>
+          </a:p>
+        </p:txBody>
+      </p:sp>
+      <p:sp>
+        <p:nvSpPr>
+          <p:cNvPr id="9" name="">
+            <a:extLst xmlns:a="http://schemas.openxmlformats.org/drawingml/2006/main">
+              <a:ext uri="{FF2B5EF4-FFF2-40B4-BE49-F238E27FC236}">
+                <a16:creationId xmlns:a16="http://schemas.microsoft.com/office/drawing/2014/main" id="{3E0B76F2-4514-4DD8-934B-ABE42A34E950}"/>
+              </a:ext>
+            </a:extLst>
+          </p:cNvPr>
+          <p:cNvSpPr>
+            <a:spLocks xmlns:a="http://schemas.openxmlformats.org/drawingml/2006/main" noGrp="1"/>
+          </p:cNvSpPr>
+          <p:nvPr/>
+        </p:nvSpPr>
+        <p:spPr>
+          <a:xfrm xmlns:a="http://schemas.openxmlformats.org/drawingml/2006/main">
+            <a:off x="8096250" y="1581150"/>
+            <a:ext cx="3333750" cy="704850"/>
+          </a:xfrm>
+          <a:prstGeom xmlns:a="http://schemas.openxmlformats.org/drawingml/2006/main" prst="rect">
+            <a:avLst/>
+          </a:prstGeom>
+          <a:noFill xmlns:a="http://schemas.openxmlformats.org/drawingml/2006/main"/>
+          <a:ln xmlns:a="http://schemas.openxmlformats.org/drawingml/2006/main" w="0">
+            <a:noFill/>
+            <a:prstDash val="solid"/>
+          </a:ln>
+        </p:spPr>
+        <p:txBody>
+          <a:bodyPr xmlns:a="http://schemas.openxmlformats.org/drawingml/2006/main" wrap="square" lIns="0" tIns="0" rIns="0" bIns="0" anchor="t">
+            <a:normAutofit fontScale="100000"/>
+          </a:bodyPr>
+          <a:lstStyle xmlns:a="http://schemas.openxmlformats.org/drawingml/2006/main"/>
+          <a:p xmlns:a="http://schemas.openxmlformats.org/drawingml/2006/main">
+            <a:pPr algn="l">
+              <a:buNone/>
+              <a:defRPr sz="1425" b="0">
+                <a:solidFill>
+                  <a:srgbClr val="667384"/>
+                </a:solidFill>
+                <a:latin typeface="Arial"/>
+                <a:ea typeface="Arial"/>
+                <a:cs typeface="Arial"/>
+              </a:defRPr>
+            </a:pPr>
+            <a:r>
+              <a:rPr sz="1425" b="0">
+                <a:solidFill>
+                  <a:srgbClr val="667384"/>
+                </a:solidFill>
+                <a:latin typeface="Arial"/>
+                <a:ea typeface="Arial"/>
+                <a:cs typeface="Arial"/>
+              </a:rPr>
+              <a:t>−16 / −10 / −14 bp at 5 / 10 / 20</a:t>
+            </a:r>
+          </a:p>
+        </p:txBody>
+      </p:sp>
+      <p:sp>
+        <p:nvSpPr>
+          <p:cNvPr id="10" name="">
+            <a:extLst xmlns:a="http://schemas.openxmlformats.org/drawingml/2006/main">
+              <a:ext uri="{FF2B5EF4-FFF2-40B4-BE49-F238E27FC236}">
+                <a16:creationId xmlns:a16="http://schemas.microsoft.com/office/drawing/2014/main" id="{294777C3-6D2F-4277-840E-7E984FB4554D}"/>
+              </a:ext>
+            </a:extLst>
+          </p:cNvPr>
+          <p:cNvSpPr>
+            <a:spLocks xmlns:a="http://schemas.openxmlformats.org/drawingml/2006/main" noGrp="1"/>
+          </p:cNvSpPr>
+          <p:nvPr/>
+        </p:nvSpPr>
+        <p:spPr>
+          <a:xfrm xmlns:a="http://schemas.openxmlformats.org/drawingml/2006/main">
+            <a:off x="876300" y="2590800"/>
+            <a:ext cx="10553700" cy="9525"/>
+          </a:xfrm>
+          <a:prstGeom xmlns:a="http://schemas.openxmlformats.org/drawingml/2006/main" prst="rect">
+            <a:avLst/>
+          </a:prstGeom>
+          <a:solidFill xmlns:a="http://schemas.openxmlformats.org/drawingml/2006/main">
+            <a:srgbClr val="B8BCC4"/>
+          </a:solidFill>
+          <a:ln xmlns:a="http://schemas.openxmlformats.org/drawingml/2006/main" w="0">
+            <a:solidFill>
+              <a:srgbClr val="B8BCC4"/>
+            </a:solidFill>
+            <a:prstDash val="solid"/>
+          </a:ln>
+        </p:spPr>
+      </p:sp>
+      <p:sp>
+        <p:nvSpPr>
+          <p:cNvPr id="11" name="">
+            <a:extLst xmlns:a="http://schemas.openxmlformats.org/drawingml/2006/main">
+              <a:ext uri="{FF2B5EF4-FFF2-40B4-BE49-F238E27FC236}">
+                <a16:creationId xmlns:a16="http://schemas.microsoft.com/office/drawing/2014/main" id="{F894CF3F-AD63-423C-8F01-64C507896579}"/>
+              </a:ext>
+            </a:extLst>
+          </p:cNvPr>
+          <p:cNvSpPr>
+            <a:spLocks xmlns:a="http://schemas.openxmlformats.org/drawingml/2006/main" noGrp="1"/>
+          </p:cNvSpPr>
+          <p:nvPr/>
+        </p:nvSpPr>
+        <p:spPr>
+          <a:xfrm xmlns:a="http://schemas.openxmlformats.org/drawingml/2006/main">
+            <a:off x="552450" y="2800350"/>
+            <a:ext cx="95250" cy="895350"/>
+          </a:xfrm>
+          <a:prstGeom xmlns:a="http://schemas.openxmlformats.org/drawingml/2006/main" prst="rect">
+            <a:avLst/>
+          </a:prstGeom>
+          <a:solidFill xmlns:a="http://schemas.openxmlformats.org/drawingml/2006/main">
+            <a:srgbClr val="2A9D6F"/>
+          </a:solidFill>
+          <a:ln xmlns:a="http://schemas.openxmlformats.org/drawingml/2006/main" w="0">
+            <a:solidFill>
+              <a:srgbClr val="2A9D6F"/>
+            </a:solidFill>
+            <a:prstDash val="solid"/>
+          </a:ln>
+        </p:spPr>
+      </p:sp>
+      <p:sp>
+        <p:nvSpPr>
+          <p:cNvPr id="12" name="">
+            <a:extLst xmlns:a="http://schemas.openxmlformats.org/drawingml/2006/main">
+              <a:ext uri="{FF2B5EF4-FFF2-40B4-BE49-F238E27FC236}">
+                <a16:creationId xmlns:a16="http://schemas.microsoft.com/office/drawing/2014/main" id="{D3953D03-6A7A-4FEE-B242-02BF0319C169}"/>
+              </a:ext>
+            </a:extLst>
+          </p:cNvPr>
+          <p:cNvSpPr>
+            <a:spLocks xmlns:a="http://schemas.openxmlformats.org/drawingml/2006/main" noGrp="1"/>
+          </p:cNvSpPr>
+          <p:nvPr/>
+        </p:nvSpPr>
+        <p:spPr>
+          <a:xfrm xmlns:a="http://schemas.openxmlformats.org/drawingml/2006/main">
+            <a:off x="876300" y="2781300"/>
+            <a:ext cx="2095500" cy="285750"/>
+          </a:xfrm>
+          <a:prstGeom xmlns:a="http://schemas.openxmlformats.org/drawingml/2006/main" prst="rect">
+            <a:avLst/>
+          </a:prstGeom>
+          <a:noFill xmlns:a="http://schemas.openxmlformats.org/drawingml/2006/main"/>
+          <a:ln xmlns:a="http://schemas.openxmlformats.org/drawingml/2006/main" w="0">
+            <a:noFill/>
+            <a:prstDash val="solid"/>
+          </a:ln>
+        </p:spPr>
+        <p:txBody>
+          <a:bodyPr xmlns:a="http://schemas.openxmlformats.org/drawingml/2006/main" wrap="square" lIns="0" tIns="0" rIns="0" bIns="0" anchor="t">
+            <a:normAutofit fontScale="100000"/>
+          </a:bodyPr>
+          <a:lstStyle xmlns:a="http://schemas.openxmlformats.org/drawingml/2006/main"/>
+          <a:p xmlns:a="http://schemas.openxmlformats.org/drawingml/2006/main">
+            <a:pPr algn="l">
+              <a:buNone/>
+              <a:defRPr sz="1350" b="1">
+                <a:solidFill>
+                  <a:srgbClr val="2A9D6F"/>
+                </a:solidFill>
+                <a:latin typeface="Arial"/>
+                <a:ea typeface="Arial"/>
+                <a:cs typeface="Arial"/>
+              </a:defRPr>
+            </a:pPr>
+            <a:r>
+              <a:rPr sz="1350" b="1">
+                <a:solidFill>
+                  <a:srgbClr val="2A9D6F"/>
+                </a:solidFill>
+                <a:latin typeface="Arial"/>
+                <a:ea typeface="Arial"/>
+                <a:cs typeface="Arial"/>
+              </a:rPr>
+              <a:t>STATE</a:t>
+            </a:r>
+          </a:p>
+        </p:txBody>
+      </p:sp>
+      <p:sp>
+        <p:nvSpPr>
+          <p:cNvPr id="13" name="">
+            <a:extLst xmlns:a="http://schemas.openxmlformats.org/drawingml/2006/main">
+              <a:ext uri="{FF2B5EF4-FFF2-40B4-BE49-F238E27FC236}">
+                <a16:creationId xmlns:a16="http://schemas.microsoft.com/office/drawing/2014/main" id="{52D1DBE8-EAF6-4492-89E7-5C97A3A6A395}"/>
+              </a:ext>
+            </a:extLst>
+          </p:cNvPr>
+          <p:cNvSpPr>
+            <a:spLocks xmlns:a="http://schemas.openxmlformats.org/drawingml/2006/main" noGrp="1"/>
+          </p:cNvSpPr>
+          <p:nvPr/>
+        </p:nvSpPr>
+        <p:spPr>
+          <a:xfrm xmlns:a="http://schemas.openxmlformats.org/drawingml/2006/main">
+            <a:off x="3105150" y="2762250"/>
+            <a:ext cx="4762500" cy="419100"/>
+          </a:xfrm>
+          <a:prstGeom xmlns:a="http://schemas.openxmlformats.org/drawingml/2006/main" prst="rect">
+            <a:avLst/>
+          </a:prstGeom>
+          <a:noFill xmlns:a="http://schemas.openxmlformats.org/drawingml/2006/main"/>
+          <a:ln xmlns:a="http://schemas.openxmlformats.org/drawingml/2006/main" w="0">
+            <a:noFill/>
+            <a:prstDash val="solid"/>
+          </a:ln>
+        </p:spPr>
+        <p:txBody>
+          <a:bodyPr xmlns:a="http://schemas.openxmlformats.org/drawingml/2006/main" wrap="square" lIns="0" tIns="0" rIns="0" bIns="0" anchor="t">
+            <a:normAutofit fontScale="100000"/>
+          </a:bodyPr>
+          <a:lstStyle xmlns:a="http://schemas.openxmlformats.org/drawingml/2006/main"/>
+          <a:p xmlns:a="http://schemas.openxmlformats.org/drawingml/2006/main">
+            <a:pPr algn="l">
+              <a:buNone/>
+              <a:defRPr sz="1950" b="1">
+                <a:solidFill>
+                  <a:srgbClr val="273548"/>
+                </a:solidFill>
+                <a:latin typeface="Arial"/>
+                <a:ea typeface="Arial"/>
+                <a:cs typeface="Arial"/>
+              </a:defRPr>
+            </a:pPr>
+            <a:r>
+              <a:rPr sz="1950" b="1">
+                <a:solidFill>
+                  <a:srgbClr val="273548"/>
+                </a:solidFill>
+                <a:latin typeface="Arial"/>
+                <a:ea typeface="Arial"/>
+                <a:cs typeface="Arial"/>
+              </a:rPr>
+              <a:t>Only 20d survives both lenses</a:t>
+            </a:r>
+          </a:p>
+        </p:txBody>
+      </p:sp>
+      <p:sp>
+        <p:nvSpPr>
+          <p:cNvPr id="14" name="">
+            <a:extLst xmlns:a="http://schemas.openxmlformats.org/drawingml/2006/main">
+              <a:ext uri="{FF2B5EF4-FFF2-40B4-BE49-F238E27FC236}">
+                <a16:creationId xmlns:a16="http://schemas.microsoft.com/office/drawing/2014/main" id="{2CAF0156-C9E6-4210-8A8A-BFEDD044631B}"/>
+              </a:ext>
+            </a:extLst>
+          </p:cNvPr>
+          <p:cNvSpPr>
+            <a:spLocks xmlns:a="http://schemas.openxmlformats.org/drawingml/2006/main" noGrp="1"/>
+          </p:cNvSpPr>
+          <p:nvPr/>
+        </p:nvSpPr>
+        <p:spPr>
+          <a:xfrm xmlns:a="http://schemas.openxmlformats.org/drawingml/2006/main">
+            <a:off x="8096250" y="2781300"/>
+            <a:ext cx="3333750" cy="704850"/>
+          </a:xfrm>
+          <a:prstGeom xmlns:a="http://schemas.openxmlformats.org/drawingml/2006/main" prst="rect">
+            <a:avLst/>
+          </a:prstGeom>
+          <a:noFill xmlns:a="http://schemas.openxmlformats.org/drawingml/2006/main"/>
+          <a:ln xmlns:a="http://schemas.openxmlformats.org/drawingml/2006/main" w="0">
+            <a:noFill/>
+            <a:prstDash val="solid"/>
+          </a:ln>
+        </p:spPr>
+        <p:txBody>
+          <a:bodyPr xmlns:a="http://schemas.openxmlformats.org/drawingml/2006/main" wrap="square" lIns="0" tIns="0" rIns="0" bIns="0" anchor="t">
+            <a:normAutofit fontScale="100000"/>
+          </a:bodyPr>
+          <a:lstStyle xmlns:a="http://schemas.openxmlformats.org/drawingml/2006/main"/>
+          <a:p xmlns:a="http://schemas.openxmlformats.org/drawingml/2006/main">
+            <a:pPr algn="l">
+              <a:buNone/>
+              <a:defRPr sz="1425" b="0">
+                <a:solidFill>
+                  <a:srgbClr val="667384"/>
+                </a:solidFill>
+                <a:latin typeface="Arial"/>
+                <a:ea typeface="Arial"/>
+                <a:cs typeface="Arial"/>
+              </a:defRPr>
+            </a:pPr>
+            <a:r>
+              <a:rPr sz="1425" b="0">
+                <a:solidFill>
+                  <a:srgbClr val="667384"/>
+                </a:solidFill>
+                <a:latin typeface="Arial"/>
+                <a:ea typeface="Arial"/>
+                <a:cs typeface="Arial"/>
+              </a:rPr>
+              <a:t>+38 bp equal-sector; +5 bp pooled</a:t>
+            </a:r>
+          </a:p>
+        </p:txBody>
+      </p:sp>
+      <p:sp>
+        <p:nvSpPr>
+          <p:cNvPr id="15" name="">
+            <a:extLst xmlns:a="http://schemas.openxmlformats.org/drawingml/2006/main">
+              <a:ext uri="{FF2B5EF4-FFF2-40B4-BE49-F238E27FC236}">
+                <a16:creationId xmlns:a16="http://schemas.microsoft.com/office/drawing/2014/main" id="{B126165D-5B65-44DB-99BD-15ED33F9B90F}"/>
+              </a:ext>
+            </a:extLst>
+          </p:cNvPr>
+          <p:cNvSpPr>
+            <a:spLocks xmlns:a="http://schemas.openxmlformats.org/drawingml/2006/main" noGrp="1"/>
+          </p:cNvSpPr>
+          <p:nvPr/>
+        </p:nvSpPr>
+        <p:spPr>
+          <a:xfrm xmlns:a="http://schemas.openxmlformats.org/drawingml/2006/main">
+            <a:off x="876300" y="3790950"/>
+            <a:ext cx="10553700" cy="9525"/>
+          </a:xfrm>
+          <a:prstGeom xmlns:a="http://schemas.openxmlformats.org/drawingml/2006/main" prst="rect">
+            <a:avLst/>
+          </a:prstGeom>
+          <a:solidFill xmlns:a="http://schemas.openxmlformats.org/drawingml/2006/main">
+            <a:srgbClr val="B8BCC4"/>
+          </a:solidFill>
+          <a:ln xmlns:a="http://schemas.openxmlformats.org/drawingml/2006/main" w="0">
+            <a:solidFill>
+              <a:srgbClr val="B8BCC4"/>
+            </a:solidFill>
+            <a:prstDash val="solid"/>
+          </a:ln>
+        </p:spPr>
+      </p:sp>
+      <p:sp>
+        <p:nvSpPr>
+          <p:cNvPr id="16" name="">
+            <a:extLst xmlns:a="http://schemas.openxmlformats.org/drawingml/2006/main">
+              <a:ext uri="{FF2B5EF4-FFF2-40B4-BE49-F238E27FC236}">
+                <a16:creationId xmlns:a16="http://schemas.microsoft.com/office/drawing/2014/main" id="{7DC0911F-9587-4B19-84C6-11974DB2A91C}"/>
+              </a:ext>
+            </a:extLst>
+          </p:cNvPr>
+          <p:cNvSpPr>
+            <a:spLocks xmlns:a="http://schemas.openxmlformats.org/drawingml/2006/main" noGrp="1"/>
+          </p:cNvSpPr>
+          <p:nvPr/>
+        </p:nvSpPr>
+        <p:spPr>
+          <a:xfrm xmlns:a="http://schemas.openxmlformats.org/drawingml/2006/main">
+            <a:off x="552450" y="4000500"/>
+            <a:ext cx="95250" cy="895350"/>
+          </a:xfrm>
+          <a:prstGeom xmlns:a="http://schemas.openxmlformats.org/drawingml/2006/main" prst="rect">
+            <a:avLst/>
+          </a:prstGeom>
+          <a:solidFill xmlns:a="http://schemas.openxmlformats.org/drawingml/2006/main">
+            <a:srgbClr val="3D8DFF"/>
+          </a:solidFill>
+          <a:ln xmlns:a="http://schemas.openxmlformats.org/drawingml/2006/main" w="0">
+            <a:solidFill>
+              <a:srgbClr val="3D8DFF"/>
+            </a:solidFill>
+            <a:prstDash val="solid"/>
+          </a:ln>
+        </p:spPr>
+      </p:sp>
+      <p:sp>
+        <p:nvSpPr>
+          <p:cNvPr id="17" name="">
+            <a:extLst xmlns:a="http://schemas.openxmlformats.org/drawingml/2006/main">
+              <a:ext uri="{FF2B5EF4-FFF2-40B4-BE49-F238E27FC236}">
+                <a16:creationId xmlns:a16="http://schemas.microsoft.com/office/drawing/2014/main" id="{DAB53991-F50C-4B95-9F23-DAE86BCEDF3B}"/>
+              </a:ext>
+            </a:extLst>
+          </p:cNvPr>
+          <p:cNvSpPr>
+            <a:spLocks xmlns:a="http://schemas.openxmlformats.org/drawingml/2006/main" noGrp="1"/>
+          </p:cNvSpPr>
+          <p:nvPr/>
+        </p:nvSpPr>
+        <p:spPr>
+          <a:xfrm xmlns:a="http://schemas.openxmlformats.org/drawingml/2006/main">
+            <a:off x="876300" y="3981450"/>
+            <a:ext cx="2095500" cy="285750"/>
+          </a:xfrm>
+          <a:prstGeom xmlns:a="http://schemas.openxmlformats.org/drawingml/2006/main" prst="rect">
+            <a:avLst/>
+          </a:prstGeom>
+          <a:noFill xmlns:a="http://schemas.openxmlformats.org/drawingml/2006/main"/>
+          <a:ln xmlns:a="http://schemas.openxmlformats.org/drawingml/2006/main" w="0">
+            <a:noFill/>
+            <a:prstDash val="solid"/>
+          </a:ln>
+        </p:spPr>
+        <p:txBody>
+          <a:bodyPr xmlns:a="http://schemas.openxmlformats.org/drawingml/2006/main" wrap="square" lIns="0" tIns="0" rIns="0" bIns="0" anchor="t">
+            <a:normAutofit fontScale="100000"/>
+          </a:bodyPr>
+          <a:lstStyle xmlns:a="http://schemas.openxmlformats.org/drawingml/2006/main"/>
+          <a:p xmlns:a="http://schemas.openxmlformats.org/drawingml/2006/main">
+            <a:pPr algn="l">
+              <a:buNone/>
+              <a:defRPr sz="1350" b="1">
+                <a:solidFill>
+                  <a:srgbClr val="3D8DFF"/>
+                </a:solidFill>
+                <a:latin typeface="Arial"/>
+                <a:ea typeface="Arial"/>
+                <a:cs typeface="Arial"/>
+              </a:defRPr>
+            </a:pPr>
+            <a:r>
+              <a:rPr sz="1350" b="1">
+                <a:solidFill>
+                  <a:srgbClr val="3D8DFF"/>
+                </a:solidFill>
+                <a:latin typeface="Arial"/>
+                <a:ea typeface="Arial"/>
+                <a:cs typeface="Arial"/>
+              </a:rPr>
+              <a:t>SIGN</a:t>
+            </a:r>
+          </a:p>
+        </p:txBody>
+      </p:sp>
+      <p:sp>
+        <p:nvSpPr>
+          <p:cNvPr id="18" name="">
+            <a:extLst xmlns:a="http://schemas.openxmlformats.org/drawingml/2006/main">
+              <a:ext uri="{FF2B5EF4-FFF2-40B4-BE49-F238E27FC236}">
+                <a16:creationId xmlns:a16="http://schemas.microsoft.com/office/drawing/2014/main" id="{5DFACF3B-08BC-4148-A40A-2004DFB81D71}"/>
+              </a:ext>
+            </a:extLst>
+          </p:cNvPr>
+          <p:cNvSpPr>
+            <a:spLocks xmlns:a="http://schemas.openxmlformats.org/drawingml/2006/main" noGrp="1"/>
+          </p:cNvSpPr>
+          <p:nvPr/>
+        </p:nvSpPr>
+        <p:spPr>
+          <a:xfrm xmlns:a="http://schemas.openxmlformats.org/drawingml/2006/main">
+            <a:off x="3105150" y="3962400"/>
+            <a:ext cx="4762500" cy="419100"/>
+          </a:xfrm>
+          <a:prstGeom xmlns:a="http://schemas.openxmlformats.org/drawingml/2006/main" prst="rect">
+            <a:avLst/>
+          </a:prstGeom>
+          <a:noFill xmlns:a="http://schemas.openxmlformats.org/drawingml/2006/main"/>
+          <a:ln xmlns:a="http://schemas.openxmlformats.org/drawingml/2006/main" w="0">
+            <a:noFill/>
+            <a:prstDash val="solid"/>
+          </a:ln>
+        </p:spPr>
+        <p:txBody>
+          <a:bodyPr xmlns:a="http://schemas.openxmlformats.org/drawingml/2006/main" wrap="square" lIns="0" tIns="0" rIns="0" bIns="0" anchor="t">
+            <a:normAutofit fontScale="100000"/>
+          </a:bodyPr>
+          <a:lstStyle xmlns:a="http://schemas.openxmlformats.org/drawingml/2006/main"/>
+          <a:p xmlns:a="http://schemas.openxmlformats.org/drawingml/2006/main">
+            <a:pPr algn="l">
+              <a:buNone/>
+              <a:defRPr sz="1950" b="1">
+                <a:solidFill>
+                  <a:srgbClr val="273548"/>
+                </a:solidFill>
+                <a:latin typeface="Arial"/>
+                <a:ea typeface="Arial"/>
+                <a:cs typeface="Arial"/>
+              </a:defRPr>
+            </a:pPr>
+            <a:r>
+              <a:rPr sz="1950" b="1">
+                <a:solidFill>
+                  <a:srgbClr val="273548"/>
+                </a:solidFill>
+                <a:latin typeface="Arial"/>
+                <a:ea typeface="Arial"/>
+                <a:cs typeface="Arial"/>
+              </a:rPr>
+              <a:t>R20 &gt; 0 adds no value vs sideways-only</a:t>
+            </a:r>
+          </a:p>
+        </p:txBody>
+      </p:sp>
+      <p:sp>
+        <p:nvSpPr>
+          <p:cNvPr id="19" name="">
+            <a:extLst xmlns:a="http://schemas.openxmlformats.org/drawingml/2006/main">
+              <a:ext uri="{FF2B5EF4-FFF2-40B4-BE49-F238E27FC236}">
+                <a16:creationId xmlns:a16="http://schemas.microsoft.com/office/drawing/2014/main" id="{C907D23B-44A2-43C4-9658-4C6E38430BF5}"/>
+              </a:ext>
+            </a:extLst>
+          </p:cNvPr>
+          <p:cNvSpPr>
+            <a:spLocks xmlns:a="http://schemas.openxmlformats.org/drawingml/2006/main" noGrp="1"/>
+          </p:cNvSpPr>
+          <p:nvPr/>
+        </p:nvSpPr>
+        <p:spPr>
+          <a:xfrm xmlns:a="http://schemas.openxmlformats.org/drawingml/2006/main">
+            <a:off x="8096250" y="3981450"/>
+            <a:ext cx="3333750" cy="704850"/>
+          </a:xfrm>
+          <a:prstGeom xmlns:a="http://schemas.openxmlformats.org/drawingml/2006/main" prst="rect">
+            <a:avLst/>
+          </a:prstGeom>
+          <a:noFill xmlns:a="http://schemas.openxmlformats.org/drawingml/2006/main"/>
+          <a:ln xmlns:a="http://schemas.openxmlformats.org/drawingml/2006/main" w="0">
+            <a:noFill/>
+            <a:prstDash val="solid"/>
+          </a:ln>
+        </p:spPr>
+        <p:txBody>
+          <a:bodyPr xmlns:a="http://schemas.openxmlformats.org/drawingml/2006/main" wrap="square" lIns="0" tIns="0" rIns="0" bIns="0" anchor="t">
+            <a:normAutofit fontScale="100000"/>
+          </a:bodyPr>
+          <a:lstStyle xmlns:a="http://schemas.openxmlformats.org/drawingml/2006/main"/>
+          <a:p xmlns:a="http://schemas.openxmlformats.org/drawingml/2006/main">
+            <a:pPr algn="l">
+              <a:buNone/>
+              <a:defRPr sz="1425" b="0">
+                <a:solidFill>
+                  <a:srgbClr val="667384"/>
+                </a:solidFill>
+                <a:latin typeface="Arial"/>
+                <a:ea typeface="Arial"/>
+                <a:cs typeface="Arial"/>
+              </a:defRPr>
+            </a:pPr>
+            <a:r>
+              <a:rPr sz="1425" b="0">
+                <a:solidFill>
+                  <a:srgbClr val="667384"/>
+                </a:solidFill>
+                <a:latin typeface="Arial"/>
+                <a:ea typeface="Arial"/>
+                <a:cs typeface="Arial"/>
+              </a:rPr>
+              <a:t>−7 / −9 / −14 bp at 5 / 10 / 20</a:t>
+            </a:r>
+          </a:p>
+        </p:txBody>
+      </p:sp>
+      <p:sp>
+        <p:nvSpPr>
+          <p:cNvPr id="20" name="">
+            <a:extLst xmlns:a="http://schemas.openxmlformats.org/drawingml/2006/main">
+              <a:ext uri="{FF2B5EF4-FFF2-40B4-BE49-F238E27FC236}">
+                <a16:creationId xmlns:a16="http://schemas.microsoft.com/office/drawing/2014/main" id="{8042DFC4-7E22-47E6-8C53-1E63A8411C3A}"/>
+              </a:ext>
+            </a:extLst>
+          </p:cNvPr>
+          <p:cNvSpPr>
+            <a:spLocks xmlns:a="http://schemas.openxmlformats.org/drawingml/2006/main" noGrp="1"/>
+          </p:cNvSpPr>
+          <p:nvPr/>
+        </p:nvSpPr>
+        <p:spPr>
+          <a:xfrm xmlns:a="http://schemas.openxmlformats.org/drawingml/2006/main">
+            <a:off x="876300" y="4991100"/>
+            <a:ext cx="10553700" cy="9525"/>
+          </a:xfrm>
+          <a:prstGeom xmlns:a="http://schemas.openxmlformats.org/drawingml/2006/main" prst="rect">
+            <a:avLst/>
+          </a:prstGeom>
+          <a:solidFill xmlns:a="http://schemas.openxmlformats.org/drawingml/2006/main">
+            <a:srgbClr val="B8BCC4"/>
+          </a:solidFill>
+          <a:ln xmlns:a="http://schemas.openxmlformats.org/drawingml/2006/main" w="0">
+            <a:solidFill>
+              <a:srgbClr val="B8BCC4"/>
+            </a:solidFill>
+            <a:prstDash val="solid"/>
+          </a:ln>
+        </p:spPr>
+      </p:sp>
+      <p:sp>
+        <p:nvSpPr>
+          <p:cNvPr id="21" name="">
+            <a:extLst xmlns:a="http://schemas.openxmlformats.org/drawingml/2006/main">
+              <a:ext uri="{FF2B5EF4-FFF2-40B4-BE49-F238E27FC236}">
+                <a16:creationId xmlns:a16="http://schemas.microsoft.com/office/drawing/2014/main" id="{F4066D54-676B-4D0F-93B6-2152B57E41AF}"/>
+              </a:ext>
+            </a:extLst>
+          </p:cNvPr>
+          <p:cNvSpPr>
+            <a:spLocks xmlns:a="http://schemas.openxmlformats.org/drawingml/2006/main" noGrp="1"/>
+          </p:cNvSpPr>
+          <p:nvPr/>
+        </p:nvSpPr>
+        <p:spPr>
+          <a:xfrm xmlns:a="http://schemas.openxmlformats.org/drawingml/2006/main">
+            <a:off x="552450" y="5353050"/>
+            <a:ext cx="10877550" cy="781050"/>
+          </a:xfrm>
+          <a:prstGeom xmlns:a="http://schemas.openxmlformats.org/drawingml/2006/main" prst="rect">
+            <a:avLst/>
+          </a:prstGeom>
+          <a:solidFill xmlns:a="http://schemas.openxmlformats.org/drawingml/2006/main">
+            <a:srgbClr val="EAF5FB"/>
+          </a:solidFill>
+          <a:ln xmlns:a="http://schemas.openxmlformats.org/drawingml/2006/main" w="0">
+            <a:solidFill>
+              <a:srgbClr val="EAF5FB"/>
+            </a:solidFill>
+            <a:prstDash val="solid"/>
+          </a:ln>
+        </p:spPr>
+      </p:sp>
+      <p:sp>
+        <p:nvSpPr>
+          <p:cNvPr id="22" name="">
+            <a:extLst xmlns:a="http://schemas.openxmlformats.org/drawingml/2006/main">
+              <a:ext uri="{FF2B5EF4-FFF2-40B4-BE49-F238E27FC236}">
+                <a16:creationId xmlns:a16="http://schemas.microsoft.com/office/drawing/2014/main" id="{6E4C79AE-EB98-4B5B-B3D3-11ED0D4C729B}"/>
+              </a:ext>
+            </a:extLst>
+          </p:cNvPr>
+          <p:cNvSpPr>
+            <a:spLocks xmlns:a="http://schemas.openxmlformats.org/drawingml/2006/main" noGrp="1"/>
+          </p:cNvSpPr>
+          <p:nvPr/>
+        </p:nvSpPr>
+        <p:spPr>
+          <a:xfrm xmlns:a="http://schemas.openxmlformats.org/drawingml/2006/main">
+            <a:off x="781050" y="5524500"/>
+            <a:ext cx="2476500" cy="323850"/>
+          </a:xfrm>
+          <a:prstGeom xmlns:a="http://schemas.openxmlformats.org/drawingml/2006/main" prst="rect">
+            <a:avLst/>
+          </a:prstGeom>
+          <a:noFill xmlns:a="http://schemas.openxmlformats.org/drawingml/2006/main"/>
+          <a:ln xmlns:a="http://schemas.openxmlformats.org/drawingml/2006/main" w="0">
+            <a:noFill/>
+            <a:prstDash val="solid"/>
+          </a:ln>
+        </p:spPr>
+        <p:txBody>
+          <a:bodyPr xmlns:a="http://schemas.openxmlformats.org/drawingml/2006/main" wrap="square" lIns="0" tIns="0" rIns="0" bIns="0" anchor="t">
+            <a:normAutofit fontScale="100000"/>
+          </a:bodyPr>
+          <a:lstStyle xmlns:a="http://schemas.openxmlformats.org/drawingml/2006/main"/>
+          <a:p xmlns:a="http://schemas.openxmlformats.org/drawingml/2006/main">
+            <a:pPr algn="l">
+              <a:buNone/>
+              <a:defRPr sz="1725" b="1">
+                <a:solidFill>
+                  <a:srgbClr val="3D8DFF"/>
+                </a:solidFill>
+                <a:latin typeface="Arial"/>
+                <a:ea typeface="Arial"/>
+                <a:cs typeface="Arial"/>
+              </a:defRPr>
+            </a:pPr>
+            <a:r>
+              <a:rPr sz="1725" b="1">
+                <a:solidFill>
+                  <a:srgbClr val="3D8DFF"/>
+                </a:solidFill>
+                <a:latin typeface="Arial"/>
+                <a:ea typeface="Arial"/>
+                <a:cs typeface="Arial"/>
+              </a:rPr>
+              <a:t>STATUS</a:t>
+            </a:r>
+          </a:p>
+        </p:txBody>
+      </p:sp>
+      <p:sp>
+        <p:nvSpPr>
+          <p:cNvPr id="23" name="">
+            <a:extLst xmlns:a="http://schemas.openxmlformats.org/drawingml/2006/main">
+              <a:ext uri="{FF2B5EF4-FFF2-40B4-BE49-F238E27FC236}">
+                <a16:creationId xmlns:a16="http://schemas.microsoft.com/office/drawing/2014/main" id="{3320D60E-6067-4236-80ED-A898A863026E}"/>
+              </a:ext>
+            </a:extLst>
+          </p:cNvPr>
+          <p:cNvSpPr>
+            <a:spLocks xmlns:a="http://schemas.openxmlformats.org/drawingml/2006/main" noGrp="1"/>
+          </p:cNvSpPr>
+          <p:nvPr/>
+        </p:nvSpPr>
+        <p:spPr>
+          <a:xfrm xmlns:a="http://schemas.openxmlformats.org/drawingml/2006/main">
+            <a:off x="3333750" y="5486400"/>
+            <a:ext cx="7810500" cy="419100"/>
+          </a:xfrm>
+          <a:prstGeom xmlns:a="http://schemas.openxmlformats.org/drawingml/2006/main" prst="rect">
+            <a:avLst/>
+          </a:prstGeom>
+          <a:noFill xmlns:a="http://schemas.openxmlformats.org/drawingml/2006/main"/>
+          <a:ln xmlns:a="http://schemas.openxmlformats.org/drawingml/2006/main" w="0">
+            <a:noFill/>
+            <a:prstDash val="solid"/>
+          </a:ln>
+        </p:spPr>
+        <p:txBody>
+          <a:bodyPr xmlns:a="http://schemas.openxmlformats.org/drawingml/2006/main" wrap="square" lIns="0" tIns="0" rIns="0" bIns="0" anchor="t">
+            <a:normAutofit fontScale="76389"/>
+          </a:bodyPr>
+          <a:lstStyle xmlns:a="http://schemas.openxmlformats.org/drawingml/2006/main"/>
+          <a:p xmlns:a="http://schemas.openxmlformats.org/drawingml/2006/main">
+            <a:pPr algn="l">
+              <a:buNone/>
+              <a:defRPr sz="1800" b="1">
+                <a:solidFill>
+                  <a:srgbClr val="273548"/>
+                </a:solidFill>
+                <a:latin typeface="Arial"/>
+                <a:ea typeface="Arial"/>
+                <a:cs typeface="Arial"/>
+              </a:defRPr>
+            </a:pPr>
+            <a:r>
+              <a:rPr sz="1800" b="1">
+                <a:solidFill>
+                  <a:srgbClr val="273548"/>
+                </a:solidFill>
+                <a:latin typeface="Arial"/>
+                <a:ea typeface="Arial"/>
+                <a:cs typeface="Arial"/>
+              </a:rPr>
+              <a:t>Raw net returns are positive at all holds, but no horizon earns promotion. Stop before selecting 20d, changing thresholds, or opening OOS.</a:t>
             </a:r>
           </a:p>
         </p:txBody>
@@ -6988,7 +12039,7 @@
           <p:nvPr/>
         </p:nvPicPr>
         <p:blipFill>
-          <a:blip xmlns:r="http://schemas.openxmlformats.org/officeDocument/2006/relationships" xmlns:a="http://schemas.openxmlformats.org/drawingml/2006/main" r:embed="R59d79921c91f4537"/>
+          <a:blip xmlns:r="http://schemas.openxmlformats.org/officeDocument/2006/relationships" xmlns:a="http://schemas.openxmlformats.org/drawingml/2006/main" r:embed="Ra31306ee0c5741b7"/>
           <a:stretch xmlns:a="http://schemas.openxmlformats.org/drawingml/2006/main"/>
         </p:blipFill>
         <p:spPr>
@@ -7308,7 +12359,7 @@
           <p:nvPr/>
         </p:nvPicPr>
         <p:blipFill>
-          <a:blip xmlns:r="http://schemas.openxmlformats.org/officeDocument/2006/relationships" xmlns:a="http://schemas.openxmlformats.org/drawingml/2006/main" r:embed="R662083d1f331452a"/>
+          <a:blip xmlns:r="http://schemas.openxmlformats.org/officeDocument/2006/relationships" xmlns:a="http://schemas.openxmlformats.org/drawingml/2006/main" r:embed="R94d1cea897904dba"/>
           <a:stretch xmlns:a="http://schemas.openxmlformats.org/drawingml/2006/main"/>
         </p:blipFill>
         <p:spPr>
@@ -7628,7 +12679,7 @@
           <p:nvPr/>
         </p:nvPicPr>
         <p:blipFill>
-          <a:blip xmlns:r="http://schemas.openxmlformats.org/officeDocument/2006/relationships" xmlns:a="http://schemas.openxmlformats.org/drawingml/2006/main" r:embed="R34f12cb8d38c4bb2"/>
+          <a:blip xmlns:r="http://schemas.openxmlformats.org/officeDocument/2006/relationships" xmlns:a="http://schemas.openxmlformats.org/drawingml/2006/main" r:embed="Reed066ceb0454ba5"/>
           <a:stretch xmlns:a="http://schemas.openxmlformats.org/drawingml/2006/main"/>
         </p:blipFill>
         <p:spPr>
@@ -7948,7 +12999,7 @@
           <p:nvPr/>
         </p:nvPicPr>
         <p:blipFill>
-          <a:blip xmlns:r="http://schemas.openxmlformats.org/officeDocument/2006/relationships" xmlns:a="http://schemas.openxmlformats.org/drawingml/2006/main" r:embed="R3bfd2aef541446b8"/>
+          <a:blip xmlns:r="http://schemas.openxmlformats.org/officeDocument/2006/relationships" xmlns:a="http://schemas.openxmlformats.org/drawingml/2006/main" r:embed="R0714a8350dec4994"/>
           <a:stretch xmlns:a="http://schemas.openxmlformats.org/drawingml/2006/main"/>
         </p:blipFill>
         <p:spPr>
@@ -8268,7 +13319,7 @@
           <p:nvPr/>
         </p:nvPicPr>
         <p:blipFill>
-          <a:blip xmlns:r="http://schemas.openxmlformats.org/officeDocument/2006/relationships" xmlns:a="http://schemas.openxmlformats.org/drawingml/2006/main" r:embed="Rdf95817faae04f76"/>
+          <a:blip xmlns:r="http://schemas.openxmlformats.org/officeDocument/2006/relationships" xmlns:a="http://schemas.openxmlformats.org/drawingml/2006/main" r:embed="R0408eb05f7c04472"/>
           <a:stretch xmlns:a="http://schemas.openxmlformats.org/drawingml/2006/main"/>
         </p:blipFill>
         <p:spPr>

--- a/operator_hypothesis_lab/presentations/return_geometry_daily_continuation_microscope.pptx
+++ b/operator_hypothesis_lab/presentations/return_geometry_daily_continuation_microscope.pptx
@@ -2,35 +2,43 @@
 <file path=ppt/presentation.xml><?xml version="1.0" encoding="utf-8"?>
 <p:presentation xmlns:p="http://schemas.openxmlformats.org/presentationml/2006/main">
   <p:sldMasterIdLst>
-    <p:sldMasterId xmlns:r="http://schemas.openxmlformats.org/officeDocument/2006/relationships" id="2147483648" r:id="Rd29db7dd59354eed"/>
+    <p:sldMasterId xmlns:r="http://schemas.openxmlformats.org/officeDocument/2006/relationships" id="2147483648" r:id="R1cab22690dd247ae"/>
   </p:sldMasterIdLst>
   <p:notesMasterIdLst>
-    <p:notesMasterId xmlns:r="http://schemas.openxmlformats.org/officeDocument/2006/relationships" r:id="R80c2df66b38d4ade"/>
+    <p:notesMasterId xmlns:r="http://schemas.openxmlformats.org/officeDocument/2006/relationships" r:id="R46b39c2236c147d8"/>
   </p:notesMasterIdLst>
   <p:sldIdLst>
-    <p:sldId xmlns:r="http://schemas.openxmlformats.org/officeDocument/2006/relationships" id="256" r:id="R5f329affa81b46ac"/>
-    <p:sldId xmlns:r="http://schemas.openxmlformats.org/officeDocument/2006/relationships" id="257" r:id="Rc5feca4d05be4d31"/>
-    <p:sldId xmlns:r="http://schemas.openxmlformats.org/officeDocument/2006/relationships" id="258" r:id="Rfe075a0198974755"/>
-    <p:sldId xmlns:r="http://schemas.openxmlformats.org/officeDocument/2006/relationships" id="259" r:id="R88b5a307b659476a"/>
-    <p:sldId xmlns:r="http://schemas.openxmlformats.org/officeDocument/2006/relationships" id="260" r:id="R45168b94e4134fc3"/>
-    <p:sldId xmlns:r="http://schemas.openxmlformats.org/officeDocument/2006/relationships" id="261" r:id="Rd9708d1a4cea4dd3"/>
-    <p:sldId xmlns:r="http://schemas.openxmlformats.org/officeDocument/2006/relationships" id="262" r:id="R32010ec1176b470d"/>
-    <p:sldId xmlns:r="http://schemas.openxmlformats.org/officeDocument/2006/relationships" id="263" r:id="Rcda05faff56240fe"/>
-    <p:sldId xmlns:r="http://schemas.openxmlformats.org/officeDocument/2006/relationships" id="264" r:id="R7e48ad869dce4bff"/>
-    <p:sldId xmlns:r="http://schemas.openxmlformats.org/officeDocument/2006/relationships" id="265" r:id="Raf1591d7362e4fec"/>
-    <p:sldId xmlns:r="http://schemas.openxmlformats.org/officeDocument/2006/relationships" id="266" r:id="R1b69565210f04e63"/>
-    <p:sldId xmlns:r="http://schemas.openxmlformats.org/officeDocument/2006/relationships" id="267" r:id="R7c5841ade7b247bf"/>
-    <p:sldId xmlns:r="http://schemas.openxmlformats.org/officeDocument/2006/relationships" id="268" r:id="R902d283e8dc04733"/>
-    <p:sldId xmlns:r="http://schemas.openxmlformats.org/officeDocument/2006/relationships" id="269" r:id="Rce17cb33b7bb4cc3"/>
-    <p:sldId xmlns:r="http://schemas.openxmlformats.org/officeDocument/2006/relationships" id="270" r:id="R28611201c9a24e28"/>
-    <p:sldId xmlns:r="http://schemas.openxmlformats.org/officeDocument/2006/relationships" id="271" r:id="Rdd04f550549648b1"/>
-    <p:sldId xmlns:r="http://schemas.openxmlformats.org/officeDocument/2006/relationships" id="272" r:id="Rb5831e14f7504f81"/>
-    <p:sldId xmlns:r="http://schemas.openxmlformats.org/officeDocument/2006/relationships" id="273" r:id="Rddba663147554d32"/>
-    <p:sldId xmlns:r="http://schemas.openxmlformats.org/officeDocument/2006/relationships" id="274" r:id="R4e8332751a83477d"/>
-    <p:sldId xmlns:r="http://schemas.openxmlformats.org/officeDocument/2006/relationships" id="275" r:id="R47a08ce89880435d"/>
-    <p:sldId xmlns:r="http://schemas.openxmlformats.org/officeDocument/2006/relationships" id="276" r:id="Rc7c580b78c0b426c"/>
-    <p:sldId xmlns:r="http://schemas.openxmlformats.org/officeDocument/2006/relationships" id="277" r:id="R32203bb98aca4287"/>
-    <p:sldId xmlns:r="http://schemas.openxmlformats.org/officeDocument/2006/relationships" id="278" r:id="R74299a0031a6455e"/>
+    <p:sldId xmlns:r="http://schemas.openxmlformats.org/officeDocument/2006/relationships" id="256" r:id="Rc70a8fdea2304332"/>
+    <p:sldId xmlns:r="http://schemas.openxmlformats.org/officeDocument/2006/relationships" id="257" r:id="Rbaf32ff6d835466e"/>
+    <p:sldId xmlns:r="http://schemas.openxmlformats.org/officeDocument/2006/relationships" id="258" r:id="Rf50dd6c4ec0a4531"/>
+    <p:sldId xmlns:r="http://schemas.openxmlformats.org/officeDocument/2006/relationships" id="259" r:id="Rb785f5f8a2514745"/>
+    <p:sldId xmlns:r="http://schemas.openxmlformats.org/officeDocument/2006/relationships" id="260" r:id="R95e0827b4fea4c0f"/>
+    <p:sldId xmlns:r="http://schemas.openxmlformats.org/officeDocument/2006/relationships" id="261" r:id="R3c1daf5b3c9f4746"/>
+    <p:sldId xmlns:r="http://schemas.openxmlformats.org/officeDocument/2006/relationships" id="262" r:id="Rf01b03991cf143ee"/>
+    <p:sldId xmlns:r="http://schemas.openxmlformats.org/officeDocument/2006/relationships" id="263" r:id="Rbd8c2f7c6f3246e0"/>
+    <p:sldId xmlns:r="http://schemas.openxmlformats.org/officeDocument/2006/relationships" id="264" r:id="R7b4c206a05d243fa"/>
+    <p:sldId xmlns:r="http://schemas.openxmlformats.org/officeDocument/2006/relationships" id="265" r:id="Rdf5a8e9b3c694c29"/>
+    <p:sldId xmlns:r="http://schemas.openxmlformats.org/officeDocument/2006/relationships" id="266" r:id="Rf0674a0c85e643d0"/>
+    <p:sldId xmlns:r="http://schemas.openxmlformats.org/officeDocument/2006/relationships" id="267" r:id="R7d4ae0adac7048a0"/>
+    <p:sldId xmlns:r="http://schemas.openxmlformats.org/officeDocument/2006/relationships" id="268" r:id="R1550b7a0eb384e8d"/>
+    <p:sldId xmlns:r="http://schemas.openxmlformats.org/officeDocument/2006/relationships" id="269" r:id="R3bbbd518ace647fe"/>
+    <p:sldId xmlns:r="http://schemas.openxmlformats.org/officeDocument/2006/relationships" id="270" r:id="R70353fcd09ab48c2"/>
+    <p:sldId xmlns:r="http://schemas.openxmlformats.org/officeDocument/2006/relationships" id="271" r:id="R63ecb9f35991474b"/>
+    <p:sldId xmlns:r="http://schemas.openxmlformats.org/officeDocument/2006/relationships" id="272" r:id="R03f990381747450f"/>
+    <p:sldId xmlns:r="http://schemas.openxmlformats.org/officeDocument/2006/relationships" id="273" r:id="Rfd850dba211f4ee7"/>
+    <p:sldId xmlns:r="http://schemas.openxmlformats.org/officeDocument/2006/relationships" id="274" r:id="R7ecfadb7e58c400b"/>
+    <p:sldId xmlns:r="http://schemas.openxmlformats.org/officeDocument/2006/relationships" id="275" r:id="R4348bbb07acd491d"/>
+    <p:sldId xmlns:r="http://schemas.openxmlformats.org/officeDocument/2006/relationships" id="276" r:id="R5bf1d5c0eb11484b"/>
+    <p:sldId xmlns:r="http://schemas.openxmlformats.org/officeDocument/2006/relationships" id="277" r:id="R09d3a18af2dc47de"/>
+    <p:sldId xmlns:r="http://schemas.openxmlformats.org/officeDocument/2006/relationships" id="278" r:id="R8fe8e5069afc4f0c"/>
+    <p:sldId xmlns:r="http://schemas.openxmlformats.org/officeDocument/2006/relationships" id="279" r:id="R2faa0acd934946f0"/>
+    <p:sldId xmlns:r="http://schemas.openxmlformats.org/officeDocument/2006/relationships" id="280" r:id="R2e18372ec51048ca"/>
+    <p:sldId xmlns:r="http://schemas.openxmlformats.org/officeDocument/2006/relationships" id="281" r:id="Rce9c76865c794a19"/>
+    <p:sldId xmlns:r="http://schemas.openxmlformats.org/officeDocument/2006/relationships" id="282" r:id="R5d728eac590d4bc6"/>
+    <p:sldId xmlns:r="http://schemas.openxmlformats.org/officeDocument/2006/relationships" id="283" r:id="Radd38be2310e4323"/>
+    <p:sldId xmlns:r="http://schemas.openxmlformats.org/officeDocument/2006/relationships" id="284" r:id="R333dce3411634205"/>
+    <p:sldId xmlns:r="http://schemas.openxmlformats.org/officeDocument/2006/relationships" id="285" r:id="Rc67c85c8cb574004"/>
+    <p:sldId xmlns:r="http://schemas.openxmlformats.org/officeDocument/2006/relationships" id="286" r:id="R5afa4edce3be4098"/>
   </p:sldIdLst>
   <p:sldSz cx="12192000" cy="6858000"/>
   <p:notesSz cx="6858000" cy="9144000"/>
@@ -1964,6 +1972,586 @@
 </p:notes>
 </file>
 
+<file path=ppt/notesSlides/notesSlide24.xml><?xml version="1.0" encoding="utf-8"?>
+<p:notes xmlns:p="http://schemas.openxmlformats.org/presentationml/2006/main">
+  <p:cSld>
+    <p:spTree>
+      <p:nvGrpSpPr>
+        <p:cNvPr id="1" name=""/>
+        <p:cNvGrpSpPr/>
+        <p:nvPr/>
+      </p:nvGrpSpPr>
+      <p:grpSpPr>
+        <a:xfrm xmlns:a="http://schemas.openxmlformats.org/drawingml/2006/main"/>
+      </p:grpSpPr>
+      <p:sp>
+        <p:nvSpPr>
+          <p:cNvPr id="2" name="Slide Image Placeholder 1"/>
+          <p:cNvSpPr>
+            <a:spLocks xmlns:a="http://schemas.openxmlformats.org/drawingml/2006/main" noGrp="1"/>
+          </p:cNvSpPr>
+          <p:nvPr>
+            <p:ph type="sldImg" idx="0"/>
+          </p:nvPr>
+        </p:nvSpPr>
+        <p:spPr/>
+      </p:sp>
+      <p:sp>
+        <p:nvSpPr>
+          <p:cNvPr id="3" name="Notes Placeholder 2"/>
+          <p:cNvSpPr>
+            <a:spLocks xmlns:a="http://schemas.openxmlformats.org/drawingml/2006/main" noGrp="1"/>
+          </p:cNvSpPr>
+          <p:nvPr>
+            <p:ph type="body" idx="1"/>
+          </p:nvPr>
+        </p:nvSpPr>
+        <p:spPr/>
+        <p:txBody>
+          <a:bodyPr xmlns:a="http://schemas.openxmlformats.org/drawingml/2006/main"/>
+          <a:lstStyle xmlns:a="http://schemas.openxmlformats.org/drawingml/2006/main"/>
+          <a:p xmlns:a="http://schemas.openxmlformats.org/drawingml/2006/main">
+            <a:r>
+              <a:t>The prior slice found that a positive-return condition did not add value inside the ER20-sideways state. This section freezes the data-informed 20-session horizon and separates prior-return sign from state so that continuation and rebound cannot be conflated.</a:t>
+            </a:r>
+          </a:p>
+          <a:p xmlns:a="http://schemas.openxmlformats.org/drawingml/2006/main">
+            <a:r>
+              <a:t/>
+            </a:r>
+          </a:p>
+          <a:p xmlns:a="http://schemas.openxmlformats.org/drawingml/2006/main">
+            <a:r>
+              <a:t>[Sources]</a:t>
+            </a:r>
+          </a:p>
+          <a:p xmlns:a="http://schemas.openxmlformats.org/drawingml/2006/main">
+            <a:r>
+              <a:t>- runs/research_workbench/operator_hypothesis_lab/return_geometry_continuation_20d_attribution_20260829/run_spec.csv</a:t>
+            </a:r>
+          </a:p>
+          <a:p xmlns:a="http://schemas.openxmlformats.org/drawingml/2006/main">
+            <a:r>
+              <a:t>- operator_hypothesis_lab/docs/RETURN_GEOMETRY_DAILY_CONTINUATION_MICROSCOPE_2018_2023.md</a:t>
+            </a:r>
+          </a:p>
+          <a:p xmlns:a="http://schemas.openxmlformats.org/drawingml/2006/main">
+            <a:r>
+              <a:t>[/Sources]</a:t>
+            </a:r>
+          </a:p>
+        </p:txBody>
+      </p:sp>
+      <p:sp>
+        <p:nvSpPr>
+          <p:cNvPr id="4" name="Slide Number Placeholder 3"/>
+          <p:cNvSpPr>
+            <a:spLocks xmlns:a="http://schemas.openxmlformats.org/drawingml/2006/main" noGrp="1"/>
+          </p:cNvSpPr>
+          <p:nvPr>
+            <p:ph type="sldNum" idx="5"/>
+          </p:nvPr>
+        </p:nvSpPr>
+        <p:spPr/>
+        <p:txBody>
+          <a:bodyPr xmlns:a="http://schemas.openxmlformats.org/drawingml/2006/main"/>
+          <a:lstStyle xmlns:a="http://schemas.openxmlformats.org/drawingml/2006/main"/>
+          <a:p xmlns:a="http://schemas.openxmlformats.org/drawingml/2006/main"/>
+        </p:txBody>
+      </p:sp>
+    </p:spTree>
+  </p:cSld>
+  <p:clrMapOvr>
+    <a:masterClrMapping xmlns:a="http://schemas.openxmlformats.org/drawingml/2006/main"/>
+  </p:clrMapOvr>
+</p:notes>
+</file>
+
+<file path=ppt/notesSlides/notesSlide25.xml><?xml version="1.0" encoding="utf-8"?>
+<p:notes xmlns:p="http://schemas.openxmlformats.org/presentationml/2006/main">
+  <p:cSld>
+    <p:spTree>
+      <p:nvGrpSpPr>
+        <p:cNvPr id="1" name=""/>
+        <p:cNvGrpSpPr/>
+        <p:nvPr/>
+      </p:nvGrpSpPr>
+      <p:grpSpPr>
+        <a:xfrm xmlns:a="http://schemas.openxmlformats.org/drawingml/2006/main"/>
+      </p:grpSpPr>
+      <p:sp>
+        <p:nvSpPr>
+          <p:cNvPr id="2" name="Slide Image Placeholder 1"/>
+          <p:cNvSpPr>
+            <a:spLocks xmlns:a="http://schemas.openxmlformats.org/drawingml/2006/main" noGrp="1"/>
+          </p:cNvSpPr>
+          <p:nvPr>
+            <p:ph type="sldImg" idx="0"/>
+          </p:nvPr>
+        </p:nvSpPr>
+        <p:spPr/>
+      </p:sp>
+      <p:sp>
+        <p:nvSpPr>
+          <p:cNvPr id="3" name="Notes Placeholder 2"/>
+          <p:cNvSpPr>
+            <a:spLocks xmlns:a="http://schemas.openxmlformats.org/drawingml/2006/main" noGrp="1"/>
+          </p:cNvSpPr>
+          <p:nvPr>
+            <p:ph type="body" idx="1"/>
+          </p:nvPr>
+        </p:nvSpPr>
+        <p:spPr/>
+        <p:txBody>
+          <a:bodyPr xmlns:a="http://schemas.openxmlformats.org/drawingml/2006/main"/>
+          <a:lstStyle xmlns:a="http://schemas.openxmlformats.org/drawingml/2006/main"/>
+          <a:p xmlns:a="http://schemas.openxmlformats.org/drawingml/2006/main">
+            <a:r>
+              <a:t>Signal information is available at completed close t; entry is open t+1 and exit is the open after 20 held sessions. One position is permitted per asset and branch, and intervening signals are ignored until exit. The two sign-qualified branches overlap the sideways-all branch by design; they are attribution lenses, not an additive decomposition.</a:t>
+            </a:r>
+          </a:p>
+          <a:p xmlns:a="http://schemas.openxmlformats.org/drawingml/2006/main">
+            <a:r>
+              <a:t/>
+            </a:r>
+          </a:p>
+          <a:p xmlns:a="http://schemas.openxmlformats.org/drawingml/2006/main">
+            <a:r>
+              <a:t>[Sources]</a:t>
+            </a:r>
+          </a:p>
+          <a:p xmlns:a="http://schemas.openxmlformats.org/drawingml/2006/main">
+            <a:r>
+              <a:t>- runs/research_workbench/operator_hypothesis_lab/return_geometry_continuation_20d_attribution_20260829/run_spec.csv</a:t>
+            </a:r>
+          </a:p>
+          <a:p xmlns:a="http://schemas.openxmlformats.org/drawingml/2006/main">
+            <a:r>
+              <a:t>- runs/research_workbench/operator_hypothesis_lab/return_geometry_continuation_20d_attribution_20260829/construction_checks.csv</a:t>
+            </a:r>
+          </a:p>
+          <a:p xmlns:a="http://schemas.openxmlformats.org/drawingml/2006/main">
+            <a:r>
+              <a:t>[/Sources]</a:t>
+            </a:r>
+          </a:p>
+        </p:txBody>
+      </p:sp>
+      <p:sp>
+        <p:nvSpPr>
+          <p:cNvPr id="4" name="Slide Number Placeholder 3"/>
+          <p:cNvSpPr>
+            <a:spLocks xmlns:a="http://schemas.openxmlformats.org/drawingml/2006/main" noGrp="1"/>
+          </p:cNvSpPr>
+          <p:nvPr>
+            <p:ph type="sldNum" idx="5"/>
+          </p:nvPr>
+        </p:nvSpPr>
+        <p:spPr/>
+        <p:txBody>
+          <a:bodyPr xmlns:a="http://schemas.openxmlformats.org/drawingml/2006/main"/>
+          <a:lstStyle xmlns:a="http://schemas.openxmlformats.org/drawingml/2006/main"/>
+          <a:p xmlns:a="http://schemas.openxmlformats.org/drawingml/2006/main"/>
+        </p:txBody>
+      </p:sp>
+    </p:spTree>
+  </p:cSld>
+  <p:clrMapOvr>
+    <a:masterClrMapping xmlns:a="http://schemas.openxmlformats.org/drawingml/2006/main"/>
+  </p:clrMapOvr>
+</p:notes>
+</file>
+
+<file path=ppt/notesSlides/notesSlide26.xml><?xml version="1.0" encoding="utf-8"?>
+<p:notes xmlns:p="http://schemas.openxmlformats.org/presentationml/2006/main">
+  <p:cSld>
+    <p:spTree>
+      <p:nvGrpSpPr>
+        <p:cNvPr id="1" name=""/>
+        <p:cNvGrpSpPr/>
+        <p:nvPr/>
+      </p:nvGrpSpPr>
+      <p:grpSpPr>
+        <a:xfrm xmlns:a="http://schemas.openxmlformats.org/drawingml/2006/main"/>
+      </p:grpSpPr>
+      <p:sp>
+        <p:nvSpPr>
+          <p:cNvPr id="2" name="Slide Image Placeholder 1"/>
+          <p:cNvSpPr>
+            <a:spLocks xmlns:a="http://schemas.openxmlformats.org/drawingml/2006/main" noGrp="1"/>
+          </p:cNvSpPr>
+          <p:nvPr>
+            <p:ph type="sldImg" idx="0"/>
+          </p:nvPr>
+        </p:nvSpPr>
+        <p:spPr/>
+      </p:sp>
+      <p:sp>
+        <p:nvSpPr>
+          <p:cNvPr id="3" name="Notes Placeholder 2"/>
+          <p:cNvSpPr>
+            <a:spLocks xmlns:a="http://schemas.openxmlformats.org/drawingml/2006/main" noGrp="1"/>
+          </p:cNvSpPr>
+          <p:nvPr>
+            <p:ph type="body" idx="1"/>
+          </p:nvPr>
+        </p:nvSpPr>
+        <p:spPr/>
+        <p:txBody>
+          <a:bodyPr xmlns:a="http://schemas.openxmlformats.org/drawingml/2006/main"/>
+          <a:lstStyle xmlns:a="http://schemas.openxmlformats.org/drawingml/2006/main"/>
+          <a:p xmlns:a="http://schemas.openxmlformats.org/drawingml/2006/main">
+            <a:r>
+              <a:t>The negative-prior sideways branch produces +0.807% net per trade and exceeds the same-asset unconditional drift baseline by about 5.8 basis points. Sideways-all, sideways-positive, and trending-all all trail drift. That result falsifies the original positive-return continuation interpretation at this frozen horizon.</a:t>
+            </a:r>
+          </a:p>
+          <a:p xmlns:a="http://schemas.openxmlformats.org/drawingml/2006/main">
+            <a:r>
+              <a:t/>
+            </a:r>
+          </a:p>
+          <a:p xmlns:a="http://schemas.openxmlformats.org/drawingml/2006/main">
+            <a:r>
+              <a:t>[Sources]</a:t>
+            </a:r>
+          </a:p>
+          <a:p xmlns:a="http://schemas.openxmlformats.org/drawingml/2006/main">
+            <a:r>
+              <a:t>- C:/Users/Franc/OneDrive/Documents/Francis/Peltata Project/Time-Series-Modeling-Gen5/runs/research_workbench/operator_hypothesis_lab/return_geometry_continuation_20d_attribution_20260829/equal_sector_rule_summary.csv</a:t>
+            </a:r>
+          </a:p>
+          <a:p xmlns:a="http://schemas.openxmlformats.org/drawingml/2006/main">
+            <a:r>
+              <a:t>- C:/Users/Franc/OneDrive/Documents/Francis/Peltata Project/Time-Series-Modeling-Gen5/runs/research_workbench/operator_hypothesis_lab/return_geometry_continuation_20d_attribution_20260829/visuals/equal_sector_branch_attribution.png</a:t>
+            </a:r>
+          </a:p>
+          <a:p xmlns:a="http://schemas.openxmlformats.org/drawingml/2006/main">
+            <a:r>
+              <a:t>[/Sources]</a:t>
+            </a:r>
+          </a:p>
+        </p:txBody>
+      </p:sp>
+      <p:sp>
+        <p:nvSpPr>
+          <p:cNvPr id="4" name="Slide Number Placeholder 3"/>
+          <p:cNvSpPr>
+            <a:spLocks xmlns:a="http://schemas.openxmlformats.org/drawingml/2006/main" noGrp="1"/>
+          </p:cNvSpPr>
+          <p:nvPr>
+            <p:ph type="sldNum" idx="5"/>
+          </p:nvPr>
+        </p:nvSpPr>
+        <p:spPr/>
+        <p:txBody>
+          <a:bodyPr xmlns:a="http://schemas.openxmlformats.org/drawingml/2006/main"/>
+          <a:lstStyle xmlns:a="http://schemas.openxmlformats.org/drawingml/2006/main"/>
+          <a:p xmlns:a="http://schemas.openxmlformats.org/drawingml/2006/main"/>
+        </p:txBody>
+      </p:sp>
+    </p:spTree>
+  </p:cSld>
+  <p:clrMapOvr>
+    <a:masterClrMapping xmlns:a="http://schemas.openxmlformats.org/drawingml/2006/main"/>
+  </p:clrMapOvr>
+</p:notes>
+</file>
+
+<file path=ppt/notesSlides/notesSlide27.xml><?xml version="1.0" encoding="utf-8"?>
+<p:notes xmlns:p="http://schemas.openxmlformats.org/presentationml/2006/main">
+  <p:cSld>
+    <p:spTree>
+      <p:nvGrpSpPr>
+        <p:cNvPr id="1" name=""/>
+        <p:cNvGrpSpPr/>
+        <p:nvPr/>
+      </p:nvGrpSpPr>
+      <p:grpSpPr>
+        <a:xfrm xmlns:a="http://schemas.openxmlformats.org/drawingml/2006/main"/>
+      </p:grpSpPr>
+      <p:sp>
+        <p:nvSpPr>
+          <p:cNvPr id="2" name="Slide Image Placeholder 1"/>
+          <p:cNvSpPr>
+            <a:spLocks xmlns:a="http://schemas.openxmlformats.org/drawingml/2006/main" noGrp="1"/>
+          </p:cNvSpPr>
+          <p:nvPr>
+            <p:ph type="sldImg" idx="0"/>
+          </p:nvPr>
+        </p:nvSpPr>
+        <p:spPr/>
+      </p:sp>
+      <p:sp>
+        <p:nvSpPr>
+          <p:cNvPr id="3" name="Notes Placeholder 2"/>
+          <p:cNvSpPr>
+            <a:spLocks xmlns:a="http://schemas.openxmlformats.org/drawingml/2006/main" noGrp="1"/>
+          </p:cNvSpPr>
+          <p:nvPr>
+            <p:ph type="body" idx="1"/>
+          </p:nvPr>
+        </p:nvSpPr>
+        <p:spPr/>
+        <p:txBody>
+          <a:bodyPr xmlns:a="http://schemas.openxmlformats.org/drawingml/2006/main"/>
+          <a:lstStyle xmlns:a="http://schemas.openxmlformats.org/drawingml/2006/main"/>
+          <a:p xmlns:a="http://schemas.openxmlformats.org/drawingml/2006/main">
+            <a:r>
+              <a:t>Only sideways-negative is above drift under both primary lenses: roughly +5.8 basis points equal-sector and +3.7 basis points event-pooled. Sideways-positive is about 15 to 19 basis points worse than sideways-negative, so the result is not merely a small continuation effect hidden by weighting.</a:t>
+            </a:r>
+          </a:p>
+          <a:p xmlns:a="http://schemas.openxmlformats.org/drawingml/2006/main">
+            <a:r>
+              <a:t/>
+            </a:r>
+          </a:p>
+          <a:p xmlns:a="http://schemas.openxmlformats.org/drawingml/2006/main">
+            <a:r>
+              <a:t>[Sources]</a:t>
+            </a:r>
+          </a:p>
+          <a:p xmlns:a="http://schemas.openxmlformats.org/drawingml/2006/main">
+            <a:r>
+              <a:t>- C:/Users/Franc/OneDrive/Documents/Francis/Peltata Project/Time-Series-Modeling-Gen5/runs/research_workbench/operator_hypothesis_lab/return_geometry_continuation_20d_attribution_20260829/equal_sector_rule_summary.csv</a:t>
+            </a:r>
+          </a:p>
+          <a:p xmlns:a="http://schemas.openxmlformats.org/drawingml/2006/main">
+            <a:r>
+              <a:t>- C:/Users/Franc/OneDrive/Documents/Francis/Peltata Project/Time-Series-Modeling-Gen5/runs/research_workbench/operator_hypothesis_lab/return_geometry_continuation_20d_attribution_20260829/core_event_pooled_rule_summary.csv</a:t>
+            </a:r>
+          </a:p>
+          <a:p xmlns:a="http://schemas.openxmlformats.org/drawingml/2006/main">
+            <a:r>
+              <a:t>- C:/Users/Franc/OneDrive/Documents/Francis/Peltata Project/Time-Series-Modeling-Gen5/runs/research_workbench/operator_hypothesis_lab/return_geometry_continuation_20d_attribution_20260829/pairwise_readout.csv</a:t>
+            </a:r>
+          </a:p>
+          <a:p xmlns:a="http://schemas.openxmlformats.org/drawingml/2006/main">
+            <a:r>
+              <a:t>- C:/Users/Franc/OneDrive/Documents/Francis/Peltata Project/Time-Series-Modeling-Gen5/runs/research_workbench/operator_hypothesis_lab/return_geometry_continuation_20d_attribution_20260829/visuals/branch_excess_both_lenses.png</a:t>
+            </a:r>
+          </a:p>
+          <a:p xmlns:a="http://schemas.openxmlformats.org/drawingml/2006/main">
+            <a:r>
+              <a:t>[/Sources]</a:t>
+            </a:r>
+          </a:p>
+        </p:txBody>
+      </p:sp>
+      <p:sp>
+        <p:nvSpPr>
+          <p:cNvPr id="4" name="Slide Number Placeholder 3"/>
+          <p:cNvSpPr>
+            <a:spLocks xmlns:a="http://schemas.openxmlformats.org/drawingml/2006/main" noGrp="1"/>
+          </p:cNvSpPr>
+          <p:nvPr>
+            <p:ph type="sldNum" idx="5"/>
+          </p:nvPr>
+        </p:nvSpPr>
+        <p:spPr/>
+        <p:txBody>
+          <a:bodyPr xmlns:a="http://schemas.openxmlformats.org/drawingml/2006/main"/>
+          <a:lstStyle xmlns:a="http://schemas.openxmlformats.org/drawingml/2006/main"/>
+          <a:p xmlns:a="http://schemas.openxmlformats.org/drawingml/2006/main"/>
+        </p:txBody>
+      </p:sp>
+    </p:spTree>
+  </p:cSld>
+  <p:clrMapOvr>
+    <a:masterClrMapping xmlns:a="http://schemas.openxmlformats.org/drawingml/2006/main"/>
+  </p:clrMapOvr>
+</p:notes>
+</file>
+
+<file path=ppt/notesSlides/notesSlide28.xml><?xml version="1.0" encoding="utf-8"?>
+<p:notes xmlns:p="http://schemas.openxmlformats.org/presentationml/2006/main">
+  <p:cSld>
+    <p:spTree>
+      <p:nvGrpSpPr>
+        <p:cNvPr id="1" name=""/>
+        <p:cNvGrpSpPr/>
+        <p:nvPr/>
+      </p:nvGrpSpPr>
+      <p:grpSpPr>
+        <a:xfrm xmlns:a="http://schemas.openxmlformats.org/drawingml/2006/main"/>
+      </p:grpSpPr>
+      <p:sp>
+        <p:nvSpPr>
+          <p:cNvPr id="2" name="Slide Image Placeholder 1"/>
+          <p:cNvSpPr>
+            <a:spLocks xmlns:a="http://schemas.openxmlformats.org/drawingml/2006/main" noGrp="1"/>
+          </p:cNvSpPr>
+          <p:nvPr>
+            <p:ph type="sldImg" idx="0"/>
+          </p:nvPr>
+        </p:nvSpPr>
+        <p:spPr/>
+      </p:sp>
+      <p:sp>
+        <p:nvSpPr>
+          <p:cNvPr id="3" name="Notes Placeholder 2"/>
+          <p:cNvSpPr>
+            <a:spLocks xmlns:a="http://schemas.openxmlformats.org/drawingml/2006/main" noGrp="1"/>
+          </p:cNvSpPr>
+          <p:nvPr>
+            <p:ph type="body" idx="1"/>
+          </p:nvPr>
+        </p:nvSpPr>
+        <p:spPr/>
+        <p:txBody>
+          <a:bodyPr xmlns:a="http://schemas.openxmlformats.org/drawingml/2006/main"/>
+          <a:lstStyle xmlns:a="http://schemas.openxmlformats.org/drawingml/2006/main"/>
+          <a:p xmlns:a="http://schemas.openxmlformats.org/drawingml/2006/main">
+            <a:r>
+              <a:t>The negative-prior sideways branch has positive median excess in seven of eleven sectors: Real Estate, Materials, Information Technology, Health Care, Financials, Energy, and Consumer Staples. Four sectors remain negative, so breadth is meaningful but incomplete and does not establish an asset-agnostic edge.</a:t>
+            </a:r>
+          </a:p>
+          <a:p xmlns:a="http://schemas.openxmlformats.org/drawingml/2006/main">
+            <a:r>
+              <a:t/>
+            </a:r>
+          </a:p>
+          <a:p xmlns:a="http://schemas.openxmlformats.org/drawingml/2006/main">
+            <a:r>
+              <a:t>[Sources]</a:t>
+            </a:r>
+          </a:p>
+          <a:p xmlns:a="http://schemas.openxmlformats.org/drawingml/2006/main">
+            <a:r>
+              <a:t>- C:/Users/Franc/OneDrive/Documents/Francis/Peltata Project/Time-Series-Modeling-Gen5/runs/research_workbench/operator_hypothesis_lab/return_geometry_continuation_20d_attribution_20260829/core_sector_rule_summary.csv</a:t>
+            </a:r>
+          </a:p>
+          <a:p xmlns:a="http://schemas.openxmlformats.org/drawingml/2006/main">
+            <a:r>
+              <a:t>- C:/Users/Franc/OneDrive/Documents/Francis/Peltata Project/Time-Series-Modeling-Gen5/runs/research_workbench/operator_hypothesis_lab/return_geometry_continuation_20d_attribution_20260829/visuals/sector_branch_excess_heatmap.png</a:t>
+            </a:r>
+          </a:p>
+          <a:p xmlns:a="http://schemas.openxmlformats.org/drawingml/2006/main">
+            <a:r>
+              <a:t>[/Sources]</a:t>
+            </a:r>
+          </a:p>
+        </p:txBody>
+      </p:sp>
+      <p:sp>
+        <p:nvSpPr>
+          <p:cNvPr id="4" name="Slide Number Placeholder 3"/>
+          <p:cNvSpPr>
+            <a:spLocks xmlns:a="http://schemas.openxmlformats.org/drawingml/2006/main" noGrp="1"/>
+          </p:cNvSpPr>
+          <p:nvPr>
+            <p:ph type="sldNum" idx="5"/>
+          </p:nvPr>
+        </p:nvSpPr>
+        <p:spPr/>
+        <p:txBody>
+          <a:bodyPr xmlns:a="http://schemas.openxmlformats.org/drawingml/2006/main"/>
+          <a:lstStyle xmlns:a="http://schemas.openxmlformats.org/drawingml/2006/main"/>
+          <a:p xmlns:a="http://schemas.openxmlformats.org/drawingml/2006/main"/>
+        </p:txBody>
+      </p:sp>
+    </p:spTree>
+  </p:cSld>
+  <p:clrMapOvr>
+    <a:masterClrMapping xmlns:a="http://schemas.openxmlformats.org/drawingml/2006/main"/>
+  </p:clrMapOvr>
+</p:notes>
+</file>
+
+<file path=ppt/notesSlides/notesSlide29.xml><?xml version="1.0" encoding="utf-8"?>
+<p:notes xmlns:p="http://schemas.openxmlformats.org/presentationml/2006/main">
+  <p:cSld>
+    <p:spTree>
+      <p:nvGrpSpPr>
+        <p:cNvPr id="1" name=""/>
+        <p:cNvGrpSpPr/>
+        <p:nvPr/>
+      </p:nvGrpSpPr>
+      <p:grpSpPr>
+        <a:xfrm xmlns:a="http://schemas.openxmlformats.org/drawingml/2006/main"/>
+      </p:grpSpPr>
+      <p:sp>
+        <p:nvSpPr>
+          <p:cNvPr id="2" name="Slide Image Placeholder 1"/>
+          <p:cNvSpPr>
+            <a:spLocks xmlns:a="http://schemas.openxmlformats.org/drawingml/2006/main" noGrp="1"/>
+          </p:cNvSpPr>
+          <p:nvPr>
+            <p:ph type="sldImg" idx="0"/>
+          </p:nvPr>
+        </p:nvSpPr>
+        <p:spPr/>
+      </p:sp>
+      <p:sp>
+        <p:nvSpPr>
+          <p:cNvPr id="3" name="Notes Placeholder 2"/>
+          <p:cNvSpPr>
+            <a:spLocks xmlns:a="http://schemas.openxmlformats.org/drawingml/2006/main" noGrp="1"/>
+          </p:cNvSpPr>
+          <p:nvPr>
+            <p:ph type="body" idx="1"/>
+          </p:nvPr>
+        </p:nvSpPr>
+        <p:spPr/>
+        <p:txBody>
+          <a:bodyPr xmlns:a="http://schemas.openxmlformats.org/drawingml/2006/main"/>
+          <a:lstStyle xmlns:a="http://schemas.openxmlformats.org/drawingml/2006/main"/>
+          <a:p xmlns:a="http://schemas.openxmlformats.org/drawingml/2006/main">
+            <a:r>
+              <a:t>The core event-pooled negative-prior path finishes highest. Much of its final separation appears late in the hold, including a visible last-session step. This is a useful fragility cue: the average result may depend on slow recovery or terminal-period behavior rather than a smooth, immediately deployable rebound.</a:t>
+            </a:r>
+          </a:p>
+          <a:p xmlns:a="http://schemas.openxmlformats.org/drawingml/2006/main">
+            <a:r>
+              <a:t/>
+            </a:r>
+          </a:p>
+          <a:p xmlns:a="http://schemas.openxmlformats.org/drawingml/2006/main">
+            <a:r>
+              <a:t>[Sources]</a:t>
+            </a:r>
+          </a:p>
+          <a:p xmlns:a="http://schemas.openxmlformats.org/drawingml/2006/main">
+            <a:r>
+              <a:t>- C:/Users/Franc/OneDrive/Documents/Francis/Peltata Project/Time-Series-Modeling-Gen5/runs/research_workbench/operator_hypothesis_lab/return_geometry_continuation_20d_attribution_20260829/trade_path_summary.csv</a:t>
+            </a:r>
+          </a:p>
+          <a:p xmlns:a="http://schemas.openxmlformats.org/drawingml/2006/main">
+            <a:r>
+              <a:t>- C:/Users/Franc/OneDrive/Documents/Francis/Peltata Project/Time-Series-Modeling-Gen5/runs/research_workbench/operator_hypothesis_lab/return_geometry_continuation_20d_attribution_20260829/visuals/branch_trade_paths.png</a:t>
+            </a:r>
+          </a:p>
+          <a:p xmlns:a="http://schemas.openxmlformats.org/drawingml/2006/main">
+            <a:r>
+              <a:t>[/Sources]</a:t>
+            </a:r>
+          </a:p>
+        </p:txBody>
+      </p:sp>
+      <p:sp>
+        <p:nvSpPr>
+          <p:cNvPr id="4" name="Slide Number Placeholder 3"/>
+          <p:cNvSpPr>
+            <a:spLocks xmlns:a="http://schemas.openxmlformats.org/drawingml/2006/main" noGrp="1"/>
+          </p:cNvSpPr>
+          <p:nvPr>
+            <p:ph type="sldNum" idx="5"/>
+          </p:nvPr>
+        </p:nvSpPr>
+        <p:spPr/>
+        <p:txBody>
+          <a:bodyPr xmlns:a="http://schemas.openxmlformats.org/drawingml/2006/main"/>
+          <a:lstStyle xmlns:a="http://schemas.openxmlformats.org/drawingml/2006/main"/>
+          <a:p xmlns:a="http://schemas.openxmlformats.org/drawingml/2006/main"/>
+        </p:txBody>
+      </p:sp>
+    </p:spTree>
+  </p:cSld>
+  <p:clrMapOvr>
+    <a:masterClrMapping xmlns:a="http://schemas.openxmlformats.org/drawingml/2006/main"/>
+  </p:clrMapOvr>
+</p:notes>
+</file>
+
 <file path=ppt/notesSlides/notesSlide3.xml><?xml version="1.0" encoding="utf-8"?>
 <p:notes xmlns:p="http://schemas.openxmlformats.org/presentationml/2006/main">
   <p:cSld>
@@ -2025,6 +2613,211 @@
           <a:p xmlns:a="http://schemas.openxmlformats.org/drawingml/2006/main">
             <a:r>
               <a:t>- runs/research_workbench/operator_hypothesis_lab/tsla_cumulative_return_horizon_grid_20260825/visuals/tsla_cumulative_return_pearson_heatmap.png</a:t>
+            </a:r>
+          </a:p>
+          <a:p xmlns:a="http://schemas.openxmlformats.org/drawingml/2006/main">
+            <a:r>
+              <a:t>[/Sources]</a:t>
+            </a:r>
+          </a:p>
+        </p:txBody>
+      </p:sp>
+      <p:sp>
+        <p:nvSpPr>
+          <p:cNvPr id="4" name="Slide Number Placeholder 3"/>
+          <p:cNvSpPr>
+            <a:spLocks xmlns:a="http://schemas.openxmlformats.org/drawingml/2006/main" noGrp="1"/>
+          </p:cNvSpPr>
+          <p:nvPr>
+            <p:ph type="sldNum" idx="5"/>
+          </p:nvPr>
+        </p:nvSpPr>
+        <p:spPr/>
+        <p:txBody>
+          <a:bodyPr xmlns:a="http://schemas.openxmlformats.org/drawingml/2006/main"/>
+          <a:lstStyle xmlns:a="http://schemas.openxmlformats.org/drawingml/2006/main"/>
+          <a:p xmlns:a="http://schemas.openxmlformats.org/drawingml/2006/main"/>
+        </p:txBody>
+      </p:sp>
+    </p:spTree>
+  </p:cSld>
+  <p:clrMapOvr>
+    <a:masterClrMapping xmlns:a="http://schemas.openxmlformats.org/drawingml/2006/main"/>
+  </p:clrMapOvr>
+</p:notes>
+</file>
+
+<file path=ppt/notesSlides/notesSlide30.xml><?xml version="1.0" encoding="utf-8"?>
+<p:notes xmlns:p="http://schemas.openxmlformats.org/presentationml/2006/main">
+  <p:cSld>
+    <p:spTree>
+      <p:nvGrpSpPr>
+        <p:cNvPr id="1" name=""/>
+        <p:cNvGrpSpPr/>
+        <p:nvPr/>
+      </p:nvGrpSpPr>
+      <p:grpSpPr>
+        <a:xfrm xmlns:a="http://schemas.openxmlformats.org/drawingml/2006/main"/>
+      </p:grpSpPr>
+      <p:sp>
+        <p:nvSpPr>
+          <p:cNvPr id="2" name="Slide Image Placeholder 1"/>
+          <p:cNvSpPr>
+            <a:spLocks xmlns:a="http://schemas.openxmlformats.org/drawingml/2006/main" noGrp="1"/>
+          </p:cNvSpPr>
+          <p:nvPr>
+            <p:ph type="sldImg" idx="0"/>
+          </p:nvPr>
+        </p:nvSpPr>
+        <p:spPr/>
+      </p:sp>
+      <p:sp>
+        <p:nvSpPr>
+          <p:cNvPr id="3" name="Notes Placeholder 2"/>
+          <p:cNvSpPr>
+            <a:spLocks xmlns:a="http://schemas.openxmlformats.org/drawingml/2006/main" noGrp="1"/>
+          </p:cNvSpPr>
+          <p:nvPr>
+            <p:ph type="body" idx="1"/>
+          </p:nvPr>
+        </p:nvSpPr>
+        <p:spPr/>
+        <p:txBody>
+          <a:bodyPr xmlns:a="http://schemas.openxmlformats.org/drawingml/2006/main"/>
+          <a:lstStyle xmlns:a="http://schemas.openxmlformats.org/drawingml/2006/main"/>
+          <a:p xmlns:a="http://schemas.openxmlformats.org/drawingml/2006/main">
+            <a:r>
+              <a:t>The first eligible positive- and negative-prior events for TSLA and AMD are shown without outcome selection. The examples contain both strong and weak outcomes. Their purpose is to make timing and state assignment concrete; they do not override the cross-asset aggregate.</a:t>
+            </a:r>
+          </a:p>
+          <a:p xmlns:a="http://schemas.openxmlformats.org/drawingml/2006/main">
+            <a:r>
+              <a:t/>
+            </a:r>
+          </a:p>
+          <a:p xmlns:a="http://schemas.openxmlformats.org/drawingml/2006/main">
+            <a:r>
+              <a:t>[Sources]</a:t>
+            </a:r>
+          </a:p>
+          <a:p xmlns:a="http://schemas.openxmlformats.org/drawingml/2006/main">
+            <a:r>
+              <a:t>- C:/Users/Franc/OneDrive/Documents/Francis/Peltata Project/Time-Series-Modeling-Gen5/runs/research_workbench/operator_hypothesis_lab/return_geometry_continuation_20d_attribution_20260829/trade_ledger.csv</a:t>
+            </a:r>
+          </a:p>
+          <a:p xmlns:a="http://schemas.openxmlformats.org/drawingml/2006/main">
+            <a:r>
+              <a:t>- C:/Users/Franc/OneDrive/Documents/Francis/Peltata Project/Time-Series-Modeling-Gen5/runs/research_workbench/operator_hypothesis_lab/return_geometry_continuation_20d_attribution_20260829/visuals/representative_sign_branch_trade_tapes.png</a:t>
+            </a:r>
+          </a:p>
+          <a:p xmlns:a="http://schemas.openxmlformats.org/drawingml/2006/main">
+            <a:r>
+              <a:t>[/Sources]</a:t>
+            </a:r>
+          </a:p>
+        </p:txBody>
+      </p:sp>
+      <p:sp>
+        <p:nvSpPr>
+          <p:cNvPr id="4" name="Slide Number Placeholder 3"/>
+          <p:cNvSpPr>
+            <a:spLocks xmlns:a="http://schemas.openxmlformats.org/drawingml/2006/main" noGrp="1"/>
+          </p:cNvSpPr>
+          <p:nvPr>
+            <p:ph type="sldNum" idx="5"/>
+          </p:nvPr>
+        </p:nvSpPr>
+        <p:spPr/>
+        <p:txBody>
+          <a:bodyPr xmlns:a="http://schemas.openxmlformats.org/drawingml/2006/main"/>
+          <a:lstStyle xmlns:a="http://schemas.openxmlformats.org/drawingml/2006/main"/>
+          <a:p xmlns:a="http://schemas.openxmlformats.org/drawingml/2006/main"/>
+        </p:txBody>
+      </p:sp>
+    </p:spTree>
+  </p:cSld>
+  <p:clrMapOvr>
+    <a:masterClrMapping xmlns:a="http://schemas.openxmlformats.org/drawingml/2006/main"/>
+  </p:clrMapOvr>
+</p:notes>
+</file>
+
+<file path=ppt/notesSlides/notesSlide31.xml><?xml version="1.0" encoding="utf-8"?>
+<p:notes xmlns:p="http://schemas.openxmlformats.org/presentationml/2006/main">
+  <p:cSld>
+    <p:spTree>
+      <p:nvGrpSpPr>
+        <p:cNvPr id="1" name=""/>
+        <p:cNvGrpSpPr/>
+        <p:nvPr/>
+      </p:nvGrpSpPr>
+      <p:grpSpPr>
+        <a:xfrm xmlns:a="http://schemas.openxmlformats.org/drawingml/2006/main"/>
+      </p:grpSpPr>
+      <p:sp>
+        <p:nvSpPr>
+          <p:cNvPr id="2" name="Slide Image Placeholder 1"/>
+          <p:cNvSpPr>
+            <a:spLocks xmlns:a="http://schemas.openxmlformats.org/drawingml/2006/main" noGrp="1"/>
+          </p:cNvSpPr>
+          <p:nvPr>
+            <p:ph type="sldImg" idx="0"/>
+          </p:nvPr>
+        </p:nvSpPr>
+        <p:spPr/>
+      </p:sp>
+      <p:sp>
+        <p:nvSpPr>
+          <p:cNvPr id="3" name="Notes Placeholder 2"/>
+          <p:cNvSpPr>
+            <a:spLocks xmlns:a="http://schemas.openxmlformats.org/drawingml/2006/main" noGrp="1"/>
+          </p:cNvSpPr>
+          <p:nvPr>
+            <p:ph type="body" idx="1"/>
+          </p:nvPr>
+        </p:nvSpPr>
+        <p:spPr/>
+        <p:txBody>
+          <a:bodyPr xmlns:a="http://schemas.openxmlformats.org/drawingml/2006/main"/>
+          <a:lstStyle xmlns:a="http://schemas.openxmlformats.org/drawingml/2006/main"/>
+          <a:p xmlns:a="http://schemas.openxmlformats.org/drawingml/2006/main">
+            <a:r>
+              <a:t>This slice changes the interpretation rather than rescuing the original hypothesis. Positive prior return does not explain the 20-session sideways-state result. Negative prior return does, modestly, under both primary weighting lenses and across seven sector medians. Because the horizon was learned from the same TRAIN surface, the rebound branch remains a development lead only and should receive a separately predeclared rule before any sealed-data test.</a:t>
+            </a:r>
+          </a:p>
+          <a:p xmlns:a="http://schemas.openxmlformats.org/drawingml/2006/main">
+            <a:r>
+              <a:t/>
+            </a:r>
+          </a:p>
+          <a:p xmlns:a="http://schemas.openxmlformats.org/drawingml/2006/main">
+            <a:r>
+              <a:t>[Sources]</a:t>
+            </a:r>
+          </a:p>
+          <a:p xmlns:a="http://schemas.openxmlformats.org/drawingml/2006/main">
+            <a:r>
+              <a:t>- C:/Users/Franc/OneDrive/Documents/Francis/Peltata Project/Time-Series-Modeling-Gen5/runs/research_workbench/operator_hypothesis_lab/return_geometry_continuation_20d_attribution_20260829/report.md</a:t>
+            </a:r>
+          </a:p>
+          <a:p xmlns:a="http://schemas.openxmlformats.org/drawingml/2006/main">
+            <a:r>
+              <a:t>- C:/Users/Franc/OneDrive/Documents/Francis/Peltata Project/Time-Series-Modeling-Gen5/runs/research_workbench/operator_hypothesis_lab/return_geometry_continuation_20d_attribution_20260829/equal_sector_rule_summary.csv</a:t>
+            </a:r>
+          </a:p>
+          <a:p xmlns:a="http://schemas.openxmlformats.org/drawingml/2006/main">
+            <a:r>
+              <a:t>- C:/Users/Franc/OneDrive/Documents/Francis/Peltata Project/Time-Series-Modeling-Gen5/runs/research_workbench/operator_hypothesis_lab/return_geometry_continuation_20d_attribution_20260829/core_event_pooled_rule_summary.csv</a:t>
+            </a:r>
+          </a:p>
+          <a:p xmlns:a="http://schemas.openxmlformats.org/drawingml/2006/main">
+            <a:r>
+              <a:t>- C:/Users/Franc/OneDrive/Documents/Francis/Peltata Project/Time-Series-Modeling-Gen5/runs/research_workbench/operator_hypothesis_lab/return_geometry_continuation_20d_attribution_20260829/pairwise_readout.csv</a:t>
+            </a:r>
+          </a:p>
+          <a:p xmlns:a="http://schemas.openxmlformats.org/drawingml/2006/main">
+            <a:r>
+              <a:t>- operator_hypothesis_lab/docs/RETURN_GEOMETRY_DAILY_CONTINUATION_MICROSCOPE_2018_2023.md</a:t>
             </a:r>
           </a:p>
           <a:p xmlns:a="http://schemas.openxmlformats.org/drawingml/2006/main">
@@ -2672,7 +3465,7 @@
   </p:cSld>
   <p:clrMap bg1="lt1" tx1="dk1" bg2="lt2" tx2="dk2" accent1="accent1" accent2="accent2" accent3="accent3" accent4="accent4" accent5="accent5" accent6="accent6" hlink="hlink" folHlink="folHlink"/>
   <p:sldLayoutIdLst>
-    <p:sldLayoutId xmlns:r="http://schemas.openxmlformats.org/officeDocument/2006/relationships" id="2147483649" r:id="R61c7f835a86d478b"/>
+    <p:sldLayoutId xmlns:r="http://schemas.openxmlformats.org/officeDocument/2006/relationships" id="2147483649" r:id="Rf3e30d034e1748b5"/>
   </p:sldLayoutIdLst>
   <p:txStyles>
     <p:titleStyle>
@@ -4130,7 +4923,7 @@
           <p:nvPr/>
         </p:nvPicPr>
         <p:blipFill>
-          <a:blip xmlns:r="http://schemas.openxmlformats.org/officeDocument/2006/relationships" xmlns:a="http://schemas.openxmlformats.org/drawingml/2006/main" r:embed="R9ec3a5842a9d4d03"/>
+          <a:blip xmlns:r="http://schemas.openxmlformats.org/officeDocument/2006/relationships" xmlns:a="http://schemas.openxmlformats.org/drawingml/2006/main" r:embed="R0a21a03d0be648e1"/>
           <a:stretch xmlns:a="http://schemas.openxmlformats.org/drawingml/2006/main"/>
         </p:blipFill>
         <p:spPr>
@@ -4450,7 +5243,7 @@
           <p:nvPr/>
         </p:nvPicPr>
         <p:blipFill>
-          <a:blip xmlns:r="http://schemas.openxmlformats.org/officeDocument/2006/relationships" xmlns:a="http://schemas.openxmlformats.org/drawingml/2006/main" r:embed="Rdf2d6d453acd4226"/>
+          <a:blip xmlns:r="http://schemas.openxmlformats.org/officeDocument/2006/relationships" xmlns:a="http://schemas.openxmlformats.org/drawingml/2006/main" r:embed="R67b2b64265e24778"/>
           <a:stretch xmlns:a="http://schemas.openxmlformats.org/drawingml/2006/main"/>
         </p:blipFill>
         <p:spPr>
@@ -4770,7 +5563,7 @@
           <p:nvPr/>
         </p:nvPicPr>
         <p:blipFill>
-          <a:blip xmlns:r="http://schemas.openxmlformats.org/officeDocument/2006/relationships" xmlns:a="http://schemas.openxmlformats.org/drawingml/2006/main" r:embed="R090dedc108d9446a"/>
+          <a:blip xmlns:r="http://schemas.openxmlformats.org/officeDocument/2006/relationships" xmlns:a="http://schemas.openxmlformats.org/drawingml/2006/main" r:embed="R6580259a33114d61"/>
           <a:stretch xmlns:a="http://schemas.openxmlformats.org/drawingml/2006/main"/>
         </p:blipFill>
         <p:spPr>
@@ -5090,7 +5883,7 @@
           <p:nvPr/>
         </p:nvPicPr>
         <p:blipFill>
-          <a:blip xmlns:r="http://schemas.openxmlformats.org/officeDocument/2006/relationships" xmlns:a="http://schemas.openxmlformats.org/drawingml/2006/main" r:embed="Rfff5e28198364a7c"/>
+          <a:blip xmlns:r="http://schemas.openxmlformats.org/officeDocument/2006/relationships" xmlns:a="http://schemas.openxmlformats.org/drawingml/2006/main" r:embed="Rc4298969f7f34a4b"/>
           <a:stretch xmlns:a="http://schemas.openxmlformats.org/drawingml/2006/main"/>
         </p:blipFill>
         <p:spPr>
@@ -8083,7 +8876,7 @@
           <p:nvPr/>
         </p:nvPicPr>
         <p:blipFill>
-          <a:blip xmlns:r="http://schemas.openxmlformats.org/officeDocument/2006/relationships" xmlns:a="http://schemas.openxmlformats.org/drawingml/2006/main" r:embed="Rf85cdb41c2c8422e"/>
+          <a:blip xmlns:r="http://schemas.openxmlformats.org/officeDocument/2006/relationships" xmlns:a="http://schemas.openxmlformats.org/drawingml/2006/main" r:embed="R7a2f979c968d4f14"/>
           <a:stretch xmlns:a="http://schemas.openxmlformats.org/drawingml/2006/main"/>
         </p:blipFill>
         <p:spPr>
@@ -8403,7 +9196,7 @@
           <p:nvPr/>
         </p:nvPicPr>
         <p:blipFill>
-          <a:blip xmlns:r="http://schemas.openxmlformats.org/officeDocument/2006/relationships" xmlns:a="http://schemas.openxmlformats.org/drawingml/2006/main" r:embed="R58247bbb8bb24d13"/>
+          <a:blip xmlns:r="http://schemas.openxmlformats.org/officeDocument/2006/relationships" xmlns:a="http://schemas.openxmlformats.org/drawingml/2006/main" r:embed="R523cb74bffe94ca7"/>
           <a:stretch xmlns:a="http://schemas.openxmlformats.org/drawingml/2006/main"/>
         </p:blipFill>
         <p:spPr>
@@ -9901,7 +10694,7 @@
           <p:nvPr/>
         </p:nvPicPr>
         <p:blipFill>
-          <a:blip xmlns:r="http://schemas.openxmlformats.org/officeDocument/2006/relationships" xmlns:a="http://schemas.openxmlformats.org/drawingml/2006/main" r:embed="Rd179ea5a9cc94e43"/>
+          <a:blip xmlns:r="http://schemas.openxmlformats.org/officeDocument/2006/relationships" xmlns:a="http://schemas.openxmlformats.org/drawingml/2006/main" r:embed="R1dde322f58194c34"/>
           <a:stretch xmlns:a="http://schemas.openxmlformats.org/drawingml/2006/main"/>
         </p:blipFill>
         <p:spPr>
@@ -10221,7 +11014,7 @@
           <p:nvPr/>
         </p:nvPicPr>
         <p:blipFill>
-          <a:blip xmlns:r="http://schemas.openxmlformats.org/officeDocument/2006/relationships" xmlns:a="http://schemas.openxmlformats.org/drawingml/2006/main" r:embed="Re87c9881ea6a4b5d"/>
+          <a:blip xmlns:r="http://schemas.openxmlformats.org/officeDocument/2006/relationships" xmlns:a="http://schemas.openxmlformats.org/drawingml/2006/main" r:embed="R8fc327b28ecd4f09"/>
           <a:stretch xmlns:a="http://schemas.openxmlformats.org/drawingml/2006/main"/>
         </p:blipFill>
         <p:spPr>
@@ -10541,7 +11334,7 @@
           <p:nvPr/>
         </p:nvPicPr>
         <p:blipFill>
-          <a:blip xmlns:r="http://schemas.openxmlformats.org/officeDocument/2006/relationships" xmlns:a="http://schemas.openxmlformats.org/drawingml/2006/main" r:embed="R4aaf75a5de5d4f03"/>
+          <a:blip xmlns:r="http://schemas.openxmlformats.org/officeDocument/2006/relationships" xmlns:a="http://schemas.openxmlformats.org/drawingml/2006/main" r:embed="R299baf737b95430c"/>
           <a:stretch xmlns:a="http://schemas.openxmlformats.org/drawingml/2006/main"/>
         </p:blipFill>
         <p:spPr>
@@ -11742,6 +12535,2781 @@
 </p:sld>
 </file>
 
+<file path=ppt/slides/slide24.xml><?xml version="1.0" encoding="utf-8"?>
+<p:sld xmlns:p="http://schemas.openxmlformats.org/presentationml/2006/main">
+  <p:cSld>
+    <p:bg>
+      <p:bgPr>
+        <a:solidFill xmlns:a="http://schemas.openxmlformats.org/drawingml/2006/main">
+          <a:srgbClr val="FFFFFF"/>
+        </a:solidFill>
+      </p:bgPr>
+    </p:bg>
+    <p:spTree>
+      <p:nvGrpSpPr>
+        <p:cNvPr id="1" name=""/>
+        <p:cNvGrpSpPr/>
+        <p:nvPr/>
+      </p:nvGrpSpPr>
+      <p:grpSpPr>
+        <a:xfrm xmlns:a="http://schemas.openxmlformats.org/drawingml/2006/main"/>
+      </p:grpSpPr>
+      <p:sp>
+        <p:nvSpPr>
+          <p:cNvPr id="7" name="">
+            <a:extLst xmlns:a="http://schemas.openxmlformats.org/drawingml/2006/main">
+              <a:ext uri="{FF2B5EF4-FFF2-40B4-BE49-F238E27FC236}">
+                <a16:creationId xmlns:a16="http://schemas.microsoft.com/office/drawing/2014/main" id="{DB12B881-2D87-4470-A9E2-CA40D710634E}"/>
+              </a:ext>
+            </a:extLst>
+          </p:cNvPr>
+          <p:cNvSpPr>
+            <a:spLocks xmlns:a="http://schemas.openxmlformats.org/drawingml/2006/main" noGrp="1"/>
+          </p:cNvSpPr>
+          <p:nvPr/>
+        </p:nvSpPr>
+        <p:spPr>
+          <a:xfrm xmlns:a="http://schemas.openxmlformats.org/drawingml/2006/main">
+            <a:off x="457200" y="400050"/>
+            <a:ext cx="4000500" cy="266700"/>
+          </a:xfrm>
+          <a:prstGeom xmlns:a="http://schemas.openxmlformats.org/drawingml/2006/main" prst="rect">
+            <a:avLst/>
+          </a:prstGeom>
+          <a:noFill xmlns:a="http://schemas.openxmlformats.org/drawingml/2006/main"/>
+          <a:ln xmlns:a="http://schemas.openxmlformats.org/drawingml/2006/main" w="0">
+            <a:noFill/>
+            <a:prstDash val="solid"/>
+          </a:ln>
+        </p:spPr>
+        <p:txBody>
+          <a:bodyPr xmlns:a="http://schemas.openxmlformats.org/drawingml/2006/main"/>
+          <a:lstStyle xmlns:a="http://schemas.openxmlformats.org/drawingml/2006/main"/>
+          <a:p xmlns:a="http://schemas.openxmlformats.org/drawingml/2006/main">
+            <a:pPr>
+              <a:buNone/>
+              <a:defRPr sz="1350" b="1">
+                <a:solidFill>
+                  <a:srgbClr val="E45756"/>
+                </a:solidFill>
+              </a:defRPr>
+            </a:pPr>
+            <a:r>
+              <a:rPr sz="1350" b="1">
+                <a:solidFill>
+                  <a:srgbClr val="E45756"/>
+                </a:solidFill>
+              </a:rPr>
+              <a:t>SIGN ATTRIBUTION</a:t>
+            </a:r>
+          </a:p>
+        </p:txBody>
+      </p:sp>
+      <p:sp>
+        <p:nvSpPr>
+          <p:cNvPr id="2" name="">
+            <a:extLst xmlns:a="http://schemas.openxmlformats.org/drawingml/2006/main">
+              <a:ext uri="{FF2B5EF4-FFF2-40B4-BE49-F238E27FC236}">
+                <a16:creationId xmlns:a16="http://schemas.microsoft.com/office/drawing/2014/main" id="{0BB2094F-C042-49AB-BE8C-0ECFD22457DD}"/>
+              </a:ext>
+            </a:extLst>
+          </p:cNvPr>
+          <p:cNvSpPr>
+            <a:spLocks xmlns:a="http://schemas.openxmlformats.org/drawingml/2006/main" noGrp="1"/>
+          </p:cNvSpPr>
+          <p:nvPr/>
+        </p:nvSpPr>
+        <p:spPr>
+          <a:xfrm xmlns:a="http://schemas.openxmlformats.org/drawingml/2006/main">
+            <a:off x="457200" y="1562100"/>
+            <a:ext cx="10763250" cy="1809750"/>
+          </a:xfrm>
+          <a:prstGeom xmlns:a="http://schemas.openxmlformats.org/drawingml/2006/main" prst="rect">
+            <a:avLst/>
+          </a:prstGeom>
+          <a:noFill xmlns:a="http://schemas.openxmlformats.org/drawingml/2006/main"/>
+          <a:ln xmlns:a="http://schemas.openxmlformats.org/drawingml/2006/main" w="0">
+            <a:noFill/>
+            <a:prstDash val="solid"/>
+          </a:ln>
+        </p:spPr>
+        <p:txBody>
+          <a:bodyPr xmlns:a="http://schemas.openxmlformats.org/drawingml/2006/main"/>
+          <a:lstStyle xmlns:a="http://schemas.openxmlformats.org/drawingml/2006/main"/>
+          <a:p xmlns:a="http://schemas.openxmlformats.org/drawingml/2006/main">
+            <a:pPr>
+              <a:buNone/>
+              <a:defRPr sz="4350" b="1">
+                <a:solidFill>
+                  <a:srgbClr val="111827"/>
+                </a:solidFill>
+              </a:defRPr>
+            </a:pPr>
+            <a:r>
+              <a:rPr sz="4350" b="1">
+                <a:solidFill>
+                  <a:srgbClr val="111827"/>
+                </a:solidFill>
+              </a:rPr>
+              <a:t>The 20-session clue changes identity</a:t>
+            </a:r>
+          </a:p>
+        </p:txBody>
+      </p:sp>
+      <p:sp>
+        <p:nvSpPr>
+          <p:cNvPr id="3" name="">
+            <a:extLst xmlns:a="http://schemas.openxmlformats.org/drawingml/2006/main">
+              <a:ext uri="{FF2B5EF4-FFF2-40B4-BE49-F238E27FC236}">
+                <a16:creationId xmlns:a16="http://schemas.microsoft.com/office/drawing/2014/main" id="{D8394FB8-5765-4318-8A56-6DACECFE912E}"/>
+              </a:ext>
+            </a:extLst>
+          </p:cNvPr>
+          <p:cNvSpPr>
+            <a:spLocks xmlns:a="http://schemas.openxmlformats.org/drawingml/2006/main" noGrp="1"/>
+          </p:cNvSpPr>
+          <p:nvPr/>
+        </p:nvSpPr>
+        <p:spPr>
+          <a:xfrm xmlns:a="http://schemas.openxmlformats.org/drawingml/2006/main">
+            <a:off x="457200" y="3714750"/>
+            <a:ext cx="1257300" cy="76200"/>
+          </a:xfrm>
+          <a:prstGeom xmlns:a="http://schemas.openxmlformats.org/drawingml/2006/main" prst="rect">
+            <a:avLst/>
+          </a:prstGeom>
+          <a:solidFill xmlns:a="http://schemas.openxmlformats.org/drawingml/2006/main">
+            <a:srgbClr val="E45756"/>
+          </a:solidFill>
+          <a:ln xmlns:a="http://schemas.openxmlformats.org/drawingml/2006/main" w="9525">
+            <a:solidFill>
+              <a:srgbClr val="E45756"/>
+            </a:solidFill>
+            <a:prstDash val="solid"/>
+          </a:ln>
+        </p:spPr>
+      </p:sp>
+      <p:sp>
+        <p:nvSpPr>
+          <p:cNvPr id="4" name="">
+            <a:extLst xmlns:a="http://schemas.openxmlformats.org/drawingml/2006/main">
+              <a:ext uri="{FF2B5EF4-FFF2-40B4-BE49-F238E27FC236}">
+                <a16:creationId xmlns:a16="http://schemas.microsoft.com/office/drawing/2014/main" id="{67E3D676-3E4E-40CF-9FFA-FDD3E7F4C6B2}"/>
+              </a:ext>
+            </a:extLst>
+          </p:cNvPr>
+          <p:cNvSpPr>
+            <a:spLocks xmlns:a="http://schemas.openxmlformats.org/drawingml/2006/main" noGrp="1"/>
+          </p:cNvSpPr>
+          <p:nvPr/>
+        </p:nvSpPr>
+        <p:spPr>
+          <a:xfrm xmlns:a="http://schemas.openxmlformats.org/drawingml/2006/main">
+            <a:off x="457200" y="4171950"/>
+            <a:ext cx="9906000" cy="685800"/>
+          </a:xfrm>
+          <a:prstGeom xmlns:a="http://schemas.openxmlformats.org/drawingml/2006/main" prst="rect">
+            <a:avLst/>
+          </a:prstGeom>
+          <a:noFill xmlns:a="http://schemas.openxmlformats.org/drawingml/2006/main"/>
+          <a:ln xmlns:a="http://schemas.openxmlformats.org/drawingml/2006/main" w="0">
+            <a:noFill/>
+            <a:prstDash val="solid"/>
+          </a:ln>
+        </p:spPr>
+        <p:txBody>
+          <a:bodyPr xmlns:a="http://schemas.openxmlformats.org/drawingml/2006/main"/>
+          <a:lstStyle xmlns:a="http://schemas.openxmlformats.org/drawingml/2006/main"/>
+          <a:p xmlns:a="http://schemas.openxmlformats.org/drawingml/2006/main">
+            <a:pPr>
+              <a:buNone/>
+              <a:defRPr sz="2025" b="0">
+                <a:solidFill>
+                  <a:srgbClr val="667384"/>
+                </a:solidFill>
+              </a:defRPr>
+            </a:pPr>
+            <a:r>
+              <a:rPr sz="2025" b="0">
+                <a:solidFill>
+                  <a:srgbClr val="667384"/>
+                </a:solidFill>
+              </a:rPr>
+              <a:t>One frozen horizon separates continuation from rebound</a:t>
+            </a:r>
+          </a:p>
+        </p:txBody>
+      </p:sp>
+      <p:sp>
+        <p:nvSpPr>
+          <p:cNvPr id="5" name="">
+            <a:extLst xmlns:a="http://schemas.openxmlformats.org/drawingml/2006/main">
+              <a:ext uri="{FF2B5EF4-FFF2-40B4-BE49-F238E27FC236}">
+                <a16:creationId xmlns:a16="http://schemas.microsoft.com/office/drawing/2014/main" id="{AF79BB13-9AEC-4C77-9A8C-3203F83002E1}"/>
+              </a:ext>
+            </a:extLst>
+          </p:cNvPr>
+          <p:cNvSpPr>
+            <a:spLocks xmlns:a="http://schemas.openxmlformats.org/drawingml/2006/main" noGrp="1"/>
+          </p:cNvSpPr>
+          <p:nvPr/>
+        </p:nvSpPr>
+        <p:spPr>
+          <a:xfrm xmlns:a="http://schemas.openxmlformats.org/drawingml/2006/main">
+            <a:off x="457200" y="5429250"/>
+            <a:ext cx="10477500" cy="609600"/>
+          </a:xfrm>
+          <a:prstGeom xmlns:a="http://schemas.openxmlformats.org/drawingml/2006/main" prst="rect">
+            <a:avLst/>
+          </a:prstGeom>
+          <a:noFill xmlns:a="http://schemas.openxmlformats.org/drawingml/2006/main"/>
+          <a:ln xmlns:a="http://schemas.openxmlformats.org/drawingml/2006/main" w="0">
+            <a:noFill/>
+            <a:prstDash val="solid"/>
+          </a:ln>
+        </p:spPr>
+        <p:txBody>
+          <a:bodyPr xmlns:a="http://schemas.openxmlformats.org/drawingml/2006/main"/>
+          <a:lstStyle xmlns:a="http://schemas.openxmlformats.org/drawingml/2006/main"/>
+          <a:p xmlns:a="http://schemas.openxmlformats.org/drawingml/2006/main">
+            <a:pPr>
+              <a:buNone/>
+              <a:defRPr sz="1575" b="0">
+                <a:solidFill>
+                  <a:srgbClr val="667384"/>
+                </a:solidFill>
+              </a:defRPr>
+            </a:pPr>
+            <a:r>
+              <a:rPr sz="1575" b="0">
+                <a:solidFill>
+                  <a:srgbClr val="667384"/>
+                </a:solidFill>
+              </a:rPr>
+              <a:t>Sideways all • sideways +R20 • sideways −R20 • trending all • drift</a:t>
+            </a:r>
+          </a:p>
+        </p:txBody>
+      </p:sp>
+      <p:sp>
+        <p:nvSpPr>
+          <p:cNvPr id="6" name="">
+            <a:extLst xmlns:a="http://schemas.openxmlformats.org/drawingml/2006/main">
+              <a:ext uri="{FF2B5EF4-FFF2-40B4-BE49-F238E27FC236}">
+                <a16:creationId xmlns:a16="http://schemas.microsoft.com/office/drawing/2014/main" id="{AD589277-BA8D-465E-8FE0-58FC0F7326BE}"/>
+              </a:ext>
+            </a:extLst>
+          </p:cNvPr>
+          <p:cNvSpPr>
+            <a:spLocks xmlns:a="http://schemas.openxmlformats.org/drawingml/2006/main" noGrp="1"/>
+          </p:cNvSpPr>
+          <p:nvPr/>
+        </p:nvSpPr>
+        <p:spPr>
+          <a:xfrm xmlns:a="http://schemas.openxmlformats.org/drawingml/2006/main">
+            <a:off x="11239500" y="6496050"/>
+            <a:ext cx="495300" cy="190500"/>
+          </a:xfrm>
+          <a:prstGeom xmlns:a="http://schemas.openxmlformats.org/drawingml/2006/main" prst="rect">
+            <a:avLst/>
+          </a:prstGeom>
+          <a:noFill xmlns:a="http://schemas.openxmlformats.org/drawingml/2006/main"/>
+          <a:ln xmlns:a="http://schemas.openxmlformats.org/drawingml/2006/main" w="0">
+            <a:noFill/>
+            <a:prstDash val="solid"/>
+          </a:ln>
+        </p:spPr>
+        <p:txBody>
+          <a:bodyPr xmlns:a="http://schemas.openxmlformats.org/drawingml/2006/main"/>
+          <a:lstStyle xmlns:a="http://schemas.openxmlformats.org/drawingml/2006/main"/>
+          <a:p xmlns:a="http://schemas.openxmlformats.org/drawingml/2006/main">
+            <a:pPr algn="r">
+              <a:buNone/>
+              <a:defRPr sz="900" b="0">
+                <a:solidFill>
+                  <a:srgbClr val="667384"/>
+                </a:solidFill>
+              </a:defRPr>
+            </a:pPr>
+            <a:r>
+              <a:rPr sz="900" b="0">
+                <a:solidFill>
+                  <a:srgbClr val="667384"/>
+                </a:solidFill>
+              </a:rPr>
+              <a:t>24</a:t>
+            </a:r>
+          </a:p>
+        </p:txBody>
+      </p:sp>
+    </p:spTree>
+    <p:extLst>
+      <p:ext uri="{BB962C8B-B14F-4D97-AF65-F5344CB8AC3E}">
+        <p14:creationId xmlns:p14="http://schemas.microsoft.com/office/powerpoint/2010/main" val="1697167073"/>
+      </p:ext>
+    </p:extLst>
+  </p:cSld>
+</p:sld>
+</file>
+
+<file path=ppt/slides/slide25.xml><?xml version="1.0" encoding="utf-8"?>
+<p:sld xmlns:p="http://schemas.openxmlformats.org/presentationml/2006/main">
+  <p:cSld>
+    <p:bg>
+      <p:bgPr>
+        <a:solidFill xmlns:a="http://schemas.openxmlformats.org/drawingml/2006/main">
+          <a:srgbClr val="FFFFFF"/>
+        </a:solidFill>
+      </p:bgPr>
+    </p:bg>
+    <p:spTree>
+      <p:nvGrpSpPr>
+        <p:cNvPr id="1" name=""/>
+        <p:cNvGrpSpPr/>
+        <p:nvPr/>
+      </p:nvGrpSpPr>
+      <p:grpSpPr>
+        <a:xfrm xmlns:a="http://schemas.openxmlformats.org/drawingml/2006/main"/>
+      </p:grpSpPr>
+      <p:sp>
+        <p:nvSpPr>
+          <p:cNvPr id="24" name="section-11">
+            <a:extLst xmlns:a="http://schemas.openxmlformats.org/drawingml/2006/main">
+              <a:ext uri="{FF2B5EF4-FFF2-40B4-BE49-F238E27FC236}">
+                <a16:creationId xmlns:a16="http://schemas.microsoft.com/office/drawing/2014/main" id="{272ED433-B59C-436C-9DFB-4D317B90A13F}"/>
+              </a:ext>
+            </a:extLst>
+          </p:cNvPr>
+          <p:cNvSpPr>
+            <a:spLocks xmlns:a="http://schemas.openxmlformats.org/drawingml/2006/main" noGrp="1"/>
+          </p:cNvSpPr>
+          <p:nvPr/>
+        </p:nvSpPr>
+        <p:spPr>
+          <a:xfrm xmlns:a="http://schemas.openxmlformats.org/drawingml/2006/main">
+            <a:off x="457200" y="228600"/>
+            <a:ext cx="4191000" cy="228600"/>
+          </a:xfrm>
+          <a:prstGeom xmlns:a="http://schemas.openxmlformats.org/drawingml/2006/main" prst="rect">
+            <a:avLst/>
+          </a:prstGeom>
+          <a:noFill xmlns:a="http://schemas.openxmlformats.org/drawingml/2006/main"/>
+          <a:ln xmlns:a="http://schemas.openxmlformats.org/drawingml/2006/main" w="0">
+            <a:noFill/>
+            <a:prstDash val="solid"/>
+          </a:ln>
+        </p:spPr>
+        <p:txBody>
+          <a:bodyPr xmlns:a="http://schemas.openxmlformats.org/drawingml/2006/main" wrap="square" lIns="0" tIns="0" rIns="0" bIns="0" anchor="t">
+            <a:normAutofit fontScale="100000"/>
+          </a:bodyPr>
+          <a:lstStyle xmlns:a="http://schemas.openxmlformats.org/drawingml/2006/main"/>
+          <a:p xmlns:a="http://schemas.openxmlformats.org/drawingml/2006/main">
+            <a:pPr algn="l">
+              <a:buNone/>
+              <a:defRPr sz="1200" b="1">
+                <a:solidFill>
+                  <a:srgbClr val="667384"/>
+                </a:solidFill>
+                <a:latin typeface="Arial"/>
+                <a:ea typeface="Arial"/>
+                <a:cs typeface="Arial"/>
+              </a:defRPr>
+            </a:pPr>
+            <a:r>
+              <a:rPr sz="1200" b="1">
+                <a:solidFill>
+                  <a:srgbClr val="667384"/>
+                </a:solidFill>
+                <a:latin typeface="Arial"/>
+                <a:ea typeface="Arial"/>
+                <a:cs typeface="Arial"/>
+              </a:rPr>
+              <a:t>FROZEN BRANCHES</a:t>
+            </a:r>
+          </a:p>
+        </p:txBody>
+      </p:sp>
+      <p:sp>
+        <p:nvSpPr>
+          <p:cNvPr id="2" name="title-11">
+            <a:extLst xmlns:a="http://schemas.openxmlformats.org/drawingml/2006/main">
+              <a:ext uri="{FF2B5EF4-FFF2-40B4-BE49-F238E27FC236}">
+                <a16:creationId xmlns:a16="http://schemas.microsoft.com/office/drawing/2014/main" id="{3EC40708-7E00-432C-8ECE-907FA5705292}"/>
+              </a:ext>
+            </a:extLst>
+          </p:cNvPr>
+          <p:cNvSpPr>
+            <a:spLocks xmlns:a="http://schemas.openxmlformats.org/drawingml/2006/main" noGrp="1"/>
+          </p:cNvSpPr>
+          <p:nvPr/>
+        </p:nvSpPr>
+        <p:spPr>
+          <a:xfrm xmlns:a="http://schemas.openxmlformats.org/drawingml/2006/main">
+            <a:off x="457200" y="533400"/>
+            <a:ext cx="11277600" cy="628650"/>
+          </a:xfrm>
+          <a:prstGeom xmlns:a="http://schemas.openxmlformats.org/drawingml/2006/main" prst="rect">
+            <a:avLst/>
+          </a:prstGeom>
+          <a:noFill xmlns:a="http://schemas.openxmlformats.org/drawingml/2006/main"/>
+          <a:ln xmlns:a="http://schemas.openxmlformats.org/drawingml/2006/main" w="0">
+            <a:noFill/>
+            <a:prstDash val="solid"/>
+          </a:ln>
+        </p:spPr>
+        <p:txBody>
+          <a:bodyPr xmlns:a="http://schemas.openxmlformats.org/drawingml/2006/main" wrap="square" lIns="0" tIns="0" rIns="0" bIns="0" anchor="t">
+            <a:normAutofit fontScale="100000"/>
+          </a:bodyPr>
+          <a:lstStyle xmlns:a="http://schemas.openxmlformats.org/drawingml/2006/main"/>
+          <a:p xmlns:a="http://schemas.openxmlformats.org/drawingml/2006/main">
+            <a:pPr algn="l">
+              <a:buNone/>
+              <a:defRPr sz="3525" b="1">
+                <a:solidFill>
+                  <a:srgbClr val="000000"/>
+                </a:solidFill>
+                <a:latin typeface="Arial"/>
+                <a:ea typeface="Arial"/>
+                <a:cs typeface="Arial"/>
+              </a:defRPr>
+            </a:pPr>
+            <a:r>
+              <a:rPr sz="3525" b="1">
+                <a:solidFill>
+                  <a:srgbClr val="000000"/>
+                </a:solidFill>
+                <a:latin typeface="Arial"/>
+                <a:ea typeface="Arial"/>
+                <a:cs typeface="Arial"/>
+              </a:rPr>
+              <a:t>Four branches isolate state from prior-return sign</a:t>
+            </a:r>
+          </a:p>
+        </p:txBody>
+      </p:sp>
+      <p:sp>
+        <p:nvSpPr>
+          <p:cNvPr id="3" name="">
+            <a:extLst xmlns:a="http://schemas.openxmlformats.org/drawingml/2006/main">
+              <a:ext uri="{FF2B5EF4-FFF2-40B4-BE49-F238E27FC236}">
+                <a16:creationId xmlns:a16="http://schemas.microsoft.com/office/drawing/2014/main" id="{D5CA0FCE-75E8-41EF-A76A-23E9E2120C6A}"/>
+              </a:ext>
+            </a:extLst>
+          </p:cNvPr>
+          <p:cNvSpPr>
+            <a:spLocks xmlns:a="http://schemas.openxmlformats.org/drawingml/2006/main" noGrp="1"/>
+          </p:cNvSpPr>
+          <p:nvPr/>
+        </p:nvSpPr>
+        <p:spPr>
+          <a:xfrm xmlns:a="http://schemas.openxmlformats.org/drawingml/2006/main">
+            <a:off x="457200" y="1200150"/>
+            <a:ext cx="11277600" cy="19050"/>
+          </a:xfrm>
+          <a:prstGeom xmlns:a="http://schemas.openxmlformats.org/drawingml/2006/main" prst="rect">
+            <a:avLst/>
+          </a:prstGeom>
+          <a:solidFill xmlns:a="http://schemas.openxmlformats.org/drawingml/2006/main">
+            <a:srgbClr val="B8BCC4"/>
+          </a:solidFill>
+          <a:ln xmlns:a="http://schemas.openxmlformats.org/drawingml/2006/main" w="0">
+            <a:solidFill>
+              <a:srgbClr val="B8BCC4"/>
+            </a:solidFill>
+            <a:prstDash val="solid"/>
+          </a:ln>
+        </p:spPr>
+      </p:sp>
+      <p:sp>
+        <p:nvSpPr>
+          <p:cNvPr id="4" name="footer-left-11">
+            <a:extLst xmlns:a="http://schemas.openxmlformats.org/drawingml/2006/main">
+              <a:ext uri="{FF2B5EF4-FFF2-40B4-BE49-F238E27FC236}">
+                <a16:creationId xmlns:a16="http://schemas.microsoft.com/office/drawing/2014/main" id="{700DA765-80E0-4197-8700-00D867B86FA2}"/>
+              </a:ext>
+            </a:extLst>
+          </p:cNvPr>
+          <p:cNvSpPr>
+            <a:spLocks xmlns:a="http://schemas.openxmlformats.org/drawingml/2006/main" noGrp="1"/>
+          </p:cNvSpPr>
+          <p:nvPr/>
+        </p:nvSpPr>
+        <p:spPr>
+          <a:xfrm xmlns:a="http://schemas.openxmlformats.org/drawingml/2006/main">
+            <a:off x="457200" y="6515100"/>
+            <a:ext cx="3429000" cy="171450"/>
+          </a:xfrm>
+          <a:prstGeom xmlns:a="http://schemas.openxmlformats.org/drawingml/2006/main" prst="rect">
+            <a:avLst/>
+          </a:prstGeom>
+          <a:noFill xmlns:a="http://schemas.openxmlformats.org/drawingml/2006/main"/>
+          <a:ln xmlns:a="http://schemas.openxmlformats.org/drawingml/2006/main" w="0">
+            <a:noFill/>
+            <a:prstDash val="solid"/>
+          </a:ln>
+        </p:spPr>
+        <p:txBody>
+          <a:bodyPr xmlns:a="http://schemas.openxmlformats.org/drawingml/2006/main" wrap="square" lIns="0" tIns="0" rIns="0" bIns="0" anchor="t">
+            <a:normAutofit fontScale="100000"/>
+          </a:bodyPr>
+          <a:lstStyle xmlns:a="http://schemas.openxmlformats.org/drawingml/2006/main"/>
+          <a:p xmlns:a="http://schemas.openxmlformats.org/drawingml/2006/main">
+            <a:pPr algn="l">
+              <a:buNone/>
+              <a:defRPr sz="825" b="0">
+                <a:solidFill>
+                  <a:srgbClr val="64748B"/>
+                </a:solidFill>
+                <a:latin typeface="Arial"/>
+                <a:ea typeface="Arial"/>
+                <a:cs typeface="Arial"/>
+              </a:defRPr>
+            </a:pPr>
+            <a:r>
+              <a:rPr sz="825" b="0">
+                <a:solidFill>
+                  <a:srgbClr val="64748B"/>
+                </a:solidFill>
+                <a:latin typeface="Arial"/>
+                <a:ea typeface="Arial"/>
+                <a:cs typeface="Arial"/>
+              </a:rPr>
+              <a:t>Next-open mechanics | 20 held sessions | 10 bp | 2018–2023 TRAIN</a:t>
+            </a:r>
+          </a:p>
+        </p:txBody>
+      </p:sp>
+      <p:sp>
+        <p:nvSpPr>
+          <p:cNvPr id="5" name="footer-number-11">
+            <a:extLst xmlns:a="http://schemas.openxmlformats.org/drawingml/2006/main">
+              <a:ext uri="{FF2B5EF4-FFF2-40B4-BE49-F238E27FC236}">
+                <a16:creationId xmlns:a16="http://schemas.microsoft.com/office/drawing/2014/main" id="{83896276-4112-4532-AF7C-776C67C58B77}"/>
+              </a:ext>
+            </a:extLst>
+          </p:cNvPr>
+          <p:cNvSpPr>
+            <a:spLocks xmlns:a="http://schemas.openxmlformats.org/drawingml/2006/main" noGrp="1"/>
+          </p:cNvSpPr>
+          <p:nvPr/>
+        </p:nvSpPr>
+        <p:spPr>
+          <a:xfrm xmlns:a="http://schemas.openxmlformats.org/drawingml/2006/main">
+            <a:off x="10477500" y="6496050"/>
+            <a:ext cx="1257300" cy="190500"/>
+          </a:xfrm>
+          <a:prstGeom xmlns:a="http://schemas.openxmlformats.org/drawingml/2006/main" prst="rect">
+            <a:avLst/>
+          </a:prstGeom>
+          <a:noFill xmlns:a="http://schemas.openxmlformats.org/drawingml/2006/main"/>
+          <a:ln xmlns:a="http://schemas.openxmlformats.org/drawingml/2006/main" w="0">
+            <a:noFill/>
+            <a:prstDash val="solid"/>
+          </a:ln>
+        </p:spPr>
+        <p:txBody>
+          <a:bodyPr xmlns:a="http://schemas.openxmlformats.org/drawingml/2006/main" wrap="square" lIns="0" tIns="0" rIns="0" bIns="0" anchor="t">
+            <a:normAutofit fontScale="100000"/>
+          </a:bodyPr>
+          <a:lstStyle xmlns:a="http://schemas.openxmlformats.org/drawingml/2006/main"/>
+          <a:p xmlns:a="http://schemas.openxmlformats.org/drawingml/2006/main">
+            <a:pPr algn="r">
+              <a:buNone/>
+              <a:defRPr sz="1050" b="0">
+                <a:solidFill>
+                  <a:srgbClr val="667384"/>
+                </a:solidFill>
+                <a:latin typeface="Arial"/>
+                <a:ea typeface="Arial"/>
+                <a:cs typeface="Arial"/>
+              </a:defRPr>
+            </a:pPr>
+            <a:r>
+              <a:rPr sz="1050" b="0">
+                <a:solidFill>
+                  <a:srgbClr val="667384"/>
+                </a:solidFill>
+                <a:latin typeface="Arial"/>
+                <a:ea typeface="Arial"/>
+                <a:cs typeface="Arial"/>
+              </a:rPr>
+              <a:t>25</a:t>
+            </a:r>
+          </a:p>
+        </p:txBody>
+      </p:sp>
+      <p:sp>
+        <p:nvSpPr>
+          <p:cNvPr id="6" name="">
+            <a:extLst xmlns:a="http://schemas.openxmlformats.org/drawingml/2006/main">
+              <a:ext uri="{FF2B5EF4-FFF2-40B4-BE49-F238E27FC236}">
+                <a16:creationId xmlns:a16="http://schemas.microsoft.com/office/drawing/2014/main" id="{10F4BA85-46C5-47BD-BA74-EC806E663D58}"/>
+              </a:ext>
+            </a:extLst>
+          </p:cNvPr>
+          <p:cNvSpPr>
+            <a:spLocks xmlns:a="http://schemas.openxmlformats.org/drawingml/2006/main" noGrp="1"/>
+          </p:cNvSpPr>
+          <p:nvPr/>
+        </p:nvSpPr>
+        <p:spPr>
+          <a:xfrm xmlns:a="http://schemas.openxmlformats.org/drawingml/2006/main">
+            <a:off x="552450" y="1600200"/>
+            <a:ext cx="95250" cy="895350"/>
+          </a:xfrm>
+          <a:prstGeom xmlns:a="http://schemas.openxmlformats.org/drawingml/2006/main" prst="rect">
+            <a:avLst/>
+          </a:prstGeom>
+          <a:solidFill xmlns:a="http://schemas.openxmlformats.org/drawingml/2006/main">
+            <a:srgbClr val="E45756"/>
+          </a:solidFill>
+          <a:ln xmlns:a="http://schemas.openxmlformats.org/drawingml/2006/main" w="0">
+            <a:solidFill>
+              <a:srgbClr val="E45756"/>
+            </a:solidFill>
+            <a:prstDash val="solid"/>
+          </a:ln>
+        </p:spPr>
+      </p:sp>
+      <p:sp>
+        <p:nvSpPr>
+          <p:cNvPr id="7" name="">
+            <a:extLst xmlns:a="http://schemas.openxmlformats.org/drawingml/2006/main">
+              <a:ext uri="{FF2B5EF4-FFF2-40B4-BE49-F238E27FC236}">
+                <a16:creationId xmlns:a16="http://schemas.microsoft.com/office/drawing/2014/main" id="{7EF5B945-9D04-48FA-BA66-96DE813A9715}"/>
+              </a:ext>
+            </a:extLst>
+          </p:cNvPr>
+          <p:cNvSpPr>
+            <a:spLocks xmlns:a="http://schemas.openxmlformats.org/drawingml/2006/main" noGrp="1"/>
+          </p:cNvSpPr>
+          <p:nvPr/>
+        </p:nvSpPr>
+        <p:spPr>
+          <a:xfrm xmlns:a="http://schemas.openxmlformats.org/drawingml/2006/main">
+            <a:off x="876300" y="1581150"/>
+            <a:ext cx="2095500" cy="285750"/>
+          </a:xfrm>
+          <a:prstGeom xmlns:a="http://schemas.openxmlformats.org/drawingml/2006/main" prst="rect">
+            <a:avLst/>
+          </a:prstGeom>
+          <a:noFill xmlns:a="http://schemas.openxmlformats.org/drawingml/2006/main"/>
+          <a:ln xmlns:a="http://schemas.openxmlformats.org/drawingml/2006/main" w="0">
+            <a:noFill/>
+            <a:prstDash val="solid"/>
+          </a:ln>
+        </p:spPr>
+        <p:txBody>
+          <a:bodyPr xmlns:a="http://schemas.openxmlformats.org/drawingml/2006/main" wrap="square" lIns="0" tIns="0" rIns="0" bIns="0" anchor="t">
+            <a:normAutofit fontScale="100000"/>
+          </a:bodyPr>
+          <a:lstStyle xmlns:a="http://schemas.openxmlformats.org/drawingml/2006/main"/>
+          <a:p xmlns:a="http://schemas.openxmlformats.org/drawingml/2006/main">
+            <a:pPr algn="l">
+              <a:buNone/>
+              <a:defRPr sz="1350" b="1">
+                <a:solidFill>
+                  <a:srgbClr val="E45756"/>
+                </a:solidFill>
+                <a:latin typeface="Arial"/>
+                <a:ea typeface="Arial"/>
+                <a:cs typeface="Arial"/>
+              </a:defRPr>
+            </a:pPr>
+            <a:r>
+              <a:rPr sz="1350" b="1">
+                <a:solidFill>
+                  <a:srgbClr val="E45756"/>
+                </a:solidFill>
+                <a:latin typeface="Arial"/>
+                <a:ea typeface="Arial"/>
+                <a:cs typeface="Arial"/>
+              </a:rPr>
+              <a:t>SIDEWAYS ALL</a:t>
+            </a:r>
+          </a:p>
+        </p:txBody>
+      </p:sp>
+      <p:sp>
+        <p:nvSpPr>
+          <p:cNvPr id="8" name="">
+            <a:extLst xmlns:a="http://schemas.openxmlformats.org/drawingml/2006/main">
+              <a:ext uri="{FF2B5EF4-FFF2-40B4-BE49-F238E27FC236}">
+                <a16:creationId xmlns:a16="http://schemas.microsoft.com/office/drawing/2014/main" id="{655CF75D-5F23-4C7F-BE9C-764036D0B9E8}"/>
+              </a:ext>
+            </a:extLst>
+          </p:cNvPr>
+          <p:cNvSpPr>
+            <a:spLocks xmlns:a="http://schemas.openxmlformats.org/drawingml/2006/main" noGrp="1"/>
+          </p:cNvSpPr>
+          <p:nvPr/>
+        </p:nvSpPr>
+        <p:spPr>
+          <a:xfrm xmlns:a="http://schemas.openxmlformats.org/drawingml/2006/main">
+            <a:off x="3105150" y="1562100"/>
+            <a:ext cx="4762500" cy="419100"/>
+          </a:xfrm>
+          <a:prstGeom xmlns:a="http://schemas.openxmlformats.org/drawingml/2006/main" prst="rect">
+            <a:avLst/>
+          </a:prstGeom>
+          <a:noFill xmlns:a="http://schemas.openxmlformats.org/drawingml/2006/main"/>
+          <a:ln xmlns:a="http://schemas.openxmlformats.org/drawingml/2006/main" w="0">
+            <a:noFill/>
+            <a:prstDash val="solid"/>
+          </a:ln>
+        </p:spPr>
+        <p:txBody>
+          <a:bodyPr xmlns:a="http://schemas.openxmlformats.org/drawingml/2006/main" wrap="square" lIns="0" tIns="0" rIns="0" bIns="0" anchor="t">
+            <a:normAutofit fontScale="100000"/>
+          </a:bodyPr>
+          <a:lstStyle xmlns:a="http://schemas.openxmlformats.org/drawingml/2006/main"/>
+          <a:p xmlns:a="http://schemas.openxmlformats.org/drawingml/2006/main">
+            <a:pPr algn="l">
+              <a:buNone/>
+              <a:defRPr sz="1950" b="1">
+                <a:solidFill>
+                  <a:srgbClr val="273548"/>
+                </a:solidFill>
+                <a:latin typeface="Arial"/>
+                <a:ea typeface="Arial"/>
+                <a:cs typeface="Arial"/>
+              </a:defRPr>
+            </a:pPr>
+            <a:r>
+              <a:rPr sz="1950" b="1">
+                <a:solidFill>
+                  <a:srgbClr val="273548"/>
+                </a:solidFill>
+                <a:latin typeface="Arial"/>
+                <a:ea typeface="Arial"/>
+                <a:cs typeface="Arial"/>
+              </a:rPr>
+              <a:t>Any R20 in ER20 sideways</a:t>
+            </a:r>
+          </a:p>
+        </p:txBody>
+      </p:sp>
+      <p:sp>
+        <p:nvSpPr>
+          <p:cNvPr id="9" name="">
+            <a:extLst xmlns:a="http://schemas.openxmlformats.org/drawingml/2006/main">
+              <a:ext uri="{FF2B5EF4-FFF2-40B4-BE49-F238E27FC236}">
+                <a16:creationId xmlns:a16="http://schemas.microsoft.com/office/drawing/2014/main" id="{3E0B76F2-4514-4DD8-934B-ABE42A34E950}"/>
+              </a:ext>
+            </a:extLst>
+          </p:cNvPr>
+          <p:cNvSpPr>
+            <a:spLocks xmlns:a="http://schemas.openxmlformats.org/drawingml/2006/main" noGrp="1"/>
+          </p:cNvSpPr>
+          <p:nvPr/>
+        </p:nvSpPr>
+        <p:spPr>
+          <a:xfrm xmlns:a="http://schemas.openxmlformats.org/drawingml/2006/main">
+            <a:off x="8096250" y="1581150"/>
+            <a:ext cx="3333750" cy="704850"/>
+          </a:xfrm>
+          <a:prstGeom xmlns:a="http://schemas.openxmlformats.org/drawingml/2006/main" prst="rect">
+            <a:avLst/>
+          </a:prstGeom>
+          <a:noFill xmlns:a="http://schemas.openxmlformats.org/drawingml/2006/main"/>
+          <a:ln xmlns:a="http://schemas.openxmlformats.org/drawingml/2006/main" w="0">
+            <a:noFill/>
+            <a:prstDash val="solid"/>
+          </a:ln>
+        </p:spPr>
+        <p:txBody>
+          <a:bodyPr xmlns:a="http://schemas.openxmlformats.org/drawingml/2006/main" wrap="square" lIns="0" tIns="0" rIns="0" bIns="0" anchor="t">
+            <a:normAutofit fontScale="100000"/>
+          </a:bodyPr>
+          <a:lstStyle xmlns:a="http://schemas.openxmlformats.org/drawingml/2006/main"/>
+          <a:p xmlns:a="http://schemas.openxmlformats.org/drawingml/2006/main">
+            <a:pPr algn="l">
+              <a:buNone/>
+              <a:defRPr sz="1425" b="0">
+                <a:solidFill>
+                  <a:srgbClr val="667384"/>
+                </a:solidFill>
+                <a:latin typeface="Arial"/>
+                <a:ea typeface="Arial"/>
+                <a:cs typeface="Arial"/>
+              </a:defRPr>
+            </a:pPr>
+            <a:r>
+              <a:rPr sz="1425" b="0">
+                <a:solidFill>
+                  <a:srgbClr val="667384"/>
+                </a:solidFill>
+                <a:latin typeface="Arial"/>
+                <a:ea typeface="Arial"/>
+                <a:cs typeface="Arial"/>
+              </a:rPr>
+              <a:t>ER20 &lt; 0.30 at completed close t</a:t>
+            </a:r>
+          </a:p>
+        </p:txBody>
+      </p:sp>
+      <p:sp>
+        <p:nvSpPr>
+          <p:cNvPr id="10" name="">
+            <a:extLst xmlns:a="http://schemas.openxmlformats.org/drawingml/2006/main">
+              <a:ext uri="{FF2B5EF4-FFF2-40B4-BE49-F238E27FC236}">
+                <a16:creationId xmlns:a16="http://schemas.microsoft.com/office/drawing/2014/main" id="{294777C3-6D2F-4277-840E-7E984FB4554D}"/>
+              </a:ext>
+            </a:extLst>
+          </p:cNvPr>
+          <p:cNvSpPr>
+            <a:spLocks xmlns:a="http://schemas.openxmlformats.org/drawingml/2006/main" noGrp="1"/>
+          </p:cNvSpPr>
+          <p:nvPr/>
+        </p:nvSpPr>
+        <p:spPr>
+          <a:xfrm xmlns:a="http://schemas.openxmlformats.org/drawingml/2006/main">
+            <a:off x="876300" y="2590800"/>
+            <a:ext cx="10553700" cy="9525"/>
+          </a:xfrm>
+          <a:prstGeom xmlns:a="http://schemas.openxmlformats.org/drawingml/2006/main" prst="rect">
+            <a:avLst/>
+          </a:prstGeom>
+          <a:solidFill xmlns:a="http://schemas.openxmlformats.org/drawingml/2006/main">
+            <a:srgbClr val="B8BCC4"/>
+          </a:solidFill>
+          <a:ln xmlns:a="http://schemas.openxmlformats.org/drawingml/2006/main" w="0">
+            <a:solidFill>
+              <a:srgbClr val="B8BCC4"/>
+            </a:solidFill>
+            <a:prstDash val="solid"/>
+          </a:ln>
+        </p:spPr>
+      </p:sp>
+      <p:sp>
+        <p:nvSpPr>
+          <p:cNvPr id="11" name="">
+            <a:extLst xmlns:a="http://schemas.openxmlformats.org/drawingml/2006/main">
+              <a:ext uri="{FF2B5EF4-FFF2-40B4-BE49-F238E27FC236}">
+                <a16:creationId xmlns:a16="http://schemas.microsoft.com/office/drawing/2014/main" id="{F894CF3F-AD63-423C-8F01-64C507896579}"/>
+              </a:ext>
+            </a:extLst>
+          </p:cNvPr>
+          <p:cNvSpPr>
+            <a:spLocks xmlns:a="http://schemas.openxmlformats.org/drawingml/2006/main" noGrp="1"/>
+          </p:cNvSpPr>
+          <p:nvPr/>
+        </p:nvSpPr>
+        <p:spPr>
+          <a:xfrm xmlns:a="http://schemas.openxmlformats.org/drawingml/2006/main">
+            <a:off x="552450" y="2800350"/>
+            <a:ext cx="95250" cy="895350"/>
+          </a:xfrm>
+          <a:prstGeom xmlns:a="http://schemas.openxmlformats.org/drawingml/2006/main" prst="rect">
+            <a:avLst/>
+          </a:prstGeom>
+          <a:solidFill xmlns:a="http://schemas.openxmlformats.org/drawingml/2006/main">
+            <a:srgbClr val="2A9D6F"/>
+          </a:solidFill>
+          <a:ln xmlns:a="http://schemas.openxmlformats.org/drawingml/2006/main" w="0">
+            <a:solidFill>
+              <a:srgbClr val="2A9D6F"/>
+            </a:solidFill>
+            <a:prstDash val="solid"/>
+          </a:ln>
+        </p:spPr>
+      </p:sp>
+      <p:sp>
+        <p:nvSpPr>
+          <p:cNvPr id="12" name="">
+            <a:extLst xmlns:a="http://schemas.openxmlformats.org/drawingml/2006/main">
+              <a:ext uri="{FF2B5EF4-FFF2-40B4-BE49-F238E27FC236}">
+                <a16:creationId xmlns:a16="http://schemas.microsoft.com/office/drawing/2014/main" id="{D3953D03-6A7A-4FEE-B242-02BF0319C169}"/>
+              </a:ext>
+            </a:extLst>
+          </p:cNvPr>
+          <p:cNvSpPr>
+            <a:spLocks xmlns:a="http://schemas.openxmlformats.org/drawingml/2006/main" noGrp="1"/>
+          </p:cNvSpPr>
+          <p:nvPr/>
+        </p:nvSpPr>
+        <p:spPr>
+          <a:xfrm xmlns:a="http://schemas.openxmlformats.org/drawingml/2006/main">
+            <a:off x="876300" y="2781300"/>
+            <a:ext cx="2095500" cy="285750"/>
+          </a:xfrm>
+          <a:prstGeom xmlns:a="http://schemas.openxmlformats.org/drawingml/2006/main" prst="rect">
+            <a:avLst/>
+          </a:prstGeom>
+          <a:noFill xmlns:a="http://schemas.openxmlformats.org/drawingml/2006/main"/>
+          <a:ln xmlns:a="http://schemas.openxmlformats.org/drawingml/2006/main" w="0">
+            <a:noFill/>
+            <a:prstDash val="solid"/>
+          </a:ln>
+        </p:spPr>
+        <p:txBody>
+          <a:bodyPr xmlns:a="http://schemas.openxmlformats.org/drawingml/2006/main" wrap="square" lIns="0" tIns="0" rIns="0" bIns="0" anchor="t">
+            <a:normAutofit fontScale="100000"/>
+          </a:bodyPr>
+          <a:lstStyle xmlns:a="http://schemas.openxmlformats.org/drawingml/2006/main"/>
+          <a:p xmlns:a="http://schemas.openxmlformats.org/drawingml/2006/main">
+            <a:pPr algn="l">
+              <a:buNone/>
+              <a:defRPr sz="1350" b="1">
+                <a:solidFill>
+                  <a:srgbClr val="2A9D6F"/>
+                </a:solidFill>
+                <a:latin typeface="Arial"/>
+                <a:ea typeface="Arial"/>
+                <a:cs typeface="Arial"/>
+              </a:defRPr>
+            </a:pPr>
+            <a:r>
+              <a:rPr sz="1350" b="1">
+                <a:solidFill>
+                  <a:srgbClr val="2A9D6F"/>
+                </a:solidFill>
+                <a:latin typeface="Arial"/>
+                <a:ea typeface="Arial"/>
+                <a:cs typeface="Arial"/>
+              </a:rPr>
+              <a:t>SIDEWAYS +R20</a:t>
+            </a:r>
+          </a:p>
+        </p:txBody>
+      </p:sp>
+      <p:sp>
+        <p:nvSpPr>
+          <p:cNvPr id="13" name="">
+            <a:extLst xmlns:a="http://schemas.openxmlformats.org/drawingml/2006/main">
+              <a:ext uri="{FF2B5EF4-FFF2-40B4-BE49-F238E27FC236}">
+                <a16:creationId xmlns:a16="http://schemas.microsoft.com/office/drawing/2014/main" id="{52D1DBE8-EAF6-4492-89E7-5C97A3A6A395}"/>
+              </a:ext>
+            </a:extLst>
+          </p:cNvPr>
+          <p:cNvSpPr>
+            <a:spLocks xmlns:a="http://schemas.openxmlformats.org/drawingml/2006/main" noGrp="1"/>
+          </p:cNvSpPr>
+          <p:nvPr/>
+        </p:nvSpPr>
+        <p:spPr>
+          <a:xfrm xmlns:a="http://schemas.openxmlformats.org/drawingml/2006/main">
+            <a:off x="3105150" y="2762250"/>
+            <a:ext cx="4762500" cy="419100"/>
+          </a:xfrm>
+          <a:prstGeom xmlns:a="http://schemas.openxmlformats.org/drawingml/2006/main" prst="rect">
+            <a:avLst/>
+          </a:prstGeom>
+          <a:noFill xmlns:a="http://schemas.openxmlformats.org/drawingml/2006/main"/>
+          <a:ln xmlns:a="http://schemas.openxmlformats.org/drawingml/2006/main" w="0">
+            <a:noFill/>
+            <a:prstDash val="solid"/>
+          </a:ln>
+        </p:spPr>
+        <p:txBody>
+          <a:bodyPr xmlns:a="http://schemas.openxmlformats.org/drawingml/2006/main" wrap="square" lIns="0" tIns="0" rIns="0" bIns="0" anchor="t">
+            <a:normAutofit fontScale="100000"/>
+          </a:bodyPr>
+          <a:lstStyle xmlns:a="http://schemas.openxmlformats.org/drawingml/2006/main"/>
+          <a:p xmlns:a="http://schemas.openxmlformats.org/drawingml/2006/main">
+            <a:pPr algn="l">
+              <a:buNone/>
+              <a:defRPr sz="1950" b="1">
+                <a:solidFill>
+                  <a:srgbClr val="273548"/>
+                </a:solidFill>
+                <a:latin typeface="Arial"/>
+                <a:ea typeface="Arial"/>
+                <a:cs typeface="Arial"/>
+              </a:defRPr>
+            </a:pPr>
+            <a:r>
+              <a:rPr sz="1950" b="1">
+                <a:solidFill>
+                  <a:srgbClr val="273548"/>
+                </a:solidFill>
+                <a:latin typeface="Arial"/>
+                <a:ea typeface="Arial"/>
+                <a:cs typeface="Arial"/>
+              </a:rPr>
+              <a:t>Continuation branch</a:t>
+            </a:r>
+          </a:p>
+        </p:txBody>
+      </p:sp>
+      <p:sp>
+        <p:nvSpPr>
+          <p:cNvPr id="14" name="">
+            <a:extLst xmlns:a="http://schemas.openxmlformats.org/drawingml/2006/main">
+              <a:ext uri="{FF2B5EF4-FFF2-40B4-BE49-F238E27FC236}">
+                <a16:creationId xmlns:a16="http://schemas.microsoft.com/office/drawing/2014/main" id="{2CAF0156-C9E6-4210-8A8A-BFEDD044631B}"/>
+              </a:ext>
+            </a:extLst>
+          </p:cNvPr>
+          <p:cNvSpPr>
+            <a:spLocks xmlns:a="http://schemas.openxmlformats.org/drawingml/2006/main" noGrp="1"/>
+          </p:cNvSpPr>
+          <p:nvPr/>
+        </p:nvSpPr>
+        <p:spPr>
+          <a:xfrm xmlns:a="http://schemas.openxmlformats.org/drawingml/2006/main">
+            <a:off x="8096250" y="2781300"/>
+            <a:ext cx="3333750" cy="704850"/>
+          </a:xfrm>
+          <a:prstGeom xmlns:a="http://schemas.openxmlformats.org/drawingml/2006/main" prst="rect">
+            <a:avLst/>
+          </a:prstGeom>
+          <a:noFill xmlns:a="http://schemas.openxmlformats.org/drawingml/2006/main"/>
+          <a:ln xmlns:a="http://schemas.openxmlformats.org/drawingml/2006/main" w="0">
+            <a:noFill/>
+            <a:prstDash val="solid"/>
+          </a:ln>
+        </p:spPr>
+        <p:txBody>
+          <a:bodyPr xmlns:a="http://schemas.openxmlformats.org/drawingml/2006/main" wrap="square" lIns="0" tIns="0" rIns="0" bIns="0" anchor="t">
+            <a:normAutofit fontScale="100000"/>
+          </a:bodyPr>
+          <a:lstStyle xmlns:a="http://schemas.openxmlformats.org/drawingml/2006/main"/>
+          <a:p xmlns:a="http://schemas.openxmlformats.org/drawingml/2006/main">
+            <a:pPr algn="l">
+              <a:buNone/>
+              <a:defRPr sz="1425" b="0">
+                <a:solidFill>
+                  <a:srgbClr val="667384"/>
+                </a:solidFill>
+                <a:latin typeface="Arial"/>
+                <a:ea typeface="Arial"/>
+                <a:cs typeface="Arial"/>
+              </a:defRPr>
+            </a:pPr>
+            <a:r>
+              <a:rPr sz="1425" b="0">
+                <a:solidFill>
+                  <a:srgbClr val="667384"/>
+                </a:solidFill>
+                <a:latin typeface="Arial"/>
+                <a:ea typeface="Arial"/>
+                <a:cs typeface="Arial"/>
+              </a:rPr>
+              <a:t>R20 &gt; 0 and ER20 &lt; 0.30</a:t>
+            </a:r>
+          </a:p>
+        </p:txBody>
+      </p:sp>
+      <p:sp>
+        <p:nvSpPr>
+          <p:cNvPr id="15" name="">
+            <a:extLst xmlns:a="http://schemas.openxmlformats.org/drawingml/2006/main">
+              <a:ext uri="{FF2B5EF4-FFF2-40B4-BE49-F238E27FC236}">
+                <a16:creationId xmlns:a16="http://schemas.microsoft.com/office/drawing/2014/main" id="{B126165D-5B65-44DB-99BD-15ED33F9B90F}"/>
+              </a:ext>
+            </a:extLst>
+          </p:cNvPr>
+          <p:cNvSpPr>
+            <a:spLocks xmlns:a="http://schemas.openxmlformats.org/drawingml/2006/main" noGrp="1"/>
+          </p:cNvSpPr>
+          <p:nvPr/>
+        </p:nvSpPr>
+        <p:spPr>
+          <a:xfrm xmlns:a="http://schemas.openxmlformats.org/drawingml/2006/main">
+            <a:off x="876300" y="3790950"/>
+            <a:ext cx="10553700" cy="9525"/>
+          </a:xfrm>
+          <a:prstGeom xmlns:a="http://schemas.openxmlformats.org/drawingml/2006/main" prst="rect">
+            <a:avLst/>
+          </a:prstGeom>
+          <a:solidFill xmlns:a="http://schemas.openxmlformats.org/drawingml/2006/main">
+            <a:srgbClr val="B8BCC4"/>
+          </a:solidFill>
+          <a:ln xmlns:a="http://schemas.openxmlformats.org/drawingml/2006/main" w="0">
+            <a:solidFill>
+              <a:srgbClr val="B8BCC4"/>
+            </a:solidFill>
+            <a:prstDash val="solid"/>
+          </a:ln>
+        </p:spPr>
+      </p:sp>
+      <p:sp>
+        <p:nvSpPr>
+          <p:cNvPr id="16" name="">
+            <a:extLst xmlns:a="http://schemas.openxmlformats.org/drawingml/2006/main">
+              <a:ext uri="{FF2B5EF4-FFF2-40B4-BE49-F238E27FC236}">
+                <a16:creationId xmlns:a16="http://schemas.microsoft.com/office/drawing/2014/main" id="{7DC0911F-9587-4B19-84C6-11974DB2A91C}"/>
+              </a:ext>
+            </a:extLst>
+          </p:cNvPr>
+          <p:cNvSpPr>
+            <a:spLocks xmlns:a="http://schemas.openxmlformats.org/drawingml/2006/main" noGrp="1"/>
+          </p:cNvSpPr>
+          <p:nvPr/>
+        </p:nvSpPr>
+        <p:spPr>
+          <a:xfrm xmlns:a="http://schemas.openxmlformats.org/drawingml/2006/main">
+            <a:off x="552450" y="4000500"/>
+            <a:ext cx="95250" cy="895350"/>
+          </a:xfrm>
+          <a:prstGeom xmlns:a="http://schemas.openxmlformats.org/drawingml/2006/main" prst="rect">
+            <a:avLst/>
+          </a:prstGeom>
+          <a:solidFill xmlns:a="http://schemas.openxmlformats.org/drawingml/2006/main">
+            <a:srgbClr val="3D8DFF"/>
+          </a:solidFill>
+          <a:ln xmlns:a="http://schemas.openxmlformats.org/drawingml/2006/main" w="0">
+            <a:solidFill>
+              <a:srgbClr val="3D8DFF"/>
+            </a:solidFill>
+            <a:prstDash val="solid"/>
+          </a:ln>
+        </p:spPr>
+      </p:sp>
+      <p:sp>
+        <p:nvSpPr>
+          <p:cNvPr id="17" name="">
+            <a:extLst xmlns:a="http://schemas.openxmlformats.org/drawingml/2006/main">
+              <a:ext uri="{FF2B5EF4-FFF2-40B4-BE49-F238E27FC236}">
+                <a16:creationId xmlns:a16="http://schemas.microsoft.com/office/drawing/2014/main" id="{DAB53991-F50C-4B95-9F23-DAE86BCEDF3B}"/>
+              </a:ext>
+            </a:extLst>
+          </p:cNvPr>
+          <p:cNvSpPr>
+            <a:spLocks xmlns:a="http://schemas.openxmlformats.org/drawingml/2006/main" noGrp="1"/>
+          </p:cNvSpPr>
+          <p:nvPr/>
+        </p:nvSpPr>
+        <p:spPr>
+          <a:xfrm xmlns:a="http://schemas.openxmlformats.org/drawingml/2006/main">
+            <a:off x="876300" y="3981450"/>
+            <a:ext cx="2095500" cy="285750"/>
+          </a:xfrm>
+          <a:prstGeom xmlns:a="http://schemas.openxmlformats.org/drawingml/2006/main" prst="rect">
+            <a:avLst/>
+          </a:prstGeom>
+          <a:noFill xmlns:a="http://schemas.openxmlformats.org/drawingml/2006/main"/>
+          <a:ln xmlns:a="http://schemas.openxmlformats.org/drawingml/2006/main" w="0">
+            <a:noFill/>
+            <a:prstDash val="solid"/>
+          </a:ln>
+        </p:spPr>
+        <p:txBody>
+          <a:bodyPr xmlns:a="http://schemas.openxmlformats.org/drawingml/2006/main" wrap="square" lIns="0" tIns="0" rIns="0" bIns="0" anchor="t">
+            <a:normAutofit fontScale="100000"/>
+          </a:bodyPr>
+          <a:lstStyle xmlns:a="http://schemas.openxmlformats.org/drawingml/2006/main"/>
+          <a:p xmlns:a="http://schemas.openxmlformats.org/drawingml/2006/main">
+            <a:pPr algn="l">
+              <a:buNone/>
+              <a:defRPr sz="1350" b="1">
+                <a:solidFill>
+                  <a:srgbClr val="3D8DFF"/>
+                </a:solidFill>
+                <a:latin typeface="Arial"/>
+                <a:ea typeface="Arial"/>
+                <a:cs typeface="Arial"/>
+              </a:defRPr>
+            </a:pPr>
+            <a:r>
+              <a:rPr sz="1350" b="1">
+                <a:solidFill>
+                  <a:srgbClr val="3D8DFF"/>
+                </a:solidFill>
+                <a:latin typeface="Arial"/>
+                <a:ea typeface="Arial"/>
+                <a:cs typeface="Arial"/>
+              </a:rPr>
+              <a:t>SIDEWAYS −R20</a:t>
+            </a:r>
+          </a:p>
+        </p:txBody>
+      </p:sp>
+      <p:sp>
+        <p:nvSpPr>
+          <p:cNvPr id="18" name="">
+            <a:extLst xmlns:a="http://schemas.openxmlformats.org/drawingml/2006/main">
+              <a:ext uri="{FF2B5EF4-FFF2-40B4-BE49-F238E27FC236}">
+                <a16:creationId xmlns:a16="http://schemas.microsoft.com/office/drawing/2014/main" id="{5DFACF3B-08BC-4148-A40A-2004DFB81D71}"/>
+              </a:ext>
+            </a:extLst>
+          </p:cNvPr>
+          <p:cNvSpPr>
+            <a:spLocks xmlns:a="http://schemas.openxmlformats.org/drawingml/2006/main" noGrp="1"/>
+          </p:cNvSpPr>
+          <p:nvPr/>
+        </p:nvSpPr>
+        <p:spPr>
+          <a:xfrm xmlns:a="http://schemas.openxmlformats.org/drawingml/2006/main">
+            <a:off x="3105150" y="3962400"/>
+            <a:ext cx="4762500" cy="419100"/>
+          </a:xfrm>
+          <a:prstGeom xmlns:a="http://schemas.openxmlformats.org/drawingml/2006/main" prst="rect">
+            <a:avLst/>
+          </a:prstGeom>
+          <a:noFill xmlns:a="http://schemas.openxmlformats.org/drawingml/2006/main"/>
+          <a:ln xmlns:a="http://schemas.openxmlformats.org/drawingml/2006/main" w="0">
+            <a:noFill/>
+            <a:prstDash val="solid"/>
+          </a:ln>
+        </p:spPr>
+        <p:txBody>
+          <a:bodyPr xmlns:a="http://schemas.openxmlformats.org/drawingml/2006/main" wrap="square" lIns="0" tIns="0" rIns="0" bIns="0" anchor="t">
+            <a:normAutofit fontScale="100000"/>
+          </a:bodyPr>
+          <a:lstStyle xmlns:a="http://schemas.openxmlformats.org/drawingml/2006/main"/>
+          <a:p xmlns:a="http://schemas.openxmlformats.org/drawingml/2006/main">
+            <a:pPr algn="l">
+              <a:buNone/>
+              <a:defRPr sz="1950" b="1">
+                <a:solidFill>
+                  <a:srgbClr val="273548"/>
+                </a:solidFill>
+                <a:latin typeface="Arial"/>
+                <a:ea typeface="Arial"/>
+                <a:cs typeface="Arial"/>
+              </a:defRPr>
+            </a:pPr>
+            <a:r>
+              <a:rPr sz="1950" b="1">
+                <a:solidFill>
+                  <a:srgbClr val="273548"/>
+                </a:solidFill>
+                <a:latin typeface="Arial"/>
+                <a:ea typeface="Arial"/>
+                <a:cs typeface="Arial"/>
+              </a:rPr>
+              <a:t>Rebound branch</a:t>
+            </a:r>
+          </a:p>
+        </p:txBody>
+      </p:sp>
+      <p:sp>
+        <p:nvSpPr>
+          <p:cNvPr id="19" name="">
+            <a:extLst xmlns:a="http://schemas.openxmlformats.org/drawingml/2006/main">
+              <a:ext uri="{FF2B5EF4-FFF2-40B4-BE49-F238E27FC236}">
+                <a16:creationId xmlns:a16="http://schemas.microsoft.com/office/drawing/2014/main" id="{C907D23B-44A2-43C4-9658-4C6E38430BF5}"/>
+              </a:ext>
+            </a:extLst>
+          </p:cNvPr>
+          <p:cNvSpPr>
+            <a:spLocks xmlns:a="http://schemas.openxmlformats.org/drawingml/2006/main" noGrp="1"/>
+          </p:cNvSpPr>
+          <p:nvPr/>
+        </p:nvSpPr>
+        <p:spPr>
+          <a:xfrm xmlns:a="http://schemas.openxmlformats.org/drawingml/2006/main">
+            <a:off x="8096250" y="3981450"/>
+            <a:ext cx="3333750" cy="704850"/>
+          </a:xfrm>
+          <a:prstGeom xmlns:a="http://schemas.openxmlformats.org/drawingml/2006/main" prst="rect">
+            <a:avLst/>
+          </a:prstGeom>
+          <a:noFill xmlns:a="http://schemas.openxmlformats.org/drawingml/2006/main"/>
+          <a:ln xmlns:a="http://schemas.openxmlformats.org/drawingml/2006/main" w="0">
+            <a:noFill/>
+            <a:prstDash val="solid"/>
+          </a:ln>
+        </p:spPr>
+        <p:txBody>
+          <a:bodyPr xmlns:a="http://schemas.openxmlformats.org/drawingml/2006/main" wrap="square" lIns="0" tIns="0" rIns="0" bIns="0" anchor="t">
+            <a:normAutofit fontScale="100000"/>
+          </a:bodyPr>
+          <a:lstStyle xmlns:a="http://schemas.openxmlformats.org/drawingml/2006/main"/>
+          <a:p xmlns:a="http://schemas.openxmlformats.org/drawingml/2006/main">
+            <a:pPr algn="l">
+              <a:buNone/>
+              <a:defRPr sz="1425" b="0">
+                <a:solidFill>
+                  <a:srgbClr val="667384"/>
+                </a:solidFill>
+                <a:latin typeface="Arial"/>
+                <a:ea typeface="Arial"/>
+                <a:cs typeface="Arial"/>
+              </a:defRPr>
+            </a:pPr>
+            <a:r>
+              <a:rPr sz="1425" b="0">
+                <a:solidFill>
+                  <a:srgbClr val="667384"/>
+                </a:solidFill>
+                <a:latin typeface="Arial"/>
+                <a:ea typeface="Arial"/>
+                <a:cs typeface="Arial"/>
+              </a:rPr>
+              <a:t>R20 &lt; 0 and ER20 &lt; 0.30</a:t>
+            </a:r>
+          </a:p>
+        </p:txBody>
+      </p:sp>
+      <p:sp>
+        <p:nvSpPr>
+          <p:cNvPr id="20" name="">
+            <a:extLst xmlns:a="http://schemas.openxmlformats.org/drawingml/2006/main">
+              <a:ext uri="{FF2B5EF4-FFF2-40B4-BE49-F238E27FC236}">
+                <a16:creationId xmlns:a16="http://schemas.microsoft.com/office/drawing/2014/main" id="{8042DFC4-7E22-47E6-8C53-1E63A8411C3A}"/>
+              </a:ext>
+            </a:extLst>
+          </p:cNvPr>
+          <p:cNvSpPr>
+            <a:spLocks xmlns:a="http://schemas.openxmlformats.org/drawingml/2006/main" noGrp="1"/>
+          </p:cNvSpPr>
+          <p:nvPr/>
+        </p:nvSpPr>
+        <p:spPr>
+          <a:xfrm xmlns:a="http://schemas.openxmlformats.org/drawingml/2006/main">
+            <a:off x="876300" y="4991100"/>
+            <a:ext cx="10553700" cy="9525"/>
+          </a:xfrm>
+          <a:prstGeom xmlns:a="http://schemas.openxmlformats.org/drawingml/2006/main" prst="rect">
+            <a:avLst/>
+          </a:prstGeom>
+          <a:solidFill xmlns:a="http://schemas.openxmlformats.org/drawingml/2006/main">
+            <a:srgbClr val="B8BCC4"/>
+          </a:solidFill>
+          <a:ln xmlns:a="http://schemas.openxmlformats.org/drawingml/2006/main" w="0">
+            <a:solidFill>
+              <a:srgbClr val="B8BCC4"/>
+            </a:solidFill>
+            <a:prstDash val="solid"/>
+          </a:ln>
+        </p:spPr>
+      </p:sp>
+      <p:sp>
+        <p:nvSpPr>
+          <p:cNvPr id="21" name="">
+            <a:extLst xmlns:a="http://schemas.openxmlformats.org/drawingml/2006/main">
+              <a:ext uri="{FF2B5EF4-FFF2-40B4-BE49-F238E27FC236}">
+                <a16:creationId xmlns:a16="http://schemas.microsoft.com/office/drawing/2014/main" id="{F4066D54-676B-4D0F-93B6-2152B57E41AF}"/>
+              </a:ext>
+            </a:extLst>
+          </p:cNvPr>
+          <p:cNvSpPr>
+            <a:spLocks xmlns:a="http://schemas.openxmlformats.org/drawingml/2006/main" noGrp="1"/>
+          </p:cNvSpPr>
+          <p:nvPr/>
+        </p:nvSpPr>
+        <p:spPr>
+          <a:xfrm xmlns:a="http://schemas.openxmlformats.org/drawingml/2006/main">
+            <a:off x="552450" y="5353050"/>
+            <a:ext cx="10877550" cy="781050"/>
+          </a:xfrm>
+          <a:prstGeom xmlns:a="http://schemas.openxmlformats.org/drawingml/2006/main" prst="rect">
+            <a:avLst/>
+          </a:prstGeom>
+          <a:solidFill xmlns:a="http://schemas.openxmlformats.org/drawingml/2006/main">
+            <a:srgbClr val="EAF5FB"/>
+          </a:solidFill>
+          <a:ln xmlns:a="http://schemas.openxmlformats.org/drawingml/2006/main" w="0">
+            <a:solidFill>
+              <a:srgbClr val="EAF5FB"/>
+            </a:solidFill>
+            <a:prstDash val="solid"/>
+          </a:ln>
+        </p:spPr>
+      </p:sp>
+      <p:sp>
+        <p:nvSpPr>
+          <p:cNvPr id="22" name="">
+            <a:extLst xmlns:a="http://schemas.openxmlformats.org/drawingml/2006/main">
+              <a:ext uri="{FF2B5EF4-FFF2-40B4-BE49-F238E27FC236}">
+                <a16:creationId xmlns:a16="http://schemas.microsoft.com/office/drawing/2014/main" id="{6E4C79AE-EB98-4B5B-B3D3-11ED0D4C729B}"/>
+              </a:ext>
+            </a:extLst>
+          </p:cNvPr>
+          <p:cNvSpPr>
+            <a:spLocks xmlns:a="http://schemas.openxmlformats.org/drawingml/2006/main" noGrp="1"/>
+          </p:cNvSpPr>
+          <p:nvPr/>
+        </p:nvSpPr>
+        <p:spPr>
+          <a:xfrm xmlns:a="http://schemas.openxmlformats.org/drawingml/2006/main">
+            <a:off x="781050" y="5524500"/>
+            <a:ext cx="2476500" cy="323850"/>
+          </a:xfrm>
+          <a:prstGeom xmlns:a="http://schemas.openxmlformats.org/drawingml/2006/main" prst="rect">
+            <a:avLst/>
+          </a:prstGeom>
+          <a:noFill xmlns:a="http://schemas.openxmlformats.org/drawingml/2006/main"/>
+          <a:ln xmlns:a="http://schemas.openxmlformats.org/drawingml/2006/main" w="0">
+            <a:noFill/>
+            <a:prstDash val="solid"/>
+          </a:ln>
+        </p:spPr>
+        <p:txBody>
+          <a:bodyPr xmlns:a="http://schemas.openxmlformats.org/drawingml/2006/main" wrap="square" lIns="0" tIns="0" rIns="0" bIns="0" anchor="t">
+            <a:normAutofit fontScale="100000"/>
+          </a:bodyPr>
+          <a:lstStyle xmlns:a="http://schemas.openxmlformats.org/drawingml/2006/main"/>
+          <a:p xmlns:a="http://schemas.openxmlformats.org/drawingml/2006/main">
+            <a:pPr algn="l">
+              <a:buNone/>
+              <a:defRPr sz="1725" b="1">
+                <a:solidFill>
+                  <a:srgbClr val="3D8DFF"/>
+                </a:solidFill>
+                <a:latin typeface="Arial"/>
+                <a:ea typeface="Arial"/>
+                <a:cs typeface="Arial"/>
+              </a:defRPr>
+            </a:pPr>
+            <a:r>
+              <a:rPr sz="1725" b="1">
+                <a:solidFill>
+                  <a:srgbClr val="3D8DFF"/>
+                </a:solidFill>
+                <a:latin typeface="Arial"/>
+                <a:ea typeface="Arial"/>
+                <a:cs typeface="Arial"/>
+              </a:rPr>
+              <a:t>TRENDING ALL</a:t>
+            </a:r>
+          </a:p>
+        </p:txBody>
+      </p:sp>
+      <p:sp>
+        <p:nvSpPr>
+          <p:cNvPr id="23" name="">
+            <a:extLst xmlns:a="http://schemas.openxmlformats.org/drawingml/2006/main">
+              <a:ext uri="{FF2B5EF4-FFF2-40B4-BE49-F238E27FC236}">
+                <a16:creationId xmlns:a16="http://schemas.microsoft.com/office/drawing/2014/main" id="{3320D60E-6067-4236-80ED-A898A863026E}"/>
+              </a:ext>
+            </a:extLst>
+          </p:cNvPr>
+          <p:cNvSpPr>
+            <a:spLocks xmlns:a="http://schemas.openxmlformats.org/drawingml/2006/main" noGrp="1"/>
+          </p:cNvSpPr>
+          <p:nvPr/>
+        </p:nvSpPr>
+        <p:spPr>
+          <a:xfrm xmlns:a="http://schemas.openxmlformats.org/drawingml/2006/main">
+            <a:off x="3333750" y="5486400"/>
+            <a:ext cx="7810500" cy="419100"/>
+          </a:xfrm>
+          <a:prstGeom xmlns:a="http://schemas.openxmlformats.org/drawingml/2006/main" prst="rect">
+            <a:avLst/>
+          </a:prstGeom>
+          <a:noFill xmlns:a="http://schemas.openxmlformats.org/drawingml/2006/main"/>
+          <a:ln xmlns:a="http://schemas.openxmlformats.org/drawingml/2006/main" w="0">
+            <a:noFill/>
+            <a:prstDash val="solid"/>
+          </a:ln>
+        </p:spPr>
+        <p:txBody>
+          <a:bodyPr xmlns:a="http://schemas.openxmlformats.org/drawingml/2006/main" wrap="square" lIns="0" tIns="0" rIns="0" bIns="0" anchor="t">
+            <a:normAutofit fontScale="76389"/>
+          </a:bodyPr>
+          <a:lstStyle xmlns:a="http://schemas.openxmlformats.org/drawingml/2006/main"/>
+          <a:p xmlns:a="http://schemas.openxmlformats.org/drawingml/2006/main">
+            <a:pPr algn="l">
+              <a:buNone/>
+              <a:defRPr sz="1800" b="1">
+                <a:solidFill>
+                  <a:srgbClr val="273548"/>
+                </a:solidFill>
+                <a:latin typeface="Arial"/>
+                <a:ea typeface="Arial"/>
+                <a:cs typeface="Arial"/>
+              </a:defRPr>
+            </a:pPr>
+            <a:r>
+              <a:rPr sz="1800" b="1">
+                <a:solidFill>
+                  <a:srgbClr val="273548"/>
+                </a:solidFill>
+                <a:latin typeface="Arial"/>
+                <a:ea typeface="Arial"/>
+                <a:cs typeface="Arial"/>
+              </a:rPr>
+              <a:t>Any R20 with ER20 ≥ 0.30. All branches share the same non-overlap, next-open execution and unconditional 20-day drift baseline.</a:t>
+            </a:r>
+          </a:p>
+        </p:txBody>
+      </p:sp>
+    </p:spTree>
+    <p:extLst>
+      <p:ext uri="{BB962C8B-B14F-4D97-AF65-F5344CB8AC3E}">
+        <p14:creationId xmlns:p14="http://schemas.microsoft.com/office/powerpoint/2010/main" val="666536286"/>
+      </p:ext>
+    </p:extLst>
+  </p:cSld>
+</p:sld>
+</file>
+
+<file path=ppt/slides/slide26.xml><?xml version="1.0" encoding="utf-8"?>
+<p:sld xmlns:p="http://schemas.openxmlformats.org/presentationml/2006/main">
+  <p:cSld>
+    <p:bg>
+      <p:bgPr>
+        <a:solidFill xmlns:a="http://schemas.openxmlformats.org/drawingml/2006/main">
+          <a:srgbClr val="FFFFFF"/>
+        </a:solidFill>
+      </p:bgPr>
+    </p:bg>
+    <p:spTree>
+      <p:nvGrpSpPr>
+        <p:cNvPr id="1" name=""/>
+        <p:cNvGrpSpPr/>
+        <p:nvPr/>
+      </p:nvGrpSpPr>
+      <p:grpSpPr>
+        <a:xfrm xmlns:a="http://schemas.openxmlformats.org/drawingml/2006/main"/>
+      </p:grpSpPr>
+      <p:sp>
+        <p:nvSpPr>
+          <p:cNvPr id="24" name="section-11">
+            <a:extLst xmlns:a="http://schemas.openxmlformats.org/drawingml/2006/main">
+              <a:ext uri="{FF2B5EF4-FFF2-40B4-BE49-F238E27FC236}">
+                <a16:creationId xmlns:a16="http://schemas.microsoft.com/office/drawing/2014/main" id="{272ED433-B59C-436C-9DFB-4D317B90A13F}"/>
+              </a:ext>
+            </a:extLst>
+          </p:cNvPr>
+          <p:cNvSpPr>
+            <a:spLocks xmlns:a="http://schemas.openxmlformats.org/drawingml/2006/main" noGrp="1"/>
+          </p:cNvSpPr>
+          <p:nvPr/>
+        </p:nvSpPr>
+        <p:spPr>
+          <a:xfrm xmlns:a="http://schemas.openxmlformats.org/drawingml/2006/main">
+            <a:off x="457200" y="228600"/>
+            <a:ext cx="4191000" cy="228600"/>
+          </a:xfrm>
+          <a:prstGeom xmlns:a="http://schemas.openxmlformats.org/drawingml/2006/main" prst="rect">
+            <a:avLst/>
+          </a:prstGeom>
+          <a:noFill xmlns:a="http://schemas.openxmlformats.org/drawingml/2006/main"/>
+          <a:ln xmlns:a="http://schemas.openxmlformats.org/drawingml/2006/main" w="0">
+            <a:noFill/>
+            <a:prstDash val="solid"/>
+          </a:ln>
+        </p:spPr>
+        <p:txBody>
+          <a:bodyPr xmlns:a="http://schemas.openxmlformats.org/drawingml/2006/main" wrap="square" lIns="0" tIns="0" rIns="0" bIns="0" anchor="t">
+            <a:normAutofit fontScale="100000"/>
+          </a:bodyPr>
+          <a:lstStyle xmlns:a="http://schemas.openxmlformats.org/drawingml/2006/main"/>
+          <a:p xmlns:a="http://schemas.openxmlformats.org/drawingml/2006/main">
+            <a:pPr algn="l">
+              <a:buNone/>
+              <a:defRPr sz="1200" b="1">
+                <a:solidFill>
+                  <a:srgbClr val="667384"/>
+                </a:solidFill>
+                <a:latin typeface="Arial"/>
+                <a:ea typeface="Arial"/>
+                <a:cs typeface="Arial"/>
+              </a:defRPr>
+            </a:pPr>
+            <a:r>
+              <a:rPr sz="1200" b="1">
+                <a:solidFill>
+                  <a:srgbClr val="667384"/>
+                </a:solidFill>
+                <a:latin typeface="Arial"/>
+                <a:ea typeface="Arial"/>
+                <a:cs typeface="Arial"/>
+              </a:rPr>
+              <a:t>BRANCH ATTRIBUTION</a:t>
+            </a:r>
+          </a:p>
+        </p:txBody>
+      </p:sp>
+      <p:sp>
+        <p:nvSpPr>
+          <p:cNvPr id="2" name="title-11">
+            <a:extLst xmlns:a="http://schemas.openxmlformats.org/drawingml/2006/main">
+              <a:ext uri="{FF2B5EF4-FFF2-40B4-BE49-F238E27FC236}">
+                <a16:creationId xmlns:a16="http://schemas.microsoft.com/office/drawing/2014/main" id="{3EC40708-7E00-432C-8ECE-907FA5705292}"/>
+              </a:ext>
+            </a:extLst>
+          </p:cNvPr>
+          <p:cNvSpPr>
+            <a:spLocks xmlns:a="http://schemas.openxmlformats.org/drawingml/2006/main" noGrp="1"/>
+          </p:cNvSpPr>
+          <p:nvPr/>
+        </p:nvSpPr>
+        <p:spPr>
+          <a:xfrm xmlns:a="http://schemas.openxmlformats.org/drawingml/2006/main">
+            <a:off x="457200" y="533400"/>
+            <a:ext cx="11277600" cy="628650"/>
+          </a:xfrm>
+          <a:prstGeom xmlns:a="http://schemas.openxmlformats.org/drawingml/2006/main" prst="rect">
+            <a:avLst/>
+          </a:prstGeom>
+          <a:noFill xmlns:a="http://schemas.openxmlformats.org/drawingml/2006/main"/>
+          <a:ln xmlns:a="http://schemas.openxmlformats.org/drawingml/2006/main" w="0">
+            <a:noFill/>
+            <a:prstDash val="solid"/>
+          </a:ln>
+        </p:spPr>
+        <p:txBody>
+          <a:bodyPr xmlns:a="http://schemas.openxmlformats.org/drawingml/2006/main" wrap="square" lIns="0" tIns="0" rIns="0" bIns="0" anchor="t">
+            <a:normAutofit fontScale="100000"/>
+          </a:bodyPr>
+          <a:lstStyle xmlns:a="http://schemas.openxmlformats.org/drawingml/2006/main"/>
+          <a:p xmlns:a="http://schemas.openxmlformats.org/drawingml/2006/main">
+            <a:pPr algn="l">
+              <a:buNone/>
+              <a:defRPr sz="3525" b="1">
+                <a:solidFill>
+                  <a:srgbClr val="000000"/>
+                </a:solidFill>
+                <a:latin typeface="Arial"/>
+                <a:ea typeface="Arial"/>
+                <a:cs typeface="Arial"/>
+              </a:defRPr>
+            </a:pPr>
+            <a:r>
+              <a:rPr sz="3525" b="1">
+                <a:solidFill>
+                  <a:srgbClr val="000000"/>
+                </a:solidFill>
+                <a:latin typeface="Arial"/>
+                <a:ea typeface="Arial"/>
+                <a:cs typeface="Arial"/>
+              </a:rPr>
+              <a:t>Only the negative-prior branch clears ordinary drift</a:t>
+            </a:r>
+          </a:p>
+        </p:txBody>
+      </p:sp>
+      <p:sp>
+        <p:nvSpPr>
+          <p:cNvPr id="3" name="">
+            <a:extLst xmlns:a="http://schemas.openxmlformats.org/drawingml/2006/main">
+              <a:ext uri="{FF2B5EF4-FFF2-40B4-BE49-F238E27FC236}">
+                <a16:creationId xmlns:a16="http://schemas.microsoft.com/office/drawing/2014/main" id="{D5CA0FCE-75E8-41EF-A76A-23E9E2120C6A}"/>
+              </a:ext>
+            </a:extLst>
+          </p:cNvPr>
+          <p:cNvSpPr>
+            <a:spLocks xmlns:a="http://schemas.openxmlformats.org/drawingml/2006/main" noGrp="1"/>
+          </p:cNvSpPr>
+          <p:nvPr/>
+        </p:nvSpPr>
+        <p:spPr>
+          <a:xfrm xmlns:a="http://schemas.openxmlformats.org/drawingml/2006/main">
+            <a:off x="457200" y="1200150"/>
+            <a:ext cx="11277600" cy="19050"/>
+          </a:xfrm>
+          <a:prstGeom xmlns:a="http://schemas.openxmlformats.org/drawingml/2006/main" prst="rect">
+            <a:avLst/>
+          </a:prstGeom>
+          <a:solidFill xmlns:a="http://schemas.openxmlformats.org/drawingml/2006/main">
+            <a:srgbClr val="B8BCC4"/>
+          </a:solidFill>
+          <a:ln xmlns:a="http://schemas.openxmlformats.org/drawingml/2006/main" w="0">
+            <a:solidFill>
+              <a:srgbClr val="B8BCC4"/>
+            </a:solidFill>
+            <a:prstDash val="solid"/>
+          </a:ln>
+        </p:spPr>
+      </p:sp>
+      <p:sp>
+        <p:nvSpPr>
+          <p:cNvPr id="4" name="footer-left-11">
+            <a:extLst xmlns:a="http://schemas.openxmlformats.org/drawingml/2006/main">
+              <a:ext uri="{FF2B5EF4-FFF2-40B4-BE49-F238E27FC236}">
+                <a16:creationId xmlns:a16="http://schemas.microsoft.com/office/drawing/2014/main" id="{700DA765-80E0-4197-8700-00D867B86FA2}"/>
+              </a:ext>
+            </a:extLst>
+          </p:cNvPr>
+          <p:cNvSpPr>
+            <a:spLocks xmlns:a="http://schemas.openxmlformats.org/drawingml/2006/main" noGrp="1"/>
+          </p:cNvSpPr>
+          <p:nvPr/>
+        </p:nvSpPr>
+        <p:spPr>
+          <a:xfrm xmlns:a="http://schemas.openxmlformats.org/drawingml/2006/main">
+            <a:off x="457200" y="6515100"/>
+            <a:ext cx="3429000" cy="171450"/>
+          </a:xfrm>
+          <a:prstGeom xmlns:a="http://schemas.openxmlformats.org/drawingml/2006/main" prst="rect">
+            <a:avLst/>
+          </a:prstGeom>
+          <a:noFill xmlns:a="http://schemas.openxmlformats.org/drawingml/2006/main"/>
+          <a:ln xmlns:a="http://schemas.openxmlformats.org/drawingml/2006/main" w="0">
+            <a:noFill/>
+            <a:prstDash val="solid"/>
+          </a:ln>
+        </p:spPr>
+        <p:txBody>
+          <a:bodyPr xmlns:a="http://schemas.openxmlformats.org/drawingml/2006/main" wrap="square" lIns="0" tIns="0" rIns="0" bIns="0" anchor="t">
+            <a:normAutofit fontScale="100000"/>
+          </a:bodyPr>
+          <a:lstStyle xmlns:a="http://schemas.openxmlformats.org/drawingml/2006/main"/>
+          <a:p xmlns:a="http://schemas.openxmlformats.org/drawingml/2006/main">
+            <a:pPr algn="l">
+              <a:buNone/>
+              <a:defRPr sz="825" b="0">
+                <a:solidFill>
+                  <a:srgbClr val="64748B"/>
+                </a:solidFill>
+                <a:latin typeface="Arial"/>
+                <a:ea typeface="Arial"/>
+                <a:cs typeface="Arial"/>
+              </a:defRPr>
+            </a:pPr>
+            <a:r>
+              <a:rPr sz="825" b="0">
+                <a:solidFill>
+                  <a:srgbClr val="64748B"/>
+                </a:solidFill>
+                <a:latin typeface="Arial"/>
+                <a:ea typeface="Arial"/>
+                <a:cs typeface="Arial"/>
+              </a:rPr>
+              <a:t>Equal-sector median asset | net of 10 bp | unconditional 20d drift</a:t>
+            </a:r>
+          </a:p>
+        </p:txBody>
+      </p:sp>
+      <p:sp>
+        <p:nvSpPr>
+          <p:cNvPr id="5" name="footer-number-11">
+            <a:extLst xmlns:a="http://schemas.openxmlformats.org/drawingml/2006/main">
+              <a:ext uri="{FF2B5EF4-FFF2-40B4-BE49-F238E27FC236}">
+                <a16:creationId xmlns:a16="http://schemas.microsoft.com/office/drawing/2014/main" id="{83896276-4112-4532-AF7C-776C67C58B77}"/>
+              </a:ext>
+            </a:extLst>
+          </p:cNvPr>
+          <p:cNvSpPr>
+            <a:spLocks xmlns:a="http://schemas.openxmlformats.org/drawingml/2006/main" noGrp="1"/>
+          </p:cNvSpPr>
+          <p:nvPr/>
+        </p:nvSpPr>
+        <p:spPr>
+          <a:xfrm xmlns:a="http://schemas.openxmlformats.org/drawingml/2006/main">
+            <a:off x="10477500" y="6496050"/>
+            <a:ext cx="1257300" cy="190500"/>
+          </a:xfrm>
+          <a:prstGeom xmlns:a="http://schemas.openxmlformats.org/drawingml/2006/main" prst="rect">
+            <a:avLst/>
+          </a:prstGeom>
+          <a:noFill xmlns:a="http://schemas.openxmlformats.org/drawingml/2006/main"/>
+          <a:ln xmlns:a="http://schemas.openxmlformats.org/drawingml/2006/main" w="0">
+            <a:noFill/>
+            <a:prstDash val="solid"/>
+          </a:ln>
+        </p:spPr>
+        <p:txBody>
+          <a:bodyPr xmlns:a="http://schemas.openxmlformats.org/drawingml/2006/main" wrap="square" lIns="0" tIns="0" rIns="0" bIns="0" anchor="t">
+            <a:normAutofit fontScale="100000"/>
+          </a:bodyPr>
+          <a:lstStyle xmlns:a="http://schemas.openxmlformats.org/drawingml/2006/main"/>
+          <a:p xmlns:a="http://schemas.openxmlformats.org/drawingml/2006/main">
+            <a:pPr algn="r">
+              <a:buNone/>
+              <a:defRPr sz="1050" b="0">
+                <a:solidFill>
+                  <a:srgbClr val="667384"/>
+                </a:solidFill>
+                <a:latin typeface="Arial"/>
+                <a:ea typeface="Arial"/>
+                <a:cs typeface="Arial"/>
+              </a:defRPr>
+            </a:pPr>
+            <a:r>
+              <a:rPr sz="1050" b="0">
+                <a:solidFill>
+                  <a:srgbClr val="667384"/>
+                </a:solidFill>
+                <a:latin typeface="Arial"/>
+                <a:ea typeface="Arial"/>
+                <a:cs typeface="Arial"/>
+              </a:rPr>
+              <a:t>26</a:t>
+            </a:r>
+          </a:p>
+        </p:txBody>
+      </p:sp>
+      <p:pic>
+        <p:nvPicPr>
+          <p:cNvPr id="31" name=""/>
+          <p:cNvPicPr>
+            <a:picLocks xmlns:a="http://schemas.openxmlformats.org/drawingml/2006/main" noChangeAspect="1"/>
+          </p:cNvPicPr>
+          <p:nvPr/>
+        </p:nvPicPr>
+        <p:blipFill>
+          <a:blip xmlns:r="http://schemas.openxmlformats.org/officeDocument/2006/relationships" xmlns:a="http://schemas.openxmlformats.org/drawingml/2006/main" r:embed="Rd0874c6e94dd4d9b"/>
+          <a:stretch xmlns:a="http://schemas.openxmlformats.org/drawingml/2006/main"/>
+        </p:blipFill>
+        <p:spPr>
+          <a:xfrm xmlns:a="http://schemas.openxmlformats.org/drawingml/2006/main">
+            <a:off x="2885498" y="2152046"/>
+            <a:ext cx="6421005" cy="3411159"/>
+          </a:xfrm>
+          <a:prstGeom xmlns:a="http://schemas.openxmlformats.org/drawingml/2006/main" prst="rect">
+            <a:avLst/>
+          </a:prstGeom>
+        </p:spPr>
+      </p:pic>
+    </p:spTree>
+    <p:extLst>
+      <p:ext uri="{BB962C8B-B14F-4D97-AF65-F5344CB8AC3E}">
+        <p14:creationId xmlns:p14="http://schemas.microsoft.com/office/powerpoint/2010/main" val="666536286"/>
+      </p:ext>
+    </p:extLst>
+  </p:cSld>
+</p:sld>
+</file>
+
+<file path=ppt/slides/slide27.xml><?xml version="1.0" encoding="utf-8"?>
+<p:sld xmlns:p="http://schemas.openxmlformats.org/presentationml/2006/main">
+  <p:cSld>
+    <p:bg>
+      <p:bgPr>
+        <a:solidFill xmlns:a="http://schemas.openxmlformats.org/drawingml/2006/main">
+          <a:srgbClr val="FFFFFF"/>
+        </a:solidFill>
+      </p:bgPr>
+    </p:bg>
+    <p:spTree>
+      <p:nvGrpSpPr>
+        <p:cNvPr id="1" name=""/>
+        <p:cNvGrpSpPr/>
+        <p:nvPr/>
+      </p:nvGrpSpPr>
+      <p:grpSpPr>
+        <a:xfrm xmlns:a="http://schemas.openxmlformats.org/drawingml/2006/main"/>
+      </p:grpSpPr>
+      <p:sp>
+        <p:nvSpPr>
+          <p:cNvPr id="24" name="section-11">
+            <a:extLst xmlns:a="http://schemas.openxmlformats.org/drawingml/2006/main">
+              <a:ext uri="{FF2B5EF4-FFF2-40B4-BE49-F238E27FC236}">
+                <a16:creationId xmlns:a16="http://schemas.microsoft.com/office/drawing/2014/main" id="{272ED433-B59C-436C-9DFB-4D317B90A13F}"/>
+              </a:ext>
+            </a:extLst>
+          </p:cNvPr>
+          <p:cNvSpPr>
+            <a:spLocks xmlns:a="http://schemas.openxmlformats.org/drawingml/2006/main" noGrp="1"/>
+          </p:cNvSpPr>
+          <p:nvPr/>
+        </p:nvSpPr>
+        <p:spPr>
+          <a:xfrm xmlns:a="http://schemas.openxmlformats.org/drawingml/2006/main">
+            <a:off x="457200" y="228600"/>
+            <a:ext cx="4191000" cy="228600"/>
+          </a:xfrm>
+          <a:prstGeom xmlns:a="http://schemas.openxmlformats.org/drawingml/2006/main" prst="rect">
+            <a:avLst/>
+          </a:prstGeom>
+          <a:noFill xmlns:a="http://schemas.openxmlformats.org/drawingml/2006/main"/>
+          <a:ln xmlns:a="http://schemas.openxmlformats.org/drawingml/2006/main" w="0">
+            <a:noFill/>
+            <a:prstDash val="solid"/>
+          </a:ln>
+        </p:spPr>
+        <p:txBody>
+          <a:bodyPr xmlns:a="http://schemas.openxmlformats.org/drawingml/2006/main" wrap="square" lIns="0" tIns="0" rIns="0" bIns="0" anchor="t">
+            <a:normAutofit fontScale="100000"/>
+          </a:bodyPr>
+          <a:lstStyle xmlns:a="http://schemas.openxmlformats.org/drawingml/2006/main"/>
+          <a:p xmlns:a="http://schemas.openxmlformats.org/drawingml/2006/main">
+            <a:pPr algn="l">
+              <a:buNone/>
+              <a:defRPr sz="1200" b="1">
+                <a:solidFill>
+                  <a:srgbClr val="667384"/>
+                </a:solidFill>
+                <a:latin typeface="Arial"/>
+                <a:ea typeface="Arial"/>
+                <a:cs typeface="Arial"/>
+              </a:defRPr>
+            </a:pPr>
+            <a:r>
+              <a:rPr sz="1200" b="1">
+                <a:solidFill>
+                  <a:srgbClr val="667384"/>
+                </a:solidFill>
+                <a:latin typeface="Arial"/>
+                <a:ea typeface="Arial"/>
+                <a:cs typeface="Arial"/>
+              </a:rPr>
+              <a:t>WEIGHTING ROBUSTNESS</a:t>
+            </a:r>
+          </a:p>
+        </p:txBody>
+      </p:sp>
+      <p:sp>
+        <p:nvSpPr>
+          <p:cNvPr id="2" name="title-11">
+            <a:extLst xmlns:a="http://schemas.openxmlformats.org/drawingml/2006/main">
+              <a:ext uri="{FF2B5EF4-FFF2-40B4-BE49-F238E27FC236}">
+                <a16:creationId xmlns:a16="http://schemas.microsoft.com/office/drawing/2014/main" id="{3EC40708-7E00-432C-8ECE-907FA5705292}"/>
+              </a:ext>
+            </a:extLst>
+          </p:cNvPr>
+          <p:cNvSpPr>
+            <a:spLocks xmlns:a="http://schemas.openxmlformats.org/drawingml/2006/main" noGrp="1"/>
+          </p:cNvSpPr>
+          <p:nvPr/>
+        </p:nvSpPr>
+        <p:spPr>
+          <a:xfrm xmlns:a="http://schemas.openxmlformats.org/drawingml/2006/main">
+            <a:off x="457200" y="533400"/>
+            <a:ext cx="11277600" cy="628650"/>
+          </a:xfrm>
+          <a:prstGeom xmlns:a="http://schemas.openxmlformats.org/drawingml/2006/main" prst="rect">
+            <a:avLst/>
+          </a:prstGeom>
+          <a:noFill xmlns:a="http://schemas.openxmlformats.org/drawingml/2006/main"/>
+          <a:ln xmlns:a="http://schemas.openxmlformats.org/drawingml/2006/main" w="0">
+            <a:noFill/>
+            <a:prstDash val="solid"/>
+          </a:ln>
+        </p:spPr>
+        <p:txBody>
+          <a:bodyPr xmlns:a="http://schemas.openxmlformats.org/drawingml/2006/main" wrap="square" lIns="0" tIns="0" rIns="0" bIns="0" anchor="t">
+            <a:normAutofit fontScale="100000"/>
+          </a:bodyPr>
+          <a:lstStyle xmlns:a="http://schemas.openxmlformats.org/drawingml/2006/main"/>
+          <a:p xmlns:a="http://schemas.openxmlformats.org/drawingml/2006/main">
+            <a:pPr algn="l">
+              <a:buNone/>
+              <a:defRPr sz="3525" b="1">
+                <a:solidFill>
+                  <a:srgbClr val="000000"/>
+                </a:solidFill>
+                <a:latin typeface="Arial"/>
+                <a:ea typeface="Arial"/>
+                <a:cs typeface="Arial"/>
+              </a:defRPr>
+            </a:pPr>
+            <a:r>
+              <a:rPr sz="3525" b="1">
+                <a:solidFill>
+                  <a:srgbClr val="000000"/>
+                </a:solidFill>
+                <a:latin typeface="Arial"/>
+                <a:ea typeface="Arial"/>
+                <a:cs typeface="Arial"/>
+              </a:rPr>
+              <a:t>The rebound readout survives both weighting lenses</a:t>
+            </a:r>
+          </a:p>
+        </p:txBody>
+      </p:sp>
+      <p:sp>
+        <p:nvSpPr>
+          <p:cNvPr id="3" name="">
+            <a:extLst xmlns:a="http://schemas.openxmlformats.org/drawingml/2006/main">
+              <a:ext uri="{FF2B5EF4-FFF2-40B4-BE49-F238E27FC236}">
+                <a16:creationId xmlns:a16="http://schemas.microsoft.com/office/drawing/2014/main" id="{D5CA0FCE-75E8-41EF-A76A-23E9E2120C6A}"/>
+              </a:ext>
+            </a:extLst>
+          </p:cNvPr>
+          <p:cNvSpPr>
+            <a:spLocks xmlns:a="http://schemas.openxmlformats.org/drawingml/2006/main" noGrp="1"/>
+          </p:cNvSpPr>
+          <p:nvPr/>
+        </p:nvSpPr>
+        <p:spPr>
+          <a:xfrm xmlns:a="http://schemas.openxmlformats.org/drawingml/2006/main">
+            <a:off x="457200" y="1200150"/>
+            <a:ext cx="11277600" cy="19050"/>
+          </a:xfrm>
+          <a:prstGeom xmlns:a="http://schemas.openxmlformats.org/drawingml/2006/main" prst="rect">
+            <a:avLst/>
+          </a:prstGeom>
+          <a:solidFill xmlns:a="http://schemas.openxmlformats.org/drawingml/2006/main">
+            <a:srgbClr val="B8BCC4"/>
+          </a:solidFill>
+          <a:ln xmlns:a="http://schemas.openxmlformats.org/drawingml/2006/main" w="0">
+            <a:solidFill>
+              <a:srgbClr val="B8BCC4"/>
+            </a:solidFill>
+            <a:prstDash val="solid"/>
+          </a:ln>
+        </p:spPr>
+      </p:sp>
+      <p:sp>
+        <p:nvSpPr>
+          <p:cNvPr id="4" name="footer-left-11">
+            <a:extLst xmlns:a="http://schemas.openxmlformats.org/drawingml/2006/main">
+              <a:ext uri="{FF2B5EF4-FFF2-40B4-BE49-F238E27FC236}">
+                <a16:creationId xmlns:a16="http://schemas.microsoft.com/office/drawing/2014/main" id="{700DA765-80E0-4197-8700-00D867B86FA2}"/>
+              </a:ext>
+            </a:extLst>
+          </p:cNvPr>
+          <p:cNvSpPr>
+            <a:spLocks xmlns:a="http://schemas.openxmlformats.org/drawingml/2006/main" noGrp="1"/>
+          </p:cNvSpPr>
+          <p:nvPr/>
+        </p:nvSpPr>
+        <p:spPr>
+          <a:xfrm xmlns:a="http://schemas.openxmlformats.org/drawingml/2006/main">
+            <a:off x="457200" y="6515100"/>
+            <a:ext cx="3429000" cy="171450"/>
+          </a:xfrm>
+          <a:prstGeom xmlns:a="http://schemas.openxmlformats.org/drawingml/2006/main" prst="rect">
+            <a:avLst/>
+          </a:prstGeom>
+          <a:noFill xmlns:a="http://schemas.openxmlformats.org/drawingml/2006/main"/>
+          <a:ln xmlns:a="http://schemas.openxmlformats.org/drawingml/2006/main" w="0">
+            <a:noFill/>
+            <a:prstDash val="solid"/>
+          </a:ln>
+        </p:spPr>
+        <p:txBody>
+          <a:bodyPr xmlns:a="http://schemas.openxmlformats.org/drawingml/2006/main" wrap="square" lIns="0" tIns="0" rIns="0" bIns="0" anchor="t">
+            <a:normAutofit fontScale="100000"/>
+          </a:bodyPr>
+          <a:lstStyle xmlns:a="http://schemas.openxmlformats.org/drawingml/2006/main"/>
+          <a:p xmlns:a="http://schemas.openxmlformats.org/drawingml/2006/main">
+            <a:pPr algn="l">
+              <a:buNone/>
+              <a:defRPr sz="825" b="0">
+                <a:solidFill>
+                  <a:srgbClr val="64748B"/>
+                </a:solidFill>
+                <a:latin typeface="Arial"/>
+                <a:ea typeface="Arial"/>
+                <a:cs typeface="Arial"/>
+              </a:defRPr>
+            </a:pPr>
+            <a:r>
+              <a:rPr sz="825" b="0">
+                <a:solidFill>
+                  <a:srgbClr val="64748B"/>
+                </a:solidFill>
+                <a:latin typeface="Arial"/>
+                <a:ea typeface="Arial"/>
+                <a:cs typeface="Arial"/>
+              </a:rPr>
+              <a:t>Excess versus same-asset drift | bp per trade</a:t>
+            </a:r>
+          </a:p>
+        </p:txBody>
+      </p:sp>
+      <p:sp>
+        <p:nvSpPr>
+          <p:cNvPr id="5" name="footer-number-11">
+            <a:extLst xmlns:a="http://schemas.openxmlformats.org/drawingml/2006/main">
+              <a:ext uri="{FF2B5EF4-FFF2-40B4-BE49-F238E27FC236}">
+                <a16:creationId xmlns:a16="http://schemas.microsoft.com/office/drawing/2014/main" id="{83896276-4112-4532-AF7C-776C67C58B77}"/>
+              </a:ext>
+            </a:extLst>
+          </p:cNvPr>
+          <p:cNvSpPr>
+            <a:spLocks xmlns:a="http://schemas.openxmlformats.org/drawingml/2006/main" noGrp="1"/>
+          </p:cNvSpPr>
+          <p:nvPr/>
+        </p:nvSpPr>
+        <p:spPr>
+          <a:xfrm xmlns:a="http://schemas.openxmlformats.org/drawingml/2006/main">
+            <a:off x="10477500" y="6496050"/>
+            <a:ext cx="1257300" cy="190500"/>
+          </a:xfrm>
+          <a:prstGeom xmlns:a="http://schemas.openxmlformats.org/drawingml/2006/main" prst="rect">
+            <a:avLst/>
+          </a:prstGeom>
+          <a:noFill xmlns:a="http://schemas.openxmlformats.org/drawingml/2006/main"/>
+          <a:ln xmlns:a="http://schemas.openxmlformats.org/drawingml/2006/main" w="0">
+            <a:noFill/>
+            <a:prstDash val="solid"/>
+          </a:ln>
+        </p:spPr>
+        <p:txBody>
+          <a:bodyPr xmlns:a="http://schemas.openxmlformats.org/drawingml/2006/main" wrap="square" lIns="0" tIns="0" rIns="0" bIns="0" anchor="t">
+            <a:normAutofit fontScale="100000"/>
+          </a:bodyPr>
+          <a:lstStyle xmlns:a="http://schemas.openxmlformats.org/drawingml/2006/main"/>
+          <a:p xmlns:a="http://schemas.openxmlformats.org/drawingml/2006/main">
+            <a:pPr algn="r">
+              <a:buNone/>
+              <a:defRPr sz="1050" b="0">
+                <a:solidFill>
+                  <a:srgbClr val="667384"/>
+                </a:solidFill>
+                <a:latin typeface="Arial"/>
+                <a:ea typeface="Arial"/>
+                <a:cs typeface="Arial"/>
+              </a:defRPr>
+            </a:pPr>
+            <a:r>
+              <a:rPr sz="1050" b="0">
+                <a:solidFill>
+                  <a:srgbClr val="667384"/>
+                </a:solidFill>
+                <a:latin typeface="Arial"/>
+                <a:ea typeface="Arial"/>
+                <a:cs typeface="Arial"/>
+              </a:rPr>
+              <a:t>27</a:t>
+            </a:r>
+          </a:p>
+        </p:txBody>
+      </p:sp>
+      <p:pic>
+        <p:nvPicPr>
+          <p:cNvPr id="31" name=""/>
+          <p:cNvPicPr>
+            <a:picLocks xmlns:a="http://schemas.openxmlformats.org/drawingml/2006/main" noChangeAspect="1"/>
+          </p:cNvPicPr>
+          <p:nvPr/>
+        </p:nvPicPr>
+        <p:blipFill>
+          <a:blip xmlns:r="http://schemas.openxmlformats.org/officeDocument/2006/relationships" xmlns:a="http://schemas.openxmlformats.org/drawingml/2006/main" r:embed="Rb6f653fef4b64c28"/>
+          <a:stretch xmlns:a="http://schemas.openxmlformats.org/drawingml/2006/main"/>
+        </p:blipFill>
+        <p:spPr>
+          <a:xfrm xmlns:a="http://schemas.openxmlformats.org/drawingml/2006/main">
+            <a:off x="2885498" y="1931323"/>
+            <a:ext cx="6421005" cy="3852603"/>
+          </a:xfrm>
+          <a:prstGeom xmlns:a="http://schemas.openxmlformats.org/drawingml/2006/main" prst="rect">
+            <a:avLst/>
+          </a:prstGeom>
+        </p:spPr>
+      </p:pic>
+    </p:spTree>
+    <p:extLst>
+      <p:ext uri="{BB962C8B-B14F-4D97-AF65-F5344CB8AC3E}">
+        <p14:creationId xmlns:p14="http://schemas.microsoft.com/office/powerpoint/2010/main" val="666536286"/>
+      </p:ext>
+    </p:extLst>
+  </p:cSld>
+</p:sld>
+</file>
+
+<file path=ppt/slides/slide28.xml><?xml version="1.0" encoding="utf-8"?>
+<p:sld xmlns:p="http://schemas.openxmlformats.org/presentationml/2006/main">
+  <p:cSld>
+    <p:bg>
+      <p:bgPr>
+        <a:solidFill xmlns:a="http://schemas.openxmlformats.org/drawingml/2006/main">
+          <a:srgbClr val="FFFFFF"/>
+        </a:solidFill>
+      </p:bgPr>
+    </p:bg>
+    <p:spTree>
+      <p:nvGrpSpPr>
+        <p:cNvPr id="1" name=""/>
+        <p:cNvGrpSpPr/>
+        <p:nvPr/>
+      </p:nvGrpSpPr>
+      <p:grpSpPr>
+        <a:xfrm xmlns:a="http://schemas.openxmlformats.org/drawingml/2006/main"/>
+      </p:grpSpPr>
+      <p:sp>
+        <p:nvSpPr>
+          <p:cNvPr id="24" name="section-11">
+            <a:extLst xmlns:a="http://schemas.openxmlformats.org/drawingml/2006/main">
+              <a:ext uri="{FF2B5EF4-FFF2-40B4-BE49-F238E27FC236}">
+                <a16:creationId xmlns:a16="http://schemas.microsoft.com/office/drawing/2014/main" id="{272ED433-B59C-436C-9DFB-4D317B90A13F}"/>
+              </a:ext>
+            </a:extLst>
+          </p:cNvPr>
+          <p:cNvSpPr>
+            <a:spLocks xmlns:a="http://schemas.openxmlformats.org/drawingml/2006/main" noGrp="1"/>
+          </p:cNvSpPr>
+          <p:nvPr/>
+        </p:nvSpPr>
+        <p:spPr>
+          <a:xfrm xmlns:a="http://schemas.openxmlformats.org/drawingml/2006/main">
+            <a:off x="457200" y="228600"/>
+            <a:ext cx="4191000" cy="228600"/>
+          </a:xfrm>
+          <a:prstGeom xmlns:a="http://schemas.openxmlformats.org/drawingml/2006/main" prst="rect">
+            <a:avLst/>
+          </a:prstGeom>
+          <a:noFill xmlns:a="http://schemas.openxmlformats.org/drawingml/2006/main"/>
+          <a:ln xmlns:a="http://schemas.openxmlformats.org/drawingml/2006/main" w="0">
+            <a:noFill/>
+            <a:prstDash val="solid"/>
+          </a:ln>
+        </p:spPr>
+        <p:txBody>
+          <a:bodyPr xmlns:a="http://schemas.openxmlformats.org/drawingml/2006/main" wrap="square" lIns="0" tIns="0" rIns="0" bIns="0" anchor="t">
+            <a:normAutofit fontScale="100000"/>
+          </a:bodyPr>
+          <a:lstStyle xmlns:a="http://schemas.openxmlformats.org/drawingml/2006/main"/>
+          <a:p xmlns:a="http://schemas.openxmlformats.org/drawingml/2006/main">
+            <a:pPr algn="l">
+              <a:buNone/>
+              <a:defRPr sz="1200" b="1">
+                <a:solidFill>
+                  <a:srgbClr val="667384"/>
+                </a:solidFill>
+                <a:latin typeface="Arial"/>
+                <a:ea typeface="Arial"/>
+                <a:cs typeface="Arial"/>
+              </a:defRPr>
+            </a:pPr>
+            <a:r>
+              <a:rPr sz="1200" b="1">
+                <a:solidFill>
+                  <a:srgbClr val="667384"/>
+                </a:solidFill>
+                <a:latin typeface="Arial"/>
+                <a:ea typeface="Arial"/>
+                <a:cs typeface="Arial"/>
+              </a:rPr>
+              <a:t>SECTOR BREADTH</a:t>
+            </a:r>
+          </a:p>
+        </p:txBody>
+      </p:sp>
+      <p:sp>
+        <p:nvSpPr>
+          <p:cNvPr id="2" name="title-11">
+            <a:extLst xmlns:a="http://schemas.openxmlformats.org/drawingml/2006/main">
+              <a:ext uri="{FF2B5EF4-FFF2-40B4-BE49-F238E27FC236}">
+                <a16:creationId xmlns:a16="http://schemas.microsoft.com/office/drawing/2014/main" id="{3EC40708-7E00-432C-8ECE-907FA5705292}"/>
+              </a:ext>
+            </a:extLst>
+          </p:cNvPr>
+          <p:cNvSpPr>
+            <a:spLocks xmlns:a="http://schemas.openxmlformats.org/drawingml/2006/main" noGrp="1"/>
+          </p:cNvSpPr>
+          <p:nvPr/>
+        </p:nvSpPr>
+        <p:spPr>
+          <a:xfrm xmlns:a="http://schemas.openxmlformats.org/drawingml/2006/main">
+            <a:off x="457200" y="533400"/>
+            <a:ext cx="11277600" cy="628650"/>
+          </a:xfrm>
+          <a:prstGeom xmlns:a="http://schemas.openxmlformats.org/drawingml/2006/main" prst="rect">
+            <a:avLst/>
+          </a:prstGeom>
+          <a:noFill xmlns:a="http://schemas.openxmlformats.org/drawingml/2006/main"/>
+          <a:ln xmlns:a="http://schemas.openxmlformats.org/drawingml/2006/main" w="0">
+            <a:noFill/>
+            <a:prstDash val="solid"/>
+          </a:ln>
+        </p:spPr>
+        <p:txBody>
+          <a:bodyPr xmlns:a="http://schemas.openxmlformats.org/drawingml/2006/main" wrap="square" lIns="0" tIns="0" rIns="0" bIns="0" anchor="t">
+            <a:normAutofit fontScale="100000"/>
+          </a:bodyPr>
+          <a:lstStyle xmlns:a="http://schemas.openxmlformats.org/drawingml/2006/main"/>
+          <a:p xmlns:a="http://schemas.openxmlformats.org/drawingml/2006/main">
+            <a:pPr algn="l">
+              <a:buNone/>
+              <a:defRPr sz="3525" b="1">
+                <a:solidFill>
+                  <a:srgbClr val="000000"/>
+                </a:solidFill>
+                <a:latin typeface="Arial"/>
+                <a:ea typeface="Arial"/>
+                <a:cs typeface="Arial"/>
+              </a:defRPr>
+            </a:pPr>
+            <a:r>
+              <a:rPr sz="3525" b="1">
+                <a:solidFill>
+                  <a:srgbClr val="000000"/>
+                </a:solidFill>
+                <a:latin typeface="Arial"/>
+                <a:ea typeface="Arial"/>
+                <a:cs typeface="Arial"/>
+              </a:rPr>
+              <a:t>The negative branch clears drift in 7 of 11 sectors</a:t>
+            </a:r>
+          </a:p>
+        </p:txBody>
+      </p:sp>
+      <p:sp>
+        <p:nvSpPr>
+          <p:cNvPr id="3" name="">
+            <a:extLst xmlns:a="http://schemas.openxmlformats.org/drawingml/2006/main">
+              <a:ext uri="{FF2B5EF4-FFF2-40B4-BE49-F238E27FC236}">
+                <a16:creationId xmlns:a16="http://schemas.microsoft.com/office/drawing/2014/main" id="{D5CA0FCE-75E8-41EF-A76A-23E9E2120C6A}"/>
+              </a:ext>
+            </a:extLst>
+          </p:cNvPr>
+          <p:cNvSpPr>
+            <a:spLocks xmlns:a="http://schemas.openxmlformats.org/drawingml/2006/main" noGrp="1"/>
+          </p:cNvSpPr>
+          <p:nvPr/>
+        </p:nvSpPr>
+        <p:spPr>
+          <a:xfrm xmlns:a="http://schemas.openxmlformats.org/drawingml/2006/main">
+            <a:off x="457200" y="1200150"/>
+            <a:ext cx="11277600" cy="19050"/>
+          </a:xfrm>
+          <a:prstGeom xmlns:a="http://schemas.openxmlformats.org/drawingml/2006/main" prst="rect">
+            <a:avLst/>
+          </a:prstGeom>
+          <a:solidFill xmlns:a="http://schemas.openxmlformats.org/drawingml/2006/main">
+            <a:srgbClr val="B8BCC4"/>
+          </a:solidFill>
+          <a:ln xmlns:a="http://schemas.openxmlformats.org/drawingml/2006/main" w="0">
+            <a:solidFill>
+              <a:srgbClr val="B8BCC4"/>
+            </a:solidFill>
+            <a:prstDash val="solid"/>
+          </a:ln>
+        </p:spPr>
+      </p:sp>
+      <p:sp>
+        <p:nvSpPr>
+          <p:cNvPr id="4" name="footer-left-11">
+            <a:extLst xmlns:a="http://schemas.openxmlformats.org/drawingml/2006/main">
+              <a:ext uri="{FF2B5EF4-FFF2-40B4-BE49-F238E27FC236}">
+                <a16:creationId xmlns:a16="http://schemas.microsoft.com/office/drawing/2014/main" id="{700DA765-80E0-4197-8700-00D867B86FA2}"/>
+              </a:ext>
+            </a:extLst>
+          </p:cNvPr>
+          <p:cNvSpPr>
+            <a:spLocks xmlns:a="http://schemas.openxmlformats.org/drawingml/2006/main" noGrp="1"/>
+          </p:cNvSpPr>
+          <p:nvPr/>
+        </p:nvSpPr>
+        <p:spPr>
+          <a:xfrm xmlns:a="http://schemas.openxmlformats.org/drawingml/2006/main">
+            <a:off x="457200" y="6515100"/>
+            <a:ext cx="3429000" cy="171450"/>
+          </a:xfrm>
+          <a:prstGeom xmlns:a="http://schemas.openxmlformats.org/drawingml/2006/main" prst="rect">
+            <a:avLst/>
+          </a:prstGeom>
+          <a:noFill xmlns:a="http://schemas.openxmlformats.org/drawingml/2006/main"/>
+          <a:ln xmlns:a="http://schemas.openxmlformats.org/drawingml/2006/main" w="0">
+            <a:noFill/>
+            <a:prstDash val="solid"/>
+          </a:ln>
+        </p:spPr>
+        <p:txBody>
+          <a:bodyPr xmlns:a="http://schemas.openxmlformats.org/drawingml/2006/main" wrap="square" lIns="0" tIns="0" rIns="0" bIns="0" anchor="t">
+            <a:normAutofit fontScale="100000"/>
+          </a:bodyPr>
+          <a:lstStyle xmlns:a="http://schemas.openxmlformats.org/drawingml/2006/main"/>
+          <a:p xmlns:a="http://schemas.openxmlformats.org/drawingml/2006/main">
+            <a:pPr algn="l">
+              <a:buNone/>
+              <a:defRPr sz="825" b="0">
+                <a:solidFill>
+                  <a:srgbClr val="64748B"/>
+                </a:solidFill>
+                <a:latin typeface="Arial"/>
+                <a:ea typeface="Arial"/>
+                <a:cs typeface="Arial"/>
+              </a:defRPr>
+            </a:pPr>
+            <a:r>
+              <a:rPr sz="825" b="0">
+                <a:solidFill>
+                  <a:srgbClr val="64748B"/>
+                </a:solidFill>
+                <a:latin typeface="Arial"/>
+                <a:ea typeface="Arial"/>
+                <a:cs typeface="Arial"/>
+              </a:rPr>
+              <a:t>Sector median branch return minus same-asset drift | bp/trade</a:t>
+            </a:r>
+          </a:p>
+        </p:txBody>
+      </p:sp>
+      <p:sp>
+        <p:nvSpPr>
+          <p:cNvPr id="5" name="footer-number-11">
+            <a:extLst xmlns:a="http://schemas.openxmlformats.org/drawingml/2006/main">
+              <a:ext uri="{FF2B5EF4-FFF2-40B4-BE49-F238E27FC236}">
+                <a16:creationId xmlns:a16="http://schemas.microsoft.com/office/drawing/2014/main" id="{83896276-4112-4532-AF7C-776C67C58B77}"/>
+              </a:ext>
+            </a:extLst>
+          </p:cNvPr>
+          <p:cNvSpPr>
+            <a:spLocks xmlns:a="http://schemas.openxmlformats.org/drawingml/2006/main" noGrp="1"/>
+          </p:cNvSpPr>
+          <p:nvPr/>
+        </p:nvSpPr>
+        <p:spPr>
+          <a:xfrm xmlns:a="http://schemas.openxmlformats.org/drawingml/2006/main">
+            <a:off x="10477500" y="6496050"/>
+            <a:ext cx="1257300" cy="190500"/>
+          </a:xfrm>
+          <a:prstGeom xmlns:a="http://schemas.openxmlformats.org/drawingml/2006/main" prst="rect">
+            <a:avLst/>
+          </a:prstGeom>
+          <a:noFill xmlns:a="http://schemas.openxmlformats.org/drawingml/2006/main"/>
+          <a:ln xmlns:a="http://schemas.openxmlformats.org/drawingml/2006/main" w="0">
+            <a:noFill/>
+            <a:prstDash val="solid"/>
+          </a:ln>
+        </p:spPr>
+        <p:txBody>
+          <a:bodyPr xmlns:a="http://schemas.openxmlformats.org/drawingml/2006/main" wrap="square" lIns="0" tIns="0" rIns="0" bIns="0" anchor="t">
+            <a:normAutofit fontScale="100000"/>
+          </a:bodyPr>
+          <a:lstStyle xmlns:a="http://schemas.openxmlformats.org/drawingml/2006/main"/>
+          <a:p xmlns:a="http://schemas.openxmlformats.org/drawingml/2006/main">
+            <a:pPr algn="r">
+              <a:buNone/>
+              <a:defRPr sz="1050" b="0">
+                <a:solidFill>
+                  <a:srgbClr val="667384"/>
+                </a:solidFill>
+                <a:latin typeface="Arial"/>
+                <a:ea typeface="Arial"/>
+                <a:cs typeface="Arial"/>
+              </a:defRPr>
+            </a:pPr>
+            <a:r>
+              <a:rPr sz="1050" b="0">
+                <a:solidFill>
+                  <a:srgbClr val="667384"/>
+                </a:solidFill>
+                <a:latin typeface="Arial"/>
+                <a:ea typeface="Arial"/>
+                <a:cs typeface="Arial"/>
+              </a:rPr>
+              <a:t>28</a:t>
+            </a:r>
+          </a:p>
+        </p:txBody>
+      </p:sp>
+      <p:pic>
+        <p:nvPicPr>
+          <p:cNvPr id="31" name=""/>
+          <p:cNvPicPr>
+            <a:picLocks xmlns:a="http://schemas.openxmlformats.org/drawingml/2006/main" noChangeAspect="1"/>
+          </p:cNvPicPr>
+          <p:nvPr/>
+        </p:nvPicPr>
+        <p:blipFill>
+          <a:blip xmlns:r="http://schemas.openxmlformats.org/officeDocument/2006/relationships" xmlns:a="http://schemas.openxmlformats.org/drawingml/2006/main" r:embed="Rcce07ce30f2a4d07"/>
+          <a:stretch xmlns:a="http://schemas.openxmlformats.org/drawingml/2006/main"/>
+        </p:blipFill>
+        <p:spPr>
+          <a:xfrm xmlns:a="http://schemas.openxmlformats.org/drawingml/2006/main">
+            <a:off x="3281926" y="1981575"/>
+            <a:ext cx="5628150" cy="3752100"/>
+          </a:xfrm>
+          <a:prstGeom xmlns:a="http://schemas.openxmlformats.org/drawingml/2006/main" prst="rect">
+            <a:avLst/>
+          </a:prstGeom>
+        </p:spPr>
+      </p:pic>
+    </p:spTree>
+    <p:extLst>
+      <p:ext uri="{BB962C8B-B14F-4D97-AF65-F5344CB8AC3E}">
+        <p14:creationId xmlns:p14="http://schemas.microsoft.com/office/powerpoint/2010/main" val="666536286"/>
+      </p:ext>
+    </p:extLst>
+  </p:cSld>
+</p:sld>
+</file>
+
+<file path=ppt/slides/slide29.xml><?xml version="1.0" encoding="utf-8"?>
+<p:sld xmlns:p="http://schemas.openxmlformats.org/presentationml/2006/main">
+  <p:cSld>
+    <p:bg>
+      <p:bgPr>
+        <a:solidFill xmlns:a="http://schemas.openxmlformats.org/drawingml/2006/main">
+          <a:srgbClr val="FFFFFF"/>
+        </a:solidFill>
+      </p:bgPr>
+    </p:bg>
+    <p:spTree>
+      <p:nvGrpSpPr>
+        <p:cNvPr id="1" name=""/>
+        <p:cNvGrpSpPr/>
+        <p:nvPr/>
+      </p:nvGrpSpPr>
+      <p:grpSpPr>
+        <a:xfrm xmlns:a="http://schemas.openxmlformats.org/drawingml/2006/main"/>
+      </p:grpSpPr>
+      <p:sp>
+        <p:nvSpPr>
+          <p:cNvPr id="24" name="section-11">
+            <a:extLst xmlns:a="http://schemas.openxmlformats.org/drawingml/2006/main">
+              <a:ext uri="{FF2B5EF4-FFF2-40B4-BE49-F238E27FC236}">
+                <a16:creationId xmlns:a16="http://schemas.microsoft.com/office/drawing/2014/main" id="{272ED433-B59C-436C-9DFB-4D317B90A13F}"/>
+              </a:ext>
+            </a:extLst>
+          </p:cNvPr>
+          <p:cNvSpPr>
+            <a:spLocks xmlns:a="http://schemas.openxmlformats.org/drawingml/2006/main" noGrp="1"/>
+          </p:cNvSpPr>
+          <p:nvPr/>
+        </p:nvSpPr>
+        <p:spPr>
+          <a:xfrm xmlns:a="http://schemas.openxmlformats.org/drawingml/2006/main">
+            <a:off x="457200" y="228600"/>
+            <a:ext cx="4191000" cy="228600"/>
+          </a:xfrm>
+          <a:prstGeom xmlns:a="http://schemas.openxmlformats.org/drawingml/2006/main" prst="rect">
+            <a:avLst/>
+          </a:prstGeom>
+          <a:noFill xmlns:a="http://schemas.openxmlformats.org/drawingml/2006/main"/>
+          <a:ln xmlns:a="http://schemas.openxmlformats.org/drawingml/2006/main" w="0">
+            <a:noFill/>
+            <a:prstDash val="solid"/>
+          </a:ln>
+        </p:spPr>
+        <p:txBody>
+          <a:bodyPr xmlns:a="http://schemas.openxmlformats.org/drawingml/2006/main" wrap="square" lIns="0" tIns="0" rIns="0" bIns="0" anchor="t">
+            <a:normAutofit fontScale="100000"/>
+          </a:bodyPr>
+          <a:lstStyle xmlns:a="http://schemas.openxmlformats.org/drawingml/2006/main"/>
+          <a:p xmlns:a="http://schemas.openxmlformats.org/drawingml/2006/main">
+            <a:pPr algn="l">
+              <a:buNone/>
+              <a:defRPr sz="1200" b="1">
+                <a:solidFill>
+                  <a:srgbClr val="667384"/>
+                </a:solidFill>
+                <a:latin typeface="Arial"/>
+                <a:ea typeface="Arial"/>
+                <a:cs typeface="Arial"/>
+              </a:defRPr>
+            </a:pPr>
+            <a:r>
+              <a:rPr sz="1200" b="1">
+                <a:solidFill>
+                  <a:srgbClr val="667384"/>
+                </a:solidFill>
+                <a:latin typeface="Arial"/>
+                <a:ea typeface="Arial"/>
+                <a:cs typeface="Arial"/>
+              </a:rPr>
+              <a:t>PATH SHAPE</a:t>
+            </a:r>
+          </a:p>
+        </p:txBody>
+      </p:sp>
+      <p:sp>
+        <p:nvSpPr>
+          <p:cNvPr id="2" name="title-11">
+            <a:extLst xmlns:a="http://schemas.openxmlformats.org/drawingml/2006/main">
+              <a:ext uri="{FF2B5EF4-FFF2-40B4-BE49-F238E27FC236}">
+                <a16:creationId xmlns:a16="http://schemas.microsoft.com/office/drawing/2014/main" id="{3EC40708-7E00-432C-8ECE-907FA5705292}"/>
+              </a:ext>
+            </a:extLst>
+          </p:cNvPr>
+          <p:cNvSpPr>
+            <a:spLocks xmlns:a="http://schemas.openxmlformats.org/drawingml/2006/main" noGrp="1"/>
+          </p:cNvSpPr>
+          <p:nvPr/>
+        </p:nvSpPr>
+        <p:spPr>
+          <a:xfrm xmlns:a="http://schemas.openxmlformats.org/drawingml/2006/main">
+            <a:off x="457200" y="533400"/>
+            <a:ext cx="11277600" cy="628650"/>
+          </a:xfrm>
+          <a:prstGeom xmlns:a="http://schemas.openxmlformats.org/drawingml/2006/main" prst="rect">
+            <a:avLst/>
+          </a:prstGeom>
+          <a:noFill xmlns:a="http://schemas.openxmlformats.org/drawingml/2006/main"/>
+          <a:ln xmlns:a="http://schemas.openxmlformats.org/drawingml/2006/main" w="0">
+            <a:noFill/>
+            <a:prstDash val="solid"/>
+          </a:ln>
+        </p:spPr>
+        <p:txBody>
+          <a:bodyPr xmlns:a="http://schemas.openxmlformats.org/drawingml/2006/main" wrap="square" lIns="0" tIns="0" rIns="0" bIns="0" anchor="t">
+            <a:normAutofit fontScale="100000"/>
+          </a:bodyPr>
+          <a:lstStyle xmlns:a="http://schemas.openxmlformats.org/drawingml/2006/main"/>
+          <a:p xmlns:a="http://schemas.openxmlformats.org/drawingml/2006/main">
+            <a:pPr algn="l">
+              <a:buNone/>
+              <a:defRPr sz="3525" b="1">
+                <a:solidFill>
+                  <a:srgbClr val="000000"/>
+                </a:solidFill>
+                <a:latin typeface="Arial"/>
+                <a:ea typeface="Arial"/>
+                <a:cs typeface="Arial"/>
+              </a:defRPr>
+            </a:pPr>
+            <a:r>
+              <a:rPr sz="3525" b="1">
+                <a:solidFill>
+                  <a:srgbClr val="000000"/>
+                </a:solidFill>
+                <a:latin typeface="Arial"/>
+                <a:ea typeface="Arial"/>
+                <a:cs typeface="Arial"/>
+              </a:rPr>
+              <a:t>The negative branch finishes strongest—but late</a:t>
+            </a:r>
+          </a:p>
+        </p:txBody>
+      </p:sp>
+      <p:sp>
+        <p:nvSpPr>
+          <p:cNvPr id="3" name="">
+            <a:extLst xmlns:a="http://schemas.openxmlformats.org/drawingml/2006/main">
+              <a:ext uri="{FF2B5EF4-FFF2-40B4-BE49-F238E27FC236}">
+                <a16:creationId xmlns:a16="http://schemas.microsoft.com/office/drawing/2014/main" id="{D5CA0FCE-75E8-41EF-A76A-23E9E2120C6A}"/>
+              </a:ext>
+            </a:extLst>
+          </p:cNvPr>
+          <p:cNvSpPr>
+            <a:spLocks xmlns:a="http://schemas.openxmlformats.org/drawingml/2006/main" noGrp="1"/>
+          </p:cNvSpPr>
+          <p:nvPr/>
+        </p:nvSpPr>
+        <p:spPr>
+          <a:xfrm xmlns:a="http://schemas.openxmlformats.org/drawingml/2006/main">
+            <a:off x="457200" y="1200150"/>
+            <a:ext cx="11277600" cy="19050"/>
+          </a:xfrm>
+          <a:prstGeom xmlns:a="http://schemas.openxmlformats.org/drawingml/2006/main" prst="rect">
+            <a:avLst/>
+          </a:prstGeom>
+          <a:solidFill xmlns:a="http://schemas.openxmlformats.org/drawingml/2006/main">
+            <a:srgbClr val="B8BCC4"/>
+          </a:solidFill>
+          <a:ln xmlns:a="http://schemas.openxmlformats.org/drawingml/2006/main" w="0">
+            <a:solidFill>
+              <a:srgbClr val="B8BCC4"/>
+            </a:solidFill>
+            <a:prstDash val="solid"/>
+          </a:ln>
+        </p:spPr>
+      </p:sp>
+      <p:sp>
+        <p:nvSpPr>
+          <p:cNvPr id="4" name="footer-left-11">
+            <a:extLst xmlns:a="http://schemas.openxmlformats.org/drawingml/2006/main">
+              <a:ext uri="{FF2B5EF4-FFF2-40B4-BE49-F238E27FC236}">
+                <a16:creationId xmlns:a16="http://schemas.microsoft.com/office/drawing/2014/main" id="{700DA765-80E0-4197-8700-00D867B86FA2}"/>
+              </a:ext>
+            </a:extLst>
+          </p:cNvPr>
+          <p:cNvSpPr>
+            <a:spLocks xmlns:a="http://schemas.openxmlformats.org/drawingml/2006/main" noGrp="1"/>
+          </p:cNvSpPr>
+          <p:nvPr/>
+        </p:nvSpPr>
+        <p:spPr>
+          <a:xfrm xmlns:a="http://schemas.openxmlformats.org/drawingml/2006/main">
+            <a:off x="457200" y="6515100"/>
+            <a:ext cx="3429000" cy="171450"/>
+          </a:xfrm>
+          <a:prstGeom xmlns:a="http://schemas.openxmlformats.org/drawingml/2006/main" prst="rect">
+            <a:avLst/>
+          </a:prstGeom>
+          <a:noFill xmlns:a="http://schemas.openxmlformats.org/drawingml/2006/main"/>
+          <a:ln xmlns:a="http://schemas.openxmlformats.org/drawingml/2006/main" w="0">
+            <a:noFill/>
+            <a:prstDash val="solid"/>
+          </a:ln>
+        </p:spPr>
+        <p:txBody>
+          <a:bodyPr xmlns:a="http://schemas.openxmlformats.org/drawingml/2006/main" wrap="square" lIns="0" tIns="0" rIns="0" bIns="0" anchor="t">
+            <a:normAutofit fontScale="100000"/>
+          </a:bodyPr>
+          <a:lstStyle xmlns:a="http://schemas.openxmlformats.org/drawingml/2006/main"/>
+          <a:p xmlns:a="http://schemas.openxmlformats.org/drawingml/2006/main">
+            <a:pPr algn="l">
+              <a:buNone/>
+              <a:defRPr sz="825" b="0">
+                <a:solidFill>
+                  <a:srgbClr val="64748B"/>
+                </a:solidFill>
+                <a:latin typeface="Arial"/>
+                <a:ea typeface="Arial"/>
+                <a:cs typeface="Arial"/>
+              </a:defRPr>
+            </a:pPr>
+            <a:r>
+              <a:rPr sz="825" b="0">
+                <a:solidFill>
+                  <a:srgbClr val="64748B"/>
+                </a:solidFill>
+                <a:latin typeface="Arial"/>
+                <a:ea typeface="Arial"/>
+                <a:cs typeface="Arial"/>
+              </a:rPr>
+              <a:t>Core event-pooled mean path | 20-session executable trades</a:t>
+            </a:r>
+          </a:p>
+        </p:txBody>
+      </p:sp>
+      <p:sp>
+        <p:nvSpPr>
+          <p:cNvPr id="5" name="footer-number-11">
+            <a:extLst xmlns:a="http://schemas.openxmlformats.org/drawingml/2006/main">
+              <a:ext uri="{FF2B5EF4-FFF2-40B4-BE49-F238E27FC236}">
+                <a16:creationId xmlns:a16="http://schemas.microsoft.com/office/drawing/2014/main" id="{83896276-4112-4532-AF7C-776C67C58B77}"/>
+              </a:ext>
+            </a:extLst>
+          </p:cNvPr>
+          <p:cNvSpPr>
+            <a:spLocks xmlns:a="http://schemas.openxmlformats.org/drawingml/2006/main" noGrp="1"/>
+          </p:cNvSpPr>
+          <p:nvPr/>
+        </p:nvSpPr>
+        <p:spPr>
+          <a:xfrm xmlns:a="http://schemas.openxmlformats.org/drawingml/2006/main">
+            <a:off x="10477500" y="6496050"/>
+            <a:ext cx="1257300" cy="190500"/>
+          </a:xfrm>
+          <a:prstGeom xmlns:a="http://schemas.openxmlformats.org/drawingml/2006/main" prst="rect">
+            <a:avLst/>
+          </a:prstGeom>
+          <a:noFill xmlns:a="http://schemas.openxmlformats.org/drawingml/2006/main"/>
+          <a:ln xmlns:a="http://schemas.openxmlformats.org/drawingml/2006/main" w="0">
+            <a:noFill/>
+            <a:prstDash val="solid"/>
+          </a:ln>
+        </p:spPr>
+        <p:txBody>
+          <a:bodyPr xmlns:a="http://schemas.openxmlformats.org/drawingml/2006/main" wrap="square" lIns="0" tIns="0" rIns="0" bIns="0" anchor="t">
+            <a:normAutofit fontScale="100000"/>
+          </a:bodyPr>
+          <a:lstStyle xmlns:a="http://schemas.openxmlformats.org/drawingml/2006/main"/>
+          <a:p xmlns:a="http://schemas.openxmlformats.org/drawingml/2006/main">
+            <a:pPr algn="r">
+              <a:buNone/>
+              <a:defRPr sz="1050" b="0">
+                <a:solidFill>
+                  <a:srgbClr val="667384"/>
+                </a:solidFill>
+                <a:latin typeface="Arial"/>
+                <a:ea typeface="Arial"/>
+                <a:cs typeface="Arial"/>
+              </a:defRPr>
+            </a:pPr>
+            <a:r>
+              <a:rPr sz="1050" b="0">
+                <a:solidFill>
+                  <a:srgbClr val="667384"/>
+                </a:solidFill>
+                <a:latin typeface="Arial"/>
+                <a:ea typeface="Arial"/>
+                <a:cs typeface="Arial"/>
+              </a:rPr>
+              <a:t>29</a:t>
+            </a:r>
+          </a:p>
+        </p:txBody>
+      </p:sp>
+      <p:pic>
+        <p:nvPicPr>
+          <p:cNvPr id="31" name=""/>
+          <p:cNvPicPr>
+            <a:picLocks xmlns:a="http://schemas.openxmlformats.org/drawingml/2006/main" noChangeAspect="1"/>
+          </p:cNvPicPr>
+          <p:nvPr/>
+        </p:nvPicPr>
+        <p:blipFill>
+          <a:blip xmlns:r="http://schemas.openxmlformats.org/officeDocument/2006/relationships" xmlns:a="http://schemas.openxmlformats.org/drawingml/2006/main" r:embed="R8079298b63874dad"/>
+          <a:stretch xmlns:a="http://schemas.openxmlformats.org/drawingml/2006/main"/>
+        </p:blipFill>
+        <p:spPr>
+          <a:xfrm xmlns:a="http://schemas.openxmlformats.org/drawingml/2006/main">
+            <a:off x="3755009" y="2453030"/>
+            <a:ext cx="4681983" cy="2809190"/>
+          </a:xfrm>
+          <a:prstGeom xmlns:a="http://schemas.openxmlformats.org/drawingml/2006/main" prst="rect">
+            <a:avLst/>
+          </a:prstGeom>
+        </p:spPr>
+      </p:pic>
+    </p:spTree>
+    <p:extLst>
+      <p:ext uri="{BB962C8B-B14F-4D97-AF65-F5344CB8AC3E}">
+        <p14:creationId xmlns:p14="http://schemas.microsoft.com/office/powerpoint/2010/main" val="666536286"/>
+      </p:ext>
+    </p:extLst>
+  </p:cSld>
+</p:sld>
+</file>
+
 <file path=ppt/slides/slide3.xml><?xml version="1.0" encoding="utf-8"?>
 <p:sld xmlns:p="http://schemas.openxmlformats.org/presentationml/2006/main">
   <p:cSld>
@@ -12039,7 +15607,7 @@
           <p:nvPr/>
         </p:nvPicPr>
         <p:blipFill>
-          <a:blip xmlns:r="http://schemas.openxmlformats.org/officeDocument/2006/relationships" xmlns:a="http://schemas.openxmlformats.org/drawingml/2006/main" r:embed="Ra31306ee0c5741b7"/>
+          <a:blip xmlns:r="http://schemas.openxmlformats.org/officeDocument/2006/relationships" xmlns:a="http://schemas.openxmlformats.org/drawingml/2006/main" r:embed="Rdcc59c1c040d44c8"/>
           <a:stretch xmlns:a="http://schemas.openxmlformats.org/drawingml/2006/main"/>
         </p:blipFill>
         <p:spPr>
@@ -12052,6 +15620,1504 @@
           </a:prstGeom>
         </p:spPr>
       </p:pic>
+    </p:spTree>
+    <p:extLst>
+      <p:ext uri="{BB962C8B-B14F-4D97-AF65-F5344CB8AC3E}">
+        <p14:creationId xmlns:p14="http://schemas.microsoft.com/office/powerpoint/2010/main" val="666536286"/>
+      </p:ext>
+    </p:extLst>
+  </p:cSld>
+</p:sld>
+</file>
+
+<file path=ppt/slides/slide30.xml><?xml version="1.0" encoding="utf-8"?>
+<p:sld xmlns:p="http://schemas.openxmlformats.org/presentationml/2006/main">
+  <p:cSld>
+    <p:bg>
+      <p:bgPr>
+        <a:solidFill xmlns:a="http://schemas.openxmlformats.org/drawingml/2006/main">
+          <a:srgbClr val="FFFFFF"/>
+        </a:solidFill>
+      </p:bgPr>
+    </p:bg>
+    <p:spTree>
+      <p:nvGrpSpPr>
+        <p:cNvPr id="1" name=""/>
+        <p:cNvGrpSpPr/>
+        <p:nvPr/>
+      </p:nvGrpSpPr>
+      <p:grpSpPr>
+        <a:xfrm xmlns:a="http://schemas.openxmlformats.org/drawingml/2006/main"/>
+      </p:grpSpPr>
+      <p:sp>
+        <p:nvSpPr>
+          <p:cNvPr id="24" name="section-11">
+            <a:extLst xmlns:a="http://schemas.openxmlformats.org/drawingml/2006/main">
+              <a:ext uri="{FF2B5EF4-FFF2-40B4-BE49-F238E27FC236}">
+                <a16:creationId xmlns:a16="http://schemas.microsoft.com/office/drawing/2014/main" id="{272ED433-B59C-436C-9DFB-4D317B90A13F}"/>
+              </a:ext>
+            </a:extLst>
+          </p:cNvPr>
+          <p:cNvSpPr>
+            <a:spLocks xmlns:a="http://schemas.openxmlformats.org/drawingml/2006/main" noGrp="1"/>
+          </p:cNvSpPr>
+          <p:nvPr/>
+        </p:nvSpPr>
+        <p:spPr>
+          <a:xfrm xmlns:a="http://schemas.openxmlformats.org/drawingml/2006/main">
+            <a:off x="457200" y="228600"/>
+            <a:ext cx="4191000" cy="228600"/>
+          </a:xfrm>
+          <a:prstGeom xmlns:a="http://schemas.openxmlformats.org/drawingml/2006/main" prst="rect">
+            <a:avLst/>
+          </a:prstGeom>
+          <a:noFill xmlns:a="http://schemas.openxmlformats.org/drawingml/2006/main"/>
+          <a:ln xmlns:a="http://schemas.openxmlformats.org/drawingml/2006/main" w="0">
+            <a:noFill/>
+            <a:prstDash val="solid"/>
+          </a:ln>
+        </p:spPr>
+        <p:txBody>
+          <a:bodyPr xmlns:a="http://schemas.openxmlformats.org/drawingml/2006/main" wrap="square" lIns="0" tIns="0" rIns="0" bIns="0" anchor="t">
+            <a:normAutofit fontScale="100000"/>
+          </a:bodyPr>
+          <a:lstStyle xmlns:a="http://schemas.openxmlformats.org/drawingml/2006/main"/>
+          <a:p xmlns:a="http://schemas.openxmlformats.org/drawingml/2006/main">
+            <a:pPr algn="l">
+              <a:buNone/>
+              <a:defRPr sz="1200" b="1">
+                <a:solidFill>
+                  <a:srgbClr val="667384"/>
+                </a:solidFill>
+                <a:latin typeface="Arial"/>
+                <a:ea typeface="Arial"/>
+                <a:cs typeface="Arial"/>
+              </a:defRPr>
+            </a:pPr>
+            <a:r>
+              <a:rPr sz="1200" b="1">
+                <a:solidFill>
+                  <a:srgbClr val="667384"/>
+                </a:solidFill>
+                <a:latin typeface="Arial"/>
+                <a:ea typeface="Arial"/>
+                <a:cs typeface="Arial"/>
+              </a:rPr>
+              <a:t>TRADE TAPES</a:t>
+            </a:r>
+          </a:p>
+        </p:txBody>
+      </p:sp>
+      <p:sp>
+        <p:nvSpPr>
+          <p:cNvPr id="2" name="title-11">
+            <a:extLst xmlns:a="http://schemas.openxmlformats.org/drawingml/2006/main">
+              <a:ext uri="{FF2B5EF4-FFF2-40B4-BE49-F238E27FC236}">
+                <a16:creationId xmlns:a16="http://schemas.microsoft.com/office/drawing/2014/main" id="{3EC40708-7E00-432C-8ECE-907FA5705292}"/>
+              </a:ext>
+            </a:extLst>
+          </p:cNvPr>
+          <p:cNvSpPr>
+            <a:spLocks xmlns:a="http://schemas.openxmlformats.org/drawingml/2006/main" noGrp="1"/>
+          </p:cNvSpPr>
+          <p:nvPr/>
+        </p:nvSpPr>
+        <p:spPr>
+          <a:xfrm xmlns:a="http://schemas.openxmlformats.org/drawingml/2006/main">
+            <a:off x="457200" y="533400"/>
+            <a:ext cx="11277600" cy="628650"/>
+          </a:xfrm>
+          <a:prstGeom xmlns:a="http://schemas.openxmlformats.org/drawingml/2006/main" prst="rect">
+            <a:avLst/>
+          </a:prstGeom>
+          <a:noFill xmlns:a="http://schemas.openxmlformats.org/drawingml/2006/main"/>
+          <a:ln xmlns:a="http://schemas.openxmlformats.org/drawingml/2006/main" w="0">
+            <a:noFill/>
+            <a:prstDash val="solid"/>
+          </a:ln>
+        </p:spPr>
+        <p:txBody>
+          <a:bodyPr xmlns:a="http://schemas.openxmlformats.org/drawingml/2006/main" wrap="square" lIns="0" tIns="0" rIns="0" bIns="0" anchor="t">
+            <a:normAutofit fontScale="100000"/>
+          </a:bodyPr>
+          <a:lstStyle xmlns:a="http://schemas.openxmlformats.org/drawingml/2006/main"/>
+          <a:p xmlns:a="http://schemas.openxmlformats.org/drawingml/2006/main">
+            <a:pPr algn="l">
+              <a:buNone/>
+              <a:defRPr sz="3525" b="1">
+                <a:solidFill>
+                  <a:srgbClr val="000000"/>
+                </a:solidFill>
+                <a:latin typeface="Arial"/>
+                <a:ea typeface="Arial"/>
+                <a:cs typeface="Arial"/>
+              </a:defRPr>
+            </a:pPr>
+            <a:r>
+              <a:rPr sz="3525" b="1">
+                <a:solidFill>
+                  <a:srgbClr val="000000"/>
+                </a:solidFill>
+                <a:latin typeface="Arial"/>
+                <a:ea typeface="Arial"/>
+                <a:cs typeface="Arial"/>
+              </a:rPr>
+              <a:t>Individual paths keep the modest aggregate honest</a:t>
+            </a:r>
+          </a:p>
+        </p:txBody>
+      </p:sp>
+      <p:sp>
+        <p:nvSpPr>
+          <p:cNvPr id="3" name="">
+            <a:extLst xmlns:a="http://schemas.openxmlformats.org/drawingml/2006/main">
+              <a:ext uri="{FF2B5EF4-FFF2-40B4-BE49-F238E27FC236}">
+                <a16:creationId xmlns:a16="http://schemas.microsoft.com/office/drawing/2014/main" id="{D5CA0FCE-75E8-41EF-A76A-23E9E2120C6A}"/>
+              </a:ext>
+            </a:extLst>
+          </p:cNvPr>
+          <p:cNvSpPr>
+            <a:spLocks xmlns:a="http://schemas.openxmlformats.org/drawingml/2006/main" noGrp="1"/>
+          </p:cNvSpPr>
+          <p:nvPr/>
+        </p:nvSpPr>
+        <p:spPr>
+          <a:xfrm xmlns:a="http://schemas.openxmlformats.org/drawingml/2006/main">
+            <a:off x="457200" y="1200150"/>
+            <a:ext cx="11277600" cy="19050"/>
+          </a:xfrm>
+          <a:prstGeom xmlns:a="http://schemas.openxmlformats.org/drawingml/2006/main" prst="rect">
+            <a:avLst/>
+          </a:prstGeom>
+          <a:solidFill xmlns:a="http://schemas.openxmlformats.org/drawingml/2006/main">
+            <a:srgbClr val="B8BCC4"/>
+          </a:solidFill>
+          <a:ln xmlns:a="http://schemas.openxmlformats.org/drawingml/2006/main" w="0">
+            <a:solidFill>
+              <a:srgbClr val="B8BCC4"/>
+            </a:solidFill>
+            <a:prstDash val="solid"/>
+          </a:ln>
+        </p:spPr>
+      </p:sp>
+      <p:sp>
+        <p:nvSpPr>
+          <p:cNvPr id="4" name="footer-left-11">
+            <a:extLst xmlns:a="http://schemas.openxmlformats.org/drawingml/2006/main">
+              <a:ext uri="{FF2B5EF4-FFF2-40B4-BE49-F238E27FC236}">
+                <a16:creationId xmlns:a16="http://schemas.microsoft.com/office/drawing/2014/main" id="{700DA765-80E0-4197-8700-00D867B86FA2}"/>
+              </a:ext>
+            </a:extLst>
+          </p:cNvPr>
+          <p:cNvSpPr>
+            <a:spLocks xmlns:a="http://schemas.openxmlformats.org/drawingml/2006/main" noGrp="1"/>
+          </p:cNvSpPr>
+          <p:nvPr/>
+        </p:nvSpPr>
+        <p:spPr>
+          <a:xfrm xmlns:a="http://schemas.openxmlformats.org/drawingml/2006/main">
+            <a:off x="457200" y="6515100"/>
+            <a:ext cx="3429000" cy="171450"/>
+          </a:xfrm>
+          <a:prstGeom xmlns:a="http://schemas.openxmlformats.org/drawingml/2006/main" prst="rect">
+            <a:avLst/>
+          </a:prstGeom>
+          <a:noFill xmlns:a="http://schemas.openxmlformats.org/drawingml/2006/main"/>
+          <a:ln xmlns:a="http://schemas.openxmlformats.org/drawingml/2006/main" w="0">
+            <a:noFill/>
+            <a:prstDash val="solid"/>
+          </a:ln>
+        </p:spPr>
+        <p:txBody>
+          <a:bodyPr xmlns:a="http://schemas.openxmlformats.org/drawingml/2006/main" wrap="square" lIns="0" tIns="0" rIns="0" bIns="0" anchor="t">
+            <a:normAutofit fontScale="98877"/>
+          </a:bodyPr>
+          <a:lstStyle xmlns:a="http://schemas.openxmlformats.org/drawingml/2006/main"/>
+          <a:p xmlns:a="http://schemas.openxmlformats.org/drawingml/2006/main">
+            <a:pPr algn="l">
+              <a:buNone/>
+              <a:defRPr sz="825" b="0">
+                <a:solidFill>
+                  <a:srgbClr val="64748B"/>
+                </a:solidFill>
+                <a:latin typeface="Arial"/>
+                <a:ea typeface="Arial"/>
+                <a:cs typeface="Arial"/>
+              </a:defRPr>
+            </a:pPr>
+            <a:r>
+              <a:rPr sz="825" b="0">
+                <a:solidFill>
+                  <a:srgbClr val="64748B"/>
+                </a:solidFill>
+                <a:latin typeface="Arial"/>
+                <a:ea typeface="Arial"/>
+                <a:cs typeface="Arial"/>
+              </a:rPr>
+              <a:t>First eligible sign-qualified 20d events | deterministic, not outcome-selected</a:t>
+            </a:r>
+          </a:p>
+        </p:txBody>
+      </p:sp>
+      <p:sp>
+        <p:nvSpPr>
+          <p:cNvPr id="5" name="footer-number-11">
+            <a:extLst xmlns:a="http://schemas.openxmlformats.org/drawingml/2006/main">
+              <a:ext uri="{FF2B5EF4-FFF2-40B4-BE49-F238E27FC236}">
+                <a16:creationId xmlns:a16="http://schemas.microsoft.com/office/drawing/2014/main" id="{83896276-4112-4532-AF7C-776C67C58B77}"/>
+              </a:ext>
+            </a:extLst>
+          </p:cNvPr>
+          <p:cNvSpPr>
+            <a:spLocks xmlns:a="http://schemas.openxmlformats.org/drawingml/2006/main" noGrp="1"/>
+          </p:cNvSpPr>
+          <p:nvPr/>
+        </p:nvSpPr>
+        <p:spPr>
+          <a:xfrm xmlns:a="http://schemas.openxmlformats.org/drawingml/2006/main">
+            <a:off x="10477500" y="6496050"/>
+            <a:ext cx="1257300" cy="190500"/>
+          </a:xfrm>
+          <a:prstGeom xmlns:a="http://schemas.openxmlformats.org/drawingml/2006/main" prst="rect">
+            <a:avLst/>
+          </a:prstGeom>
+          <a:noFill xmlns:a="http://schemas.openxmlformats.org/drawingml/2006/main"/>
+          <a:ln xmlns:a="http://schemas.openxmlformats.org/drawingml/2006/main" w="0">
+            <a:noFill/>
+            <a:prstDash val="solid"/>
+          </a:ln>
+        </p:spPr>
+        <p:txBody>
+          <a:bodyPr xmlns:a="http://schemas.openxmlformats.org/drawingml/2006/main" wrap="square" lIns="0" tIns="0" rIns="0" bIns="0" anchor="t">
+            <a:normAutofit fontScale="100000"/>
+          </a:bodyPr>
+          <a:lstStyle xmlns:a="http://schemas.openxmlformats.org/drawingml/2006/main"/>
+          <a:p xmlns:a="http://schemas.openxmlformats.org/drawingml/2006/main">
+            <a:pPr algn="r">
+              <a:buNone/>
+              <a:defRPr sz="1050" b="0">
+                <a:solidFill>
+                  <a:srgbClr val="667384"/>
+                </a:solidFill>
+                <a:latin typeface="Arial"/>
+                <a:ea typeface="Arial"/>
+                <a:cs typeface="Arial"/>
+              </a:defRPr>
+            </a:pPr>
+            <a:r>
+              <a:rPr sz="1050" b="0">
+                <a:solidFill>
+                  <a:srgbClr val="667384"/>
+                </a:solidFill>
+                <a:latin typeface="Arial"/>
+                <a:ea typeface="Arial"/>
+                <a:cs typeface="Arial"/>
+              </a:rPr>
+              <a:t>30</a:t>
+            </a:r>
+          </a:p>
+        </p:txBody>
+      </p:sp>
+      <p:pic>
+        <p:nvPicPr>
+          <p:cNvPr id="31" name=""/>
+          <p:cNvPicPr>
+            <a:picLocks xmlns:a="http://schemas.openxmlformats.org/drawingml/2006/main" noChangeAspect="1"/>
+          </p:cNvPicPr>
+          <p:nvPr/>
+        </p:nvPicPr>
+        <p:blipFill>
+          <a:blip xmlns:r="http://schemas.openxmlformats.org/officeDocument/2006/relationships" xmlns:a="http://schemas.openxmlformats.org/drawingml/2006/main" r:embed="Rca7be830440f4621"/>
+          <a:stretch xmlns:a="http://schemas.openxmlformats.org/drawingml/2006/main"/>
+        </p:blipFill>
+        <p:spPr>
+          <a:xfrm xmlns:a="http://schemas.openxmlformats.org/drawingml/2006/main">
+            <a:off x="2885498" y="1650404"/>
+            <a:ext cx="6421005" cy="4414441"/>
+          </a:xfrm>
+          <a:prstGeom xmlns:a="http://schemas.openxmlformats.org/drawingml/2006/main" prst="rect">
+            <a:avLst/>
+          </a:prstGeom>
+        </p:spPr>
+      </p:pic>
+    </p:spTree>
+    <p:extLst>
+      <p:ext uri="{BB962C8B-B14F-4D97-AF65-F5344CB8AC3E}">
+        <p14:creationId xmlns:p14="http://schemas.microsoft.com/office/powerpoint/2010/main" val="666536286"/>
+      </p:ext>
+    </p:extLst>
+  </p:cSld>
+</p:sld>
+</file>
+
+<file path=ppt/slides/slide31.xml><?xml version="1.0" encoding="utf-8"?>
+<p:sld xmlns:p="http://schemas.openxmlformats.org/presentationml/2006/main">
+  <p:cSld>
+    <p:bg>
+      <p:bgPr>
+        <a:solidFill xmlns:a="http://schemas.openxmlformats.org/drawingml/2006/main">
+          <a:srgbClr val="FFFFFF"/>
+        </a:solidFill>
+      </p:bgPr>
+    </p:bg>
+    <p:spTree>
+      <p:nvGrpSpPr>
+        <p:cNvPr id="1" name=""/>
+        <p:cNvGrpSpPr/>
+        <p:nvPr/>
+      </p:nvGrpSpPr>
+      <p:grpSpPr>
+        <a:xfrm xmlns:a="http://schemas.openxmlformats.org/drawingml/2006/main"/>
+      </p:grpSpPr>
+      <p:sp>
+        <p:nvSpPr>
+          <p:cNvPr id="24" name="section-11">
+            <a:extLst xmlns:a="http://schemas.openxmlformats.org/drawingml/2006/main">
+              <a:ext uri="{FF2B5EF4-FFF2-40B4-BE49-F238E27FC236}">
+                <a16:creationId xmlns:a16="http://schemas.microsoft.com/office/drawing/2014/main" id="{272ED433-B59C-436C-9DFB-4D317B90A13F}"/>
+              </a:ext>
+            </a:extLst>
+          </p:cNvPr>
+          <p:cNvSpPr>
+            <a:spLocks xmlns:a="http://schemas.openxmlformats.org/drawingml/2006/main" noGrp="1"/>
+          </p:cNvSpPr>
+          <p:nvPr/>
+        </p:nvSpPr>
+        <p:spPr>
+          <a:xfrm xmlns:a="http://schemas.openxmlformats.org/drawingml/2006/main">
+            <a:off x="457200" y="228600"/>
+            <a:ext cx="4191000" cy="228600"/>
+          </a:xfrm>
+          <a:prstGeom xmlns:a="http://schemas.openxmlformats.org/drawingml/2006/main" prst="rect">
+            <a:avLst/>
+          </a:prstGeom>
+          <a:noFill xmlns:a="http://schemas.openxmlformats.org/drawingml/2006/main"/>
+          <a:ln xmlns:a="http://schemas.openxmlformats.org/drawingml/2006/main" w="0">
+            <a:noFill/>
+            <a:prstDash val="solid"/>
+          </a:ln>
+        </p:spPr>
+        <p:txBody>
+          <a:bodyPr xmlns:a="http://schemas.openxmlformats.org/drawingml/2006/main" wrap="square" lIns="0" tIns="0" rIns="0" bIns="0" anchor="t">
+            <a:normAutofit fontScale="100000"/>
+          </a:bodyPr>
+          <a:lstStyle xmlns:a="http://schemas.openxmlformats.org/drawingml/2006/main"/>
+          <a:p xmlns:a="http://schemas.openxmlformats.org/drawingml/2006/main">
+            <a:pPr algn="l">
+              <a:buNone/>
+              <a:defRPr sz="1200" b="1">
+                <a:solidFill>
+                  <a:srgbClr val="667384"/>
+                </a:solidFill>
+                <a:latin typeface="Arial"/>
+                <a:ea typeface="Arial"/>
+                <a:cs typeface="Arial"/>
+              </a:defRPr>
+            </a:pPr>
+            <a:r>
+              <a:rPr sz="1200" b="1">
+                <a:solidFill>
+                  <a:srgbClr val="667384"/>
+                </a:solidFill>
+                <a:latin typeface="Arial"/>
+                <a:ea typeface="Arial"/>
+                <a:cs typeface="Arial"/>
+              </a:rPr>
+              <a:t>MECHANISM READOUT</a:t>
+            </a:r>
+          </a:p>
+        </p:txBody>
+      </p:sp>
+      <p:sp>
+        <p:nvSpPr>
+          <p:cNvPr id="2" name="title-11">
+            <a:extLst xmlns:a="http://schemas.openxmlformats.org/drawingml/2006/main">
+              <a:ext uri="{FF2B5EF4-FFF2-40B4-BE49-F238E27FC236}">
+                <a16:creationId xmlns:a16="http://schemas.microsoft.com/office/drawing/2014/main" id="{3EC40708-7E00-432C-8ECE-907FA5705292}"/>
+              </a:ext>
+            </a:extLst>
+          </p:cNvPr>
+          <p:cNvSpPr>
+            <a:spLocks xmlns:a="http://schemas.openxmlformats.org/drawingml/2006/main" noGrp="1"/>
+          </p:cNvSpPr>
+          <p:nvPr/>
+        </p:nvSpPr>
+        <p:spPr>
+          <a:xfrm xmlns:a="http://schemas.openxmlformats.org/drawingml/2006/main">
+            <a:off x="457200" y="533400"/>
+            <a:ext cx="11277600" cy="628650"/>
+          </a:xfrm>
+          <a:prstGeom xmlns:a="http://schemas.openxmlformats.org/drawingml/2006/main" prst="rect">
+            <a:avLst/>
+          </a:prstGeom>
+          <a:noFill xmlns:a="http://schemas.openxmlformats.org/drawingml/2006/main"/>
+          <a:ln xmlns:a="http://schemas.openxmlformats.org/drawingml/2006/main" w="0">
+            <a:noFill/>
+            <a:prstDash val="solid"/>
+          </a:ln>
+        </p:spPr>
+        <p:txBody>
+          <a:bodyPr xmlns:a="http://schemas.openxmlformats.org/drawingml/2006/main" wrap="square" lIns="0" tIns="0" rIns="0" bIns="0" anchor="t">
+            <a:normAutofit fontScale="100000"/>
+          </a:bodyPr>
+          <a:lstStyle xmlns:a="http://schemas.openxmlformats.org/drawingml/2006/main"/>
+          <a:p xmlns:a="http://schemas.openxmlformats.org/drawingml/2006/main">
+            <a:pPr algn="l">
+              <a:buNone/>
+              <a:defRPr sz="3525" b="1">
+                <a:solidFill>
+                  <a:srgbClr val="000000"/>
+                </a:solidFill>
+                <a:latin typeface="Arial"/>
+                <a:ea typeface="Arial"/>
+                <a:cs typeface="Arial"/>
+              </a:defRPr>
+            </a:pPr>
+            <a:r>
+              <a:rPr sz="3525" b="1">
+                <a:solidFill>
+                  <a:srgbClr val="000000"/>
+                </a:solidFill>
+                <a:latin typeface="Arial"/>
+                <a:ea typeface="Arial"/>
+                <a:cs typeface="Arial"/>
+              </a:rPr>
+              <a:t>Continuation is falsified; a rebound lead remains</a:t>
+            </a:r>
+          </a:p>
+        </p:txBody>
+      </p:sp>
+      <p:sp>
+        <p:nvSpPr>
+          <p:cNvPr id="3" name="">
+            <a:extLst xmlns:a="http://schemas.openxmlformats.org/drawingml/2006/main">
+              <a:ext uri="{FF2B5EF4-FFF2-40B4-BE49-F238E27FC236}">
+                <a16:creationId xmlns:a16="http://schemas.microsoft.com/office/drawing/2014/main" id="{D5CA0FCE-75E8-41EF-A76A-23E9E2120C6A}"/>
+              </a:ext>
+            </a:extLst>
+          </p:cNvPr>
+          <p:cNvSpPr>
+            <a:spLocks xmlns:a="http://schemas.openxmlformats.org/drawingml/2006/main" noGrp="1"/>
+          </p:cNvSpPr>
+          <p:nvPr/>
+        </p:nvSpPr>
+        <p:spPr>
+          <a:xfrm xmlns:a="http://schemas.openxmlformats.org/drawingml/2006/main">
+            <a:off x="457200" y="1200150"/>
+            <a:ext cx="11277600" cy="19050"/>
+          </a:xfrm>
+          <a:prstGeom xmlns:a="http://schemas.openxmlformats.org/drawingml/2006/main" prst="rect">
+            <a:avLst/>
+          </a:prstGeom>
+          <a:solidFill xmlns:a="http://schemas.openxmlformats.org/drawingml/2006/main">
+            <a:srgbClr val="B8BCC4"/>
+          </a:solidFill>
+          <a:ln xmlns:a="http://schemas.openxmlformats.org/drawingml/2006/main" w="0">
+            <a:solidFill>
+              <a:srgbClr val="B8BCC4"/>
+            </a:solidFill>
+            <a:prstDash val="solid"/>
+          </a:ln>
+        </p:spPr>
+      </p:sp>
+      <p:sp>
+        <p:nvSpPr>
+          <p:cNvPr id="4" name="footer-left-11">
+            <a:extLst xmlns:a="http://schemas.openxmlformats.org/drawingml/2006/main">
+              <a:ext uri="{FF2B5EF4-FFF2-40B4-BE49-F238E27FC236}">
+                <a16:creationId xmlns:a16="http://schemas.microsoft.com/office/drawing/2014/main" id="{700DA765-80E0-4197-8700-00D867B86FA2}"/>
+              </a:ext>
+            </a:extLst>
+          </p:cNvPr>
+          <p:cNvSpPr>
+            <a:spLocks xmlns:a="http://schemas.openxmlformats.org/drawingml/2006/main" noGrp="1"/>
+          </p:cNvSpPr>
+          <p:nvPr/>
+        </p:nvSpPr>
+        <p:spPr>
+          <a:xfrm xmlns:a="http://schemas.openxmlformats.org/drawingml/2006/main">
+            <a:off x="457200" y="6515100"/>
+            <a:ext cx="3429000" cy="171450"/>
+          </a:xfrm>
+          <a:prstGeom xmlns:a="http://schemas.openxmlformats.org/drawingml/2006/main" prst="rect">
+            <a:avLst/>
+          </a:prstGeom>
+          <a:noFill xmlns:a="http://schemas.openxmlformats.org/drawingml/2006/main"/>
+          <a:ln xmlns:a="http://schemas.openxmlformats.org/drawingml/2006/main" w="0">
+            <a:noFill/>
+            <a:prstDash val="solid"/>
+          </a:ln>
+        </p:spPr>
+        <p:txBody>
+          <a:bodyPr xmlns:a="http://schemas.openxmlformats.org/drawingml/2006/main" wrap="square" lIns="0" tIns="0" rIns="0" bIns="0" anchor="t">
+            <a:normAutofit fontScale="100000"/>
+          </a:bodyPr>
+          <a:lstStyle xmlns:a="http://schemas.openxmlformats.org/drawingml/2006/main"/>
+          <a:p xmlns:a="http://schemas.openxmlformats.org/drawingml/2006/main">
+            <a:pPr algn="l">
+              <a:buNone/>
+              <a:defRPr sz="825" b="0">
+                <a:solidFill>
+                  <a:srgbClr val="64748B"/>
+                </a:solidFill>
+                <a:latin typeface="Arial"/>
+                <a:ea typeface="Arial"/>
+                <a:cs typeface="Arial"/>
+              </a:defRPr>
+            </a:pPr>
+            <a:r>
+              <a:rPr sz="825" b="0">
+                <a:solidFill>
+                  <a:srgbClr val="64748B"/>
+                </a:solidFill>
+                <a:latin typeface="Arial"/>
+                <a:ea typeface="Arial"/>
+                <a:cs typeface="Arial"/>
+              </a:rPr>
+              <a:t>Frozen 20d attribution | 88-stock equal-sector core | post-2023 sealed</a:t>
+            </a:r>
+          </a:p>
+        </p:txBody>
+      </p:sp>
+      <p:sp>
+        <p:nvSpPr>
+          <p:cNvPr id="5" name="footer-number-11">
+            <a:extLst xmlns:a="http://schemas.openxmlformats.org/drawingml/2006/main">
+              <a:ext uri="{FF2B5EF4-FFF2-40B4-BE49-F238E27FC236}">
+                <a16:creationId xmlns:a16="http://schemas.microsoft.com/office/drawing/2014/main" id="{83896276-4112-4532-AF7C-776C67C58B77}"/>
+              </a:ext>
+            </a:extLst>
+          </p:cNvPr>
+          <p:cNvSpPr>
+            <a:spLocks xmlns:a="http://schemas.openxmlformats.org/drawingml/2006/main" noGrp="1"/>
+          </p:cNvSpPr>
+          <p:nvPr/>
+        </p:nvSpPr>
+        <p:spPr>
+          <a:xfrm xmlns:a="http://schemas.openxmlformats.org/drawingml/2006/main">
+            <a:off x="10477500" y="6496050"/>
+            <a:ext cx="1257300" cy="190500"/>
+          </a:xfrm>
+          <a:prstGeom xmlns:a="http://schemas.openxmlformats.org/drawingml/2006/main" prst="rect">
+            <a:avLst/>
+          </a:prstGeom>
+          <a:noFill xmlns:a="http://schemas.openxmlformats.org/drawingml/2006/main"/>
+          <a:ln xmlns:a="http://schemas.openxmlformats.org/drawingml/2006/main" w="0">
+            <a:noFill/>
+            <a:prstDash val="solid"/>
+          </a:ln>
+        </p:spPr>
+        <p:txBody>
+          <a:bodyPr xmlns:a="http://schemas.openxmlformats.org/drawingml/2006/main" wrap="square" lIns="0" tIns="0" rIns="0" bIns="0" anchor="t">
+            <a:normAutofit fontScale="100000"/>
+          </a:bodyPr>
+          <a:lstStyle xmlns:a="http://schemas.openxmlformats.org/drawingml/2006/main"/>
+          <a:p xmlns:a="http://schemas.openxmlformats.org/drawingml/2006/main">
+            <a:pPr algn="r">
+              <a:buNone/>
+              <a:defRPr sz="1050" b="0">
+                <a:solidFill>
+                  <a:srgbClr val="667384"/>
+                </a:solidFill>
+                <a:latin typeface="Arial"/>
+                <a:ea typeface="Arial"/>
+                <a:cs typeface="Arial"/>
+              </a:defRPr>
+            </a:pPr>
+            <a:r>
+              <a:rPr sz="1050" b="0">
+                <a:solidFill>
+                  <a:srgbClr val="667384"/>
+                </a:solidFill>
+                <a:latin typeface="Arial"/>
+                <a:ea typeface="Arial"/>
+                <a:cs typeface="Arial"/>
+              </a:rPr>
+              <a:t>31</a:t>
+            </a:r>
+          </a:p>
+        </p:txBody>
+      </p:sp>
+      <p:sp>
+        <p:nvSpPr>
+          <p:cNvPr id="6" name="">
+            <a:extLst xmlns:a="http://schemas.openxmlformats.org/drawingml/2006/main">
+              <a:ext uri="{FF2B5EF4-FFF2-40B4-BE49-F238E27FC236}">
+                <a16:creationId xmlns:a16="http://schemas.microsoft.com/office/drawing/2014/main" id="{10F4BA85-46C5-47BD-BA74-EC806E663D58}"/>
+              </a:ext>
+            </a:extLst>
+          </p:cNvPr>
+          <p:cNvSpPr>
+            <a:spLocks xmlns:a="http://schemas.openxmlformats.org/drawingml/2006/main" noGrp="1"/>
+          </p:cNvSpPr>
+          <p:nvPr/>
+        </p:nvSpPr>
+        <p:spPr>
+          <a:xfrm xmlns:a="http://schemas.openxmlformats.org/drawingml/2006/main">
+            <a:off x="552450" y="1600200"/>
+            <a:ext cx="95250" cy="895350"/>
+          </a:xfrm>
+          <a:prstGeom xmlns:a="http://schemas.openxmlformats.org/drawingml/2006/main" prst="rect">
+            <a:avLst/>
+          </a:prstGeom>
+          <a:solidFill xmlns:a="http://schemas.openxmlformats.org/drawingml/2006/main">
+            <a:srgbClr val="E45756"/>
+          </a:solidFill>
+          <a:ln xmlns:a="http://schemas.openxmlformats.org/drawingml/2006/main" w="0">
+            <a:solidFill>
+              <a:srgbClr val="E45756"/>
+            </a:solidFill>
+            <a:prstDash val="solid"/>
+          </a:ln>
+        </p:spPr>
+      </p:sp>
+      <p:sp>
+        <p:nvSpPr>
+          <p:cNvPr id="7" name="">
+            <a:extLst xmlns:a="http://schemas.openxmlformats.org/drawingml/2006/main">
+              <a:ext uri="{FF2B5EF4-FFF2-40B4-BE49-F238E27FC236}">
+                <a16:creationId xmlns:a16="http://schemas.microsoft.com/office/drawing/2014/main" id="{7EF5B945-9D04-48FA-BA66-96DE813A9715}"/>
+              </a:ext>
+            </a:extLst>
+          </p:cNvPr>
+          <p:cNvSpPr>
+            <a:spLocks xmlns:a="http://schemas.openxmlformats.org/drawingml/2006/main" noGrp="1"/>
+          </p:cNvSpPr>
+          <p:nvPr/>
+        </p:nvSpPr>
+        <p:spPr>
+          <a:xfrm xmlns:a="http://schemas.openxmlformats.org/drawingml/2006/main">
+            <a:off x="876300" y="1581150"/>
+            <a:ext cx="2095500" cy="285750"/>
+          </a:xfrm>
+          <a:prstGeom xmlns:a="http://schemas.openxmlformats.org/drawingml/2006/main" prst="rect">
+            <a:avLst/>
+          </a:prstGeom>
+          <a:noFill xmlns:a="http://schemas.openxmlformats.org/drawingml/2006/main"/>
+          <a:ln xmlns:a="http://schemas.openxmlformats.org/drawingml/2006/main" w="0">
+            <a:noFill/>
+            <a:prstDash val="solid"/>
+          </a:ln>
+        </p:spPr>
+        <p:txBody>
+          <a:bodyPr xmlns:a="http://schemas.openxmlformats.org/drawingml/2006/main" wrap="square" lIns="0" tIns="0" rIns="0" bIns="0" anchor="t">
+            <a:normAutofit fontScale="100000"/>
+          </a:bodyPr>
+          <a:lstStyle xmlns:a="http://schemas.openxmlformats.org/drawingml/2006/main"/>
+          <a:p xmlns:a="http://schemas.openxmlformats.org/drawingml/2006/main">
+            <a:pPr algn="l">
+              <a:buNone/>
+              <a:defRPr sz="1350" b="1">
+                <a:solidFill>
+                  <a:srgbClr val="E45756"/>
+                </a:solidFill>
+                <a:latin typeface="Arial"/>
+                <a:ea typeface="Arial"/>
+                <a:cs typeface="Arial"/>
+              </a:defRPr>
+            </a:pPr>
+            <a:r>
+              <a:rPr sz="1350" b="1">
+                <a:solidFill>
+                  <a:srgbClr val="E45756"/>
+                </a:solidFill>
+                <a:latin typeface="Arial"/>
+                <a:ea typeface="Arial"/>
+                <a:cs typeface="Arial"/>
+              </a:rPr>
+              <a:t>ATTRIBUTION</a:t>
+            </a:r>
+          </a:p>
+        </p:txBody>
+      </p:sp>
+      <p:sp>
+        <p:nvSpPr>
+          <p:cNvPr id="8" name="">
+            <a:extLst xmlns:a="http://schemas.openxmlformats.org/drawingml/2006/main">
+              <a:ext uri="{FF2B5EF4-FFF2-40B4-BE49-F238E27FC236}">
+                <a16:creationId xmlns:a16="http://schemas.microsoft.com/office/drawing/2014/main" id="{655CF75D-5F23-4C7F-BE9C-764036D0B9E8}"/>
+              </a:ext>
+            </a:extLst>
+          </p:cNvPr>
+          <p:cNvSpPr>
+            <a:spLocks xmlns:a="http://schemas.openxmlformats.org/drawingml/2006/main" noGrp="1"/>
+          </p:cNvSpPr>
+          <p:nvPr/>
+        </p:nvSpPr>
+        <p:spPr>
+          <a:xfrm xmlns:a="http://schemas.openxmlformats.org/drawingml/2006/main">
+            <a:off x="3105150" y="1562100"/>
+            <a:ext cx="4762500" cy="419100"/>
+          </a:xfrm>
+          <a:prstGeom xmlns:a="http://schemas.openxmlformats.org/drawingml/2006/main" prst="rect">
+            <a:avLst/>
+          </a:prstGeom>
+          <a:noFill xmlns:a="http://schemas.openxmlformats.org/drawingml/2006/main"/>
+          <a:ln xmlns:a="http://schemas.openxmlformats.org/drawingml/2006/main" w="0">
+            <a:noFill/>
+            <a:prstDash val="solid"/>
+          </a:ln>
+        </p:spPr>
+        <p:txBody>
+          <a:bodyPr xmlns:a="http://schemas.openxmlformats.org/drawingml/2006/main" wrap="square" lIns="0" tIns="0" rIns="0" bIns="0" anchor="t">
+            <a:normAutofit fontScale="100000"/>
+          </a:bodyPr>
+          <a:lstStyle xmlns:a="http://schemas.openxmlformats.org/drawingml/2006/main"/>
+          <a:p xmlns:a="http://schemas.openxmlformats.org/drawingml/2006/main">
+            <a:pPr algn="l">
+              <a:buNone/>
+              <a:defRPr sz="1950" b="1">
+                <a:solidFill>
+                  <a:srgbClr val="273548"/>
+                </a:solidFill>
+                <a:latin typeface="Arial"/>
+                <a:ea typeface="Arial"/>
+                <a:cs typeface="Arial"/>
+              </a:defRPr>
+            </a:pPr>
+            <a:r>
+              <a:rPr sz="1950" b="1">
+                <a:solidFill>
+                  <a:srgbClr val="273548"/>
+                </a:solidFill>
+                <a:latin typeface="Arial"/>
+                <a:ea typeface="Arial"/>
+                <a:cs typeface="Arial"/>
+              </a:rPr>
+              <a:t>+R20 trails −R20</a:t>
+            </a:r>
+          </a:p>
+        </p:txBody>
+      </p:sp>
+      <p:sp>
+        <p:nvSpPr>
+          <p:cNvPr id="9" name="">
+            <a:extLst xmlns:a="http://schemas.openxmlformats.org/drawingml/2006/main">
+              <a:ext uri="{FF2B5EF4-FFF2-40B4-BE49-F238E27FC236}">
+                <a16:creationId xmlns:a16="http://schemas.microsoft.com/office/drawing/2014/main" id="{3E0B76F2-4514-4DD8-934B-ABE42A34E950}"/>
+              </a:ext>
+            </a:extLst>
+          </p:cNvPr>
+          <p:cNvSpPr>
+            <a:spLocks xmlns:a="http://schemas.openxmlformats.org/drawingml/2006/main" noGrp="1"/>
+          </p:cNvSpPr>
+          <p:nvPr/>
+        </p:nvSpPr>
+        <p:spPr>
+          <a:xfrm xmlns:a="http://schemas.openxmlformats.org/drawingml/2006/main">
+            <a:off x="8096250" y="1581150"/>
+            <a:ext cx="3333750" cy="704850"/>
+          </a:xfrm>
+          <a:prstGeom xmlns:a="http://schemas.openxmlformats.org/drawingml/2006/main" prst="rect">
+            <a:avLst/>
+          </a:prstGeom>
+          <a:noFill xmlns:a="http://schemas.openxmlformats.org/drawingml/2006/main"/>
+          <a:ln xmlns:a="http://schemas.openxmlformats.org/drawingml/2006/main" w="0">
+            <a:noFill/>
+            <a:prstDash val="solid"/>
+          </a:ln>
+        </p:spPr>
+        <p:txBody>
+          <a:bodyPr xmlns:a="http://schemas.openxmlformats.org/drawingml/2006/main" wrap="square" lIns="0" tIns="0" rIns="0" bIns="0" anchor="t">
+            <a:normAutofit fontScale="100000"/>
+          </a:bodyPr>
+          <a:lstStyle xmlns:a="http://schemas.openxmlformats.org/drawingml/2006/main"/>
+          <a:p xmlns:a="http://schemas.openxmlformats.org/drawingml/2006/main">
+            <a:pPr algn="l">
+              <a:buNone/>
+              <a:defRPr sz="1425" b="0">
+                <a:solidFill>
+                  <a:srgbClr val="667384"/>
+                </a:solidFill>
+                <a:latin typeface="Arial"/>
+                <a:ea typeface="Arial"/>
+                <a:cs typeface="Arial"/>
+              </a:defRPr>
+            </a:pPr>
+            <a:r>
+              <a:rPr sz="1425" b="0">
+                <a:solidFill>
+                  <a:srgbClr val="667384"/>
+                </a:solidFill>
+                <a:latin typeface="Arial"/>
+                <a:ea typeface="Arial"/>
+                <a:cs typeface="Arial"/>
+              </a:rPr>
+              <a:t>−15 bp equal-sector; −19 bp pooled</a:t>
+            </a:r>
+          </a:p>
+        </p:txBody>
+      </p:sp>
+      <p:sp>
+        <p:nvSpPr>
+          <p:cNvPr id="10" name="">
+            <a:extLst xmlns:a="http://schemas.openxmlformats.org/drawingml/2006/main">
+              <a:ext uri="{FF2B5EF4-FFF2-40B4-BE49-F238E27FC236}">
+                <a16:creationId xmlns:a16="http://schemas.microsoft.com/office/drawing/2014/main" id="{294777C3-6D2F-4277-840E-7E984FB4554D}"/>
+              </a:ext>
+            </a:extLst>
+          </p:cNvPr>
+          <p:cNvSpPr>
+            <a:spLocks xmlns:a="http://schemas.openxmlformats.org/drawingml/2006/main" noGrp="1"/>
+          </p:cNvSpPr>
+          <p:nvPr/>
+        </p:nvSpPr>
+        <p:spPr>
+          <a:xfrm xmlns:a="http://schemas.openxmlformats.org/drawingml/2006/main">
+            <a:off x="876300" y="2590800"/>
+            <a:ext cx="10553700" cy="9525"/>
+          </a:xfrm>
+          <a:prstGeom xmlns:a="http://schemas.openxmlformats.org/drawingml/2006/main" prst="rect">
+            <a:avLst/>
+          </a:prstGeom>
+          <a:solidFill xmlns:a="http://schemas.openxmlformats.org/drawingml/2006/main">
+            <a:srgbClr val="B8BCC4"/>
+          </a:solidFill>
+          <a:ln xmlns:a="http://schemas.openxmlformats.org/drawingml/2006/main" w="0">
+            <a:solidFill>
+              <a:srgbClr val="B8BCC4"/>
+            </a:solidFill>
+            <a:prstDash val="solid"/>
+          </a:ln>
+        </p:spPr>
+      </p:sp>
+      <p:sp>
+        <p:nvSpPr>
+          <p:cNvPr id="11" name="">
+            <a:extLst xmlns:a="http://schemas.openxmlformats.org/drawingml/2006/main">
+              <a:ext uri="{FF2B5EF4-FFF2-40B4-BE49-F238E27FC236}">
+                <a16:creationId xmlns:a16="http://schemas.microsoft.com/office/drawing/2014/main" id="{F894CF3F-AD63-423C-8F01-64C507896579}"/>
+              </a:ext>
+            </a:extLst>
+          </p:cNvPr>
+          <p:cNvSpPr>
+            <a:spLocks xmlns:a="http://schemas.openxmlformats.org/drawingml/2006/main" noGrp="1"/>
+          </p:cNvSpPr>
+          <p:nvPr/>
+        </p:nvSpPr>
+        <p:spPr>
+          <a:xfrm xmlns:a="http://schemas.openxmlformats.org/drawingml/2006/main">
+            <a:off x="552450" y="2800350"/>
+            <a:ext cx="95250" cy="895350"/>
+          </a:xfrm>
+          <a:prstGeom xmlns:a="http://schemas.openxmlformats.org/drawingml/2006/main" prst="rect">
+            <a:avLst/>
+          </a:prstGeom>
+          <a:solidFill xmlns:a="http://schemas.openxmlformats.org/drawingml/2006/main">
+            <a:srgbClr val="2A9D6F"/>
+          </a:solidFill>
+          <a:ln xmlns:a="http://schemas.openxmlformats.org/drawingml/2006/main" w="0">
+            <a:solidFill>
+              <a:srgbClr val="2A9D6F"/>
+            </a:solidFill>
+            <a:prstDash val="solid"/>
+          </a:ln>
+        </p:spPr>
+      </p:sp>
+      <p:sp>
+        <p:nvSpPr>
+          <p:cNvPr id="12" name="">
+            <a:extLst xmlns:a="http://schemas.openxmlformats.org/drawingml/2006/main">
+              <a:ext uri="{FF2B5EF4-FFF2-40B4-BE49-F238E27FC236}">
+                <a16:creationId xmlns:a16="http://schemas.microsoft.com/office/drawing/2014/main" id="{D3953D03-6A7A-4FEE-B242-02BF0319C169}"/>
+              </a:ext>
+            </a:extLst>
+          </p:cNvPr>
+          <p:cNvSpPr>
+            <a:spLocks xmlns:a="http://schemas.openxmlformats.org/drawingml/2006/main" noGrp="1"/>
+          </p:cNvSpPr>
+          <p:nvPr/>
+        </p:nvSpPr>
+        <p:spPr>
+          <a:xfrm xmlns:a="http://schemas.openxmlformats.org/drawingml/2006/main">
+            <a:off x="876300" y="2781300"/>
+            <a:ext cx="2095500" cy="285750"/>
+          </a:xfrm>
+          <a:prstGeom xmlns:a="http://schemas.openxmlformats.org/drawingml/2006/main" prst="rect">
+            <a:avLst/>
+          </a:prstGeom>
+          <a:noFill xmlns:a="http://schemas.openxmlformats.org/drawingml/2006/main"/>
+          <a:ln xmlns:a="http://schemas.openxmlformats.org/drawingml/2006/main" w="0">
+            <a:noFill/>
+            <a:prstDash val="solid"/>
+          </a:ln>
+        </p:spPr>
+        <p:txBody>
+          <a:bodyPr xmlns:a="http://schemas.openxmlformats.org/drawingml/2006/main" wrap="square" lIns="0" tIns="0" rIns="0" bIns="0" anchor="t">
+            <a:normAutofit fontScale="100000"/>
+          </a:bodyPr>
+          <a:lstStyle xmlns:a="http://schemas.openxmlformats.org/drawingml/2006/main"/>
+          <a:p xmlns:a="http://schemas.openxmlformats.org/drawingml/2006/main">
+            <a:pPr algn="l">
+              <a:buNone/>
+              <a:defRPr sz="1350" b="1">
+                <a:solidFill>
+                  <a:srgbClr val="2A9D6F"/>
+                </a:solidFill>
+                <a:latin typeface="Arial"/>
+                <a:ea typeface="Arial"/>
+                <a:cs typeface="Arial"/>
+              </a:defRPr>
+            </a:pPr>
+            <a:r>
+              <a:rPr sz="1350" b="1">
+                <a:solidFill>
+                  <a:srgbClr val="2A9D6F"/>
+                </a:solidFill>
+                <a:latin typeface="Arial"/>
+                <a:ea typeface="Arial"/>
+                <a:cs typeface="Arial"/>
+              </a:rPr>
+              <a:t>BASELINE</a:t>
+            </a:r>
+          </a:p>
+        </p:txBody>
+      </p:sp>
+      <p:sp>
+        <p:nvSpPr>
+          <p:cNvPr id="13" name="">
+            <a:extLst xmlns:a="http://schemas.openxmlformats.org/drawingml/2006/main">
+              <a:ext uri="{FF2B5EF4-FFF2-40B4-BE49-F238E27FC236}">
+                <a16:creationId xmlns:a16="http://schemas.microsoft.com/office/drawing/2014/main" id="{52D1DBE8-EAF6-4492-89E7-5C97A3A6A395}"/>
+              </a:ext>
+            </a:extLst>
+          </p:cNvPr>
+          <p:cNvSpPr>
+            <a:spLocks xmlns:a="http://schemas.openxmlformats.org/drawingml/2006/main" noGrp="1"/>
+          </p:cNvSpPr>
+          <p:nvPr/>
+        </p:nvSpPr>
+        <p:spPr>
+          <a:xfrm xmlns:a="http://schemas.openxmlformats.org/drawingml/2006/main">
+            <a:off x="3105150" y="2762250"/>
+            <a:ext cx="4762500" cy="419100"/>
+          </a:xfrm>
+          <a:prstGeom xmlns:a="http://schemas.openxmlformats.org/drawingml/2006/main" prst="rect">
+            <a:avLst/>
+          </a:prstGeom>
+          <a:noFill xmlns:a="http://schemas.openxmlformats.org/drawingml/2006/main"/>
+          <a:ln xmlns:a="http://schemas.openxmlformats.org/drawingml/2006/main" w="0">
+            <a:noFill/>
+            <a:prstDash val="solid"/>
+          </a:ln>
+        </p:spPr>
+        <p:txBody>
+          <a:bodyPr xmlns:a="http://schemas.openxmlformats.org/drawingml/2006/main" wrap="square" lIns="0" tIns="0" rIns="0" bIns="0" anchor="t">
+            <a:normAutofit fontScale="100000"/>
+          </a:bodyPr>
+          <a:lstStyle xmlns:a="http://schemas.openxmlformats.org/drawingml/2006/main"/>
+          <a:p xmlns:a="http://schemas.openxmlformats.org/drawingml/2006/main">
+            <a:pPr algn="l">
+              <a:buNone/>
+              <a:defRPr sz="1950" b="1">
+                <a:solidFill>
+                  <a:srgbClr val="273548"/>
+                </a:solidFill>
+                <a:latin typeface="Arial"/>
+                <a:ea typeface="Arial"/>
+                <a:cs typeface="Arial"/>
+              </a:defRPr>
+            </a:pPr>
+            <a:r>
+              <a:rPr sz="1950" b="1">
+                <a:solidFill>
+                  <a:srgbClr val="273548"/>
+                </a:solidFill>
+                <a:latin typeface="Arial"/>
+                <a:ea typeface="Arial"/>
+                <a:cs typeface="Arial"/>
+              </a:rPr>
+              <a:t>−R20 is the only branch above drift</a:t>
+            </a:r>
+          </a:p>
+        </p:txBody>
+      </p:sp>
+      <p:sp>
+        <p:nvSpPr>
+          <p:cNvPr id="14" name="">
+            <a:extLst xmlns:a="http://schemas.openxmlformats.org/drawingml/2006/main">
+              <a:ext uri="{FF2B5EF4-FFF2-40B4-BE49-F238E27FC236}">
+                <a16:creationId xmlns:a16="http://schemas.microsoft.com/office/drawing/2014/main" id="{2CAF0156-C9E6-4210-8A8A-BFEDD044631B}"/>
+              </a:ext>
+            </a:extLst>
+          </p:cNvPr>
+          <p:cNvSpPr>
+            <a:spLocks xmlns:a="http://schemas.openxmlformats.org/drawingml/2006/main" noGrp="1"/>
+          </p:cNvSpPr>
+          <p:nvPr/>
+        </p:nvSpPr>
+        <p:spPr>
+          <a:xfrm xmlns:a="http://schemas.openxmlformats.org/drawingml/2006/main">
+            <a:off x="8096250" y="2781300"/>
+            <a:ext cx="3333750" cy="704850"/>
+          </a:xfrm>
+          <a:prstGeom xmlns:a="http://schemas.openxmlformats.org/drawingml/2006/main" prst="rect">
+            <a:avLst/>
+          </a:prstGeom>
+          <a:noFill xmlns:a="http://schemas.openxmlformats.org/drawingml/2006/main"/>
+          <a:ln xmlns:a="http://schemas.openxmlformats.org/drawingml/2006/main" w="0">
+            <a:noFill/>
+            <a:prstDash val="solid"/>
+          </a:ln>
+        </p:spPr>
+        <p:txBody>
+          <a:bodyPr xmlns:a="http://schemas.openxmlformats.org/drawingml/2006/main" wrap="square" lIns="0" tIns="0" rIns="0" bIns="0" anchor="t">
+            <a:normAutofit fontScale="100000"/>
+          </a:bodyPr>
+          <a:lstStyle xmlns:a="http://schemas.openxmlformats.org/drawingml/2006/main"/>
+          <a:p xmlns:a="http://schemas.openxmlformats.org/drawingml/2006/main">
+            <a:pPr algn="l">
+              <a:buNone/>
+              <a:defRPr sz="1425" b="0">
+                <a:solidFill>
+                  <a:srgbClr val="667384"/>
+                </a:solidFill>
+                <a:latin typeface="Arial"/>
+                <a:ea typeface="Arial"/>
+                <a:cs typeface="Arial"/>
+              </a:defRPr>
+            </a:pPr>
+            <a:r>
+              <a:rPr sz="1425" b="0">
+                <a:solidFill>
+                  <a:srgbClr val="667384"/>
+                </a:solidFill>
+                <a:latin typeface="Arial"/>
+                <a:ea typeface="Arial"/>
+                <a:cs typeface="Arial"/>
+              </a:rPr>
+              <a:t>+5.8 bp equal-sector; +3.7 bp pooled</a:t>
+            </a:r>
+          </a:p>
+        </p:txBody>
+      </p:sp>
+      <p:sp>
+        <p:nvSpPr>
+          <p:cNvPr id="15" name="">
+            <a:extLst xmlns:a="http://schemas.openxmlformats.org/drawingml/2006/main">
+              <a:ext uri="{FF2B5EF4-FFF2-40B4-BE49-F238E27FC236}">
+                <a16:creationId xmlns:a16="http://schemas.microsoft.com/office/drawing/2014/main" id="{B126165D-5B65-44DB-99BD-15ED33F9B90F}"/>
+              </a:ext>
+            </a:extLst>
+          </p:cNvPr>
+          <p:cNvSpPr>
+            <a:spLocks xmlns:a="http://schemas.openxmlformats.org/drawingml/2006/main" noGrp="1"/>
+          </p:cNvSpPr>
+          <p:nvPr/>
+        </p:nvSpPr>
+        <p:spPr>
+          <a:xfrm xmlns:a="http://schemas.openxmlformats.org/drawingml/2006/main">
+            <a:off x="876300" y="3790950"/>
+            <a:ext cx="10553700" cy="9525"/>
+          </a:xfrm>
+          <a:prstGeom xmlns:a="http://schemas.openxmlformats.org/drawingml/2006/main" prst="rect">
+            <a:avLst/>
+          </a:prstGeom>
+          <a:solidFill xmlns:a="http://schemas.openxmlformats.org/drawingml/2006/main">
+            <a:srgbClr val="B8BCC4"/>
+          </a:solidFill>
+          <a:ln xmlns:a="http://schemas.openxmlformats.org/drawingml/2006/main" w="0">
+            <a:solidFill>
+              <a:srgbClr val="B8BCC4"/>
+            </a:solidFill>
+            <a:prstDash val="solid"/>
+          </a:ln>
+        </p:spPr>
+      </p:sp>
+      <p:sp>
+        <p:nvSpPr>
+          <p:cNvPr id="16" name="">
+            <a:extLst xmlns:a="http://schemas.openxmlformats.org/drawingml/2006/main">
+              <a:ext uri="{FF2B5EF4-FFF2-40B4-BE49-F238E27FC236}">
+                <a16:creationId xmlns:a16="http://schemas.microsoft.com/office/drawing/2014/main" id="{7DC0911F-9587-4B19-84C6-11974DB2A91C}"/>
+              </a:ext>
+            </a:extLst>
+          </p:cNvPr>
+          <p:cNvSpPr>
+            <a:spLocks xmlns:a="http://schemas.openxmlformats.org/drawingml/2006/main" noGrp="1"/>
+          </p:cNvSpPr>
+          <p:nvPr/>
+        </p:nvSpPr>
+        <p:spPr>
+          <a:xfrm xmlns:a="http://schemas.openxmlformats.org/drawingml/2006/main">
+            <a:off x="552450" y="4000500"/>
+            <a:ext cx="95250" cy="895350"/>
+          </a:xfrm>
+          <a:prstGeom xmlns:a="http://schemas.openxmlformats.org/drawingml/2006/main" prst="rect">
+            <a:avLst/>
+          </a:prstGeom>
+          <a:solidFill xmlns:a="http://schemas.openxmlformats.org/drawingml/2006/main">
+            <a:srgbClr val="3D8DFF"/>
+          </a:solidFill>
+          <a:ln xmlns:a="http://schemas.openxmlformats.org/drawingml/2006/main" w="0">
+            <a:solidFill>
+              <a:srgbClr val="3D8DFF"/>
+            </a:solidFill>
+            <a:prstDash val="solid"/>
+          </a:ln>
+        </p:spPr>
+      </p:sp>
+      <p:sp>
+        <p:nvSpPr>
+          <p:cNvPr id="17" name="">
+            <a:extLst xmlns:a="http://schemas.openxmlformats.org/drawingml/2006/main">
+              <a:ext uri="{FF2B5EF4-FFF2-40B4-BE49-F238E27FC236}">
+                <a16:creationId xmlns:a16="http://schemas.microsoft.com/office/drawing/2014/main" id="{DAB53991-F50C-4B95-9F23-DAE86BCEDF3B}"/>
+              </a:ext>
+            </a:extLst>
+          </p:cNvPr>
+          <p:cNvSpPr>
+            <a:spLocks xmlns:a="http://schemas.openxmlformats.org/drawingml/2006/main" noGrp="1"/>
+          </p:cNvSpPr>
+          <p:nvPr/>
+        </p:nvSpPr>
+        <p:spPr>
+          <a:xfrm xmlns:a="http://schemas.openxmlformats.org/drawingml/2006/main">
+            <a:off x="876300" y="3981450"/>
+            <a:ext cx="2095500" cy="285750"/>
+          </a:xfrm>
+          <a:prstGeom xmlns:a="http://schemas.openxmlformats.org/drawingml/2006/main" prst="rect">
+            <a:avLst/>
+          </a:prstGeom>
+          <a:noFill xmlns:a="http://schemas.openxmlformats.org/drawingml/2006/main"/>
+          <a:ln xmlns:a="http://schemas.openxmlformats.org/drawingml/2006/main" w="0">
+            <a:noFill/>
+            <a:prstDash val="solid"/>
+          </a:ln>
+        </p:spPr>
+        <p:txBody>
+          <a:bodyPr xmlns:a="http://schemas.openxmlformats.org/drawingml/2006/main" wrap="square" lIns="0" tIns="0" rIns="0" bIns="0" anchor="t">
+            <a:normAutofit fontScale="100000"/>
+          </a:bodyPr>
+          <a:lstStyle xmlns:a="http://schemas.openxmlformats.org/drawingml/2006/main"/>
+          <a:p xmlns:a="http://schemas.openxmlformats.org/drawingml/2006/main">
+            <a:pPr algn="l">
+              <a:buNone/>
+              <a:defRPr sz="1350" b="1">
+                <a:solidFill>
+                  <a:srgbClr val="3D8DFF"/>
+                </a:solidFill>
+                <a:latin typeface="Arial"/>
+                <a:ea typeface="Arial"/>
+                <a:cs typeface="Arial"/>
+              </a:defRPr>
+            </a:pPr>
+            <a:r>
+              <a:rPr sz="1350" b="1">
+                <a:solidFill>
+                  <a:srgbClr val="3D8DFF"/>
+                </a:solidFill>
+                <a:latin typeface="Arial"/>
+                <a:ea typeface="Arial"/>
+                <a:cs typeface="Arial"/>
+              </a:rPr>
+              <a:t>BREADTH</a:t>
+            </a:r>
+          </a:p>
+        </p:txBody>
+      </p:sp>
+      <p:sp>
+        <p:nvSpPr>
+          <p:cNvPr id="18" name="">
+            <a:extLst xmlns:a="http://schemas.openxmlformats.org/drawingml/2006/main">
+              <a:ext uri="{FF2B5EF4-FFF2-40B4-BE49-F238E27FC236}">
+                <a16:creationId xmlns:a16="http://schemas.microsoft.com/office/drawing/2014/main" id="{5DFACF3B-08BC-4148-A40A-2004DFB81D71}"/>
+              </a:ext>
+            </a:extLst>
+          </p:cNvPr>
+          <p:cNvSpPr>
+            <a:spLocks xmlns:a="http://schemas.openxmlformats.org/drawingml/2006/main" noGrp="1"/>
+          </p:cNvSpPr>
+          <p:nvPr/>
+        </p:nvSpPr>
+        <p:spPr>
+          <a:xfrm xmlns:a="http://schemas.openxmlformats.org/drawingml/2006/main">
+            <a:off x="3105150" y="3962400"/>
+            <a:ext cx="4762500" cy="419100"/>
+          </a:xfrm>
+          <a:prstGeom xmlns:a="http://schemas.openxmlformats.org/drawingml/2006/main" prst="rect">
+            <a:avLst/>
+          </a:prstGeom>
+          <a:noFill xmlns:a="http://schemas.openxmlformats.org/drawingml/2006/main"/>
+          <a:ln xmlns:a="http://schemas.openxmlformats.org/drawingml/2006/main" w="0">
+            <a:noFill/>
+            <a:prstDash val="solid"/>
+          </a:ln>
+        </p:spPr>
+        <p:txBody>
+          <a:bodyPr xmlns:a="http://schemas.openxmlformats.org/drawingml/2006/main" wrap="square" lIns="0" tIns="0" rIns="0" bIns="0" anchor="t">
+            <a:normAutofit fontScale="100000"/>
+          </a:bodyPr>
+          <a:lstStyle xmlns:a="http://schemas.openxmlformats.org/drawingml/2006/main"/>
+          <a:p xmlns:a="http://schemas.openxmlformats.org/drawingml/2006/main">
+            <a:pPr algn="l">
+              <a:buNone/>
+              <a:defRPr sz="1950" b="1">
+                <a:solidFill>
+                  <a:srgbClr val="273548"/>
+                </a:solidFill>
+                <a:latin typeface="Arial"/>
+                <a:ea typeface="Arial"/>
+                <a:cs typeface="Arial"/>
+              </a:defRPr>
+            </a:pPr>
+            <a:r>
+              <a:rPr sz="1950" b="1">
+                <a:solidFill>
+                  <a:srgbClr val="273548"/>
+                </a:solidFill>
+                <a:latin typeface="Arial"/>
+                <a:ea typeface="Arial"/>
+                <a:cs typeface="Arial"/>
+              </a:rPr>
+              <a:t>Not a single-sector artifact</a:t>
+            </a:r>
+          </a:p>
+        </p:txBody>
+      </p:sp>
+      <p:sp>
+        <p:nvSpPr>
+          <p:cNvPr id="19" name="">
+            <a:extLst xmlns:a="http://schemas.openxmlformats.org/drawingml/2006/main">
+              <a:ext uri="{FF2B5EF4-FFF2-40B4-BE49-F238E27FC236}">
+                <a16:creationId xmlns:a16="http://schemas.microsoft.com/office/drawing/2014/main" id="{C907D23B-44A2-43C4-9658-4C6E38430BF5}"/>
+              </a:ext>
+            </a:extLst>
+          </p:cNvPr>
+          <p:cNvSpPr>
+            <a:spLocks xmlns:a="http://schemas.openxmlformats.org/drawingml/2006/main" noGrp="1"/>
+          </p:cNvSpPr>
+          <p:nvPr/>
+        </p:nvSpPr>
+        <p:spPr>
+          <a:xfrm xmlns:a="http://schemas.openxmlformats.org/drawingml/2006/main">
+            <a:off x="8096250" y="3981450"/>
+            <a:ext cx="3333750" cy="704850"/>
+          </a:xfrm>
+          <a:prstGeom xmlns:a="http://schemas.openxmlformats.org/drawingml/2006/main" prst="rect">
+            <a:avLst/>
+          </a:prstGeom>
+          <a:noFill xmlns:a="http://schemas.openxmlformats.org/drawingml/2006/main"/>
+          <a:ln xmlns:a="http://schemas.openxmlformats.org/drawingml/2006/main" w="0">
+            <a:noFill/>
+            <a:prstDash val="solid"/>
+          </a:ln>
+        </p:spPr>
+        <p:txBody>
+          <a:bodyPr xmlns:a="http://schemas.openxmlformats.org/drawingml/2006/main" wrap="square" lIns="0" tIns="0" rIns="0" bIns="0" anchor="t">
+            <a:normAutofit fontScale="100000"/>
+          </a:bodyPr>
+          <a:lstStyle xmlns:a="http://schemas.openxmlformats.org/drawingml/2006/main"/>
+          <a:p xmlns:a="http://schemas.openxmlformats.org/drawingml/2006/main">
+            <a:pPr algn="l">
+              <a:buNone/>
+              <a:defRPr sz="1425" b="0">
+                <a:solidFill>
+                  <a:srgbClr val="667384"/>
+                </a:solidFill>
+                <a:latin typeface="Arial"/>
+                <a:ea typeface="Arial"/>
+                <a:cs typeface="Arial"/>
+              </a:defRPr>
+            </a:pPr>
+            <a:r>
+              <a:rPr sz="1425" b="0">
+                <a:solidFill>
+                  <a:srgbClr val="667384"/>
+                </a:solidFill>
+                <a:latin typeface="Arial"/>
+                <a:ea typeface="Arial"/>
+                <a:cs typeface="Arial"/>
+              </a:rPr>
+              <a:t>7 of 11 sector medians clear drift</a:t>
+            </a:r>
+          </a:p>
+        </p:txBody>
+      </p:sp>
+      <p:sp>
+        <p:nvSpPr>
+          <p:cNvPr id="20" name="">
+            <a:extLst xmlns:a="http://schemas.openxmlformats.org/drawingml/2006/main">
+              <a:ext uri="{FF2B5EF4-FFF2-40B4-BE49-F238E27FC236}">
+                <a16:creationId xmlns:a16="http://schemas.microsoft.com/office/drawing/2014/main" id="{8042DFC4-7E22-47E6-8C53-1E63A8411C3A}"/>
+              </a:ext>
+            </a:extLst>
+          </p:cNvPr>
+          <p:cNvSpPr>
+            <a:spLocks xmlns:a="http://schemas.openxmlformats.org/drawingml/2006/main" noGrp="1"/>
+          </p:cNvSpPr>
+          <p:nvPr/>
+        </p:nvSpPr>
+        <p:spPr>
+          <a:xfrm xmlns:a="http://schemas.openxmlformats.org/drawingml/2006/main">
+            <a:off x="876300" y="4991100"/>
+            <a:ext cx="10553700" cy="9525"/>
+          </a:xfrm>
+          <a:prstGeom xmlns:a="http://schemas.openxmlformats.org/drawingml/2006/main" prst="rect">
+            <a:avLst/>
+          </a:prstGeom>
+          <a:solidFill xmlns:a="http://schemas.openxmlformats.org/drawingml/2006/main">
+            <a:srgbClr val="B8BCC4"/>
+          </a:solidFill>
+          <a:ln xmlns:a="http://schemas.openxmlformats.org/drawingml/2006/main" w="0">
+            <a:solidFill>
+              <a:srgbClr val="B8BCC4"/>
+            </a:solidFill>
+            <a:prstDash val="solid"/>
+          </a:ln>
+        </p:spPr>
+      </p:sp>
+      <p:sp>
+        <p:nvSpPr>
+          <p:cNvPr id="21" name="">
+            <a:extLst xmlns:a="http://schemas.openxmlformats.org/drawingml/2006/main">
+              <a:ext uri="{FF2B5EF4-FFF2-40B4-BE49-F238E27FC236}">
+                <a16:creationId xmlns:a16="http://schemas.microsoft.com/office/drawing/2014/main" id="{F4066D54-676B-4D0F-93B6-2152B57E41AF}"/>
+              </a:ext>
+            </a:extLst>
+          </p:cNvPr>
+          <p:cNvSpPr>
+            <a:spLocks xmlns:a="http://schemas.openxmlformats.org/drawingml/2006/main" noGrp="1"/>
+          </p:cNvSpPr>
+          <p:nvPr/>
+        </p:nvSpPr>
+        <p:spPr>
+          <a:xfrm xmlns:a="http://schemas.openxmlformats.org/drawingml/2006/main">
+            <a:off x="552450" y="5353050"/>
+            <a:ext cx="10877550" cy="781050"/>
+          </a:xfrm>
+          <a:prstGeom xmlns:a="http://schemas.openxmlformats.org/drawingml/2006/main" prst="rect">
+            <a:avLst/>
+          </a:prstGeom>
+          <a:solidFill xmlns:a="http://schemas.openxmlformats.org/drawingml/2006/main">
+            <a:srgbClr val="EAF5FB"/>
+          </a:solidFill>
+          <a:ln xmlns:a="http://schemas.openxmlformats.org/drawingml/2006/main" w="0">
+            <a:solidFill>
+              <a:srgbClr val="EAF5FB"/>
+            </a:solidFill>
+            <a:prstDash val="solid"/>
+          </a:ln>
+        </p:spPr>
+      </p:sp>
+      <p:sp>
+        <p:nvSpPr>
+          <p:cNvPr id="22" name="">
+            <a:extLst xmlns:a="http://schemas.openxmlformats.org/drawingml/2006/main">
+              <a:ext uri="{FF2B5EF4-FFF2-40B4-BE49-F238E27FC236}">
+                <a16:creationId xmlns:a16="http://schemas.microsoft.com/office/drawing/2014/main" id="{6E4C79AE-EB98-4B5B-B3D3-11ED0D4C729B}"/>
+              </a:ext>
+            </a:extLst>
+          </p:cNvPr>
+          <p:cNvSpPr>
+            <a:spLocks xmlns:a="http://schemas.openxmlformats.org/drawingml/2006/main" noGrp="1"/>
+          </p:cNvSpPr>
+          <p:nvPr/>
+        </p:nvSpPr>
+        <p:spPr>
+          <a:xfrm xmlns:a="http://schemas.openxmlformats.org/drawingml/2006/main">
+            <a:off x="781050" y="5524500"/>
+            <a:ext cx="2476500" cy="323850"/>
+          </a:xfrm>
+          <a:prstGeom xmlns:a="http://schemas.openxmlformats.org/drawingml/2006/main" prst="rect">
+            <a:avLst/>
+          </a:prstGeom>
+          <a:noFill xmlns:a="http://schemas.openxmlformats.org/drawingml/2006/main"/>
+          <a:ln xmlns:a="http://schemas.openxmlformats.org/drawingml/2006/main" w="0">
+            <a:noFill/>
+            <a:prstDash val="solid"/>
+          </a:ln>
+        </p:spPr>
+        <p:txBody>
+          <a:bodyPr xmlns:a="http://schemas.openxmlformats.org/drawingml/2006/main" wrap="square" lIns="0" tIns="0" rIns="0" bIns="0" anchor="t">
+            <a:normAutofit fontScale="100000"/>
+          </a:bodyPr>
+          <a:lstStyle xmlns:a="http://schemas.openxmlformats.org/drawingml/2006/main"/>
+          <a:p xmlns:a="http://schemas.openxmlformats.org/drawingml/2006/main">
+            <a:pPr algn="l">
+              <a:buNone/>
+              <a:defRPr sz="1725" b="1">
+                <a:solidFill>
+                  <a:srgbClr val="3D8DFF"/>
+                </a:solidFill>
+                <a:latin typeface="Arial"/>
+                <a:ea typeface="Arial"/>
+                <a:cs typeface="Arial"/>
+              </a:defRPr>
+            </a:pPr>
+            <a:r>
+              <a:rPr sz="1725" b="1">
+                <a:solidFill>
+                  <a:srgbClr val="3D8DFF"/>
+                </a:solidFill>
+                <a:latin typeface="Arial"/>
+                <a:ea typeface="Arial"/>
+                <a:cs typeface="Arial"/>
+              </a:rPr>
+              <a:t>STATUS</a:t>
+            </a:r>
+          </a:p>
+        </p:txBody>
+      </p:sp>
+      <p:sp>
+        <p:nvSpPr>
+          <p:cNvPr id="23" name="">
+            <a:extLst xmlns:a="http://schemas.openxmlformats.org/drawingml/2006/main">
+              <a:ext uri="{FF2B5EF4-FFF2-40B4-BE49-F238E27FC236}">
+                <a16:creationId xmlns:a16="http://schemas.microsoft.com/office/drawing/2014/main" id="{3320D60E-6067-4236-80ED-A898A863026E}"/>
+              </a:ext>
+            </a:extLst>
+          </p:cNvPr>
+          <p:cNvSpPr>
+            <a:spLocks xmlns:a="http://schemas.openxmlformats.org/drawingml/2006/main" noGrp="1"/>
+          </p:cNvSpPr>
+          <p:nvPr/>
+        </p:nvSpPr>
+        <p:spPr>
+          <a:xfrm xmlns:a="http://schemas.openxmlformats.org/drawingml/2006/main">
+            <a:off x="3333750" y="5486400"/>
+            <a:ext cx="7810500" cy="419100"/>
+          </a:xfrm>
+          <a:prstGeom xmlns:a="http://schemas.openxmlformats.org/drawingml/2006/main" prst="rect">
+            <a:avLst/>
+          </a:prstGeom>
+          <a:noFill xmlns:a="http://schemas.openxmlformats.org/drawingml/2006/main"/>
+          <a:ln xmlns:a="http://schemas.openxmlformats.org/drawingml/2006/main" w="0">
+            <a:noFill/>
+            <a:prstDash val="solid"/>
+          </a:ln>
+        </p:spPr>
+        <p:txBody>
+          <a:bodyPr xmlns:a="http://schemas.openxmlformats.org/drawingml/2006/main" wrap="square" lIns="0" tIns="0" rIns="0" bIns="0" anchor="t">
+            <a:normAutofit fontScale="76389"/>
+          </a:bodyPr>
+          <a:lstStyle xmlns:a="http://schemas.openxmlformats.org/drawingml/2006/main"/>
+          <a:p xmlns:a="http://schemas.openxmlformats.org/drawingml/2006/main">
+            <a:pPr algn="l">
+              <a:buNone/>
+              <a:defRPr sz="1800" b="1">
+                <a:solidFill>
+                  <a:srgbClr val="273548"/>
+                </a:solidFill>
+                <a:latin typeface="Arial"/>
+                <a:ea typeface="Arial"/>
+                <a:cs typeface="Arial"/>
+              </a:defRPr>
+            </a:pPr>
+            <a:r>
+              <a:rPr sz="1800" b="1">
+                <a:solidFill>
+                  <a:srgbClr val="273548"/>
+                </a:solidFill>
+                <a:latin typeface="Arial"/>
+                <a:ea typeface="Arial"/>
+                <a:cs typeface="Arial"/>
+              </a:rPr>
+              <a:t>TRAIN mechanism attribution complete. Keep continuation stopped; treat rebound as a separate lead. No rule selection, OOS, portfolio replay, or 30-minute expansion yet.</a:t>
+            </a:r>
+          </a:p>
+        </p:txBody>
+      </p:sp>
     </p:spTree>
     <p:extLst>
       <p:ext uri="{BB962C8B-B14F-4D97-AF65-F5344CB8AC3E}">
@@ -12359,7 +17425,7 @@
           <p:nvPr/>
         </p:nvPicPr>
         <p:blipFill>
-          <a:blip xmlns:r="http://schemas.openxmlformats.org/officeDocument/2006/relationships" xmlns:a="http://schemas.openxmlformats.org/drawingml/2006/main" r:embed="R94d1cea897904dba"/>
+          <a:blip xmlns:r="http://schemas.openxmlformats.org/officeDocument/2006/relationships" xmlns:a="http://schemas.openxmlformats.org/drawingml/2006/main" r:embed="R90834bdbe0ef4e46"/>
           <a:stretch xmlns:a="http://schemas.openxmlformats.org/drawingml/2006/main"/>
         </p:blipFill>
         <p:spPr>
@@ -12679,7 +17745,7 @@
           <p:nvPr/>
         </p:nvPicPr>
         <p:blipFill>
-          <a:blip xmlns:r="http://schemas.openxmlformats.org/officeDocument/2006/relationships" xmlns:a="http://schemas.openxmlformats.org/drawingml/2006/main" r:embed="Reed066ceb0454ba5"/>
+          <a:blip xmlns:r="http://schemas.openxmlformats.org/officeDocument/2006/relationships" xmlns:a="http://schemas.openxmlformats.org/drawingml/2006/main" r:embed="R0371cea80b684b1e"/>
           <a:stretch xmlns:a="http://schemas.openxmlformats.org/drawingml/2006/main"/>
         </p:blipFill>
         <p:spPr>
@@ -12999,7 +18065,7 @@
           <p:nvPr/>
         </p:nvPicPr>
         <p:blipFill>
-          <a:blip xmlns:r="http://schemas.openxmlformats.org/officeDocument/2006/relationships" xmlns:a="http://schemas.openxmlformats.org/drawingml/2006/main" r:embed="R0714a8350dec4994"/>
+          <a:blip xmlns:r="http://schemas.openxmlformats.org/officeDocument/2006/relationships" xmlns:a="http://schemas.openxmlformats.org/drawingml/2006/main" r:embed="R86dc59791dd24072"/>
           <a:stretch xmlns:a="http://schemas.openxmlformats.org/drawingml/2006/main"/>
         </p:blipFill>
         <p:spPr>
@@ -13319,7 +18385,7 @@
           <p:nvPr/>
         </p:nvPicPr>
         <p:blipFill>
-          <a:blip xmlns:r="http://schemas.openxmlformats.org/officeDocument/2006/relationships" xmlns:a="http://schemas.openxmlformats.org/drawingml/2006/main" r:embed="R0408eb05f7c04472"/>
+          <a:blip xmlns:r="http://schemas.openxmlformats.org/officeDocument/2006/relationships" xmlns:a="http://schemas.openxmlformats.org/drawingml/2006/main" r:embed="R1e977a7d40db463b"/>
           <a:stretch xmlns:a="http://schemas.openxmlformats.org/drawingml/2006/main"/>
         </p:blipFill>
         <p:spPr>
